--- a/slides/oral_10min.pptx
+++ b/slides/oral_10min.pptx
@@ -514,10 +514,9 @@
             <a:r>
               <a:rPr lang="en-US" dirty="0"/>
               <a:t>Speaker notes — Slide 1 (Title). ~30s.
-Good [morning/afternoon] everyone. I'm Zeming Liang, and with my teammates Xiying Chen and our collaborator we built an end-to-end machine-learning system that predicts the 2020-21 English Premier League season using twenty-one seasons of self-collected data.
-Quick context for why we picked this. Football match prediction is a notoriously difficult problem because the data is small, the variance is high, and there is a sharp, liquid betting market that prices games for a living. Beating that market — or even getting close to it — is a real test of every step of the data science pipeline. So this project is the full pipeline: scraping, cleaning, NLP on unstructured match reports, feature engineering with strict anti-leakage discipline, six models including a domain-specific Dixon-Coles bivariate Poisson, and a deployed Shiny app where you can try it out yourself.
-Today I'll walk you through the whole arc end to end. By the last slide you'll know exactly what we built, what the headline number was, and — importantly — how we interpret a result that is honest rather than spun.
-[Spend ~30s here. Then click forward.]</a:t>
+Good [morning/afternoon]. I'm Zeming Liang, and with Xiying Chen and our collaborator we built an end-to-end ML system that predicts the 2020-21 Premier League from twenty-one seasons of self-collected data.
+We picked football because the data is small, the variance is huge, and there is a sharp betting market that prices games for a living — so beating it, or even getting close, is a real test of every step of the pipeline. In ten minutes I'll walk you scraping → NLP → features → six models → results → live app. By the last slide you'll know what we built, the headline number, and how we read it honestly.
+[~30s. Then click forward.]</a:t>
             </a:r>
             <a:endParaRPr lang="en-US" dirty="0"/>
           </a:p>
@@ -605,13 +604,12 @@
           <a:p>
             <a:r>
               <a:rPr lang="en-US" dirty="0"/>
-              <a:t>Speaker notes — Slide 10 (Bonus targets). ~50s.
-Three bonus targets. All three share the same probabilistic engine — they're different ways of stress-testing the same per-match probabilities.
-First: exact score from Dixon-Coles. Bivariate Poisson on home-goals and away-goals, fitted with a daily exponential decay so recent matches matter more, plus the tau correction that fixes the well-known under-prediction of low-low scorelines like nil-nil and one-one. That gives us a joint score distribution we can marginalise to H/D/A or report as the single most-likely scoreline.
-Second: final standings via Monte Carlo. We take per-match probabilities and roll the entire 380-match season ten thousand times. Each iteration draws every match outcome, accumulates points, and ranks the table. Aggregating across iterations gives you each team's title probability, top-four probability, and relegation probability — and 5th-and-95th-percentile bands on their final ranking.
-Third: beat the bookmaker. Kelly-fractional staking, capped at five percent of bankroll per bet. We place a bet only when the model's edge — that's probability times decimal odds minus one — is strictly positive. ROI on the held-out 2020-21 season is the cleanest test of the model: this is conviction translated to dollars.
-The bonus-target tab in the live demo lets you re-roll each of these on the spot.
-[Spend ~50s here.]</a:t>
+              <a:t>Speaker notes — Slide 10 (Bonus targets). ~45s.
+Building on the per-match results, three bonus targets — all stress-tests of the same engine.
+Exact score from Dixon-Coles. Bivariate Poisson with daily exponential decay plus the tau correction that fixes the under-prediction of low-low scorelines. Shipped.
+Final standings via Monte Carlo. Ten thousand simulated 380-match seasons; aggregate gives title, top-four, relegation probabilities with bands. Chart on the right is the actual 2020-21 standings — the target. Shipped.
+Beat-the-bookmaker. Kelly-fractional, capped at 5%, bet only on positive edge. ROI on hold-out is conviction in dollars. Scaffolded — betting harness runs in the app, back-test in the appendix.
+[~45s. Click to demo.]</a:t>
             </a:r>
             <a:endParaRPr lang="en-US" dirty="0"/>
           </a:p>
@@ -699,14 +697,11 @@
           <a:p>
             <a:r>
               <a:rPr lang="en-US" dirty="0"/>
-              <a:t>Speaker notes — Slide 11 (Live demo). ~70s — DEMO IS THE STAR.
-We deployed a Shiny-for-Python app to Posit Connect Cloud so anyone can replay the predictions interactively. Three tabs, shown across the slide.
-Tab one: Predict-a-Match. Pick any 2020-21 fixture from the dropdown. The app shows our model's H/D/A probabilities, the market's H/D/A probabilities, and the implied edge — positive edges are highlighted in coral.
-Tab two: Season Simulator. One click runs ten thousand Monte Carlo simulations of the entire 2020-21 season and gives you a live histogram of where each team finishes. You can filter by team, sort by title probability, by top-four probability, by relegation probability.
-Tab three: Leaderboard. The full evaluation suite from the previous slide, presented interactively — a calibration plot, confusion matrix per model, and the metrics table sortable by any column.
-The screenshots on the slide will be replaced with fresh captures from the deployed app the morning of the talk.
-I'll switch to the live app now and walk through one match end-to-end. [About 30 seconds at the laptop, then return to the deck.]
-[Total ~70s for this slide because of the live transition.]</a:t>
+              <a:t>Speaker notes — Slide 11 (Live demo). ~60s — DEMO IS THE STAR.
+Time to make this real — switching to the live Shiny app on Posit Connect Cloud.
+Step one: click Predict tab, pick Liverpool vs Arsenal. Model probabilities and market probabilities side-by-side; coral marks any positive edge. Step two: show that on most matches the model and market agree within a couple of points — mirrors the leaderboard. Step three: hit Run season simulation. Ten thousand Monte Carlo seasons render in about three seconds; hover any team for title, top-four, and relegation probabilities with bands.
+If the cloud breaks, fall back to the backup screenshots in figures/11_app_*.png — same three steps.
+[~60s with the live transition. Click to conclusion.]</a:t>
             </a:r>
             <a:endParaRPr lang="en-US" dirty="0"/>
           </a:p>
@@ -795,11 +790,12 @@
             <a:r>
               <a:rPr lang="en-US" dirty="0"/>
               <a:t>Speaker notes — Slide 12 (Conclusion + team). ~45s.
-Wrapping up. The TL;DR in the navy banner: end-to-end machine learning on nearly 8,000 self-collected matches, with six models, walk-forward cross-validation, four interlinked targets, and a deployed Shiny app. Random Forest gets within zero-point-three percentage points of the bookmakers — but the bookmakers still win. We're not going to spin that. The honest finding is that the closing market is genuinely hard to beat, and that itself is the result.
-Two future-work bullets on the left. First, in-play features — live expected-goals, possession-by-half, and lineup-strength deltas would let us predict the second half conditioned on the first. Second, a hierarchical Bayesian model — borrowing strength across seasons would meaningfully tighten the cold-start problem for newly-promoted clubs.
-Team contributions on the right. Zeming led the end-to-end coordination, the scrapers, the modelling, and the deployment. Elina led the EDA, the unsupervised features, the NLP pipeline, and the bulk of the report. Our collaborator's specific contribution will be filled in before submission.
-Thank you. Happy to take questions, and the full code and report are public on GitHub at the URL on screen.
-[Spend ~45s here. Then transition to Q&amp;A.]</a:t>
+Coming back from the demo — wrapping up.
+The one line: we built an end-to-end pipeline that gets within 0.02 log-loss of the bookmaker on the 2020-21 hold-out, and we know exactly why we don't beat them. The last clause matters as much as the first — the closing market is nearly perfectly calibrated, so this ceiling is rational to respect, not to spin around.
+Future work: in-play features (live xG, possession-by-half, lineup deltas), hierarchical Bayes for tighter cold-start on promoted clubs, and a stacked ensemble blending RF + Dixon-Coles + market.
+Team contributions on the right. Zeming: coordination, scrapers, modelling, deployment. Elina: EDA, unsupervised features, NLP, report. Collaborator's contribution to be confirmed before submission. Code, leaderboard CSV, and companion report public on GitHub.
+Thank you. Questions?
+[~45s. Transition to Q&amp;A.]</a:t>
             </a:r>
             <a:endParaRPr lang="en-US" dirty="0"/>
           </a:p>
@@ -887,11 +883,11 @@
           <a:p>
             <a:r>
               <a:rPr lang="en-US" dirty="0"/>
-              <a:t>Speaker notes — Slide 2 (The Question). ~50s.
-The question we set out to answer has three increasingly hard bars to clear. The first is trivial: can we beat random, which is 33% on a three-class problem. The second is much less trivial — can we beat naive priors. The Premier League has a strong home-field advantage, so always-pick-Home is already around 46% accuracy. The third is the real test: can we beat the bookmakers, who are sharp, well-resourced, and whose closing odds incorporate every piece of public information up to kickoff. Spoiler: that last bar is much harder than it sounds.
-We deliberately framed the project around four interlinked targets, not just one. Match outcome — that's the headline three-class classification with calibrated probabilities. Exact score — a bivariate Poisson where we predict joint home and away goals. Final standings — we simulate the full 380-match season ten thousand times and aggregate to a predicted league table. And finally, beat the bookmaker — translating the model's edge into a Kelly-fractional staking strategy and reporting its ROI on the held-out test season.
-These four are interlinked because they share the same probabilistic engine, but they stress-test the model in very different ways. A model can be well-calibrated on H/D/A and still produce a nonsense final table.
-[Spend ~50s here. Then click forward.]</a:t>
+              <a:t>Speaker notes — Slide 2 (The question). ~50s.
+Picking up from the title — what does "predicting the Premier League" actually mean?
+Three increasingly hard bars to clear. Beat random — 33% floor. Beat naive priors — always-pick-Home is already 46%. And beat the bookmakers, whose closing odds aggregate every sharp's bets right up to kickoff.
+On the right, four interlinked targets. Match outcome: H/D/A with calibrated probabilities. Exact score: Dixon-Coles bivariate Poisson. Final standings: ten thousand Monte Carlo seasons. Beat-the-bookmaker: Kelly-fractional ROI on the hold-out. Same probabilistic engine drives all four — and a model can be well-calibrated on H/D/A yet produce a nonsense table, which is why we test all four.
+[~50s. Click forward.]</a:t>
             </a:r>
             <a:endParaRPr lang="en-US" dirty="0"/>
           </a:p>
@@ -980,13 +976,10 @@
             <a:r>
               <a:rPr lang="en-US" dirty="0"/>
               <a:t>Speaker notes — Slide 3 (Why this is hard). ~50s.
-Before I show what we built, I want to set expectations honestly. Football is one of the hardest sports to model. Here's why.
-First, the data is tiny by modern ML standards. Each Premier League season is only 380 matches, and we have twenty-one of them. That's under eight thousand rows total — orders of magnitude smaller than what tabular gradient-boosting was designed for.
-Second, the variance is enormous. One deflected goal in stoppage time can flip a Home win into a Draw, and the underlying skill gap that day didn't change at all. Match-level noise is comparable in size to the signal.
-Third — and this is the brutal one — the bookmakers are the smartest baseline you've ever competed with. Pinnacle's closing odds aggregate the bets of every sharp in the world right up to kickoff. They are arguably the closest thing in finance to a real-time, market-priced probability.
-Fourth, our test season is 2020-21, which was played behind closed doors because of Covid. Home advantage collapsed from about forty-six percent to about thirty-six percent. That's a textbook distribution shift on the held-out set — exactly the worst-case for a model trained on pre-Covid data.
-And as a bonus difficulty, three teams get promoted every season with no Premier League history at all. Cold-start, every August.
-[Spend ~50s here. Then click forward.]</a:t>
+Before I show what we built, expectations honestly. Football is one of the hardest sports to model, and 2020-21 is the worst-case version of it.
+Tiny data: 380 matches per season, twenty-one seasons, under 8k rows. High variance: one deflected goal flips an outcome and the underlying skill didn't change. Sharp bookmakers: Pinnacle's closing odds are the closest thing to real-time market-priced probabilities outside finance. Distribution shift: Covid 2020-21 was played behind closed doors and home-win rate collapsed from 46% to 38% — textbook regime change on the hold-out.
+Plus three promoted teams every August have zero Premier League history. We picked this season deliberately — even the bookmakers struggled with it.
+[~50s. Click forward.]</a:t>
             </a:r>
             <a:endParaRPr lang="en-US" dirty="0"/>
           </a:p>
@@ -1074,12 +1067,11 @@
           <a:p>
             <a:r>
               <a:rPr lang="en-US" dirty="0"/>
-              <a:t>Speaker notes — Slide 4 (Data sources). ~55s.
-Onto the data. We did not use Kaggle. We collected every byte ourselves from five independent sources. Three big numbers on the left: seven thousand, eight hundred and ninety matches across twenty-one seasons from five independent sources.
-The four structured sources are listed in the top of the table. football-data.co.uk gives us per-match results, half-time scores, and the closing betting odds — those odds become the market baseline that's the hardest thing to beat. ClubElo gives us daily Elo ratings going back to the year 2000. FBref via the soccerdata Python wrapper gives us advanced stats including expected goals, but only from 2017-18 onward — that data-availability gap turned into one of our challenges. Wikipedia gives us the manager-tenure and promotion-relegation context.
-The fifth row, in coral, is the showpiece of the cleaning pipeline. We scraped roughly 7,600 BBC and Guardian match-report HTML pages and pushed them through an NLP pipeline. That's the unstructured-to-structured story I'll demo on the next slide.
-One discipline point at the bottom: every source uses different name spellings — "Man Utd" versus "Manchester United" versus "Manchester Utd" — so we built a canonical-name dictionary and fail fast on any unknown variant. That's how we avoided silent mis-joins, which would have polluted features without raising any error.
-[Spend ~55s here.]</a:t>
+              <a:t>Speaker notes — Slide 4 (Data sources). ~50s.
+Onto the data. No Kaggle — we scraped every byte ourselves from five independent sources. Big numbers on the left: 7,890 matches, 21 seasons, 45 engineered features.
+Top of the table: football-data.co.uk gives results and the closing odds that become our hardest baseline. ClubElo gives daily Elo ratings since 2000. FBref via soccerdata gives advanced stats including expected goals, but only from 2017-18. Wikipedia gives manager and promotion context.
+The coral row is the showpiece — about 7,600 BBC and Guardian match-report HTML pages pushed through an NLP pipeline. That's the unstructured-to-structured story on the next slide.
+[~50s. Click forward.]</a:t>
             </a:r>
             <a:endParaRPr lang="en-US" dirty="0"/>
           </a:p>
@@ -1167,11 +1159,12 @@
           <a:p>
             <a:r>
               <a:rPr lang="en-US" dirty="0"/>
-              <a:t>Speaker notes — Slide 5 (Unstructured to structured). ~55s.
-This is the slide I am personally proudest of, because the rubric specifically calls out unstructured data and most teams stop at scraping CSVs.
-The pipeline is four stages, shown across the top. We scrape the BBC and Guardian match-report HTML. We use BeautifulSoup to extract the article body text. We then run that text through three NLP layers in parallel. SpaCy with the English small model gives us named-entity recognition, which we use to count the people mentioned per side. VADER sentiment scores every sentence and we attribute it to whichever team is mentioned in that sentence — that's our per-team sentiment. And a regex classifier flags red cards, penalties, VAR mentions, and a controversy flag. All of that flows into roughly twelve derived columns per match.
-The worked example at the bottom makes it concrete. The input is one sentence from a match report — "Liverpool were sloppy and were lucky to escape with a draw after a controversial VAR call denied Tottenham a winner." The output is what our pipeline writes to the parquet table for that match: home_report_sentiment is negative-point-four-two, away_report_sentiment is mildly positive, the VAR mention count is one, and the controversy flag fires. Those four numbers, combined with about eight others from the same article, become inputs to the model.
-[Spend ~55s here. The unstructured story is the rubric magnet — slow down.]</a:t>
+              <a:t>Speaker notes — Slide 5 (Cleaning showcase). ~55s.
+Onto the NLP pipeline — the slide I'm most proud of, because the rubric calls out unstructured data and most teams stop at CSVs.
+Four stages along the top. Scrape: BBC and Guardian pages are JS-rendered, so we use a headless fetcher and pivot to the static Wikipedia recap on failure. Parse: BeautifulSoup pulls article text. NLP: spaCy NER for player mentions, VADER per-team sentiment via sentence attribution, regex tags for red cards, penalties, VAR. Twelve columns flow out.
+Worked example. Input is one sentence calling Liverpool sloppy and noting a controversial VAR call. Output: negative home sentiment, mildly positive away, VAR count one, controversy flag fires.
+Critically — the leakage guard in the banner — these NLP features are joined as PRIOR-season aggregates per team. A match report never describes its own match.
+[~55s. Slow down — this is the rubric magnet.]</a:t>
             </a:r>
             <a:endParaRPr lang="en-US" dirty="0"/>
           </a:p>
@@ -1260,12 +1253,12 @@
             <a:r>
               <a:rPr lang="en-US" dirty="0"/>
               <a:t>Speaker notes — Slide 6 (EDA). ~50s.
-Three quick figures from EDA that ended up actually shaping how we built the model. Note that the figure placeholders here will be regenerated by the EDA pipeline into the figures/ directory before the in-class talk — the captions tell you exactly what each one shows.
-The leftmost figure is home-win rate plotted by season. For two decades it sits flat around forty-six percent, and then in 2020-21 it falls off a cliff to about thirty-six percent — that's the Covid empty-stadiums effect, and it's the single most important fact about our test set.
-The middle figure is the distribution of total goals per match. It's right-skewed with a mean of about two-point-seven. That shape is exactly what justifies modelling scores as Poisson — and it's why we put a Dixon-Coles model in the zoo as a domain-specific complement to the gradient-boosted classifiers.
-The rightmost figure is a PCA projection of team-season-aggregate stats — possession, shots, xG, etc. — coloured by season. The clusters are real, they correspond to playing-style archetypes, and they drift over time as tactics evolve. We use those PCA components and a K-means cluster ID as inputs to the supervised model. That's our unsupervised-learning hook for the rubric.
-The takeaway in the navy banner is the punch line: 2020-21 is a regime shift. Our model has to be robust to it, not blind to it.
-[Spend ~50s here.]</a:t>
+Three EDA findings shaped how we built the model.
+Big chart left: home-win rate by season. Twenty years flat around 46%, then 2020-21 falls off a cliff to 38% — the Covid empty-stadiums effect. The single most important fact about our test set.
+Top right: PCA on team-season aggregate stats, K-means into four clusters. Pink Cluster 3 is the elite top-six like City and Liverpool, orange Cluster 1 is the relegation fight. Both the PC components and the cluster ID feed the supervised model — that's our unsupervised hook.
+Bottom right: scoreline frequency heatmap. Mass clustered at 1-1, 1-0, 2-1, 2-0 — Poisson with a low-score correction, exactly what Dixon-Coles fits.
+Banner takeaway: regime shift on test, Poisson-shaped joint.
+[~50s. Click forward.]</a:t>
             </a:r>
             <a:endParaRPr lang="en-US" dirty="0"/>
           </a:p>
@@ -1353,10 +1346,11 @@
           <a:p>
             <a:r>
               <a:rPr lang="en-US" dirty="0"/>
-              <a:t>Speaker notes — Slide 7 (Features). ~55s.
-We engineered six families of features, shown in the 2-by-3 grid. The first three are the obvious ones for football. Form: rolling N-match averages of goals, points, xG, computed separately for last three / five / ten matches. Strength: club Elo from ClubElo plus our own Elo update, expressed as the home-minus-away Elo difference. Context: rest days since last match, derby flag for historic local rivalries, manager-tenure days. The fourth family is market features — the closing-odds implied probabilities from Pinnacle, with the bookmaker margin removed by renormalising H, D, and A to sum to one. The fifth family is the unsupervised hook the rubric asks for: PCA components on team-season aggregate stats plus a K-means style cluster ID. And the sixth is the NLP-derived features we just saw on the previous slide.
-The rail at the bottom is the discipline story, which I want to emphasise. Football leakage is the classic trap — random k-fold lets the future inform the past. We never use random k-fold. We use walk-forward expanding-window CV. And every rolling feature is computed with a strict as_of cutoff: only matches with kickoff strictly less than the current match are allowed to contribute. That invariant is unit-tested by tests.test_no_temporal_leakage and runs on every push in CI.
-[Spend ~55s here. Speed up if behind.]</a:t>
+              <a:t>Speaker notes — Slide 7 (Feature engineering). ~55s.
+Carrying EDA into features — six families on the left.
+Form: rolling 3/5/10-match goals, points, xG. Strength: ClubElo + our own Elo, home minus away. Context: rest days, derby flag, manager tenure. Market: Pinnacle implied probabilities, vig removed. Unsupervised: PCA-2 + K-means cluster ID, our rubric hook (chart on right). NLP: per-team sentiment, event tags, controversy flag.
+The bottom rail is the discipline story. Football's classic trap is random k-fold leaking the future. We never use it — walk-forward only, every rolling feature uses a strict as_of cutoff, and that invariant is unit-tested in CI on every push.
+[~55s. Speed up if behind.]</a:t>
             </a:r>
             <a:endParaRPr lang="en-US" dirty="0"/>
           </a:p>
@@ -1444,11 +1438,11 @@
           <a:p>
             <a:r>
               <a:rPr lang="en-US" dirty="0"/>
-              <a:t>Speaker notes — Slide 8 (Model zoo). ~55s.
-Six models — actually seven if you count both naive baselines. Reading down the table: Always-Home is the sanity floor — it exposes how brutally log-loss punishes confident wrong probabilities. Class-Prior just predicts the historical class frequencies, which is the calibration floor. Market-Implied is the strong baseline — Pinnacle's closing odds with the bookmaker margin removed by renormalisation. That's the hardest bar to clear.
-Then the real models. Multinomial logistic regression is our interpretable workhorse — when XGBoost and the Random Forest disagree we read off the LR coefficients to figure out why. Random Forest captures non-linear interactions and is robust to noisy features. XGBoost is the state-of-the-art for tabular data and we tuned it specifically for log-loss, not accuracy. Last is Dixon-Coles — a domain-specific bivariate Poisson that models home-goals and away-goals jointly, with the famous low-score correction term to fix the under-prediction of nil-nils that vanilla Poisson suffers from.
-Validation, in the sky-blue strip: walk-forward expanding-window CV. Train on 2000-01 through 2018-19, validate on 2019-20, and hold out 2020-21 for the final test we never look at until the end. And we tune every hyperparameter for log-loss, because log-loss is a proper scoring rule and accuracy on a three-class problem is too coarse to differentiate models.
-[Spend ~55s here.]</a:t>
+              <a:t>Speaker notes — Slide 8 (Models). ~50s.
+With features set, the model zoo — three baselines, three models, plus Dixon-Coles, all on the same walk-forward CV.
+Top to bottom. Always-Home: sanity floor that exposes log-loss penalties. Class-Prior: historical 46/25/29 frequencies — the calibration floor. Market-Implied: Pinnacle close, vig-removed — the hardest baseline. Multinomial LR: our interpretable workhorse for sanity-checks. Random Forest: non-linear, robust to noisy features. XGBoost: tabular state-of-the-art, tuned for log-loss. Dixon-Coles: bivariate Poisson — same fit gives exact scores and H/D/A by marginal.
+Validation strip: walk-forward, train through 2018-19, validate 2019-20, hold out 2020-21. Every hyperparameter tuned for log-loss — proper scoring rule, three-class accuracy is too coarse.
+[~50s. Click forward.]</a:t>
             </a:r>
             <a:endParaRPr lang="en-US" dirty="0"/>
           </a:p>
@@ -1536,14 +1530,12 @@
           <a:p>
             <a:r>
               <a:rPr lang="en-US" dirty="0"/>
-              <a:t>Speaker notes — Slide 9 (Results — the headline). ~70s. THIS IS THE PUNCH-LINE SLIDE.
-This is the most important slide of the talk. Let me read the table top to bottom.
-Sorted by log-loss, the leader is the market-implied baseline — Pinnacle's closing odds, with the bookmaker margin removed. Log-loss zero-point-nine-nine-seven, accuracy fifty-one-point-six percent. That's the hardest bar.
-Random Forest is second: log-loss one-point-zero-one-seven, accuracy fifty-one-point-three percent. We are within zero-point-three percentage points of accuracy and about two percentage points of log-loss to the bookmakers — using only the engineered features they presumably already price into their odds. That is genuinely close.
-Logistic regression and XGBoost trail Random Forest by another point or two. The two genuinely-naive baselines — class-prior and always-home — both get thirty-eight percent accuracy. But look at the always-home log-loss in coral on the bottom row: twenty-two-point-four. That is what happens when you assign probability one to the wrong class — log-loss is a proper scoring rule, and it punishes confident wrong predictions catastrophically. That number alone justifies why log-loss is our headline metric.
-The card on the right is the confusion matrix; the figure is regenerated by the pipeline. The pattern is consistent across all our models: most errors are Draws being predicted as Home or Away wins. Draws are intrinsically the hardest class because they are not anyone's favoured outcome.
-The narrative in the navy banner is the honest finding: the market is genuinely hard to beat. Our model gets within touching distance, but it does not surpass the market. Being honest about that is the correct read.
-[Spend a full 70 seconds on this slide. It is the single most important moment of the talk.]</a:t>
+              <a:t>Speaker notes — Slide 9 (Results — PUNCH LINE). ~70s.
+The most important slide of the talk. Also the most honest one.
+Sorted by log-loss, the market-implied baseline leads — Pinnacle closing odds with the vig removed, log-loss 0.997. The chart on the right shows why: the market sits almost exactly on the diagonal. Essentially perfectly calibrated — when they say sixty percent, the home team wins about sixty percent. That is the ceiling.
+Random Forest is second — log-loss 1.02, only 0.02 worse than the market. LR and XGBoost trail. The naive baselines both get 38% accuracy. Look at the always-home log-loss in coral: 22.4. That is what assigning probability one to the wrong class costs. Log-loss is a proper scoring rule and it punishes confident wrong predictions catastrophically — which is exactly why log-loss, not accuracy, is our headline metric.
+The honest finding: the market is genuinely hard to beat. We get within touching distance using features the market presumably already prices. We are NOT going to spin that into "we beat the bookies" — knowing why we don't surpass them is the result.
+[Full 70s. The moment of the talk.]</a:t>
             </a:r>
             <a:endParaRPr lang="en-US" dirty="0"/>
           </a:p>
@@ -1978,7 +1970,47 @@
       </p:sp>
       <p:sp>
         <p:nvSpPr>
-          <p:cNvPr id="5" name="Text 3"/>
+          <p:cNvPr id="5" name="Shape 3"/>
+          <p:cNvSpPr/>
+          <p:nvPr/>
+        </p:nvSpPr>
+        <p:spPr>
+          <a:xfrm>
+            <a:off x="8979408" y="0"/>
+            <a:ext cx="164592" cy="5143500"/>
+          </a:xfrm>
+          <a:prstGeom prst="rect">
+            <a:avLst/>
+          </a:prstGeom>
+          <a:solidFill>
+            <a:srgbClr val="13315C"/>
+          </a:solidFill>
+          <a:ln/>
+        </p:spPr>
+      </p:sp>
+      <p:sp>
+        <p:nvSpPr>
+          <p:cNvPr id="6" name="Shape 4"/>
+          <p:cNvSpPr/>
+          <p:nvPr/>
+        </p:nvSpPr>
+        <p:spPr>
+          <a:xfrm>
+            <a:off x="9107424" y="0"/>
+            <a:ext cx="36576" cy="5143500"/>
+          </a:xfrm>
+          <a:prstGeom prst="rect">
+            <a:avLst/>
+          </a:prstGeom>
+          <a:solidFill>
+            <a:srgbClr val="7FB3D5"/>
+          </a:solidFill>
+          <a:ln/>
+        </p:spPr>
+      </p:sp>
+      <p:sp>
+        <p:nvSpPr>
+          <p:cNvPr id="7" name="Text 5"/>
           <p:cNvSpPr/>
           <p:nvPr/>
         </p:nvSpPr>
@@ -2017,7 +2049,7 @@
       </p:sp>
       <p:sp>
         <p:nvSpPr>
-          <p:cNvPr id="6" name="Text 4"/>
+          <p:cNvPr id="8" name="Text 6"/>
           <p:cNvSpPr/>
           <p:nvPr/>
         </p:nvSpPr>
@@ -2079,7 +2111,7 @@
       </p:sp>
       <p:sp>
         <p:nvSpPr>
-          <p:cNvPr id="7" name="Shape 5"/>
+          <p:cNvPr id="9" name="Shape 7"/>
           <p:cNvSpPr/>
           <p:nvPr/>
         </p:nvSpPr>
@@ -2099,7 +2131,7 @@
       </p:sp>
       <p:sp>
         <p:nvSpPr>
-          <p:cNvPr id="8" name="Text 6"/>
+          <p:cNvPr id="10" name="Text 8"/>
           <p:cNvSpPr/>
           <p:nvPr/>
         </p:nvSpPr>
@@ -2138,7 +2170,7 @@
       </p:sp>
       <p:sp>
         <p:nvSpPr>
-          <p:cNvPr id="9" name="Text 7"/>
+          <p:cNvPr id="11" name="Text 9"/>
           <p:cNvSpPr/>
           <p:nvPr/>
         </p:nvSpPr>
@@ -2267,7 +2299,7 @@
       </p:sp>
       <p:sp>
         <p:nvSpPr>
-          <p:cNvPr id="10" name="Text 8"/>
+          <p:cNvPr id="12" name="Text 10"/>
           <p:cNvSpPr/>
           <p:nvPr/>
         </p:nvSpPr>
@@ -2502,7 +2534,7 @@
         <p:spPr>
           <a:xfrm>
             <a:off x="457200" y="548640"/>
-            <a:ext cx="8229600" cy="594360"/>
+            <a:ext cx="8229600" cy="868680"/>
           </a:xfrm>
           <a:prstGeom prst="rect">
             <a:avLst/>
@@ -2515,10 +2547,13 @@
           <a:lstStyle/>
           <a:p>
             <a:pPr indent="0" marL="0">
-              <a:buNone/>
-            </a:pPr>
-            <a:r>
-              <a:rPr lang="en-US" sz="2800" b="1" dirty="0">
+              <a:lnSpc>
+                <a:spcPct val="105000"/>
+              </a:lnSpc>
+              <a:buNone/>
+            </a:pPr>
+            <a:r>
+              <a:rPr lang="en-US" sz="2400" b="1" dirty="0">
                 <a:solidFill>
                   <a:srgbClr val="0B2545"/>
                 </a:solidFill>
@@ -2526,9 +2561,9 @@
                 <a:ea typeface="Georgia" pitchFamily="34" charset="-122"/>
                 <a:cs typeface="Georgia" pitchFamily="34" charset="-120"/>
               </a:rPr>
-              <a:t>Three bonus targets, one shared engine</a:t>
-            </a:r>
-            <a:endParaRPr lang="en-US" sz="2800" dirty="0"/>
+              <a:t>Three bonus targets, one shared probabilistic engine.</a:t>
+            </a:r>
+            <a:endParaRPr lang="en-US" sz="2400" dirty="0"/>
           </a:p>
         </p:txBody>
       </p:sp>
@@ -2541,7 +2576,7 @@
         <p:spPr>
           <a:xfrm>
             <a:off x="457200" y="1371600"/>
-            <a:ext cx="8229600" cy="1005840"/>
+            <a:ext cx="5074920" cy="777240"/>
           </a:xfrm>
           <a:prstGeom prst="rect">
             <a:avLst/>
@@ -2573,7 +2608,7 @@
         <p:spPr>
           <a:xfrm>
             <a:off x="457200" y="1371600"/>
-            <a:ext cx="54864" cy="1005840"/>
+            <a:ext cx="54864" cy="777240"/>
           </a:xfrm>
           <a:prstGeom prst="rect">
             <a:avLst/>
@@ -2592,8 +2627,8 @@
         </p:nvSpPr>
         <p:spPr>
           <a:xfrm>
-            <a:off x="640080" y="1463040"/>
-            <a:ext cx="2743200" cy="365760"/>
+            <a:off x="640080" y="1426464"/>
+            <a:ext cx="2103120" cy="274320"/>
           </a:xfrm>
           <a:prstGeom prst="rect">
             <a:avLst/>
@@ -2609,7 +2644,7 @@
               <a:buNone/>
             </a:pPr>
             <a:r>
-              <a:rPr lang="en-US" sz="1800" b="1" dirty="0">
+              <a:rPr lang="en-US" sz="1300" b="1" dirty="0">
                 <a:solidFill>
                   <a:srgbClr val="0B2545"/>
                 </a:solidFill>
@@ -2619,7 +2654,7 @@
               </a:rPr>
               <a:t>Exact score</a:t>
             </a:r>
-            <a:endParaRPr lang="en-US" sz="1800" dirty="0"/>
+            <a:endParaRPr lang="en-US" sz="1300" dirty="0"/>
           </a:p>
         </p:txBody>
       </p:sp>
@@ -2631,12 +2666,12 @@
         </p:nvSpPr>
         <p:spPr>
           <a:xfrm>
-            <a:off x="3520440" y="1554480"/>
-            <a:ext cx="1417320" cy="274320"/>
+            <a:off x="2834640" y="1463040"/>
+            <a:ext cx="1417320" cy="237744"/>
           </a:xfrm>
           <a:prstGeom prst="roundRect">
             <a:avLst>
-              <a:gd name="adj" fmla="val 20000"/>
+              <a:gd name="adj" fmla="val 23077"/>
             </a:avLst>
           </a:prstGeom>
           <a:solidFill>
@@ -2653,8 +2688,8 @@
         </p:nvSpPr>
         <p:spPr>
           <a:xfrm>
-            <a:off x="3520440" y="1554480"/>
-            <a:ext cx="1417320" cy="274320"/>
+            <a:off x="2834640" y="1463040"/>
+            <a:ext cx="1417320" cy="237744"/>
           </a:xfrm>
           <a:prstGeom prst="rect">
             <a:avLst/>
@@ -2670,7 +2705,7 @@
               <a:buNone/>
             </a:pPr>
             <a:r>
-              <a:rPr lang="en-US" sz="1000" b="1" dirty="0">
+              <a:rPr lang="en-US" sz="900" b="1" dirty="0">
                 <a:solidFill>
                   <a:srgbClr val="B9D9EB"/>
                 </a:solidFill>
@@ -2680,7 +2715,7 @@
               </a:rPr>
               <a:t>Dixon-Coles</a:t>
             </a:r>
-            <a:endParaRPr lang="en-US" sz="1000" dirty="0"/>
+            <a:endParaRPr lang="en-US" sz="900" dirty="0"/>
           </a:p>
         </p:txBody>
       </p:sp>
@@ -2692,8 +2727,8 @@
         </p:nvSpPr>
         <p:spPr>
           <a:xfrm>
-            <a:off x="640080" y="1874520"/>
-            <a:ext cx="7863840" cy="457200"/>
+            <a:off x="4343400" y="1463040"/>
+            <a:ext cx="1097280" cy="237744"/>
           </a:xfrm>
           <a:prstGeom prst="rect">
             <a:avLst/>
@@ -2706,36 +2741,75 @@
           <a:lstStyle/>
           <a:p>
             <a:pPr indent="0" marL="0">
-              <a:lnSpc>
-                <a:spcPct val="125000"/>
-              </a:lnSpc>
-              <a:buNone/>
-            </a:pPr>
-            <a:r>
-              <a:rPr lang="en-US" sz="1150" dirty="0">
-                <a:solidFill>
-                  <a:srgbClr val="1F2933"/>
+              <a:buNone/>
+            </a:pPr>
+            <a:r>
+              <a:rPr lang="en-US" sz="850" b="1" i="1" spc="200" kern="0" dirty="0">
+                <a:solidFill>
+                  <a:srgbClr val="13315C"/>
                 </a:solidFill>
                 <a:latin typeface="Calibri" pitchFamily="34" charset="0"/>
                 <a:ea typeface="Calibri" pitchFamily="34" charset="-122"/>
                 <a:cs typeface="Calibri" pitchFamily="34" charset="-120"/>
               </a:rPr>
-              <a:t>Joint home-goals × away-goals from the bivariate Poisson model. Fitted with a 0.0065/day exponential decay weight; the tau correction term fixes under-prediction of (0,0), (0,1), (1,0), (1,1) scorelines.</a:t>
-            </a:r>
-            <a:endParaRPr lang="en-US" sz="1150" dirty="0"/>
-          </a:p>
-        </p:txBody>
-      </p:sp>
-      <p:sp>
-        <p:nvSpPr>
-          <p:cNvPr id="14" name="Shape 12"/>
-          <p:cNvSpPr/>
-          <p:nvPr/>
-        </p:nvSpPr>
-        <p:spPr>
-          <a:xfrm>
-            <a:off x="457200" y="2542032"/>
-            <a:ext cx="8229600" cy="1005840"/>
+              <a:t>shipped</a:t>
+            </a:r>
+            <a:endParaRPr lang="en-US" sz="850" dirty="0"/>
+          </a:p>
+        </p:txBody>
+      </p:sp>
+      <p:sp>
+        <p:nvSpPr>
+          <p:cNvPr id="14" name="Text 12"/>
+          <p:cNvSpPr/>
+          <p:nvPr/>
+        </p:nvSpPr>
+        <p:spPr>
+          <a:xfrm>
+            <a:off x="640080" y="1719072"/>
+            <a:ext cx="4846320" cy="393192"/>
+          </a:xfrm>
+          <a:prstGeom prst="rect">
+            <a:avLst/>
+          </a:prstGeom>
+          <a:noFill/>
+          <a:ln/>
+        </p:spPr>
+        <p:txBody>
+          <a:bodyPr wrap="square" lIns="0" tIns="0" rIns="0" bIns="0" rtlCol="0" anchor="ctr"/>
+          <a:lstStyle/>
+          <a:p>
+            <a:pPr indent="0" marL="0">
+              <a:lnSpc>
+                <a:spcPct val="118000"/>
+              </a:lnSpc>
+              <a:buNone/>
+            </a:pPr>
+            <a:r>
+              <a:rPr lang="en-US" sz="1000" dirty="0">
+                <a:solidFill>
+                  <a:srgbClr val="1F2933"/>
+                </a:solidFill>
+                <a:latin typeface="Calibri" pitchFamily="34" charset="0"/>
+                <a:ea typeface="Calibri" pitchFamily="34" charset="-122"/>
+                <a:cs typeface="Calibri" pitchFamily="34" charset="-120"/>
+              </a:rPr>
+              <a:t>Joint home × away goals from bivariate Poisson with 0.0065/day decay; tau correction fixes 0-0 / 0-1 / 1-0 / 1-1 under-prediction.</a:t>
+            </a:r>
+            <a:endParaRPr lang="en-US" sz="1000" dirty="0"/>
+          </a:p>
+        </p:txBody>
+      </p:sp>
+      <p:sp>
+        <p:nvSpPr>
+          <p:cNvPr id="15" name="Shape 13"/>
+          <p:cNvSpPr/>
+          <p:nvPr/>
+        </p:nvSpPr>
+        <p:spPr>
+          <a:xfrm>
+            <a:off x="457200" y="2240280"/>
+            <a:ext cx="5074920" cy="777240"/>
           </a:xfrm>
           <a:prstGeom prst="rect">
             <a:avLst/>
@@ -2760,14 +2834,14 @@
       </p:sp>
       <p:sp>
         <p:nvSpPr>
-          <p:cNvPr id="15" name="Shape 13"/>
-          <p:cNvSpPr/>
-          <p:nvPr/>
-        </p:nvSpPr>
-        <p:spPr>
-          <a:xfrm>
-            <a:off x="457200" y="2542032"/>
-            <a:ext cx="54864" cy="1005840"/>
+          <p:cNvPr id="16" name="Shape 14"/>
+          <p:cNvSpPr/>
+          <p:nvPr/>
+        </p:nvSpPr>
+        <p:spPr>
+          <a:xfrm>
+            <a:off x="457200" y="2240280"/>
+            <a:ext cx="54864" cy="777240"/>
           </a:xfrm>
           <a:prstGeom prst="rect">
             <a:avLst/>
@@ -2780,14 +2854,14 @@
       </p:sp>
       <p:sp>
         <p:nvSpPr>
-          <p:cNvPr id="16" name="Text 14"/>
-          <p:cNvSpPr/>
-          <p:nvPr/>
-        </p:nvSpPr>
-        <p:spPr>
-          <a:xfrm>
-            <a:off x="640080" y="2633472"/>
-            <a:ext cx="2743200" cy="365760"/>
+          <p:cNvPr id="17" name="Text 15"/>
+          <p:cNvSpPr/>
+          <p:nvPr/>
+        </p:nvSpPr>
+        <p:spPr>
+          <a:xfrm>
+            <a:off x="640080" y="2295144"/>
+            <a:ext cx="2103120" cy="274320"/>
           </a:xfrm>
           <a:prstGeom prst="rect">
             <a:avLst/>
@@ -2803,7 +2877,7 @@
               <a:buNone/>
             </a:pPr>
             <a:r>
-              <a:rPr lang="en-US" sz="1800" b="1" dirty="0">
+              <a:rPr lang="en-US" sz="1300" b="1" dirty="0">
                 <a:solidFill>
                   <a:srgbClr val="0B2545"/>
                 </a:solidFill>
@@ -2813,24 +2887,24 @@
               </a:rPr>
               <a:t>Final standings</a:t>
             </a:r>
-            <a:endParaRPr lang="en-US" sz="1800" dirty="0"/>
-          </a:p>
-        </p:txBody>
-      </p:sp>
-      <p:sp>
-        <p:nvSpPr>
-          <p:cNvPr id="17" name="Shape 15"/>
-          <p:cNvSpPr/>
-          <p:nvPr/>
-        </p:nvSpPr>
-        <p:spPr>
-          <a:xfrm>
-            <a:off x="3520440" y="2724912"/>
-            <a:ext cx="1417320" cy="274320"/>
+            <a:endParaRPr lang="en-US" sz="1300" dirty="0"/>
+          </a:p>
+        </p:txBody>
+      </p:sp>
+      <p:sp>
+        <p:nvSpPr>
+          <p:cNvPr id="18" name="Shape 16"/>
+          <p:cNvSpPr/>
+          <p:nvPr/>
+        </p:nvSpPr>
+        <p:spPr>
+          <a:xfrm>
+            <a:off x="2834640" y="2331720"/>
+            <a:ext cx="1417320" cy="237744"/>
           </a:xfrm>
           <a:prstGeom prst="roundRect">
             <a:avLst>
-              <a:gd name="adj" fmla="val 20000"/>
+              <a:gd name="adj" fmla="val 23077"/>
             </a:avLst>
           </a:prstGeom>
           <a:solidFill>
@@ -2841,14 +2915,14 @@
       </p:sp>
       <p:sp>
         <p:nvSpPr>
-          <p:cNvPr id="18" name="Text 16"/>
-          <p:cNvSpPr/>
-          <p:nvPr/>
-        </p:nvSpPr>
-        <p:spPr>
-          <a:xfrm>
-            <a:off x="3520440" y="2724912"/>
-            <a:ext cx="1417320" cy="274320"/>
+          <p:cNvPr id="19" name="Text 17"/>
+          <p:cNvSpPr/>
+          <p:nvPr/>
+        </p:nvSpPr>
+        <p:spPr>
+          <a:xfrm>
+            <a:off x="2834640" y="2331720"/>
+            <a:ext cx="1417320" cy="237744"/>
           </a:xfrm>
           <a:prstGeom prst="rect">
             <a:avLst/>
@@ -2864,7 +2938,7 @@
               <a:buNone/>
             </a:pPr>
             <a:r>
-              <a:rPr lang="en-US" sz="1000" b="1" dirty="0">
+              <a:rPr lang="en-US" sz="900" b="1" dirty="0">
                 <a:solidFill>
                   <a:srgbClr val="B9D9EB"/>
                 </a:solidFill>
@@ -2874,20 +2948,20 @@
               </a:rPr>
               <a:t>Monte Carlo</a:t>
             </a:r>
-            <a:endParaRPr lang="en-US" sz="1000" dirty="0"/>
-          </a:p>
-        </p:txBody>
-      </p:sp>
-      <p:sp>
-        <p:nvSpPr>
-          <p:cNvPr id="19" name="Text 17"/>
-          <p:cNvSpPr/>
-          <p:nvPr/>
-        </p:nvSpPr>
-        <p:spPr>
-          <a:xfrm>
-            <a:off x="640080" y="3044952"/>
-            <a:ext cx="7863840" cy="457200"/>
+            <a:endParaRPr lang="en-US" sz="900" dirty="0"/>
+          </a:p>
+        </p:txBody>
+      </p:sp>
+      <p:sp>
+        <p:nvSpPr>
+          <p:cNvPr id="20" name="Text 18"/>
+          <p:cNvSpPr/>
+          <p:nvPr/>
+        </p:nvSpPr>
+        <p:spPr>
+          <a:xfrm>
+            <a:off x="4343400" y="2331720"/>
+            <a:ext cx="1097280" cy="237744"/>
           </a:xfrm>
           <a:prstGeom prst="rect">
             <a:avLst/>
@@ -2900,36 +2974,75 @@
           <a:lstStyle/>
           <a:p>
             <a:pPr indent="0" marL="0">
-              <a:lnSpc>
-                <a:spcPct val="125000"/>
-              </a:lnSpc>
-              <a:buNone/>
-            </a:pPr>
-            <a:r>
-              <a:rPr lang="en-US" sz="1150" dirty="0">
-                <a:solidFill>
-                  <a:srgbClr val="1F2933"/>
+              <a:buNone/>
+            </a:pPr>
+            <a:r>
+              <a:rPr lang="en-US" sz="850" b="1" i="1" spc="200" kern="0" dirty="0">
+                <a:solidFill>
+                  <a:srgbClr val="13315C"/>
                 </a:solidFill>
                 <a:latin typeface="Calibri" pitchFamily="34" charset="0"/>
                 <a:ea typeface="Calibri" pitchFamily="34" charset="-122"/>
                 <a:cs typeface="Calibri" pitchFamily="34" charset="-120"/>
               </a:rPr>
-              <a:t>10,000 simulations of the 380-match season. Each iteration rolls every match's H/D/A from the per-match probabilities, accumulates points, ranks teams. Output: title prob, top-4 prob, relegation prob with 5/95 bands.</a:t>
-            </a:r>
-            <a:endParaRPr lang="en-US" sz="1150" dirty="0"/>
-          </a:p>
-        </p:txBody>
-      </p:sp>
-      <p:sp>
-        <p:nvSpPr>
-          <p:cNvPr id="20" name="Shape 18"/>
-          <p:cNvSpPr/>
-          <p:nvPr/>
-        </p:nvSpPr>
-        <p:spPr>
-          <a:xfrm>
-            <a:off x="457200" y="3712464"/>
-            <a:ext cx="8229600" cy="1005840"/>
+              <a:t>shipped</a:t>
+            </a:r>
+            <a:endParaRPr lang="en-US" sz="850" dirty="0"/>
+          </a:p>
+        </p:txBody>
+      </p:sp>
+      <p:sp>
+        <p:nvSpPr>
+          <p:cNvPr id="21" name="Text 19"/>
+          <p:cNvSpPr/>
+          <p:nvPr/>
+        </p:nvSpPr>
+        <p:spPr>
+          <a:xfrm>
+            <a:off x="640080" y="2587752"/>
+            <a:ext cx="4846320" cy="393192"/>
+          </a:xfrm>
+          <a:prstGeom prst="rect">
+            <a:avLst/>
+          </a:prstGeom>
+          <a:noFill/>
+          <a:ln/>
+        </p:spPr>
+        <p:txBody>
+          <a:bodyPr wrap="square" lIns="0" tIns="0" rIns="0" bIns="0" rtlCol="0" anchor="ctr"/>
+          <a:lstStyle/>
+          <a:p>
+            <a:pPr indent="0" marL="0">
+              <a:lnSpc>
+                <a:spcPct val="118000"/>
+              </a:lnSpc>
+              <a:buNone/>
+            </a:pPr>
+            <a:r>
+              <a:rPr lang="en-US" sz="1000" dirty="0">
+                <a:solidFill>
+                  <a:srgbClr val="1F2933"/>
+                </a:solidFill>
+                <a:latin typeface="Calibri" pitchFamily="34" charset="0"/>
+                <a:ea typeface="Calibri" pitchFamily="34" charset="-122"/>
+                <a:cs typeface="Calibri" pitchFamily="34" charset="-120"/>
+              </a:rPr>
+              <a:t>10,000 simulated 380-match seasons; per-team title prob, top-4 prob, relegation prob with 5 / 95 bands.</a:t>
+            </a:r>
+            <a:endParaRPr lang="en-US" sz="1000" dirty="0"/>
+          </a:p>
+        </p:txBody>
+      </p:sp>
+      <p:sp>
+        <p:nvSpPr>
+          <p:cNvPr id="22" name="Shape 20"/>
+          <p:cNvSpPr/>
+          <p:nvPr/>
+        </p:nvSpPr>
+        <p:spPr>
+          <a:xfrm>
+            <a:off x="457200" y="3108960"/>
+            <a:ext cx="5074920" cy="777240"/>
           </a:xfrm>
           <a:prstGeom prst="rect">
             <a:avLst/>
@@ -2954,14 +3067,14 @@
       </p:sp>
       <p:sp>
         <p:nvSpPr>
-          <p:cNvPr id="21" name="Shape 19"/>
-          <p:cNvSpPr/>
-          <p:nvPr/>
-        </p:nvSpPr>
-        <p:spPr>
-          <a:xfrm>
-            <a:off x="457200" y="3712464"/>
-            <a:ext cx="54864" cy="1005840"/>
+          <p:cNvPr id="23" name="Shape 21"/>
+          <p:cNvSpPr/>
+          <p:nvPr/>
+        </p:nvSpPr>
+        <p:spPr>
+          <a:xfrm>
+            <a:off x="457200" y="3108960"/>
+            <a:ext cx="54864" cy="777240"/>
           </a:xfrm>
           <a:prstGeom prst="rect">
             <a:avLst/>
@@ -2974,14 +3087,14 @@
       </p:sp>
       <p:sp>
         <p:nvSpPr>
-          <p:cNvPr id="22" name="Text 20"/>
-          <p:cNvSpPr/>
-          <p:nvPr/>
-        </p:nvSpPr>
-        <p:spPr>
-          <a:xfrm>
-            <a:off x="640080" y="3803904"/>
-            <a:ext cx="2743200" cy="365760"/>
+          <p:cNvPr id="24" name="Text 22"/>
+          <p:cNvSpPr/>
+          <p:nvPr/>
+        </p:nvSpPr>
+        <p:spPr>
+          <a:xfrm>
+            <a:off x="640080" y="3163824"/>
+            <a:ext cx="2103120" cy="274320"/>
           </a:xfrm>
           <a:prstGeom prst="rect">
             <a:avLst/>
@@ -2997,7 +3110,7 @@
               <a:buNone/>
             </a:pPr>
             <a:r>
-              <a:rPr lang="en-US" sz="1800" b="1" dirty="0">
+              <a:rPr lang="en-US" sz="1300" b="1" dirty="0">
                 <a:solidFill>
                   <a:srgbClr val="0B2545"/>
                 </a:solidFill>
@@ -3007,24 +3120,24 @@
               </a:rPr>
               <a:t>Beat the bookmaker</a:t>
             </a:r>
-            <a:endParaRPr lang="en-US" sz="1800" dirty="0"/>
-          </a:p>
-        </p:txBody>
-      </p:sp>
-      <p:sp>
-        <p:nvSpPr>
-          <p:cNvPr id="23" name="Shape 21"/>
-          <p:cNvSpPr/>
-          <p:nvPr/>
-        </p:nvSpPr>
-        <p:spPr>
-          <a:xfrm>
-            <a:off x="3520440" y="3895344"/>
-            <a:ext cx="1417320" cy="274320"/>
+            <a:endParaRPr lang="en-US" sz="1300" dirty="0"/>
+          </a:p>
+        </p:txBody>
+      </p:sp>
+      <p:sp>
+        <p:nvSpPr>
+          <p:cNvPr id="25" name="Shape 23"/>
+          <p:cNvSpPr/>
+          <p:nvPr/>
+        </p:nvSpPr>
+        <p:spPr>
+          <a:xfrm>
+            <a:off x="2834640" y="3200400"/>
+            <a:ext cx="1417320" cy="237744"/>
           </a:xfrm>
           <a:prstGeom prst="roundRect">
             <a:avLst>
-              <a:gd name="adj" fmla="val 20000"/>
+              <a:gd name="adj" fmla="val 23077"/>
             </a:avLst>
           </a:prstGeom>
           <a:solidFill>
@@ -3035,14 +3148,14 @@
       </p:sp>
       <p:sp>
         <p:nvSpPr>
-          <p:cNvPr id="24" name="Text 22"/>
-          <p:cNvSpPr/>
-          <p:nvPr/>
-        </p:nvSpPr>
-        <p:spPr>
-          <a:xfrm>
-            <a:off x="3520440" y="3895344"/>
-            <a:ext cx="1417320" cy="274320"/>
+          <p:cNvPr id="26" name="Text 24"/>
+          <p:cNvSpPr/>
+          <p:nvPr/>
+        </p:nvSpPr>
+        <p:spPr>
+          <a:xfrm>
+            <a:off x="2834640" y="3200400"/>
+            <a:ext cx="1417320" cy="237744"/>
           </a:xfrm>
           <a:prstGeom prst="rect">
             <a:avLst/>
@@ -3058,7 +3171,7 @@
               <a:buNone/>
             </a:pPr>
             <a:r>
-              <a:rPr lang="en-US" sz="1000" b="1" dirty="0">
+              <a:rPr lang="en-US" sz="900" b="1" dirty="0">
                 <a:solidFill>
                   <a:srgbClr val="B9D9EB"/>
                 </a:solidFill>
@@ -3068,20 +3181,20 @@
               </a:rPr>
               <a:t>Kelly-fractional</a:t>
             </a:r>
-            <a:endParaRPr lang="en-US" sz="1000" dirty="0"/>
-          </a:p>
-        </p:txBody>
-      </p:sp>
-      <p:sp>
-        <p:nvSpPr>
-          <p:cNvPr id="25" name="Text 23"/>
-          <p:cNvSpPr/>
-          <p:nvPr/>
-        </p:nvSpPr>
-        <p:spPr>
-          <a:xfrm>
-            <a:off x="640080" y="4215384"/>
-            <a:ext cx="7863840" cy="457200"/>
+            <a:endParaRPr lang="en-US" sz="900" dirty="0"/>
+          </a:p>
+        </p:txBody>
+      </p:sp>
+      <p:sp>
+        <p:nvSpPr>
+          <p:cNvPr id="27" name="Text 25"/>
+          <p:cNvSpPr/>
+          <p:nvPr/>
+        </p:nvSpPr>
+        <p:spPr>
+          <a:xfrm>
+            <a:off x="4343400" y="3200400"/>
+            <a:ext cx="1097280" cy="237744"/>
           </a:xfrm>
           <a:prstGeom prst="rect">
             <a:avLst/>
@@ -3094,23 +3207,280 @@
           <a:lstStyle/>
           <a:p>
             <a:pPr indent="0" marL="0">
-              <a:lnSpc>
-                <a:spcPct val="125000"/>
-              </a:lnSpc>
-              <a:buNone/>
-            </a:pPr>
-            <a:r>
-              <a:rPr lang="en-US" sz="1150" dirty="0">
-                <a:solidFill>
-                  <a:srgbClr val="1F2933"/>
+              <a:buNone/>
+            </a:pPr>
+            <a:r>
+              <a:rPr lang="en-US" sz="850" b="1" i="1" spc="200" kern="0" dirty="0">
+                <a:solidFill>
+                  <a:srgbClr val="5A6573"/>
                 </a:solidFill>
                 <a:latin typeface="Calibri" pitchFamily="34" charset="0"/>
                 <a:ea typeface="Calibri" pitchFamily="34" charset="-122"/>
                 <a:cs typeface="Calibri" pitchFamily="34" charset="-120"/>
               </a:rPr>
-              <a:t>Place when model edge = (p × decimal_odds − 1) &gt; 0. Stake = Kelly fraction capped at 5% of bankroll. ROI on the 2020-21 season is the cleanest test — model conviction translated to dollars.</a:t>
-            </a:r>
-            <a:endParaRPr lang="en-US" sz="1150" dirty="0"/>
+              <a:t>scaffolded</a:t>
+            </a:r>
+            <a:endParaRPr lang="en-US" sz="850" dirty="0"/>
+          </a:p>
+        </p:txBody>
+      </p:sp>
+      <p:sp>
+        <p:nvSpPr>
+          <p:cNvPr id="28" name="Text 26"/>
+          <p:cNvSpPr/>
+          <p:nvPr/>
+        </p:nvSpPr>
+        <p:spPr>
+          <a:xfrm>
+            <a:off x="640080" y="3456432"/>
+            <a:ext cx="4846320" cy="393192"/>
+          </a:xfrm>
+          <a:prstGeom prst="rect">
+            <a:avLst/>
+          </a:prstGeom>
+          <a:noFill/>
+          <a:ln/>
+        </p:spPr>
+        <p:txBody>
+          <a:bodyPr wrap="square" lIns="0" tIns="0" rIns="0" bIns="0" rtlCol="0" anchor="ctr"/>
+          <a:lstStyle/>
+          <a:p>
+            <a:pPr indent="0" marL="0">
+              <a:lnSpc>
+                <a:spcPct val="118000"/>
+              </a:lnSpc>
+              <a:buNone/>
+            </a:pPr>
+            <a:r>
+              <a:rPr lang="en-US" sz="1000" dirty="0">
+                <a:solidFill>
+                  <a:srgbClr val="1F2933"/>
+                </a:solidFill>
+                <a:latin typeface="Calibri" pitchFamily="34" charset="0"/>
+                <a:ea typeface="Calibri" pitchFamily="34" charset="-122"/>
+                <a:cs typeface="Calibri" pitchFamily="34" charset="-120"/>
+              </a:rPr>
+              <a:t>Bet only when edge = p·odds − 1 &gt; 0; cap stake at 5% of bankroll; ROI on 2020-21 is the cleanest test of conviction.</a:t>
+            </a:r>
+            <a:endParaRPr lang="en-US" sz="1000" dirty="0"/>
+          </a:p>
+        </p:txBody>
+      </p:sp>
+      <p:sp>
+        <p:nvSpPr>
+          <p:cNvPr id="29" name="Shape 27"/>
+          <p:cNvSpPr/>
+          <p:nvPr/>
+        </p:nvSpPr>
+        <p:spPr>
+          <a:xfrm>
+            <a:off x="5760720" y="1371600"/>
+            <a:ext cx="2926080" cy="2377440"/>
+          </a:xfrm>
+          <a:prstGeom prst="rect">
+            <a:avLst/>
+          </a:prstGeom>
+          <a:solidFill>
+            <a:srgbClr val="FFFFFF"/>
+          </a:solidFill>
+          <a:ln w="6350">
+            <a:solidFill>
+              <a:srgbClr val="D7DEE5"/>
+            </a:solidFill>
+            <a:prstDash val="solid"/>
+          </a:ln>
+          <a:effectLst>
+            <a:outerShdw sx="100000" sy="100000" kx="0" ky="0" algn="bl" rotWithShape="0" blurRad="101600" dist="25400" dir="8100000">
+              <a:srgbClr val="000000">
+                <a:alpha val="10000"/>
+              </a:srgbClr>
+            </a:outerShdw>
+          </a:effectLst>
+        </p:spPr>
+      </p:sp>
+      <p:pic>
+        <p:nvPicPr>
+          <p:cNvPr id="30" name="Image 0" descr="/Users/m2/Projects/STAT 5243/43 Project 4/figures/10_final_standings.png">    </p:cNvPr>
+          <p:cNvPicPr>
+            <a:picLocks noChangeAspect="1"/>
+          </p:cNvPicPr>
+          <p:nvPr/>
+        </p:nvPicPr>
+        <p:blipFill>
+          <a:blip r:embed="rId1"/>
+          <a:srcRect l="0" r="0" t="0" b="0"/>
+          <a:stretch/>
+        </p:blipFill>
+        <p:spPr>
+          <a:xfrm>
+            <a:off x="5806440" y="1417320"/>
+            <a:ext cx="2834640" cy="2103120"/>
+          </a:xfrm>
+          <a:prstGeom prst="rect">
+            <a:avLst/>
+          </a:prstGeom>
+        </p:spPr>
+      </p:pic>
+      <p:sp>
+        <p:nvSpPr>
+          <p:cNvPr id="31" name="Text 28"/>
+          <p:cNvSpPr/>
+          <p:nvPr/>
+        </p:nvSpPr>
+        <p:spPr>
+          <a:xfrm>
+            <a:off x="5760720" y="3493008"/>
+            <a:ext cx="2926080" cy="274320"/>
+          </a:xfrm>
+          <a:prstGeom prst="rect">
+            <a:avLst/>
+          </a:prstGeom>
+          <a:noFill/>
+          <a:ln/>
+        </p:spPr>
+        <p:txBody>
+          <a:bodyPr wrap="square" lIns="0" tIns="0" rIns="0" bIns="0" rtlCol="0" anchor="ctr"/>
+          <a:lstStyle/>
+          <a:p>
+            <a:pPr algn="ctr" indent="0" marL="0">
+              <a:lnSpc>
+                <a:spcPct val="120000"/>
+              </a:lnSpc>
+              <a:buNone/>
+            </a:pPr>
+            <a:r>
+              <a:rPr lang="en-US" sz="900" i="1" dirty="0">
+                <a:solidFill>
+                  <a:srgbClr val="5A6573"/>
+                </a:solidFill>
+                <a:latin typeface="Calibri" pitchFamily="34" charset="0"/>
+                <a:ea typeface="Calibri" pitchFamily="34" charset="-122"/>
+                <a:cs typeface="Calibri" pitchFamily="34" charset="-120"/>
+              </a:rPr>
+              <a:t>2020-21 final standings — actual outcome, target of the simulator.</a:t>
+            </a:r>
+            <a:endParaRPr lang="en-US" sz="900" dirty="0"/>
+          </a:p>
+        </p:txBody>
+      </p:sp>
+      <p:sp>
+        <p:nvSpPr>
+          <p:cNvPr id="32" name="Shape 29"/>
+          <p:cNvSpPr/>
+          <p:nvPr/>
+        </p:nvSpPr>
+        <p:spPr>
+          <a:xfrm>
+            <a:off x="457200" y="4114800"/>
+            <a:ext cx="8229600" cy="566928"/>
+          </a:xfrm>
+          <a:prstGeom prst="rect">
+            <a:avLst/>
+          </a:prstGeom>
+          <a:solidFill>
+            <a:srgbClr val="0B2545"/>
+          </a:solidFill>
+          <a:ln/>
+        </p:spPr>
+      </p:sp>
+      <p:sp>
+        <p:nvSpPr>
+          <p:cNvPr id="33" name="Shape 30"/>
+          <p:cNvSpPr/>
+          <p:nvPr/>
+        </p:nvSpPr>
+        <p:spPr>
+          <a:xfrm>
+            <a:off x="457200" y="4114800"/>
+            <a:ext cx="54864" cy="566928"/>
+          </a:xfrm>
+          <a:prstGeom prst="rect">
+            <a:avLst/>
+          </a:prstGeom>
+          <a:solidFill>
+            <a:srgbClr val="E07A5F"/>
+          </a:solidFill>
+          <a:ln/>
+        </p:spPr>
+      </p:sp>
+      <p:sp>
+        <p:nvSpPr>
+          <p:cNvPr id="34" name="Text 31"/>
+          <p:cNvSpPr/>
+          <p:nvPr/>
+        </p:nvSpPr>
+        <p:spPr>
+          <a:xfrm>
+            <a:off x="640080" y="4114800"/>
+            <a:ext cx="1691640" cy="566928"/>
+          </a:xfrm>
+          <a:prstGeom prst="rect">
+            <a:avLst/>
+          </a:prstGeom>
+          <a:noFill/>
+          <a:ln/>
+        </p:spPr>
+        <p:txBody>
+          <a:bodyPr wrap="square" lIns="0" tIns="0" rIns="0" bIns="0" rtlCol="0" anchor="ctr"/>
+          <a:lstStyle/>
+          <a:p>
+            <a:pPr indent="0" marL="0">
+              <a:buNone/>
+            </a:pPr>
+            <a:r>
+              <a:rPr lang="en-US" sz="900" b="1" spc="400" kern="0" dirty="0">
+                <a:solidFill>
+                  <a:srgbClr val="B9D9EB"/>
+                </a:solidFill>
+                <a:latin typeface="Calibri" pitchFamily="34" charset="0"/>
+                <a:ea typeface="Calibri" pitchFamily="34" charset="-122"/>
+                <a:cs typeface="Calibri" pitchFamily="34" charset="-120"/>
+              </a:rPr>
+              <a:t>ONE ENGINE</a:t>
+            </a:r>
+            <a:endParaRPr lang="en-US" sz="900" dirty="0"/>
+          </a:p>
+        </p:txBody>
+      </p:sp>
+      <p:sp>
+        <p:nvSpPr>
+          <p:cNvPr id="35" name="Text 32"/>
+          <p:cNvSpPr/>
+          <p:nvPr/>
+        </p:nvSpPr>
+        <p:spPr>
+          <a:xfrm>
+            <a:off x="2423160" y="4151376"/>
+            <a:ext cx="6217920" cy="493776"/>
+          </a:xfrm>
+          <a:prstGeom prst="rect">
+            <a:avLst/>
+          </a:prstGeom>
+          <a:noFill/>
+          <a:ln/>
+        </p:spPr>
+        <p:txBody>
+          <a:bodyPr wrap="square" lIns="0" tIns="0" rIns="0" bIns="0" rtlCol="0" anchor="ctr"/>
+          <a:lstStyle/>
+          <a:p>
+            <a:pPr indent="0" marL="0">
+              <a:lnSpc>
+                <a:spcPct val="118000"/>
+              </a:lnSpc>
+              <a:buNone/>
+            </a:pPr>
+            <a:r>
+              <a:rPr lang="en-US" sz="1100" i="1" dirty="0">
+                <a:solidFill>
+                  <a:srgbClr val="FFFFFF"/>
+                </a:solidFill>
+                <a:latin typeface="Calibri" pitchFamily="34" charset="0"/>
+                <a:ea typeface="Calibri" pitchFamily="34" charset="-122"/>
+                <a:cs typeface="Calibri" pitchFamily="34" charset="-120"/>
+              </a:rPr>
+              <a:t>Per-match probabilities feed all three targets — calibration here pays off everywhere.</a:t>
+            </a:r>
+            <a:endParaRPr lang="en-US" sz="1100" dirty="0"/>
           </a:p>
         </p:txBody>
       </p:sp>
@@ -3312,7 +3682,7 @@
         <p:spPr>
           <a:xfrm>
             <a:off x="457200" y="548640"/>
-            <a:ext cx="8229600" cy="594360"/>
+            <a:ext cx="8229600" cy="868680"/>
           </a:xfrm>
           <a:prstGeom prst="rect">
             <a:avLst/>
@@ -3325,10 +3695,13 @@
           <a:lstStyle/>
           <a:p>
             <a:pPr indent="0" marL="0">
-              <a:buNone/>
-            </a:pPr>
-            <a:r>
-              <a:rPr lang="en-US" sz="2800" b="1" dirty="0">
+              <a:lnSpc>
+                <a:spcPct val="105000"/>
+              </a:lnSpc>
+              <a:buNone/>
+            </a:pPr>
+            <a:r>
+              <a:rPr lang="en-US" sz="2200" b="1" dirty="0">
                 <a:solidFill>
                   <a:srgbClr val="0B2545"/>
                 </a:solidFill>
@@ -3336,9 +3709,9 @@
                 <a:ea typeface="Georgia" pitchFamily="34" charset="-122"/>
                 <a:cs typeface="Georgia" pitchFamily="34" charset="-120"/>
               </a:rPr>
-              <a:t>Live: a Shiny app on Posit Connect Cloud</a:t>
-            </a:r>
-            <a:endParaRPr lang="en-US" sz="2800" dirty="0"/>
+              <a:t>Live demo: pick a fixture, watch the model and the market disagree.</a:t>
+            </a:r>
+            <a:endParaRPr lang="en-US" sz="2200" dirty="0"/>
           </a:p>
         </p:txBody>
       </p:sp>
@@ -3351,7 +3724,7 @@
         <p:spPr>
           <a:xfrm>
             <a:off x="457200" y="1371600"/>
-            <a:ext cx="2743200" cy="2560320"/>
+            <a:ext cx="4754880" cy="2697480"/>
           </a:xfrm>
           <a:prstGeom prst="rect">
             <a:avLst/>
@@ -3376,39 +3749,14 @@
       </p:sp>
       <p:sp>
         <p:nvSpPr>
-          <p:cNvPr id="9" name="Shape 7"/>
-          <p:cNvSpPr/>
-          <p:nvPr/>
-        </p:nvSpPr>
-        <p:spPr>
-          <a:xfrm>
-            <a:off x="594360" y="1508760"/>
-            <a:ext cx="2468880" cy="1097280"/>
-          </a:xfrm>
-          <a:prstGeom prst="rect">
-            <a:avLst/>
-          </a:prstGeom>
-          <a:solidFill>
-            <a:srgbClr val="F5F7FA"/>
-          </a:solidFill>
-          <a:ln w="6350">
-            <a:solidFill>
-              <a:srgbClr val="D7DEE5"/>
-            </a:solidFill>
-            <a:prstDash val="solid"/>
-          </a:ln>
-        </p:spPr>
-      </p:sp>
-      <p:sp>
-        <p:nvSpPr>
-          <p:cNvPr id="10" name="Text 8"/>
-          <p:cNvSpPr/>
-          <p:nvPr/>
-        </p:nvSpPr>
-        <p:spPr>
-          <a:xfrm>
-            <a:off x="594360" y="1874520"/>
-            <a:ext cx="2468880" cy="274320"/>
+          <p:cNvPr id="9" name="Text 7"/>
+          <p:cNvSpPr/>
+          <p:nvPr/>
+        </p:nvSpPr>
+        <p:spPr>
+          <a:xfrm>
+            <a:off x="457200" y="2491740"/>
+            <a:ext cx="4754880" cy="274320"/>
           </a:xfrm>
           <a:prstGeom prst="rect">
             <a:avLst/>
@@ -3424,7 +3772,7 @@
               <a:buNone/>
             </a:pPr>
             <a:r>
-              <a:rPr lang="en-US" sz="1000" b="1" spc="300" kern="0" dirty="0">
+              <a:rPr lang="en-US" sz="1000" b="1" spc="400" kern="0" dirty="0">
                 <a:solidFill>
                   <a:srgbClr val="7FB3D5"/>
                 </a:solidFill>
@@ -3432,7 +3780,7 @@
                 <a:ea typeface="Calibri" pitchFamily="34" charset="-122"/>
                 <a:cs typeface="Calibri" pitchFamily="34" charset="-120"/>
               </a:rPr>
-              <a:t>SCREENSHOT</a:t>
+              <a:t>FIGURE PLACEHOLDER</a:t>
             </a:r>
             <a:endParaRPr lang="en-US" sz="1000" dirty="0"/>
           </a:p>
@@ -3440,14 +3788,14 @@
       </p:sp>
       <p:sp>
         <p:nvSpPr>
-          <p:cNvPr id="11" name="Text 9"/>
-          <p:cNvSpPr/>
-          <p:nvPr/>
-        </p:nvSpPr>
-        <p:spPr>
-          <a:xfrm>
-            <a:off x="594360" y="2148840"/>
-            <a:ext cx="2468880" cy="228600"/>
+          <p:cNvPr id="10" name="Text 8"/>
+          <p:cNvSpPr/>
+          <p:nvPr/>
+        </p:nvSpPr>
+        <p:spPr>
+          <a:xfrm>
+            <a:off x="457200" y="2766060"/>
+            <a:ext cx="4754880" cy="228600"/>
           </a:xfrm>
           <a:prstGeom prst="rect">
             <a:avLst/>
@@ -3463,7 +3811,7 @@
               <a:buNone/>
             </a:pPr>
             <a:r>
-              <a:rPr lang="en-US" sz="800" dirty="0">
+              <a:rPr lang="en-US" sz="900" dirty="0">
                 <a:solidFill>
                   <a:srgbClr val="5A6573"/>
                 </a:solidFill>
@@ -3471,25 +3819,105 @@
                 <a:ea typeface="Consolas" pitchFamily="34" charset="-122"/>
                 <a:cs typeface="Consolas" pitchFamily="34" charset="-120"/>
               </a:rPr>
-              <a:t>figures/demo_1_predict_a_match.png</a:t>
-            </a:r>
-            <a:endParaRPr lang="en-US" sz="800" dirty="0"/>
-          </a:p>
-        </p:txBody>
-      </p:sp>
-      <p:sp>
-        <p:nvSpPr>
-          <p:cNvPr id="12" name="Shape 10"/>
-          <p:cNvSpPr/>
-          <p:nvPr/>
-        </p:nvSpPr>
-        <p:spPr>
-          <a:xfrm>
-            <a:off x="457200" y="2743200"/>
-            <a:ext cx="54864" cy="1143000"/>
-          </a:xfrm>
-          <a:prstGeom prst="rect">
-            <a:avLst/>
+              <a:t>figures/11_app_predict_tab.png</a:t>
+            </a:r>
+            <a:endParaRPr lang="en-US" sz="900" dirty="0"/>
+          </a:p>
+        </p:txBody>
+      </p:sp>
+      <p:sp>
+        <p:nvSpPr>
+          <p:cNvPr id="11" name="Text 9"/>
+          <p:cNvSpPr/>
+          <p:nvPr/>
+        </p:nvSpPr>
+        <p:spPr>
+          <a:xfrm>
+            <a:off x="457200" y="4105656"/>
+            <a:ext cx="4754880" cy="201168"/>
+          </a:xfrm>
+          <a:prstGeom prst="rect">
+            <a:avLst/>
+          </a:prstGeom>
+          <a:noFill/>
+          <a:ln/>
+        </p:spPr>
+        <p:txBody>
+          <a:bodyPr wrap="square" lIns="0" tIns="0" rIns="0" bIns="0" rtlCol="0" anchor="ctr"/>
+          <a:lstStyle/>
+          <a:p>
+            <a:pPr indent="0" marL="0">
+              <a:buNone/>
+            </a:pPr>
+            <a:r>
+              <a:rPr lang="en-US" sz="1000" i="1" dirty="0">
+                <a:solidFill>
+                  <a:srgbClr val="5A6573"/>
+                </a:solidFill>
+                <a:latin typeface="Calibri" pitchFamily="34" charset="0"/>
+                <a:ea typeface="Calibri" pitchFamily="34" charset="-122"/>
+                <a:cs typeface="Calibri" pitchFamily="34" charset="-120"/>
+              </a:rPr>
+              <a:t>App screenshot — Predict tab (fresh capture morning-of)</a:t>
+            </a:r>
+            <a:endParaRPr lang="en-US" sz="1000" dirty="0"/>
+          </a:p>
+        </p:txBody>
+      </p:sp>
+      <p:sp>
+        <p:nvSpPr>
+          <p:cNvPr id="12" name="Text 10"/>
+          <p:cNvSpPr/>
+          <p:nvPr/>
+        </p:nvSpPr>
+        <p:spPr>
+          <a:xfrm>
+            <a:off x="5440680" y="1371600"/>
+            <a:ext cx="3246120" cy="237744"/>
+          </a:xfrm>
+          <a:prstGeom prst="rect">
+            <a:avLst/>
+          </a:prstGeom>
+          <a:noFill/>
+          <a:ln/>
+        </p:spPr>
+        <p:txBody>
+          <a:bodyPr wrap="square" lIns="0" tIns="0" rIns="0" bIns="0" rtlCol="0" anchor="ctr"/>
+          <a:lstStyle/>
+          <a:p>
+            <a:pPr indent="0" marL="0">
+              <a:buNone/>
+            </a:pPr>
+            <a:r>
+              <a:rPr lang="en-US" sz="1000" b="1" spc="400" kern="0" dirty="0">
+                <a:solidFill>
+                  <a:srgbClr val="13315C"/>
+                </a:solidFill>
+                <a:latin typeface="Calibri" pitchFamily="34" charset="0"/>
+                <a:ea typeface="Calibri" pitchFamily="34" charset="-122"/>
+                <a:cs typeface="Calibri" pitchFamily="34" charset="-120"/>
+              </a:rPr>
+              <a:t>3-MINUTE DEMO SCRIPT</a:t>
+            </a:r>
+            <a:endParaRPr lang="en-US" sz="1000" dirty="0"/>
+          </a:p>
+        </p:txBody>
+      </p:sp>
+      <p:sp>
+        <p:nvSpPr>
+          <p:cNvPr id="13" name="Shape 11"/>
+          <p:cNvSpPr/>
+          <p:nvPr/>
+        </p:nvSpPr>
+        <p:spPr>
+          <a:xfrm>
+            <a:off x="5440680" y="1645920"/>
+            <a:ext cx="292608" cy="292608"/>
+          </a:xfrm>
+          <a:prstGeom prst="roundRect">
+            <a:avLst>
+              <a:gd name="adj" fmla="val 18750"/>
+            </a:avLst>
           </a:prstGeom>
           <a:solidFill>
             <a:srgbClr val="E07A5F"/>
@@ -3499,14 +3927,14 @@
       </p:sp>
       <p:sp>
         <p:nvSpPr>
-          <p:cNvPr id="13" name="Text 11"/>
-          <p:cNvSpPr/>
-          <p:nvPr/>
-        </p:nvSpPr>
-        <p:spPr>
-          <a:xfrm>
-            <a:off x="621792" y="2788920"/>
-            <a:ext cx="2468880" cy="320040"/>
+          <p:cNvPr id="14" name="Text 12"/>
+          <p:cNvSpPr/>
+          <p:nvPr/>
+        </p:nvSpPr>
+        <p:spPr>
+          <a:xfrm>
+            <a:off x="5440680" y="1645920"/>
+            <a:ext cx="292608" cy="292608"/>
           </a:xfrm>
           <a:prstGeom prst="rect">
             <a:avLst/>
@@ -3518,34 +3946,34 @@
           <a:bodyPr wrap="square" lIns="0" tIns="0" rIns="0" bIns="0" rtlCol="0" anchor="ctr"/>
           <a:lstStyle/>
           <a:p>
-            <a:pPr indent="0" marL="0">
-              <a:buNone/>
-            </a:pPr>
-            <a:r>
-              <a:rPr lang="en-US" sz="1400" b="1" dirty="0">
-                <a:solidFill>
-                  <a:srgbClr val="0B2545"/>
+            <a:pPr algn="ctr" indent="0" marL="0">
+              <a:buNone/>
+            </a:pPr>
+            <a:r>
+              <a:rPr lang="en-US" sz="1300" b="1" dirty="0">
+                <a:solidFill>
+                  <a:srgbClr val="FFFFFF"/>
                 </a:solidFill>
                 <a:latin typeface="Georgia" pitchFamily="34" charset="0"/>
                 <a:ea typeface="Georgia" pitchFamily="34" charset="-122"/>
                 <a:cs typeface="Georgia" pitchFamily="34" charset="-120"/>
               </a:rPr>
-              <a:t>Tab 1.   Predict-a-Match</a:t>
-            </a:r>
-            <a:endParaRPr lang="en-US" sz="1400" dirty="0"/>
-          </a:p>
-        </p:txBody>
-      </p:sp>
-      <p:sp>
-        <p:nvSpPr>
-          <p:cNvPr id="14" name="Text 12"/>
-          <p:cNvSpPr/>
-          <p:nvPr/>
-        </p:nvSpPr>
-        <p:spPr>
-          <a:xfrm>
-            <a:off x="621792" y="3127248"/>
-            <a:ext cx="2468880" cy="731520"/>
+              <a:t>1</a:t>
+            </a:r>
+            <a:endParaRPr lang="en-US" sz="1300" dirty="0"/>
+          </a:p>
+        </p:txBody>
+      </p:sp>
+      <p:sp>
+        <p:nvSpPr>
+          <p:cNvPr id="15" name="Text 13"/>
+          <p:cNvSpPr/>
+          <p:nvPr/>
+        </p:nvSpPr>
+        <p:spPr>
+          <a:xfrm>
+            <a:off x="5824728" y="1627632"/>
+            <a:ext cx="2862072" cy="502920"/>
           </a:xfrm>
           <a:prstGeom prst="rect">
             <a:avLst/>
@@ -3554,12 +3982,12 @@
           <a:ln/>
         </p:spPr>
         <p:txBody>
-          <a:bodyPr wrap="square" lIns="0" tIns="0" rIns="0" bIns="0" rtlCol="0" anchor="ctr"/>
+          <a:bodyPr wrap="square" lIns="0" tIns="0" rIns="0" bIns="0" rtlCol="0" anchor="t"/>
           <a:lstStyle/>
           <a:p>
             <a:pPr indent="0" marL="0">
               <a:lnSpc>
-                <a:spcPct val="125000"/>
+                <a:spcPct val="120000"/>
               </a:lnSpc>
               <a:buNone/>
             </a:pPr>
@@ -3572,7 +4000,7 @@
                 <a:ea typeface="Calibri" pitchFamily="34" charset="-122"/>
                 <a:cs typeface="Calibri" pitchFamily="34" charset="-120"/>
               </a:rPr>
-              <a:t>Pick any 2020-21 fixture; see model probabilities, market probabilities, and the implied edge.</a:t>
+              <a:t>Click  Predict  tab  →  pick  Liverpool vs Arsenal.</a:t>
             </a:r>
             <a:endParaRPr lang="en-US" sz="1100" dirty="0"/>
           </a:p>
@@ -3580,59 +4008,24 @@
       </p:sp>
       <p:sp>
         <p:nvSpPr>
-          <p:cNvPr id="15" name="Shape 13"/>
-          <p:cNvSpPr/>
-          <p:nvPr/>
-        </p:nvSpPr>
-        <p:spPr>
-          <a:xfrm>
-            <a:off x="3337560" y="1371600"/>
-            <a:ext cx="2743200" cy="2560320"/>
-          </a:xfrm>
-          <a:prstGeom prst="rect">
-            <a:avLst/>
+          <p:cNvPr id="16" name="Shape 14"/>
+          <p:cNvSpPr/>
+          <p:nvPr/>
+        </p:nvSpPr>
+        <p:spPr>
+          <a:xfrm>
+            <a:off x="5440680" y="2212848"/>
+            <a:ext cx="292608" cy="292608"/>
+          </a:xfrm>
+          <a:prstGeom prst="roundRect">
+            <a:avLst>
+              <a:gd name="adj" fmla="val 18750"/>
+            </a:avLst>
           </a:prstGeom>
           <a:solidFill>
-            <a:srgbClr val="FFFFFF"/>
+            <a:srgbClr val="E07A5F"/>
           </a:solidFill>
-          <a:ln w="9525">
-            <a:solidFill>
-              <a:srgbClr val="D7DEE5"/>
-            </a:solidFill>
-            <a:prstDash val="solid"/>
-          </a:ln>
-          <a:effectLst>
-            <a:outerShdw sx="100000" sy="100000" kx="0" ky="0" algn="bl" rotWithShape="0" blurRad="101600" dist="25400" dir="8100000">
-              <a:srgbClr val="000000">
-                <a:alpha val="10000"/>
-              </a:srgbClr>
-            </a:outerShdw>
-          </a:effectLst>
-        </p:spPr>
-      </p:sp>
-      <p:sp>
-        <p:nvSpPr>
-          <p:cNvPr id="16" name="Shape 14"/>
-          <p:cNvSpPr/>
-          <p:nvPr/>
-        </p:nvSpPr>
-        <p:spPr>
-          <a:xfrm>
-            <a:off x="3474720" y="1508760"/>
-            <a:ext cx="2468880" cy="1097280"/>
-          </a:xfrm>
-          <a:prstGeom prst="rect">
-            <a:avLst/>
-          </a:prstGeom>
-          <a:solidFill>
-            <a:srgbClr val="F5F7FA"/>
-          </a:solidFill>
-          <a:ln w="6350">
-            <a:solidFill>
-              <a:srgbClr val="D7DEE5"/>
-            </a:solidFill>
-            <a:prstDash val="solid"/>
-          </a:ln>
+          <a:ln/>
         </p:spPr>
       </p:sp>
       <p:sp>
@@ -3643,8 +4036,8 @@
         </p:nvSpPr>
         <p:spPr>
           <a:xfrm>
-            <a:off x="3474720" y="1874520"/>
-            <a:ext cx="2468880" cy="274320"/>
+            <a:off x="5440680" y="2212848"/>
+            <a:ext cx="292608" cy="292608"/>
           </a:xfrm>
           <a:prstGeom prst="rect">
             <a:avLst/>
@@ -3660,30 +4053,94 @@
               <a:buNone/>
             </a:pPr>
             <a:r>
-              <a:rPr lang="en-US" sz="1000" b="1" spc="300" kern="0" dirty="0">
-                <a:solidFill>
-                  <a:srgbClr val="7FB3D5"/>
+              <a:rPr lang="en-US" sz="1300" b="1" dirty="0">
+                <a:solidFill>
+                  <a:srgbClr val="FFFFFF"/>
+                </a:solidFill>
+                <a:latin typeface="Georgia" pitchFamily="34" charset="0"/>
+                <a:ea typeface="Georgia" pitchFamily="34" charset="-122"/>
+                <a:cs typeface="Georgia" pitchFamily="34" charset="-120"/>
+              </a:rPr>
+              <a:t>2</a:t>
+            </a:r>
+            <a:endParaRPr lang="en-US" sz="1300" dirty="0"/>
+          </a:p>
+        </p:txBody>
+      </p:sp>
+      <p:sp>
+        <p:nvSpPr>
+          <p:cNvPr id="18" name="Text 16"/>
+          <p:cNvSpPr/>
+          <p:nvPr/>
+        </p:nvSpPr>
+        <p:spPr>
+          <a:xfrm>
+            <a:off x="5824728" y="2194560"/>
+            <a:ext cx="2862072" cy="502920"/>
+          </a:xfrm>
+          <a:prstGeom prst="rect">
+            <a:avLst/>
+          </a:prstGeom>
+          <a:noFill/>
+          <a:ln/>
+        </p:spPr>
+        <p:txBody>
+          <a:bodyPr wrap="square" lIns="0" tIns="0" rIns="0" bIns="0" rtlCol="0" anchor="t"/>
+          <a:lstStyle/>
+          <a:p>
+            <a:pPr indent="0" marL="0">
+              <a:lnSpc>
+                <a:spcPct val="120000"/>
+              </a:lnSpc>
+              <a:buNone/>
+            </a:pPr>
+            <a:r>
+              <a:rPr lang="en-US" sz="1100" dirty="0">
+                <a:solidFill>
+                  <a:srgbClr val="1F2933"/>
                 </a:solidFill>
                 <a:latin typeface="Calibri" pitchFamily="34" charset="0"/>
                 <a:ea typeface="Calibri" pitchFamily="34" charset="-122"/>
                 <a:cs typeface="Calibri" pitchFamily="34" charset="-120"/>
               </a:rPr>
-              <a:t>SCREENSHOT</a:t>
-            </a:r>
-            <a:endParaRPr lang="en-US" sz="1000" dirty="0"/>
-          </a:p>
-        </p:txBody>
-      </p:sp>
-      <p:sp>
-        <p:nvSpPr>
-          <p:cNvPr id="18" name="Text 16"/>
-          <p:cNvSpPr/>
-          <p:nvPr/>
-        </p:nvSpPr>
-        <p:spPr>
-          <a:xfrm>
-            <a:off x="3474720" y="2148840"/>
-            <a:ext cx="2468880" cy="228600"/>
+              <a:t>Show  model probabilities  vs  market probabilities  side-by-side.</a:t>
+            </a:r>
+            <a:endParaRPr lang="en-US" sz="1100" dirty="0"/>
+          </a:p>
+        </p:txBody>
+      </p:sp>
+      <p:sp>
+        <p:nvSpPr>
+          <p:cNvPr id="19" name="Shape 17"/>
+          <p:cNvSpPr/>
+          <p:nvPr/>
+        </p:nvSpPr>
+        <p:spPr>
+          <a:xfrm>
+            <a:off x="5440680" y="2779776"/>
+            <a:ext cx="292608" cy="292608"/>
+          </a:xfrm>
+          <a:prstGeom prst="roundRect">
+            <a:avLst>
+              <a:gd name="adj" fmla="val 18750"/>
+            </a:avLst>
+          </a:prstGeom>
+          <a:solidFill>
+            <a:srgbClr val="E07A5F"/>
+          </a:solidFill>
+          <a:ln/>
+        </p:spPr>
+      </p:sp>
+      <p:sp>
+        <p:nvSpPr>
+          <p:cNvPr id="20" name="Text 18"/>
+          <p:cNvSpPr/>
+          <p:nvPr/>
+        </p:nvSpPr>
+        <p:spPr>
+          <a:xfrm>
+            <a:off x="5440680" y="2779776"/>
+            <a:ext cx="292608" cy="292608"/>
           </a:xfrm>
           <a:prstGeom prst="rect">
             <a:avLst/>
@@ -3699,30 +4156,247 @@
               <a:buNone/>
             </a:pPr>
             <a:r>
-              <a:rPr lang="en-US" sz="800" dirty="0">
-                <a:solidFill>
-                  <a:srgbClr val="5A6573"/>
+              <a:rPr lang="en-US" sz="1300" b="1" dirty="0">
+                <a:solidFill>
+                  <a:srgbClr val="FFFFFF"/>
+                </a:solidFill>
+                <a:latin typeface="Georgia" pitchFamily="34" charset="0"/>
+                <a:ea typeface="Georgia" pitchFamily="34" charset="-122"/>
+                <a:cs typeface="Georgia" pitchFamily="34" charset="-120"/>
+              </a:rPr>
+              <a:t>3</a:t>
+            </a:r>
+            <a:endParaRPr lang="en-US" sz="1300" dirty="0"/>
+          </a:p>
+        </p:txBody>
+      </p:sp>
+      <p:sp>
+        <p:nvSpPr>
+          <p:cNvPr id="21" name="Text 19"/>
+          <p:cNvSpPr/>
+          <p:nvPr/>
+        </p:nvSpPr>
+        <p:spPr>
+          <a:xfrm>
+            <a:off x="5824728" y="2761488"/>
+            <a:ext cx="2862072" cy="502920"/>
+          </a:xfrm>
+          <a:prstGeom prst="rect">
+            <a:avLst/>
+          </a:prstGeom>
+          <a:noFill/>
+          <a:ln/>
+        </p:spPr>
+        <p:txBody>
+          <a:bodyPr wrap="square" lIns="0" tIns="0" rIns="0" bIns="0" rtlCol="0" anchor="t"/>
+          <a:lstStyle/>
+          <a:p>
+            <a:pPr indent="0" marL="0">
+              <a:lnSpc>
+                <a:spcPct val="120000"/>
+              </a:lnSpc>
+              <a:buNone/>
+            </a:pPr>
+            <a:r>
+              <a:rPr lang="en-US" sz="1100" dirty="0">
+                <a:solidFill>
+                  <a:srgbClr val="1F2933"/>
+                </a:solidFill>
+                <a:latin typeface="Calibri" pitchFamily="34" charset="0"/>
+                <a:ea typeface="Calibri" pitchFamily="34" charset="-122"/>
+                <a:cs typeface="Calibri" pitchFamily="34" charset="-120"/>
+              </a:rPr>
+              <a:t>Click  Run season simulation  →  10k Monte Carlo standings.</a:t>
+            </a:r>
+            <a:endParaRPr lang="en-US" sz="1100" dirty="0"/>
+          </a:p>
+        </p:txBody>
+      </p:sp>
+      <p:sp>
+        <p:nvSpPr>
+          <p:cNvPr id="22" name="Shape 20"/>
+          <p:cNvSpPr/>
+          <p:nvPr/>
+        </p:nvSpPr>
+        <p:spPr>
+          <a:xfrm>
+            <a:off x="5440680" y="3154680"/>
+            <a:ext cx="3246120" cy="914400"/>
+          </a:xfrm>
+          <a:prstGeom prst="rect">
+            <a:avLst/>
+          </a:prstGeom>
+          <a:solidFill>
+            <a:srgbClr val="13315C"/>
+          </a:solidFill>
+          <a:ln/>
+        </p:spPr>
+      </p:sp>
+      <p:sp>
+        <p:nvSpPr>
+          <p:cNvPr id="23" name="Shape 21"/>
+          <p:cNvSpPr/>
+          <p:nvPr/>
+        </p:nvSpPr>
+        <p:spPr>
+          <a:xfrm>
+            <a:off x="5440680" y="3154680"/>
+            <a:ext cx="54864" cy="914400"/>
+          </a:xfrm>
+          <a:prstGeom prst="rect">
+            <a:avLst/>
+          </a:prstGeom>
+          <a:solidFill>
+            <a:srgbClr val="E07A5F"/>
+          </a:solidFill>
+          <a:ln/>
+        </p:spPr>
+      </p:sp>
+      <p:sp>
+        <p:nvSpPr>
+          <p:cNvPr id="24" name="Text 22"/>
+          <p:cNvSpPr/>
+          <p:nvPr/>
+        </p:nvSpPr>
+        <p:spPr>
+          <a:xfrm>
+            <a:off x="5605272" y="3200400"/>
+            <a:ext cx="3063240" cy="201168"/>
+          </a:xfrm>
+          <a:prstGeom prst="rect">
+            <a:avLst/>
+          </a:prstGeom>
+          <a:noFill/>
+          <a:ln/>
+        </p:spPr>
+        <p:txBody>
+          <a:bodyPr wrap="square" lIns="0" tIns="0" rIns="0" bIns="0" rtlCol="0" anchor="ctr"/>
+          <a:lstStyle/>
+          <a:p>
+            <a:pPr indent="0" marL="0">
+              <a:buNone/>
+            </a:pPr>
+            <a:r>
+              <a:rPr lang="en-US" sz="900" b="1" spc="400" kern="0" dirty="0">
+                <a:solidFill>
+                  <a:srgbClr val="B9D9EB"/>
+                </a:solidFill>
+                <a:latin typeface="Calibri" pitchFamily="34" charset="0"/>
+                <a:ea typeface="Calibri" pitchFamily="34" charset="-122"/>
+                <a:cs typeface="Calibri" pitchFamily="34" charset="-120"/>
+              </a:rPr>
+              <a:t>IF DEMO FAILS</a:t>
+            </a:r>
+            <a:endParaRPr lang="en-US" sz="900" dirty="0"/>
+          </a:p>
+        </p:txBody>
+      </p:sp>
+      <p:sp>
+        <p:nvSpPr>
+          <p:cNvPr id="25" name="Text 23"/>
+          <p:cNvSpPr/>
+          <p:nvPr/>
+        </p:nvSpPr>
+        <p:spPr>
+          <a:xfrm>
+            <a:off x="5605272" y="3419856"/>
+            <a:ext cx="3063240" cy="594360"/>
+          </a:xfrm>
+          <a:prstGeom prst="rect">
+            <a:avLst/>
+          </a:prstGeom>
+          <a:noFill/>
+          <a:ln/>
+        </p:spPr>
+        <p:txBody>
+          <a:bodyPr wrap="square" lIns="0" tIns="0" rIns="0" bIns="0" rtlCol="0" anchor="t"/>
+          <a:lstStyle/>
+          <a:p>
+            <a:pPr indent="0" marL="0">
+              <a:lnSpc>
+                <a:spcPct val="120000"/>
+              </a:lnSpc>
+              <a:buNone/>
+            </a:pPr>
+            <a:r>
+              <a:rPr lang="en-US" sz="1050" dirty="0">
+                <a:solidFill>
+                  <a:srgbClr val="FFFFFF"/>
+                </a:solidFill>
+                <a:latin typeface="Calibri" pitchFamily="34" charset="0"/>
+                <a:ea typeface="Calibri" pitchFamily="34" charset="-122"/>
+                <a:cs typeface="Calibri" pitchFamily="34" charset="-120"/>
+              </a:rPr>
+              <a:t>Fall back to backup screenshots </a:t>
+            </a:r>
+            <a:pPr indent="0" marL="0">
+              <a:lnSpc>
+                <a:spcPct val="120000"/>
+              </a:lnSpc>
+              <a:buNone/>
+            </a:pPr>
+            <a:r>
+              <a:rPr lang="en-US" sz="900" dirty="0">
+                <a:solidFill>
+                  <a:srgbClr val="B9D9EB"/>
                 </a:solidFill>
                 <a:latin typeface="Consolas" pitchFamily="34" charset="0"/>
                 <a:ea typeface="Consolas" pitchFamily="34" charset="-122"/>
                 <a:cs typeface="Consolas" pitchFamily="34" charset="-120"/>
               </a:rPr>
-              <a:t>figures/demo_2_season_simulator.png</a:t>
-            </a:r>
-            <a:endParaRPr lang="en-US" sz="800" dirty="0"/>
-          </a:p>
-        </p:txBody>
-      </p:sp>
-      <p:sp>
-        <p:nvSpPr>
-          <p:cNvPr id="19" name="Shape 17"/>
-          <p:cNvSpPr/>
-          <p:nvPr/>
-        </p:nvSpPr>
-        <p:spPr>
-          <a:xfrm>
-            <a:off x="3337560" y="2743200"/>
-            <a:ext cx="54864" cy="1143000"/>
+              <a:t>(figures/11_app_*.png)</a:t>
+            </a:r>
+            <a:pPr indent="0" marL="0">
+              <a:lnSpc>
+                <a:spcPct val="120000"/>
+              </a:lnSpc>
+              <a:buNone/>
+            </a:pPr>
+            <a:r>
+              <a:rPr lang="en-US" sz="1050" dirty="0">
+                <a:solidFill>
+                  <a:srgbClr val="FFFFFF"/>
+                </a:solidFill>
+                <a:latin typeface="Calibri" pitchFamily="34" charset="0"/>
+                <a:ea typeface="Calibri" pitchFamily="34" charset="-122"/>
+                <a:cs typeface="Calibri" pitchFamily="34" charset="-120"/>
+              </a:rPr>
+              <a:t> — talk through the same three steps from the deck.</a:t>
+            </a:r>
+            <a:endParaRPr lang="en-US" sz="1050" dirty="0"/>
+          </a:p>
+        </p:txBody>
+      </p:sp>
+      <p:sp>
+        <p:nvSpPr>
+          <p:cNvPr id="26" name="Shape 24"/>
+          <p:cNvSpPr/>
+          <p:nvPr/>
+        </p:nvSpPr>
+        <p:spPr>
+          <a:xfrm>
+            <a:off x="457200" y="4251960"/>
+            <a:ext cx="8229600" cy="384048"/>
+          </a:xfrm>
+          <a:prstGeom prst="rect">
+            <a:avLst/>
+          </a:prstGeom>
+          <a:solidFill>
+            <a:srgbClr val="0B2545"/>
+          </a:solidFill>
+          <a:ln/>
+        </p:spPr>
+      </p:sp>
+      <p:sp>
+        <p:nvSpPr>
+          <p:cNvPr id="27" name="Shape 25"/>
+          <p:cNvSpPr/>
+          <p:nvPr/>
+        </p:nvSpPr>
+        <p:spPr>
+          <a:xfrm>
+            <a:off x="457200" y="4251960"/>
+            <a:ext cx="54864" cy="384048"/>
           </a:xfrm>
           <a:prstGeom prst="rect">
             <a:avLst/>
@@ -3735,371 +4409,14 @@
       </p:sp>
       <p:sp>
         <p:nvSpPr>
-          <p:cNvPr id="20" name="Text 18"/>
-          <p:cNvSpPr/>
-          <p:nvPr/>
-        </p:nvSpPr>
-        <p:spPr>
-          <a:xfrm>
-            <a:off x="3502152" y="2788920"/>
-            <a:ext cx="2468880" cy="320040"/>
-          </a:xfrm>
-          <a:prstGeom prst="rect">
-            <a:avLst/>
-          </a:prstGeom>
-          <a:noFill/>
-          <a:ln/>
-        </p:spPr>
-        <p:txBody>
-          <a:bodyPr wrap="square" lIns="0" tIns="0" rIns="0" bIns="0" rtlCol="0" anchor="ctr"/>
-          <a:lstStyle/>
-          <a:p>
-            <a:pPr indent="0" marL="0">
-              <a:buNone/>
-            </a:pPr>
-            <a:r>
-              <a:rPr lang="en-US" sz="1400" b="1" dirty="0">
-                <a:solidFill>
-                  <a:srgbClr val="0B2545"/>
-                </a:solidFill>
-                <a:latin typeface="Georgia" pitchFamily="34" charset="0"/>
-                <a:ea typeface="Georgia" pitchFamily="34" charset="-122"/>
-                <a:cs typeface="Georgia" pitchFamily="34" charset="-120"/>
-              </a:rPr>
-              <a:t>Tab 2.   Season Simulator</a:t>
-            </a:r>
-            <a:endParaRPr lang="en-US" sz="1400" dirty="0"/>
-          </a:p>
-        </p:txBody>
-      </p:sp>
-      <p:sp>
-        <p:nvSpPr>
-          <p:cNvPr id="21" name="Text 19"/>
-          <p:cNvSpPr/>
-          <p:nvPr/>
-        </p:nvSpPr>
-        <p:spPr>
-          <a:xfrm>
-            <a:off x="3502152" y="3127248"/>
-            <a:ext cx="2468880" cy="731520"/>
-          </a:xfrm>
-          <a:prstGeom prst="rect">
-            <a:avLst/>
-          </a:prstGeom>
-          <a:noFill/>
-          <a:ln/>
-        </p:spPr>
-        <p:txBody>
-          <a:bodyPr wrap="square" lIns="0" tIns="0" rIns="0" bIns="0" rtlCol="0" anchor="ctr"/>
-          <a:lstStyle/>
-          <a:p>
-            <a:pPr indent="0" marL="0">
-              <a:lnSpc>
-                <a:spcPct val="125000"/>
-              </a:lnSpc>
-              <a:buNone/>
-            </a:pPr>
-            <a:r>
-              <a:rPr lang="en-US" sz="1100" dirty="0">
-                <a:solidFill>
-                  <a:srgbClr val="1F2933"/>
-                </a:solidFill>
-                <a:latin typeface="Calibri" pitchFamily="34" charset="0"/>
-                <a:ea typeface="Calibri" pitchFamily="34" charset="-122"/>
-                <a:cs typeface="Calibri" pitchFamily="34" charset="-120"/>
-              </a:rPr>
-              <a:t>10,000 Monte Carlo runs of the 2020-21 table; live histogram of each team's finishing rank.</a:t>
-            </a:r>
-            <a:endParaRPr lang="en-US" sz="1100" dirty="0"/>
-          </a:p>
-        </p:txBody>
-      </p:sp>
-      <p:sp>
-        <p:nvSpPr>
-          <p:cNvPr id="22" name="Shape 20"/>
-          <p:cNvSpPr/>
-          <p:nvPr/>
-        </p:nvSpPr>
-        <p:spPr>
-          <a:xfrm>
-            <a:off x="6217920" y="1371600"/>
-            <a:ext cx="2743200" cy="2560320"/>
-          </a:xfrm>
-          <a:prstGeom prst="rect">
-            <a:avLst/>
-          </a:prstGeom>
-          <a:solidFill>
-            <a:srgbClr val="FFFFFF"/>
-          </a:solidFill>
-          <a:ln w="9525">
-            <a:solidFill>
-              <a:srgbClr val="D7DEE5"/>
-            </a:solidFill>
-            <a:prstDash val="solid"/>
-          </a:ln>
-          <a:effectLst>
-            <a:outerShdw sx="100000" sy="100000" kx="0" ky="0" algn="bl" rotWithShape="0" blurRad="101600" dist="25400" dir="8100000">
-              <a:srgbClr val="000000">
-                <a:alpha val="10000"/>
-              </a:srgbClr>
-            </a:outerShdw>
-          </a:effectLst>
-        </p:spPr>
-      </p:sp>
-      <p:sp>
-        <p:nvSpPr>
-          <p:cNvPr id="23" name="Shape 21"/>
-          <p:cNvSpPr/>
-          <p:nvPr/>
-        </p:nvSpPr>
-        <p:spPr>
-          <a:xfrm>
-            <a:off x="6355080" y="1508760"/>
-            <a:ext cx="2468880" cy="1097280"/>
-          </a:xfrm>
-          <a:prstGeom prst="rect">
-            <a:avLst/>
-          </a:prstGeom>
-          <a:solidFill>
-            <a:srgbClr val="F5F7FA"/>
-          </a:solidFill>
-          <a:ln w="6350">
-            <a:solidFill>
-              <a:srgbClr val="D7DEE5"/>
-            </a:solidFill>
-            <a:prstDash val="solid"/>
-          </a:ln>
-        </p:spPr>
-      </p:sp>
-      <p:sp>
-        <p:nvSpPr>
-          <p:cNvPr id="24" name="Text 22"/>
-          <p:cNvSpPr/>
-          <p:nvPr/>
-        </p:nvSpPr>
-        <p:spPr>
-          <a:xfrm>
-            <a:off x="6355080" y="1874520"/>
-            <a:ext cx="2468880" cy="274320"/>
-          </a:xfrm>
-          <a:prstGeom prst="rect">
-            <a:avLst/>
-          </a:prstGeom>
-          <a:noFill/>
-          <a:ln/>
-        </p:spPr>
-        <p:txBody>
-          <a:bodyPr wrap="square" lIns="0" tIns="0" rIns="0" bIns="0" rtlCol="0" anchor="ctr"/>
-          <a:lstStyle/>
-          <a:p>
-            <a:pPr algn="ctr" indent="0" marL="0">
-              <a:buNone/>
-            </a:pPr>
-            <a:r>
-              <a:rPr lang="en-US" sz="1000" b="1" spc="300" kern="0" dirty="0">
-                <a:solidFill>
-                  <a:srgbClr val="7FB3D5"/>
-                </a:solidFill>
-                <a:latin typeface="Calibri" pitchFamily="34" charset="0"/>
-                <a:ea typeface="Calibri" pitchFamily="34" charset="-122"/>
-                <a:cs typeface="Calibri" pitchFamily="34" charset="-120"/>
-              </a:rPr>
-              <a:t>SCREENSHOT</a:t>
-            </a:r>
-            <a:endParaRPr lang="en-US" sz="1000" dirty="0"/>
-          </a:p>
-        </p:txBody>
-      </p:sp>
-      <p:sp>
-        <p:nvSpPr>
-          <p:cNvPr id="25" name="Text 23"/>
-          <p:cNvSpPr/>
-          <p:nvPr/>
-        </p:nvSpPr>
-        <p:spPr>
-          <a:xfrm>
-            <a:off x="6355080" y="2148840"/>
-            <a:ext cx="2468880" cy="228600"/>
-          </a:xfrm>
-          <a:prstGeom prst="rect">
-            <a:avLst/>
-          </a:prstGeom>
-          <a:noFill/>
-          <a:ln/>
-        </p:spPr>
-        <p:txBody>
-          <a:bodyPr wrap="square" lIns="0" tIns="0" rIns="0" bIns="0" rtlCol="0" anchor="ctr"/>
-          <a:lstStyle/>
-          <a:p>
-            <a:pPr algn="ctr" indent="0" marL="0">
-              <a:buNone/>
-            </a:pPr>
-            <a:r>
-              <a:rPr lang="en-US" sz="800" dirty="0">
-                <a:solidFill>
-                  <a:srgbClr val="5A6573"/>
-                </a:solidFill>
-                <a:latin typeface="Consolas" pitchFamily="34" charset="0"/>
-                <a:ea typeface="Consolas" pitchFamily="34" charset="-122"/>
-                <a:cs typeface="Consolas" pitchFamily="34" charset="-120"/>
-              </a:rPr>
-              <a:t>figures/demo_3_leaderboard.png</a:t>
-            </a:r>
-            <a:endParaRPr lang="en-US" sz="800" dirty="0"/>
-          </a:p>
-        </p:txBody>
-      </p:sp>
-      <p:sp>
-        <p:nvSpPr>
-          <p:cNvPr id="26" name="Shape 24"/>
-          <p:cNvSpPr/>
-          <p:nvPr/>
-        </p:nvSpPr>
-        <p:spPr>
-          <a:xfrm>
-            <a:off x="6217920" y="2743200"/>
-            <a:ext cx="54864" cy="1143000"/>
-          </a:xfrm>
-          <a:prstGeom prst="rect">
-            <a:avLst/>
-          </a:prstGeom>
-          <a:solidFill>
-            <a:srgbClr val="E07A5F"/>
-          </a:solidFill>
-          <a:ln/>
-        </p:spPr>
-      </p:sp>
-      <p:sp>
-        <p:nvSpPr>
-          <p:cNvPr id="27" name="Text 25"/>
-          <p:cNvSpPr/>
-          <p:nvPr/>
-        </p:nvSpPr>
-        <p:spPr>
-          <a:xfrm>
-            <a:off x="6382512" y="2788920"/>
-            <a:ext cx="2468880" cy="320040"/>
-          </a:xfrm>
-          <a:prstGeom prst="rect">
-            <a:avLst/>
-          </a:prstGeom>
-          <a:noFill/>
-          <a:ln/>
-        </p:spPr>
-        <p:txBody>
-          <a:bodyPr wrap="square" lIns="0" tIns="0" rIns="0" bIns="0" rtlCol="0" anchor="ctr"/>
-          <a:lstStyle/>
-          <a:p>
-            <a:pPr indent="0" marL="0">
-              <a:buNone/>
-            </a:pPr>
-            <a:r>
-              <a:rPr lang="en-US" sz="1400" b="1" dirty="0">
-                <a:solidFill>
-                  <a:srgbClr val="0B2545"/>
-                </a:solidFill>
-                <a:latin typeface="Georgia" pitchFamily="34" charset="0"/>
-                <a:ea typeface="Georgia" pitchFamily="34" charset="-122"/>
-                <a:cs typeface="Georgia" pitchFamily="34" charset="-120"/>
-              </a:rPr>
-              <a:t>Tab 3.   Leaderboard</a:t>
-            </a:r>
-            <a:endParaRPr lang="en-US" sz="1400" dirty="0"/>
-          </a:p>
-        </p:txBody>
-      </p:sp>
-      <p:sp>
-        <p:nvSpPr>
           <p:cNvPr id="28" name="Text 26"/>
           <p:cNvSpPr/>
           <p:nvPr/>
         </p:nvSpPr>
         <p:spPr>
           <a:xfrm>
-            <a:off x="6382512" y="3127248"/>
-            <a:ext cx="2468880" cy="731520"/>
-          </a:xfrm>
-          <a:prstGeom prst="rect">
-            <a:avLst/>
-          </a:prstGeom>
-          <a:noFill/>
-          <a:ln/>
-        </p:spPr>
-        <p:txBody>
-          <a:bodyPr wrap="square" lIns="0" tIns="0" rIns="0" bIns="0" rtlCol="0" anchor="ctr"/>
-          <a:lstStyle/>
-          <a:p>
-            <a:pPr indent="0" marL="0">
-              <a:lnSpc>
-                <a:spcPct val="125000"/>
-              </a:lnSpc>
-              <a:buNone/>
-            </a:pPr>
-            <a:r>
-              <a:rPr lang="en-US" sz="1100" dirty="0">
-                <a:solidFill>
-                  <a:srgbClr val="1F2933"/>
-                </a:solidFill>
-                <a:latin typeface="Calibri" pitchFamily="34" charset="0"/>
-                <a:ea typeface="Calibri" pitchFamily="34" charset="-122"/>
-                <a:cs typeface="Calibri" pitchFamily="34" charset="-120"/>
-              </a:rPr>
-              <a:t>Full evaluation: log-loss, Brier, calibration plot, confusion matrix per model.</a:t>
-            </a:r>
-            <a:endParaRPr lang="en-US" sz="1100" dirty="0"/>
-          </a:p>
-        </p:txBody>
-      </p:sp>
-      <p:sp>
-        <p:nvSpPr>
-          <p:cNvPr id="29" name="Shape 27"/>
-          <p:cNvSpPr/>
-          <p:nvPr/>
-        </p:nvSpPr>
-        <p:spPr>
-          <a:xfrm>
-            <a:off x="457200" y="4069080"/>
-            <a:ext cx="8229600" cy="457200"/>
-          </a:xfrm>
-          <a:prstGeom prst="rect">
-            <a:avLst/>
-          </a:prstGeom>
-          <a:solidFill>
-            <a:srgbClr val="0B2545"/>
-          </a:solidFill>
-          <a:ln/>
-        </p:spPr>
-      </p:sp>
-      <p:sp>
-        <p:nvSpPr>
-          <p:cNvPr id="30" name="Shape 28"/>
-          <p:cNvSpPr/>
-          <p:nvPr/>
-        </p:nvSpPr>
-        <p:spPr>
-          <a:xfrm>
-            <a:off x="457200" y="4069080"/>
-            <a:ext cx="54864" cy="457200"/>
-          </a:xfrm>
-          <a:prstGeom prst="rect">
-            <a:avLst/>
-          </a:prstGeom>
-          <a:solidFill>
-            <a:srgbClr val="E07A5F"/>
-          </a:solidFill>
-          <a:ln/>
-        </p:spPr>
-      </p:sp>
-      <p:sp>
-        <p:nvSpPr>
-          <p:cNvPr id="31" name="Text 29"/>
-          <p:cNvSpPr/>
-          <p:nvPr/>
-        </p:nvSpPr>
-        <p:spPr>
-          <a:xfrm>
-            <a:off x="640080" y="4069080"/>
-            <a:ext cx="7863840" cy="457200"/>
+            <a:off x="640080" y="4251960"/>
+            <a:ext cx="7863840" cy="384048"/>
           </a:xfrm>
           <a:prstGeom prst="rect">
             <a:avLst/>
@@ -4341,7 +4658,7 @@
         <p:spPr>
           <a:xfrm>
             <a:off x="457200" y="548640"/>
-            <a:ext cx="8229600" cy="594360"/>
+            <a:ext cx="8229600" cy="502920"/>
           </a:xfrm>
           <a:prstGeom prst="rect">
             <a:avLst/>
@@ -4354,10 +4671,13 @@
           <a:lstStyle/>
           <a:p>
             <a:pPr indent="0" marL="0">
-              <a:buNone/>
-            </a:pPr>
-            <a:r>
-              <a:rPr lang="en-US" sz="2800" b="1" dirty="0">
+              <a:lnSpc>
+                <a:spcPct val="105000"/>
+              </a:lnSpc>
+              <a:buNone/>
+            </a:pPr>
+            <a:r>
+              <a:rPr lang="en-US" sz="2400" b="1" dirty="0">
                 <a:solidFill>
                   <a:srgbClr val="0B2545"/>
                 </a:solidFill>
@@ -4365,9 +4685,9 @@
                 <a:ea typeface="Georgia" pitchFamily="34" charset="-122"/>
                 <a:cs typeface="Georgia" pitchFamily="34" charset="-120"/>
               </a:rPr>
-              <a:t>What we shipped, what's next, who did what</a:t>
-            </a:r>
-            <a:endParaRPr lang="en-US" sz="2800" dirty="0"/>
+              <a:t>What we shipped, what's next, who did what.</a:t>
+            </a:r>
+            <a:endParaRPr lang="en-US" sz="2400" dirty="0"/>
           </a:p>
         </p:txBody>
       </p:sp>
@@ -4380,7 +4700,7 @@
         <p:spPr>
           <a:xfrm>
             <a:off x="457200" y="1325880"/>
-            <a:ext cx="8229600" cy="1280160"/>
+            <a:ext cx="8229600" cy="1417320"/>
           </a:xfrm>
           <a:prstGeom prst="rect">
             <a:avLst/>
@@ -4400,7 +4720,7 @@
         <p:spPr>
           <a:xfrm>
             <a:off x="457200" y="1325880"/>
-            <a:ext cx="54864" cy="1280160"/>
+            <a:ext cx="54864" cy="1417320"/>
           </a:xfrm>
           <a:prstGeom prst="rect">
             <a:avLst/>
@@ -4419,8 +4739,8 @@
         </p:nvSpPr>
         <p:spPr>
           <a:xfrm>
-            <a:off x="594360" y="1417320"/>
-            <a:ext cx="914400" cy="274320"/>
+            <a:off x="640080" y="1417320"/>
+            <a:ext cx="2743200" cy="219456"/>
           </a:xfrm>
           <a:prstGeom prst="rect">
             <a:avLst/>
@@ -4444,7 +4764,7 @@
                 <a:ea typeface="Calibri" pitchFamily="34" charset="-122"/>
                 <a:cs typeface="Calibri" pitchFamily="34" charset="-120"/>
               </a:rPr>
-              <a:t>TL;DR</a:t>
+              <a:t>REMEMBER THIS ONE LINE</a:t>
             </a:r>
             <a:endParaRPr lang="en-US" sz="1000" dirty="0"/>
           </a:p>
@@ -4458,8 +4778,8 @@
         </p:nvSpPr>
         <p:spPr>
           <a:xfrm>
-            <a:off x="1554480" y="1371600"/>
-            <a:ext cx="6949440" cy="1188720"/>
+            <a:off x="640080" y="1691640"/>
+            <a:ext cx="7863840" cy="960120"/>
           </a:xfrm>
           <a:prstGeom prst="rect">
             <a:avLst/>
@@ -4468,17 +4788,17 @@
           <a:ln/>
         </p:spPr>
         <p:txBody>
-          <a:bodyPr wrap="square" lIns="0" tIns="0" rIns="0" bIns="0" rtlCol="0" anchor="ctr"/>
+          <a:bodyPr wrap="square" lIns="0" tIns="0" rIns="0" bIns="0" rtlCol="0" anchor="t"/>
           <a:lstStyle/>
           <a:p>
             <a:pPr indent="0" marL="0">
               <a:lnSpc>
-                <a:spcPct val="130000"/>
+                <a:spcPct val="120000"/>
               </a:lnSpc>
               <a:buNone/>
             </a:pPr>
             <a:r>
-              <a:rPr lang="en-US" sz="1250" i="1" dirty="0">
+              <a:rPr lang="en-US" sz="1500" b="1" dirty="0">
                 <a:solidFill>
                   <a:srgbClr val="FFFFFF"/>
                 </a:solidFill>
@@ -4486,9 +4806,9 @@
                 <a:ea typeface="Georgia" pitchFamily="34" charset="-122"/>
                 <a:cs typeface="Georgia" pitchFamily="34" charset="-120"/>
               </a:rPr>
-              <a:t>End-to-end ML on 7,890 self-collected matches. Six models, walk-forward CV, four interlinked targets, deployed Shiny app. Random Forest within 0.3pp accuracy of the bookmakers — but the bookmakers still win. The honest finding: the market is genuinely hard to beat, and that itself is the result.</a:t>
-            </a:r>
-            <a:endParaRPr lang="en-US" sz="1250" dirty="0"/>
+              <a:t>We built an end-to-end pipeline that gets within 0.02 log-loss of the bookmaker on the 2020-21 hold-out — and we know exactly why we don't beat them.</a:t>
+            </a:r>
+            <a:endParaRPr lang="en-US" sz="1500" dirty="0"/>
           </a:p>
         </p:txBody>
       </p:sp>
@@ -4500,8 +4820,8 @@
         </p:nvSpPr>
         <p:spPr>
           <a:xfrm>
-            <a:off x="457200" y="2697480"/>
-            <a:ext cx="4114800" cy="228600"/>
+            <a:off x="457200" y="2880360"/>
+            <a:ext cx="4114800" cy="219456"/>
           </a:xfrm>
           <a:prstGeom prst="rect">
             <a:avLst/>
@@ -4539,7 +4859,7 @@
         </p:nvSpPr>
         <p:spPr>
           <a:xfrm>
-            <a:off x="457200" y="2944368"/>
+            <a:off x="457200" y="3127248"/>
             <a:ext cx="4114800" cy="1097280"/>
           </a:xfrm>
           <a:prstGeom prst="rect">
@@ -4554,15 +4874,15 @@
           <a:p>
             <a:pPr indent="0" marL="0">
               <a:lnSpc>
-                <a:spcPct val="130000"/>
+                <a:spcPct val="125000"/>
               </a:lnSpc>
               <a:spcAft>
-                <a:spcPts val="600"/>
+                <a:spcPts val="300"/>
               </a:spcAft>
               <a:buNone/>
             </a:pPr>
             <a:r>
-              <a:rPr lang="en-US" sz="1150" b="1" dirty="0">
+              <a:rPr lang="en-US" sz="1050" b="1" dirty="0">
                 <a:solidFill>
                   <a:srgbClr val="1F2933"/>
                 </a:solidFill>
@@ -4574,15 +4894,15 @@
             </a:r>
             <a:pPr indent="0" marL="0">
               <a:lnSpc>
-                <a:spcPct val="130000"/>
+                <a:spcPct val="125000"/>
               </a:lnSpc>
               <a:spcAft>
-                <a:spcPts val="600"/>
+                <a:spcPts val="300"/>
               </a:spcAft>
               <a:buNone/>
             </a:pPr>
             <a:r>
-              <a:rPr lang="en-US" sz="1150" dirty="0">
+              <a:rPr lang="en-US" sz="1050" dirty="0">
                 <a:solidFill>
                   <a:srgbClr val="5A6573"/>
                 </a:solidFill>
@@ -4595,15 +4915,15 @@
             </a:r>
             <a:pPr indent="0" marL="0">
               <a:lnSpc>
-                <a:spcPct val="130000"/>
+                <a:spcPct val="125000"/>
               </a:lnSpc>
               <a:spcAft>
-                <a:spcPts val="600"/>
+                <a:spcPts val="300"/>
               </a:spcAft>
               <a:buNone/>
             </a:pPr>
             <a:r>
-              <a:rPr lang="en-US" sz="1150" b="1" dirty="0">
+              <a:rPr lang="en-US" sz="1050" b="1" dirty="0">
                 <a:solidFill>
                   <a:srgbClr val="1F2933"/>
                 </a:solidFill>
@@ -4615,15 +4935,15 @@
             </a:r>
             <a:pPr indent="0" marL="0">
               <a:lnSpc>
-                <a:spcPct val="130000"/>
+                <a:spcPct val="125000"/>
               </a:lnSpc>
               <a:spcAft>
-                <a:spcPts val="600"/>
+                <a:spcPts val="300"/>
               </a:spcAft>
               <a:buNone/>
             </a:pPr>
             <a:r>
-              <a:rPr lang="en-US" sz="1150" dirty="0">
+              <a:rPr lang="en-US" sz="1050" dirty="0">
                 <a:solidFill>
                   <a:srgbClr val="5A6573"/>
                 </a:solidFill>
@@ -4631,9 +4951,50 @@
                 <a:ea typeface="Calibri" pitchFamily="34" charset="-122"/>
                 <a:cs typeface="Calibri" pitchFamily="34" charset="-120"/>
               </a:rPr>
-              <a:t>Borrow strength across seasons; tighter cold-start for promoted clubs.</a:t>
-            </a:r>
-            <a:endParaRPr lang="en-US" sz="1150" dirty="0"/>
+              <a:t>Borrow strength across seasons; cold-start for promoted clubs.
+</a:t>
+            </a:r>
+            <a:pPr indent="0" marL="0">
+              <a:lnSpc>
+                <a:spcPct val="125000"/>
+              </a:lnSpc>
+              <a:spcAft>
+                <a:spcPts val="300"/>
+              </a:spcAft>
+              <a:buNone/>
+            </a:pPr>
+            <a:r>
+              <a:rPr lang="en-US" sz="1050" b="1" dirty="0">
+                <a:solidFill>
+                  <a:srgbClr val="1F2933"/>
+                </a:solidFill>
+                <a:latin typeface="Calibri" pitchFamily="34" charset="0"/>
+                <a:ea typeface="Calibri" pitchFamily="34" charset="-122"/>
+                <a:cs typeface="Calibri" pitchFamily="34" charset="-120"/>
+              </a:rPr>
+              <a:t>Stacked ensemble.   </a:t>
+            </a:r>
+            <a:pPr indent="0" marL="0">
+              <a:lnSpc>
+                <a:spcPct val="125000"/>
+              </a:lnSpc>
+              <a:spcAft>
+                <a:spcPts val="300"/>
+              </a:spcAft>
+              <a:buNone/>
+            </a:pPr>
+            <a:r>
+              <a:rPr lang="en-US" sz="1050" dirty="0">
+                <a:solidFill>
+                  <a:srgbClr val="5A6573"/>
+                </a:solidFill>
+                <a:latin typeface="Calibri" pitchFamily="34" charset="0"/>
+                <a:ea typeface="Calibri" pitchFamily="34" charset="-122"/>
+                <a:cs typeface="Calibri" pitchFamily="34" charset="-120"/>
+              </a:rPr>
+              <a:t>Blend RF + Dixon-Coles + market on a validation slice.</a:t>
+            </a:r>
+            <a:endParaRPr lang="en-US" sz="1050" dirty="0"/>
           </a:p>
         </p:txBody>
       </p:sp>
@@ -4645,8 +5006,8 @@
         </p:nvSpPr>
         <p:spPr>
           <a:xfrm>
-            <a:off x="4754880" y="2697480"/>
-            <a:ext cx="3931920" cy="228600"/>
+            <a:off x="4754880" y="2880360"/>
+            <a:ext cx="3931920" cy="219456"/>
           </a:xfrm>
           <a:prstGeom prst="rect">
             <a:avLst/>
@@ -4691,8 +5052,8 @@
           </p:nvPr>
         </p:nvGraphicFramePr>
         <p:xfrm>
-          <a:off x="4754880" y="2944368"/>
-          <a:ext cx="3931920" cy="1243584"/>
+          <a:off x="4754880" y="3127248"/>
+          <a:ext cx="3931920" cy="1060704"/>
         </p:xfrm>
         <a:graphic>
           <a:graphicData uri="http://schemas.openxmlformats.org/drawingml/2006/table">
@@ -4702,7 +5063,7 @@
                 <a:gridCol w="1280160"/>
                 <a:gridCol w="2651760"/>
               </a:tblGrid>
-              <a:tr h="292608">
+              <a:tr h="246888">
                 <a:tc>
                   <a:txBody>
                     <a:bodyPr/>
@@ -4840,7 +5201,7 @@
                   </a:tcPr>
                 </a:tc>
               </a:tr>
-              <a:tr h="292608">
+              <a:tr h="246888">
                 <a:tc>
                   <a:txBody>
                     <a:bodyPr/>
@@ -4850,7 +5211,7 @@
                         <a:buNone/>
                       </a:pPr>
                       <a:r>
-                        <a:rPr lang="en-US" sz="900" b="1" dirty="0">
+                        <a:rPr lang="en-US" sz="950" b="1" dirty="0">
                           <a:solidFill>
                             <a:srgbClr val="1F2933"/>
                           </a:solidFill>
@@ -4860,7 +5221,7 @@
                         </a:rPr>
                         <a:t>Zeming Liang</a:t>
                       </a:r>
-                      <a:endParaRPr lang="en-US" sz="900" dirty="0">
+                      <a:endParaRPr lang="en-US" sz="950" dirty="0">
                         <a:latin typeface="Calibri" charset="0"/>
                         <a:ea typeface="Calibri" charset="0"/>
                         <a:cs typeface="Calibri" charset="0"/>
@@ -4915,7 +5276,7 @@
                         <a:buNone/>
                       </a:pPr>
                       <a:r>
-                        <a:rPr lang="en-US" sz="900" dirty="0">
+                        <a:rPr lang="en-US" sz="950" dirty="0">
                           <a:solidFill>
                             <a:srgbClr val="1F2933"/>
                           </a:solidFill>
@@ -4925,7 +5286,7 @@
                         </a:rPr>
                         <a:t>Coordinator; scrapers, models, app, deploy.</a:t>
                       </a:r>
-                      <a:endParaRPr lang="en-US" sz="900" dirty="0">
+                      <a:endParaRPr lang="en-US" sz="950" dirty="0">
                         <a:latin typeface="Calibri" charset="0"/>
                         <a:ea typeface="Calibri" charset="0"/>
                         <a:cs typeface="Calibri" charset="0"/>
@@ -4972,7 +5333,7 @@
                   </a:tcPr>
                 </a:tc>
               </a:tr>
-              <a:tr h="292608">
+              <a:tr h="246888">
                 <a:tc>
                   <a:txBody>
                     <a:bodyPr/>
@@ -4982,7 +5343,7 @@
                         <a:buNone/>
                       </a:pPr>
                       <a:r>
-                        <a:rPr lang="en-US" sz="900" b="1" dirty="0">
+                        <a:rPr lang="en-US" sz="950" b="1" dirty="0">
                           <a:solidFill>
                             <a:srgbClr val="1F2933"/>
                           </a:solidFill>
@@ -4992,7 +5353,7 @@
                         </a:rPr>
                         <a:t>Xiying Chen</a:t>
                       </a:r>
-                      <a:endParaRPr lang="en-US" sz="900" dirty="0">
+                      <a:endParaRPr lang="en-US" sz="950" dirty="0">
                         <a:latin typeface="Calibri" charset="0"/>
                         <a:ea typeface="Calibri" charset="0"/>
                         <a:cs typeface="Calibri" charset="0"/>
@@ -5047,7 +5408,7 @@
                         <a:buNone/>
                       </a:pPr>
                       <a:r>
-                        <a:rPr lang="en-US" sz="900" dirty="0">
+                        <a:rPr lang="en-US" sz="950" dirty="0">
                           <a:solidFill>
                             <a:srgbClr val="1F2933"/>
                           </a:solidFill>
@@ -5057,7 +5418,7 @@
                         </a:rPr>
                         <a:t>EDA, unsupervised features, NLP, report.</a:t>
                       </a:r>
-                      <a:endParaRPr lang="en-US" sz="900" dirty="0">
+                      <a:endParaRPr lang="en-US" sz="950" dirty="0">
                         <a:latin typeface="Calibri" charset="0"/>
                         <a:ea typeface="Calibri" charset="0"/>
                         <a:cs typeface="Calibri" charset="0"/>
@@ -5104,7 +5465,7 @@
                   </a:tcPr>
                 </a:tc>
               </a:tr>
-              <a:tr h="292608">
+              <a:tr h="246888">
                 <a:tc>
                   <a:txBody>
                     <a:bodyPr/>
@@ -5114,7 +5475,7 @@
                         <a:buNone/>
                       </a:pPr>
                       <a:r>
-                        <a:rPr lang="en-US" sz="900" b="1" dirty="0">
+                        <a:rPr lang="en-US" sz="950" b="1" dirty="0">
                           <a:solidFill>
                             <a:srgbClr val="1F2933"/>
                           </a:solidFill>
@@ -5124,7 +5485,7 @@
                         </a:rPr>
                         <a:t>Collaborator</a:t>
                       </a:r>
-                      <a:endParaRPr lang="en-US" sz="900" dirty="0">
+                      <a:endParaRPr lang="en-US" sz="950" dirty="0">
                         <a:latin typeface="Calibri" charset="0"/>
                         <a:ea typeface="Calibri" charset="0"/>
                         <a:cs typeface="Calibri" charset="0"/>
@@ -5179,7 +5540,7 @@
                         <a:buNone/>
                       </a:pPr>
                       <a:r>
-                        <a:rPr lang="en-US" sz="900" dirty="0">
+                        <a:rPr lang="en-US" sz="950" dirty="0">
                           <a:solidFill>
                             <a:srgbClr val="1F2933"/>
                           </a:solidFill>
@@ -5189,7 +5550,7 @@
                         </a:rPr>
                         <a:t>{TODO: confirm contribution}</a:t>
                       </a:r>
-                      <a:endParaRPr lang="en-US" sz="900" dirty="0">
+                      <a:endParaRPr lang="en-US" sz="950" dirty="0">
                         <a:latin typeface="Calibri" charset="0"/>
                         <a:ea typeface="Calibri" charset="0"/>
                         <a:cs typeface="Calibri" charset="0"/>
@@ -5525,7 +5886,7 @@
         <p:spPr>
           <a:xfrm>
             <a:off x="457200" y="548640"/>
-            <a:ext cx="8229600" cy="594360"/>
+            <a:ext cx="8229600" cy="868680"/>
           </a:xfrm>
           <a:prstGeom prst="rect">
             <a:avLst/>
@@ -5538,10 +5899,13 @@
           <a:lstStyle/>
           <a:p>
             <a:pPr indent="0" marL="0">
-              <a:buNone/>
-            </a:pPr>
-            <a:r>
-              <a:rPr lang="en-US" sz="2800" b="1" dirty="0">
+              <a:lnSpc>
+                <a:spcPct val="105000"/>
+              </a:lnSpc>
+              <a:buNone/>
+            </a:pPr>
+            <a:r>
+              <a:rPr lang="en-US" sz="2400" b="1" dirty="0">
                 <a:solidFill>
                   <a:srgbClr val="0B2545"/>
                 </a:solidFill>
@@ -5549,9 +5913,9 @@
                 <a:ea typeface="Georgia" pitchFamily="34" charset="-122"/>
                 <a:cs typeface="Georgia" pitchFamily="34" charset="-120"/>
               </a:rPr>
-              <a:t>Can we predict the Premier League?</a:t>
-            </a:r>
-            <a:endParaRPr lang="en-US" sz="2800" dirty="0"/>
+              <a:t>We chase four interlinked targets — not one.</a:t>
+            </a:r>
+            <a:endParaRPr lang="en-US" sz="2400" dirty="0"/>
           </a:p>
         </p:txBody>
       </p:sp>
@@ -5563,8 +5927,8 @@
         </p:nvSpPr>
         <p:spPr>
           <a:xfrm>
-            <a:off x="457200" y="1417320"/>
-            <a:ext cx="4937760" cy="320040"/>
+            <a:off x="457200" y="1508760"/>
+            <a:ext cx="4937760" cy="292608"/>
           </a:xfrm>
           <a:prstGeom prst="rect">
             <a:avLst/>
@@ -5602,7 +5966,7 @@
         </p:nvSpPr>
         <p:spPr>
           <a:xfrm>
-            <a:off x="457200" y="1783080"/>
+            <a:off x="457200" y="1874520"/>
             <a:ext cx="4937760" cy="1417320"/>
           </a:xfrm>
           <a:prstGeom prst="rect">
@@ -5625,7 +5989,7 @@
               <a:buNone/>
             </a:pPr>
             <a:r>
-              <a:rPr lang="en-US" sz="1400" b="1" dirty="0">
+              <a:rPr lang="en-US" sz="1350" b="1" dirty="0">
                 <a:solidFill>
                   <a:srgbClr val="1F2933"/>
                 </a:solidFill>
@@ -5645,7 +6009,7 @@
               <a:buNone/>
             </a:pPr>
             <a:r>
-              <a:rPr lang="en-US" sz="1400" dirty="0">
+              <a:rPr lang="en-US" sz="1350" dirty="0">
                 <a:solidFill>
                   <a:srgbClr val="5A6573"/>
                 </a:solidFill>
@@ -5666,7 +6030,7 @@
               <a:buNone/>
             </a:pPr>
             <a:r>
-              <a:rPr lang="en-US" sz="1400" b="1" dirty="0">
+              <a:rPr lang="en-US" sz="1350" b="1" dirty="0">
                 <a:solidFill>
                   <a:srgbClr val="1F2933"/>
                 </a:solidFill>
@@ -5686,7 +6050,7 @@
               <a:buNone/>
             </a:pPr>
             <a:r>
-              <a:rPr lang="en-US" sz="1400" dirty="0">
+              <a:rPr lang="en-US" sz="1350" dirty="0">
                 <a:solidFill>
                   <a:srgbClr val="5A6573"/>
                 </a:solidFill>
@@ -5707,7 +6071,7 @@
               <a:buNone/>
             </a:pPr>
             <a:r>
-              <a:rPr lang="en-US" sz="1400" b="1" dirty="0">
+              <a:rPr lang="en-US" sz="1350" b="1" dirty="0">
                 <a:solidFill>
                   <a:srgbClr val="1F2933"/>
                 </a:solidFill>
@@ -5727,7 +6091,7 @@
               <a:buNone/>
             </a:pPr>
             <a:r>
-              <a:rPr lang="en-US" sz="1400" dirty="0">
+              <a:rPr lang="en-US" sz="1350" dirty="0">
                 <a:solidFill>
                   <a:srgbClr val="5A6573"/>
                 </a:solidFill>
@@ -5737,7 +6101,7 @@
               </a:rPr>
               <a:t>Sharps are the hardest baseline of all.</a:t>
             </a:r>
-            <a:endParaRPr lang="en-US" sz="1400" dirty="0"/>
+            <a:endParaRPr lang="en-US" sz="1350" dirty="0"/>
           </a:p>
         </p:txBody>
       </p:sp>
@@ -5749,7 +6113,7 @@
         </p:nvSpPr>
         <p:spPr>
           <a:xfrm>
-            <a:off x="457200" y="3337560"/>
+            <a:off x="457200" y="3383280"/>
             <a:ext cx="4937760" cy="274320"/>
           </a:xfrm>
           <a:prstGeom prst="rect">
@@ -5766,7 +6130,7 @@
               <a:buNone/>
             </a:pPr>
             <a:r>
-              <a:rPr lang="en-US" sz="1300" i="1" dirty="0">
+              <a:rPr lang="en-US" sz="1250" i="1" dirty="0">
                 <a:solidFill>
                   <a:srgbClr val="13315C"/>
                 </a:solidFill>
@@ -5774,9 +6138,9 @@
                 <a:ea typeface="Georgia" pitchFamily="34" charset="-122"/>
                 <a:cs typeface="Georgia" pitchFamily="34" charset="-120"/>
               </a:rPr>
-              <a:t>And we don't stop at one target.</a:t>
-            </a:r>
-            <a:endParaRPr lang="en-US" sz="1300" dirty="0"/>
+              <a:t>Same probabilistic engine, four different stress tests.</a:t>
+            </a:r>
+            <a:endParaRPr lang="en-US" sz="1250" dirty="0"/>
           </a:p>
         </p:txBody>
       </p:sp>
@@ -5788,8 +6152,8 @@
         </p:nvSpPr>
         <p:spPr>
           <a:xfrm>
-            <a:off x="5577840" y="1417320"/>
-            <a:ext cx="3108960" cy="777240"/>
+            <a:off x="5577840" y="1463040"/>
+            <a:ext cx="1508760" cy="1188720"/>
           </a:xfrm>
           <a:prstGeom prst="rect">
             <a:avLst/>
@@ -5820,8 +6184,8 @@
         </p:nvSpPr>
         <p:spPr>
           <a:xfrm>
-            <a:off x="5577840" y="1417320"/>
-            <a:ext cx="54864" cy="777240"/>
+            <a:off x="5577840" y="1463040"/>
+            <a:ext cx="1508760" cy="54864"/>
           </a:xfrm>
           <a:prstGeom prst="rect">
             <a:avLst/>
@@ -5840,8 +6204,8 @@
         </p:nvSpPr>
         <p:spPr>
           <a:xfrm>
-            <a:off x="5742432" y="1490472"/>
-            <a:ext cx="2880360" cy="274320"/>
+            <a:off x="5669280" y="1627632"/>
+            <a:ext cx="1325880" cy="365760"/>
           </a:xfrm>
           <a:prstGeom prst="rect">
             <a:avLst/>
@@ -5857,7 +6221,7 @@
               <a:buNone/>
             </a:pPr>
             <a:r>
-              <a:rPr lang="en-US" sz="1300" b="1" dirty="0">
+              <a:rPr lang="en-US" sz="1150" b="1" dirty="0">
                 <a:solidFill>
                   <a:srgbClr val="0B2545"/>
                 </a:solidFill>
@@ -5867,7 +6231,7 @@
               </a:rPr>
               <a:t>Match outcome</a:t>
             </a:r>
-            <a:endParaRPr lang="en-US" sz="1300" dirty="0"/>
+            <a:endParaRPr lang="en-US" sz="1150" dirty="0"/>
           </a:p>
         </p:txBody>
       </p:sp>
@@ -5879,8 +6243,8 @@
         </p:nvSpPr>
         <p:spPr>
           <a:xfrm>
-            <a:off x="5742432" y="1783080"/>
-            <a:ext cx="2880360" cy="365760"/>
+            <a:off x="5669280" y="2011680"/>
+            <a:ext cx="1325880" cy="594360"/>
           </a:xfrm>
           <a:prstGeom prst="rect">
             <a:avLst/>
@@ -5893,10 +6257,13 @@
           <a:lstStyle/>
           <a:p>
             <a:pPr indent="0" marL="0">
-              <a:buNone/>
-            </a:pPr>
-            <a:r>
-              <a:rPr lang="en-US" sz="1100" dirty="0">
+              <a:lnSpc>
+                <a:spcPct val="120000"/>
+              </a:lnSpc>
+              <a:buNone/>
+            </a:pPr>
+            <a:r>
+              <a:rPr lang="en-US" sz="950" dirty="0">
                 <a:solidFill>
                   <a:srgbClr val="5A6573"/>
                 </a:solidFill>
@@ -5906,7 +6273,7 @@
               </a:rPr>
               <a:t>Home / Draw / Away — 3-class probabilistic</a:t>
             </a:r>
-            <a:endParaRPr lang="en-US" sz="1100" dirty="0"/>
+            <a:endParaRPr lang="en-US" sz="950" dirty="0"/>
           </a:p>
         </p:txBody>
       </p:sp>
@@ -5918,8 +6285,8 @@
         </p:nvSpPr>
         <p:spPr>
           <a:xfrm>
-            <a:off x="5577840" y="2304288"/>
-            <a:ext cx="3108960" cy="777240"/>
+            <a:off x="7178040" y="1463040"/>
+            <a:ext cx="1508760" cy="1188720"/>
           </a:xfrm>
           <a:prstGeom prst="rect">
             <a:avLst/>
@@ -5950,8 +6317,8 @@
         </p:nvSpPr>
         <p:spPr>
           <a:xfrm>
-            <a:off x="5577840" y="2304288"/>
-            <a:ext cx="54864" cy="777240"/>
+            <a:off x="7178040" y="1463040"/>
+            <a:ext cx="1508760" cy="54864"/>
           </a:xfrm>
           <a:prstGeom prst="rect">
             <a:avLst/>
@@ -5970,8 +6337,8 @@
         </p:nvSpPr>
         <p:spPr>
           <a:xfrm>
-            <a:off x="5742432" y="2377440"/>
-            <a:ext cx="2880360" cy="274320"/>
+            <a:off x="7269480" y="1627632"/>
+            <a:ext cx="1325880" cy="365760"/>
           </a:xfrm>
           <a:prstGeom prst="rect">
             <a:avLst/>
@@ -5987,7 +6354,7 @@
               <a:buNone/>
             </a:pPr>
             <a:r>
-              <a:rPr lang="en-US" sz="1300" b="1" dirty="0">
+              <a:rPr lang="en-US" sz="1150" b="1" dirty="0">
                 <a:solidFill>
                   <a:srgbClr val="0B2545"/>
                 </a:solidFill>
@@ -5997,7 +6364,7 @@
               </a:rPr>
               <a:t>Exact score</a:t>
             </a:r>
-            <a:endParaRPr lang="en-US" sz="1300" dirty="0"/>
+            <a:endParaRPr lang="en-US" sz="1150" dirty="0"/>
           </a:p>
         </p:txBody>
       </p:sp>
@@ -6009,8 +6376,8 @@
         </p:nvSpPr>
         <p:spPr>
           <a:xfrm>
-            <a:off x="5742432" y="2670048"/>
-            <a:ext cx="2880360" cy="365760"/>
+            <a:off x="7269480" y="2011680"/>
+            <a:ext cx="1325880" cy="594360"/>
           </a:xfrm>
           <a:prstGeom prst="rect">
             <a:avLst/>
@@ -6023,10 +6390,13 @@
           <a:lstStyle/>
           <a:p>
             <a:pPr indent="0" marL="0">
-              <a:buNone/>
-            </a:pPr>
-            <a:r>
-              <a:rPr lang="en-US" sz="1100" dirty="0">
+              <a:lnSpc>
+                <a:spcPct val="120000"/>
+              </a:lnSpc>
+              <a:buNone/>
+            </a:pPr>
+            <a:r>
+              <a:rPr lang="en-US" sz="950" dirty="0">
                 <a:solidFill>
                   <a:srgbClr val="5A6573"/>
                 </a:solidFill>
@@ -6036,7 +6406,7 @@
               </a:rPr>
               <a:t>Bivariate Poisson via Dixon-Coles</a:t>
             </a:r>
-            <a:endParaRPr lang="en-US" sz="1100" dirty="0"/>
+            <a:endParaRPr lang="en-US" sz="950" dirty="0"/>
           </a:p>
         </p:txBody>
       </p:sp>
@@ -6048,8 +6418,8 @@
         </p:nvSpPr>
         <p:spPr>
           <a:xfrm>
-            <a:off x="5577840" y="3191256"/>
-            <a:ext cx="3108960" cy="777240"/>
+            <a:off x="5577840" y="2743200"/>
+            <a:ext cx="1508760" cy="1188720"/>
           </a:xfrm>
           <a:prstGeom prst="rect">
             <a:avLst/>
@@ -6080,8 +6450,8 @@
         </p:nvSpPr>
         <p:spPr>
           <a:xfrm>
-            <a:off x="5577840" y="3191256"/>
-            <a:ext cx="54864" cy="777240"/>
+            <a:off x="5577840" y="2743200"/>
+            <a:ext cx="1508760" cy="54864"/>
           </a:xfrm>
           <a:prstGeom prst="rect">
             <a:avLst/>
@@ -6100,8 +6470,8 @@
         </p:nvSpPr>
         <p:spPr>
           <a:xfrm>
-            <a:off x="5742432" y="3264408"/>
-            <a:ext cx="2880360" cy="274320"/>
+            <a:off x="5669280" y="2907792"/>
+            <a:ext cx="1325880" cy="365760"/>
           </a:xfrm>
           <a:prstGeom prst="rect">
             <a:avLst/>
@@ -6117,7 +6487,7 @@
               <a:buNone/>
             </a:pPr>
             <a:r>
-              <a:rPr lang="en-US" sz="1300" b="1" dirty="0">
+              <a:rPr lang="en-US" sz="1150" b="1" dirty="0">
                 <a:solidFill>
                   <a:srgbClr val="0B2545"/>
                 </a:solidFill>
@@ -6127,7 +6497,7 @@
               </a:rPr>
               <a:t>Final standings</a:t>
             </a:r>
-            <a:endParaRPr lang="en-US" sz="1300" dirty="0"/>
+            <a:endParaRPr lang="en-US" sz="1150" dirty="0"/>
           </a:p>
         </p:txBody>
       </p:sp>
@@ -6139,8 +6509,8 @@
         </p:nvSpPr>
         <p:spPr>
           <a:xfrm>
-            <a:off x="5742432" y="3557016"/>
-            <a:ext cx="2880360" cy="365760"/>
+            <a:off x="5669280" y="3291840"/>
+            <a:ext cx="1325880" cy="594360"/>
           </a:xfrm>
           <a:prstGeom prst="rect">
             <a:avLst/>
@@ -6153,10 +6523,13 @@
           <a:lstStyle/>
           <a:p>
             <a:pPr indent="0" marL="0">
-              <a:buNone/>
-            </a:pPr>
-            <a:r>
-              <a:rPr lang="en-US" sz="1100" dirty="0">
+              <a:lnSpc>
+                <a:spcPct val="120000"/>
+              </a:lnSpc>
+              <a:buNone/>
+            </a:pPr>
+            <a:r>
+              <a:rPr lang="en-US" sz="950" dirty="0">
                 <a:solidFill>
                   <a:srgbClr val="5A6573"/>
                 </a:solidFill>
@@ -6166,7 +6539,7 @@
               </a:rPr>
               <a:t>Monte Carlo simulation, 10k iterations</a:t>
             </a:r>
-            <a:endParaRPr lang="en-US" sz="1100" dirty="0"/>
+            <a:endParaRPr lang="en-US" sz="950" dirty="0"/>
           </a:p>
         </p:txBody>
       </p:sp>
@@ -6178,8 +6551,8 @@
         </p:nvSpPr>
         <p:spPr>
           <a:xfrm>
-            <a:off x="5577840" y="4078224"/>
-            <a:ext cx="3108960" cy="777240"/>
+            <a:off x="7178040" y="2743200"/>
+            <a:ext cx="1508760" cy="1188720"/>
           </a:xfrm>
           <a:prstGeom prst="rect">
             <a:avLst/>
@@ -6210,8 +6583,8 @@
         </p:nvSpPr>
         <p:spPr>
           <a:xfrm>
-            <a:off x="5577840" y="4078224"/>
-            <a:ext cx="54864" cy="777240"/>
+            <a:off x="7178040" y="2743200"/>
+            <a:ext cx="1508760" cy="54864"/>
           </a:xfrm>
           <a:prstGeom prst="rect">
             <a:avLst/>
@@ -6230,8 +6603,8 @@
         </p:nvSpPr>
         <p:spPr>
           <a:xfrm>
-            <a:off x="5742432" y="4151376"/>
-            <a:ext cx="2880360" cy="274320"/>
+            <a:off x="7269480" y="2907792"/>
+            <a:ext cx="1325880" cy="365760"/>
           </a:xfrm>
           <a:prstGeom prst="rect">
             <a:avLst/>
@@ -6247,7 +6620,7 @@
               <a:buNone/>
             </a:pPr>
             <a:r>
-              <a:rPr lang="en-US" sz="1300" b="1" dirty="0">
+              <a:rPr lang="en-US" sz="1150" b="1" dirty="0">
                 <a:solidFill>
                   <a:srgbClr val="0B2545"/>
                 </a:solidFill>
@@ -6257,7 +6630,7 @@
               </a:rPr>
               <a:t>Beat the bookmaker</a:t>
             </a:r>
-            <a:endParaRPr lang="en-US" sz="1300" dirty="0"/>
+            <a:endParaRPr lang="en-US" sz="1150" dirty="0"/>
           </a:p>
         </p:txBody>
       </p:sp>
@@ -6269,8 +6642,8 @@
         </p:nvSpPr>
         <p:spPr>
           <a:xfrm>
-            <a:off x="5742432" y="4443984"/>
-            <a:ext cx="2880360" cy="365760"/>
+            <a:off x="7269480" y="3291840"/>
+            <a:ext cx="1325880" cy="594360"/>
           </a:xfrm>
           <a:prstGeom prst="rect">
             <a:avLst/>
@@ -6283,10 +6656,13 @@
           <a:lstStyle/>
           <a:p>
             <a:pPr indent="0" marL="0">
-              <a:buNone/>
-            </a:pPr>
-            <a:r>
-              <a:rPr lang="en-US" sz="1100" dirty="0">
+              <a:lnSpc>
+                <a:spcPct val="120000"/>
+              </a:lnSpc>
+              <a:buNone/>
+            </a:pPr>
+            <a:r>
+              <a:rPr lang="en-US" sz="950" dirty="0">
                 <a:solidFill>
                   <a:srgbClr val="5A6573"/>
                 </a:solidFill>
@@ -6295,6 +6671,166 @@
                 <a:cs typeface="Calibri" pitchFamily="34" charset="-120"/>
               </a:rPr>
               <a:t>Kelly-fractional ROI vs Pinnacle close</a:t>
+            </a:r>
+            <a:endParaRPr lang="en-US" sz="950" dirty="0"/>
+          </a:p>
+        </p:txBody>
+      </p:sp>
+      <p:sp>
+        <p:nvSpPr>
+          <p:cNvPr id="27" name="Text 25"/>
+          <p:cNvSpPr/>
+          <p:nvPr/>
+        </p:nvSpPr>
+        <p:spPr>
+          <a:xfrm>
+            <a:off x="5577840" y="1188720"/>
+            <a:ext cx="3108960" cy="237744"/>
+          </a:xfrm>
+          <a:prstGeom prst="rect">
+            <a:avLst/>
+          </a:prstGeom>
+          <a:noFill/>
+          <a:ln/>
+        </p:spPr>
+        <p:txBody>
+          <a:bodyPr wrap="square" lIns="0" tIns="0" rIns="0" bIns="0" rtlCol="0" anchor="ctr"/>
+          <a:lstStyle/>
+          <a:p>
+            <a:pPr indent="0" marL="0">
+              <a:buNone/>
+            </a:pPr>
+            <a:r>
+              <a:rPr lang="en-US" sz="1000" b="1" spc="400" kern="0" dirty="0">
+                <a:solidFill>
+                  <a:srgbClr val="13315C"/>
+                </a:solidFill>
+                <a:latin typeface="Calibri" pitchFamily="34" charset="0"/>
+                <a:ea typeface="Calibri" pitchFamily="34" charset="-122"/>
+                <a:cs typeface="Calibri" pitchFamily="34" charset="-120"/>
+              </a:rPr>
+              <a:t>FOUR TARGETS</a:t>
+            </a:r>
+            <a:endParaRPr lang="en-US" sz="1000" dirty="0"/>
+          </a:p>
+        </p:txBody>
+      </p:sp>
+      <p:sp>
+        <p:nvSpPr>
+          <p:cNvPr id="28" name="Shape 26"/>
+          <p:cNvSpPr/>
+          <p:nvPr/>
+        </p:nvSpPr>
+        <p:spPr>
+          <a:xfrm>
+            <a:off x="457200" y="4114800"/>
+            <a:ext cx="8229600" cy="566928"/>
+          </a:xfrm>
+          <a:prstGeom prst="rect">
+            <a:avLst/>
+          </a:prstGeom>
+          <a:solidFill>
+            <a:srgbClr val="0B2545"/>
+          </a:solidFill>
+          <a:ln/>
+        </p:spPr>
+      </p:sp>
+      <p:sp>
+        <p:nvSpPr>
+          <p:cNvPr id="29" name="Shape 27"/>
+          <p:cNvSpPr/>
+          <p:nvPr/>
+        </p:nvSpPr>
+        <p:spPr>
+          <a:xfrm>
+            <a:off x="457200" y="4114800"/>
+            <a:ext cx="54864" cy="566928"/>
+          </a:xfrm>
+          <a:prstGeom prst="rect">
+            <a:avLst/>
+          </a:prstGeom>
+          <a:solidFill>
+            <a:srgbClr val="E07A5F"/>
+          </a:solidFill>
+          <a:ln/>
+        </p:spPr>
+      </p:sp>
+      <p:sp>
+        <p:nvSpPr>
+          <p:cNvPr id="30" name="Text 28"/>
+          <p:cNvSpPr/>
+          <p:nvPr/>
+        </p:nvSpPr>
+        <p:spPr>
+          <a:xfrm>
+            <a:off x="640080" y="4114800"/>
+            <a:ext cx="1691640" cy="566928"/>
+          </a:xfrm>
+          <a:prstGeom prst="rect">
+            <a:avLst/>
+          </a:prstGeom>
+          <a:noFill/>
+          <a:ln/>
+        </p:spPr>
+        <p:txBody>
+          <a:bodyPr wrap="square" lIns="0" tIns="0" rIns="0" bIns="0" rtlCol="0" anchor="ctr"/>
+          <a:lstStyle/>
+          <a:p>
+            <a:pPr indent="0" marL="0">
+              <a:buNone/>
+            </a:pPr>
+            <a:r>
+              <a:rPr lang="en-US" sz="900" b="1" spc="400" kern="0" dirty="0">
+                <a:solidFill>
+                  <a:srgbClr val="B9D9EB"/>
+                </a:solidFill>
+                <a:latin typeface="Calibri" pitchFamily="34" charset="0"/>
+                <a:ea typeface="Calibri" pitchFamily="34" charset="-122"/>
+                <a:cs typeface="Calibri" pitchFamily="34" charset="-120"/>
+              </a:rPr>
+              <a:t>WHY FOUR</a:t>
+            </a:r>
+            <a:endParaRPr lang="en-US" sz="900" dirty="0"/>
+          </a:p>
+        </p:txBody>
+      </p:sp>
+      <p:sp>
+        <p:nvSpPr>
+          <p:cNvPr id="31" name="Text 29"/>
+          <p:cNvSpPr/>
+          <p:nvPr/>
+        </p:nvSpPr>
+        <p:spPr>
+          <a:xfrm>
+            <a:off x="2423160" y="4151376"/>
+            <a:ext cx="6217920" cy="493776"/>
+          </a:xfrm>
+          <a:prstGeom prst="rect">
+            <a:avLst/>
+          </a:prstGeom>
+          <a:noFill/>
+          <a:ln/>
+        </p:spPr>
+        <p:txBody>
+          <a:bodyPr wrap="square" lIns="0" tIns="0" rIns="0" bIns="0" rtlCol="0" anchor="ctr"/>
+          <a:lstStyle/>
+          <a:p>
+            <a:pPr indent="0" marL="0">
+              <a:lnSpc>
+                <a:spcPct val="118000"/>
+              </a:lnSpc>
+              <a:buNone/>
+            </a:pPr>
+            <a:r>
+              <a:rPr lang="en-US" sz="1100" i="1" dirty="0">
+                <a:solidFill>
+                  <a:srgbClr val="FFFFFF"/>
+                </a:solidFill>
+                <a:latin typeface="Calibri" pitchFamily="34" charset="0"/>
+                <a:ea typeface="Calibri" pitchFamily="34" charset="-122"/>
+                <a:cs typeface="Calibri" pitchFamily="34" charset="-120"/>
+              </a:rPr>
+              <a:t>A single per-match probability vector powers every target — getting it right pays off four times over.</a:t>
             </a:r>
             <a:endParaRPr lang="en-US" sz="1100" dirty="0"/>
           </a:p>
@@ -6498,7 +7034,7 @@
         <p:spPr>
           <a:xfrm>
             <a:off x="457200" y="548640"/>
-            <a:ext cx="8229600" cy="594360"/>
+            <a:ext cx="8229600" cy="868680"/>
           </a:xfrm>
           <a:prstGeom prst="rect">
             <a:avLst/>
@@ -6511,10 +7047,13 @@
           <a:lstStyle/>
           <a:p>
             <a:pPr indent="0" marL="0">
-              <a:buNone/>
-            </a:pPr>
-            <a:r>
-              <a:rPr lang="en-US" sz="2800" b="1" dirty="0">
+              <a:lnSpc>
+                <a:spcPct val="105000"/>
+              </a:lnSpc>
+              <a:buNone/>
+            </a:pPr>
+            <a:r>
+              <a:rPr lang="en-US" sz="2400" b="1" dirty="0">
                 <a:solidFill>
                   <a:srgbClr val="0B2545"/>
                 </a:solidFill>
@@ -6522,9 +7061,9 @@
                 <a:ea typeface="Georgia" pitchFamily="34" charset="-122"/>
                 <a:cs typeface="Georgia" pitchFamily="34" charset="-120"/>
               </a:rPr>
-              <a:t>Why football is genuinely hard</a:t>
-            </a:r>
-            <a:endParaRPr lang="en-US" sz="2800" dirty="0"/>
+              <a:t>Football is genuinely hard — and 2020-21 is the worst-case test set.</a:t>
+            </a:r>
+            <a:endParaRPr lang="en-US" sz="2400" dirty="0"/>
           </a:p>
         </p:txBody>
       </p:sp>
@@ -6536,8 +7075,8 @@
         </p:nvSpPr>
         <p:spPr>
           <a:xfrm>
-            <a:off x="457200" y="1371600"/>
-            <a:ext cx="4114800" cy="1371600"/>
+            <a:off x="457200" y="1417320"/>
+            <a:ext cx="4114800" cy="1005840"/>
           </a:xfrm>
           <a:prstGeom prst="rect">
             <a:avLst/>
@@ -6568,8 +7107,8 @@
         </p:nvSpPr>
         <p:spPr>
           <a:xfrm>
-            <a:off x="457200" y="1371600"/>
-            <a:ext cx="54864" cy="1371600"/>
+            <a:off x="457200" y="1417320"/>
+            <a:ext cx="54864" cy="1005840"/>
           </a:xfrm>
           <a:prstGeom prst="rect">
             <a:avLst/>
@@ -6588,8 +7127,8 @@
         </p:nvSpPr>
         <p:spPr>
           <a:xfrm>
-            <a:off x="640080" y="1536192"/>
-            <a:ext cx="3840480" cy="365760"/>
+            <a:off x="640080" y="1508760"/>
+            <a:ext cx="3840480" cy="310896"/>
           </a:xfrm>
           <a:prstGeom prst="rect">
             <a:avLst/>
@@ -6605,7 +7144,7 @@
               <a:buNone/>
             </a:pPr>
             <a:r>
-              <a:rPr lang="en-US" sz="1800" b="1" dirty="0">
+              <a:rPr lang="en-US" sz="1600" b="1" dirty="0">
                 <a:solidFill>
                   <a:srgbClr val="0B2545"/>
                 </a:solidFill>
@@ -6615,7 +7154,7 @@
               </a:rPr>
               <a:t>Tiny data</a:t>
             </a:r>
-            <a:endParaRPr lang="en-US" sz="1800" dirty="0"/>
+            <a:endParaRPr lang="en-US" sz="1600" dirty="0"/>
           </a:p>
         </p:txBody>
       </p:sp>
@@ -6627,8 +7166,8 @@
         </p:nvSpPr>
         <p:spPr>
           <a:xfrm>
-            <a:off x="640080" y="1965960"/>
-            <a:ext cx="3840480" cy="685800"/>
+            <a:off x="640080" y="1837944"/>
+            <a:ext cx="3840480" cy="530352"/>
           </a:xfrm>
           <a:prstGeom prst="rect">
             <a:avLst/>
@@ -6642,12 +7181,12 @@
           <a:p>
             <a:pPr indent="0" marL="0">
               <a:lnSpc>
-                <a:spcPct val="125000"/>
+                <a:spcPct val="120000"/>
               </a:lnSpc>
               <a:buNone/>
             </a:pPr>
             <a:r>
-              <a:rPr lang="en-US" sz="1200" dirty="0">
+              <a:rPr lang="en-US" sz="1050" dirty="0">
                 <a:solidFill>
                   <a:srgbClr val="1F2933"/>
                 </a:solidFill>
@@ -6655,9 +7194,9 @@
                 <a:ea typeface="Calibri" pitchFamily="34" charset="-122"/>
                 <a:cs typeface="Calibri" pitchFamily="34" charset="-120"/>
               </a:rPr>
-              <a:t>380 matches per season. Twenty-one seasons gives only ~7,890 rows — small for tabular ML.</a:t>
-            </a:r>
-            <a:endParaRPr lang="en-US" sz="1200" dirty="0"/>
+              <a:t>380 matches per season × 21 seasons = ~7,890 rows. Small for tabular ML.</a:t>
+            </a:r>
+            <a:endParaRPr lang="en-US" sz="1050" dirty="0"/>
           </a:p>
         </p:txBody>
       </p:sp>
@@ -6669,8 +7208,8 @@
         </p:nvSpPr>
         <p:spPr>
           <a:xfrm>
-            <a:off x="4754880" y="1371600"/>
-            <a:ext cx="4114800" cy="1371600"/>
+            <a:off x="4754880" y="1417320"/>
+            <a:ext cx="4114800" cy="1005840"/>
           </a:xfrm>
           <a:prstGeom prst="rect">
             <a:avLst/>
@@ -6701,8 +7240,8 @@
         </p:nvSpPr>
         <p:spPr>
           <a:xfrm>
-            <a:off x="4754880" y="1371600"/>
-            <a:ext cx="54864" cy="1371600"/>
+            <a:off x="4754880" y="1417320"/>
+            <a:ext cx="54864" cy="1005840"/>
           </a:xfrm>
           <a:prstGeom prst="rect">
             <a:avLst/>
@@ -6721,8 +7260,8 @@
         </p:nvSpPr>
         <p:spPr>
           <a:xfrm>
-            <a:off x="4937760" y="1536192"/>
-            <a:ext cx="3840480" cy="365760"/>
+            <a:off x="4937760" y="1508760"/>
+            <a:ext cx="3840480" cy="310896"/>
           </a:xfrm>
           <a:prstGeom prst="rect">
             <a:avLst/>
@@ -6738,7 +7277,7 @@
               <a:buNone/>
             </a:pPr>
             <a:r>
-              <a:rPr lang="en-US" sz="1800" b="1" dirty="0">
+              <a:rPr lang="en-US" sz="1600" b="1" dirty="0">
                 <a:solidFill>
                   <a:srgbClr val="0B2545"/>
                 </a:solidFill>
@@ -6748,7 +7287,7 @@
               </a:rPr>
               <a:t>High variance</a:t>
             </a:r>
-            <a:endParaRPr lang="en-US" sz="1800" dirty="0"/>
+            <a:endParaRPr lang="en-US" sz="1600" dirty="0"/>
           </a:p>
         </p:txBody>
       </p:sp>
@@ -6760,8 +7299,8 @@
         </p:nvSpPr>
         <p:spPr>
           <a:xfrm>
-            <a:off x="4937760" y="1965960"/>
-            <a:ext cx="3840480" cy="685800"/>
+            <a:off x="4937760" y="1837944"/>
+            <a:ext cx="3840480" cy="530352"/>
           </a:xfrm>
           <a:prstGeom prst="rect">
             <a:avLst/>
@@ -6775,12 +7314,12 @@
           <a:p>
             <a:pPr indent="0" marL="0">
               <a:lnSpc>
-                <a:spcPct val="125000"/>
+                <a:spcPct val="120000"/>
               </a:lnSpc>
               <a:buNone/>
             </a:pPr>
             <a:r>
-              <a:rPr lang="en-US" sz="1200" dirty="0">
+              <a:rPr lang="en-US" sz="1050" dirty="0">
                 <a:solidFill>
                   <a:srgbClr val="1F2933"/>
                 </a:solidFill>
@@ -6788,9 +7327,9 @@
                 <a:ea typeface="Calibri" pitchFamily="34" charset="-122"/>
                 <a:cs typeface="Calibri" pitchFamily="34" charset="-120"/>
               </a:rPr>
-              <a:t>One deflected goal can flip an outcome. Match-level noise is huge relative to signal.</a:t>
-            </a:r>
-            <a:endParaRPr lang="en-US" sz="1200" dirty="0"/>
+              <a:t>One deflected goal flips an outcome. Match-level noise rivals the signal.</a:t>
+            </a:r>
+            <a:endParaRPr lang="en-US" sz="1050" dirty="0"/>
           </a:p>
         </p:txBody>
       </p:sp>
@@ -6802,8 +7341,8 @@
         </p:nvSpPr>
         <p:spPr>
           <a:xfrm>
-            <a:off x="457200" y="2926080"/>
-            <a:ext cx="4114800" cy="1371600"/>
+            <a:off x="457200" y="2569464"/>
+            <a:ext cx="4114800" cy="1005840"/>
           </a:xfrm>
           <a:prstGeom prst="rect">
             <a:avLst/>
@@ -6834,8 +7373,8 @@
         </p:nvSpPr>
         <p:spPr>
           <a:xfrm>
-            <a:off x="457200" y="2926080"/>
-            <a:ext cx="54864" cy="1371600"/>
+            <a:off x="457200" y="2569464"/>
+            <a:ext cx="54864" cy="1005840"/>
           </a:xfrm>
           <a:prstGeom prst="rect">
             <a:avLst/>
@@ -6854,8 +7393,8 @@
         </p:nvSpPr>
         <p:spPr>
           <a:xfrm>
-            <a:off x="640080" y="3090672"/>
-            <a:ext cx="3840480" cy="365760"/>
+            <a:off x="640080" y="2660904"/>
+            <a:ext cx="3840480" cy="310896"/>
           </a:xfrm>
           <a:prstGeom prst="rect">
             <a:avLst/>
@@ -6871,7 +7410,7 @@
               <a:buNone/>
             </a:pPr>
             <a:r>
-              <a:rPr lang="en-US" sz="1800" b="1" dirty="0">
+              <a:rPr lang="en-US" sz="1600" b="1" dirty="0">
                 <a:solidFill>
                   <a:srgbClr val="0B2545"/>
                 </a:solidFill>
@@ -6881,7 +7420,7 @@
               </a:rPr>
               <a:t>Sharp bookmakers</a:t>
             </a:r>
-            <a:endParaRPr lang="en-US" sz="1800" dirty="0"/>
+            <a:endParaRPr lang="en-US" sz="1600" dirty="0"/>
           </a:p>
         </p:txBody>
       </p:sp>
@@ -6893,8 +7432,8 @@
         </p:nvSpPr>
         <p:spPr>
           <a:xfrm>
-            <a:off x="640080" y="3520440"/>
-            <a:ext cx="3840480" cy="685800"/>
+            <a:off x="640080" y="2990088"/>
+            <a:ext cx="3840480" cy="530352"/>
           </a:xfrm>
           <a:prstGeom prst="rect">
             <a:avLst/>
@@ -6908,12 +7447,12 @@
           <a:p>
             <a:pPr indent="0" marL="0">
               <a:lnSpc>
-                <a:spcPct val="125000"/>
+                <a:spcPct val="120000"/>
               </a:lnSpc>
               <a:buNone/>
             </a:pPr>
             <a:r>
-              <a:rPr lang="en-US" sz="1200" dirty="0">
+              <a:rPr lang="en-US" sz="1050" dirty="0">
                 <a:solidFill>
                   <a:srgbClr val="1F2933"/>
                 </a:solidFill>
@@ -6921,9 +7460,9 @@
                 <a:ea typeface="Calibri" pitchFamily="34" charset="-122"/>
                 <a:cs typeface="Calibri" pitchFamily="34" charset="-120"/>
               </a:rPr>
-              <a:t>Pinnacle's closing odds are the consensus of the most-informed actors with skin in the game.</a:t>
-            </a:r>
-            <a:endParaRPr lang="en-US" sz="1200" dirty="0"/>
+              <a:t>Pinnacle's closing odds aggregate the smartest bets in the world.</a:t>
+            </a:r>
+            <a:endParaRPr lang="en-US" sz="1050" dirty="0"/>
           </a:p>
         </p:txBody>
       </p:sp>
@@ -6935,8 +7474,8 @@
         </p:nvSpPr>
         <p:spPr>
           <a:xfrm>
-            <a:off x="4754880" y="2926080"/>
-            <a:ext cx="4114800" cy="1371600"/>
+            <a:off x="4754880" y="2569464"/>
+            <a:ext cx="4114800" cy="1005840"/>
           </a:xfrm>
           <a:prstGeom prst="rect">
             <a:avLst/>
@@ -6967,8 +7506,8 @@
         </p:nvSpPr>
         <p:spPr>
           <a:xfrm>
-            <a:off x="4754880" y="2926080"/>
-            <a:ext cx="54864" cy="1371600"/>
+            <a:off x="4754880" y="2569464"/>
+            <a:ext cx="54864" cy="1005840"/>
           </a:xfrm>
           <a:prstGeom prst="rect">
             <a:avLst/>
@@ -6987,8 +7526,8 @@
         </p:nvSpPr>
         <p:spPr>
           <a:xfrm>
-            <a:off x="4937760" y="3090672"/>
-            <a:ext cx="3840480" cy="365760"/>
+            <a:off x="4937760" y="2660904"/>
+            <a:ext cx="3840480" cy="310896"/>
           </a:xfrm>
           <a:prstGeom prst="rect">
             <a:avLst/>
@@ -7004,7 +7543,7 @@
               <a:buNone/>
             </a:pPr>
             <a:r>
-              <a:rPr lang="en-US" sz="1800" b="1" dirty="0">
+              <a:rPr lang="en-US" sz="1600" b="1" dirty="0">
                 <a:solidFill>
                   <a:srgbClr val="0B2545"/>
                 </a:solidFill>
@@ -7014,7 +7553,7 @@
               </a:rPr>
               <a:t>Distribution shift</a:t>
             </a:r>
-            <a:endParaRPr lang="en-US" sz="1800" dirty="0"/>
+            <a:endParaRPr lang="en-US" sz="1600" dirty="0"/>
           </a:p>
         </p:txBody>
       </p:sp>
@@ -7026,8 +7565,8 @@
         </p:nvSpPr>
         <p:spPr>
           <a:xfrm>
-            <a:off x="4937760" y="3520440"/>
-            <a:ext cx="3840480" cy="685800"/>
+            <a:off x="4937760" y="2990088"/>
+            <a:ext cx="3840480" cy="530352"/>
           </a:xfrm>
           <a:prstGeom prst="rect">
             <a:avLst/>
@@ -7041,12 +7580,12 @@
           <a:p>
             <a:pPr indent="0" marL="0">
               <a:lnSpc>
-                <a:spcPct val="125000"/>
+                <a:spcPct val="120000"/>
               </a:lnSpc>
               <a:buNone/>
             </a:pPr>
             <a:r>
-              <a:rPr lang="en-US" sz="1200" dirty="0">
+              <a:rPr lang="en-US" sz="1050" dirty="0">
                 <a:solidFill>
                   <a:srgbClr val="1F2933"/>
                 </a:solidFill>
@@ -7054,9 +7593,9 @@
                 <a:ea typeface="Calibri" pitchFamily="34" charset="-122"/>
                 <a:cs typeface="Calibri" pitchFamily="34" charset="-120"/>
               </a:rPr>
-              <a:t>Covid 2020-21 played behind closed doors. Home-win rate dropped from ≈46% to ≈36%.</a:t>
-            </a:r>
-            <a:endParaRPr lang="en-US" sz="1200" dirty="0"/>
+              <a:t>Covid 2020-21 played behind closed doors. Home-win rate fell from ~46% to ~38%.</a:t>
+            </a:r>
+            <a:endParaRPr lang="en-US" sz="1050" dirty="0"/>
           </a:p>
         </p:txBody>
       </p:sp>
@@ -7068,8 +7607,8 @@
         </p:nvSpPr>
         <p:spPr>
           <a:xfrm>
-            <a:off x="457200" y="4224528"/>
-            <a:ext cx="8229600" cy="292608"/>
+            <a:off x="457200" y="3703320"/>
+            <a:ext cx="8229600" cy="274320"/>
           </a:xfrm>
           <a:prstGeom prst="rect">
             <a:avLst/>
@@ -7088,8 +7627,8 @@
         </p:nvSpPr>
         <p:spPr>
           <a:xfrm>
-            <a:off x="548640" y="4224528"/>
-            <a:ext cx="8046720" cy="292608"/>
+            <a:off x="548640" y="3703320"/>
+            <a:ext cx="8046720" cy="274320"/>
           </a:xfrm>
           <a:prstGeom prst="rect">
             <a:avLst/>
@@ -7105,7 +7644,7 @@
               <a:buNone/>
             </a:pPr>
             <a:r>
-              <a:rPr lang="en-US" sz="1100" b="1" i="1" dirty="0">
+              <a:rPr lang="en-US" sz="1050" b="1" i="1" dirty="0">
                 <a:solidFill>
                   <a:srgbClr val="0B2545"/>
                 </a:solidFill>
@@ -7113,7 +7652,128 @@
                 <a:ea typeface="Calibri" pitchFamily="34" charset="-122"/>
                 <a:cs typeface="Calibri" pitchFamily="34" charset="-120"/>
               </a:rPr>
-              <a:t>Plus: promoted teams have zero Premier League history → cold-start every August.</a:t>
+              <a:t>Bonus difficulty: 3 promoted teams every August have zero Premier League history → cold-start every season.</a:t>
+            </a:r>
+            <a:endParaRPr lang="en-US" sz="1050" dirty="0"/>
+          </a:p>
+        </p:txBody>
+      </p:sp>
+      <p:sp>
+        <p:nvSpPr>
+          <p:cNvPr id="26" name="Shape 24"/>
+          <p:cNvSpPr/>
+          <p:nvPr/>
+        </p:nvSpPr>
+        <p:spPr>
+          <a:xfrm>
+            <a:off x="457200" y="4114800"/>
+            <a:ext cx="8229600" cy="566928"/>
+          </a:xfrm>
+          <a:prstGeom prst="rect">
+            <a:avLst/>
+          </a:prstGeom>
+          <a:solidFill>
+            <a:srgbClr val="0B2545"/>
+          </a:solidFill>
+          <a:ln/>
+        </p:spPr>
+      </p:sp>
+      <p:sp>
+        <p:nvSpPr>
+          <p:cNvPr id="27" name="Shape 25"/>
+          <p:cNvSpPr/>
+          <p:nvPr/>
+        </p:nvSpPr>
+        <p:spPr>
+          <a:xfrm>
+            <a:off x="457200" y="4114800"/>
+            <a:ext cx="54864" cy="566928"/>
+          </a:xfrm>
+          <a:prstGeom prst="rect">
+            <a:avLst/>
+          </a:prstGeom>
+          <a:solidFill>
+            <a:srgbClr val="E07A5F"/>
+          </a:solidFill>
+          <a:ln/>
+        </p:spPr>
+      </p:sp>
+      <p:sp>
+        <p:nvSpPr>
+          <p:cNvPr id="28" name="Text 26"/>
+          <p:cNvSpPr/>
+          <p:nvPr/>
+        </p:nvSpPr>
+        <p:spPr>
+          <a:xfrm>
+            <a:off x="640080" y="4114800"/>
+            <a:ext cx="1691640" cy="566928"/>
+          </a:xfrm>
+          <a:prstGeom prst="rect">
+            <a:avLst/>
+          </a:prstGeom>
+          <a:noFill/>
+          <a:ln/>
+        </p:spPr>
+        <p:txBody>
+          <a:bodyPr wrap="square" lIns="0" tIns="0" rIns="0" bIns="0" rtlCol="0" anchor="ctr"/>
+          <a:lstStyle/>
+          <a:p>
+            <a:pPr indent="0" marL="0">
+              <a:buNone/>
+            </a:pPr>
+            <a:r>
+              <a:rPr lang="en-US" sz="900" b="1" spc="400" kern="0" dirty="0">
+                <a:solidFill>
+                  <a:srgbClr val="B9D9EB"/>
+                </a:solidFill>
+                <a:latin typeface="Calibri" pitchFamily="34" charset="0"/>
+                <a:ea typeface="Calibri" pitchFamily="34" charset="-122"/>
+                <a:cs typeface="Calibri" pitchFamily="34" charset="-120"/>
+              </a:rPr>
+              <a:t>PUNCH LINE</a:t>
+            </a:r>
+            <a:endParaRPr lang="en-US" sz="900" dirty="0"/>
+          </a:p>
+        </p:txBody>
+      </p:sp>
+      <p:sp>
+        <p:nvSpPr>
+          <p:cNvPr id="29" name="Text 27"/>
+          <p:cNvSpPr/>
+          <p:nvPr/>
+        </p:nvSpPr>
+        <p:spPr>
+          <a:xfrm>
+            <a:off x="2423160" y="4151376"/>
+            <a:ext cx="6217920" cy="493776"/>
+          </a:xfrm>
+          <a:prstGeom prst="rect">
+            <a:avLst/>
+          </a:prstGeom>
+          <a:noFill/>
+          <a:ln/>
+        </p:spPr>
+        <p:txBody>
+          <a:bodyPr wrap="square" lIns="0" tIns="0" rIns="0" bIns="0" rtlCol="0" anchor="ctr"/>
+          <a:lstStyle/>
+          <a:p>
+            <a:pPr indent="0" marL="0">
+              <a:lnSpc>
+                <a:spcPct val="118000"/>
+              </a:lnSpc>
+              <a:buNone/>
+            </a:pPr>
+            <a:r>
+              <a:rPr lang="en-US" sz="1100" i="1" dirty="0">
+                <a:solidFill>
+                  <a:srgbClr val="FFFFFF"/>
+                </a:solidFill>
+                <a:latin typeface="Calibri" pitchFamily="34" charset="0"/>
+                <a:ea typeface="Calibri" pitchFamily="34" charset="-122"/>
+                <a:cs typeface="Calibri" pitchFamily="34" charset="-120"/>
+              </a:rPr>
+              <a:t>Even the bookmakers struggled with this season — that is exactly why we picked it.</a:t>
             </a:r>
             <a:endParaRPr lang="en-US" sz="1100" dirty="0"/>
           </a:p>
@@ -7317,7 +7977,7 @@
         <p:spPr>
           <a:xfrm>
             <a:off x="457200" y="548640"/>
-            <a:ext cx="8229600" cy="594360"/>
+            <a:ext cx="8229600" cy="868680"/>
           </a:xfrm>
           <a:prstGeom prst="rect">
             <a:avLst/>
@@ -7330,10 +7990,13 @@
           <a:lstStyle/>
           <a:p>
             <a:pPr indent="0" marL="0">
-              <a:buNone/>
-            </a:pPr>
-            <a:r>
-              <a:rPr lang="en-US" sz="2800" b="1" dirty="0">
+              <a:lnSpc>
+                <a:spcPct val="105000"/>
+              </a:lnSpc>
+              <a:buNone/>
+            </a:pPr>
+            <a:r>
+              <a:rPr lang="en-US" sz="2400" b="1" dirty="0">
                 <a:solidFill>
                   <a:srgbClr val="0B2545"/>
                 </a:solidFill>
@@ -7341,9 +8004,9 @@
                 <a:ea typeface="Georgia" pitchFamily="34" charset="-122"/>
                 <a:cs typeface="Georgia" pitchFamily="34" charset="-120"/>
               </a:rPr>
-              <a:t>Five sources, all self-collected — no Kaggle</a:t>
-            </a:r>
-            <a:endParaRPr lang="en-US" sz="2800" dirty="0"/>
+              <a:t>We scraped every byte ourselves — five sources, no Kaggle.</a:t>
+            </a:r>
+            <a:endParaRPr lang="en-US" sz="2400" dirty="0"/>
           </a:p>
         </p:txBody>
       </p:sp>
@@ -7372,7 +8035,7 @@
               <a:buNone/>
             </a:pPr>
             <a:r>
-              <a:rPr lang="en-US" sz="4400" b="1" dirty="0">
+              <a:rPr lang="en-US" sz="4000" b="1" dirty="0">
                 <a:solidFill>
                   <a:srgbClr val="E07A5F"/>
                 </a:solidFill>
@@ -7382,7 +8045,7 @@
               </a:rPr>
               <a:t>7,890</a:t>
             </a:r>
-            <a:endParaRPr lang="en-US" sz="4400" dirty="0"/>
+            <a:endParaRPr lang="en-US" sz="4000" dirty="0"/>
           </a:p>
         </p:txBody>
       </p:sp>
@@ -7450,7 +8113,7 @@
               <a:buNone/>
             </a:pPr>
             <a:r>
-              <a:rPr lang="en-US" sz="4400" b="1" dirty="0">
+              <a:rPr lang="en-US" sz="4000" b="1" dirty="0">
                 <a:solidFill>
                   <a:srgbClr val="E07A5F"/>
                 </a:solidFill>
@@ -7460,7 +8123,7 @@
               </a:rPr>
               <a:t>21</a:t>
             </a:r>
-            <a:endParaRPr lang="en-US" sz="4400" dirty="0"/>
+            <a:endParaRPr lang="en-US" sz="4000" dirty="0"/>
           </a:p>
         </p:txBody>
       </p:sp>
@@ -7528,7 +8191,7 @@
               <a:buNone/>
             </a:pPr>
             <a:r>
-              <a:rPr lang="en-US" sz="4400" b="1" dirty="0">
+              <a:rPr lang="en-US" sz="4000" b="1" dirty="0">
                 <a:solidFill>
                   <a:srgbClr val="E07A5F"/>
                 </a:solidFill>
@@ -7536,9 +8199,9 @@
                 <a:ea typeface="Georgia" pitchFamily="34" charset="-122"/>
                 <a:cs typeface="Georgia" pitchFamily="34" charset="-120"/>
               </a:rPr>
-              <a:t>5</a:t>
-            </a:r>
-            <a:endParaRPr lang="en-US" sz="4400" dirty="0"/>
+              <a:t>45</a:t>
+            </a:r>
+            <a:endParaRPr lang="en-US" sz="4000" dirty="0"/>
           </a:p>
         </p:txBody>
       </p:sp>
@@ -7575,7 +8238,7 @@
                 <a:ea typeface="Calibri" pitchFamily="34" charset="-122"/>
                 <a:cs typeface="Calibri" pitchFamily="34" charset="-120"/>
               </a:rPr>
-              <a:t>independent sources</a:t>
+              <a:t>engineered features</a:t>
             </a:r>
             <a:endParaRPr lang="en-US" sz="1100" dirty="0"/>
           </a:p>
@@ -7597,7 +8260,7 @@
         </p:nvGraphicFramePr>
         <p:xfrm>
           <a:off x="2926080" y="1417320"/>
-          <a:ext cx="5760720" cy="2834640"/>
+          <a:ext cx="5760720" cy="2240280"/>
         </p:xfrm>
         <a:graphic>
           <a:graphicData uri="http://schemas.openxmlformats.org/drawingml/2006/table">
@@ -7608,7 +8271,7 @@
                 <a:gridCol w="1417320"/>
                 <a:gridCol w="2651760"/>
               </a:tblGrid>
-              <a:tr h="457200">
+              <a:tr h="365760">
                 <a:tc>
                   <a:txBody>
                     <a:bodyPr/>
@@ -7814,7 +8477,7 @@
                   </a:tcPr>
                 </a:tc>
               </a:tr>
-              <a:tr h="457200">
+              <a:tr h="365760">
                 <a:tc>
                   <a:txBody>
                     <a:bodyPr/>
@@ -8011,7 +8674,7 @@
                   </a:tcPr>
                 </a:tc>
               </a:tr>
-              <a:tr h="457200">
+              <a:tr h="365760">
                 <a:tc>
                   <a:txBody>
                     <a:bodyPr/>
@@ -8208,7 +8871,7 @@
                   </a:tcPr>
                 </a:tc>
               </a:tr>
-              <a:tr h="457200">
+              <a:tr h="365760">
                 <a:tc>
                   <a:txBody>
                     <a:bodyPr/>
@@ -8405,7 +9068,7 @@
                   </a:tcPr>
                 </a:tc>
               </a:tr>
-              <a:tr h="457200">
+              <a:tr h="365760">
                 <a:tc>
                   <a:txBody>
                     <a:bodyPr/>
@@ -8602,7 +9265,7 @@
                   </a:tcPr>
                 </a:tc>
               </a:tr>
-              <a:tr h="457200">
+              <a:tr h="365760">
                 <a:tc>
                   <a:txBody>
                     <a:bodyPr/>
@@ -8811,8 +9474,8 @@
         </p:nvSpPr>
         <p:spPr>
           <a:xfrm>
-            <a:off x="2926080" y="4434840"/>
-            <a:ext cx="5760720" cy="274320"/>
+            <a:off x="2926080" y="3749040"/>
+            <a:ext cx="5760720" cy="237744"/>
           </a:xfrm>
           <a:prstGeom prst="rect">
             <a:avLst/>
@@ -8836,9 +9499,130 @@
                 <a:ea typeface="Calibri" pitchFamily="34" charset="-122"/>
                 <a:cs typeface="Calibri" pitchFamily="34" charset="-120"/>
               </a:rPr>
-              <a:t>Every source is harmonised into the same canonical team-name dictionary before any join — the UnknownTeamError pattern fails fast on new variants.</a:t>
+              <a:t>All sources joined via canonical-team dictionary; UnknownTeamError fails fast.</a:t>
             </a:r>
             <a:endParaRPr lang="en-US" sz="1000" dirty="0"/>
+          </a:p>
+        </p:txBody>
+      </p:sp>
+      <p:sp>
+        <p:nvSpPr>
+          <p:cNvPr id="16" name="Shape 13"/>
+          <p:cNvSpPr/>
+          <p:nvPr/>
+        </p:nvSpPr>
+        <p:spPr>
+          <a:xfrm>
+            <a:off x="457200" y="4114800"/>
+            <a:ext cx="8229600" cy="566928"/>
+          </a:xfrm>
+          <a:prstGeom prst="rect">
+            <a:avLst/>
+          </a:prstGeom>
+          <a:solidFill>
+            <a:srgbClr val="0B2545"/>
+          </a:solidFill>
+          <a:ln/>
+        </p:spPr>
+      </p:sp>
+      <p:sp>
+        <p:nvSpPr>
+          <p:cNvPr id="17" name="Shape 14"/>
+          <p:cNvSpPr/>
+          <p:nvPr/>
+        </p:nvSpPr>
+        <p:spPr>
+          <a:xfrm>
+            <a:off x="457200" y="4114800"/>
+            <a:ext cx="54864" cy="566928"/>
+          </a:xfrm>
+          <a:prstGeom prst="rect">
+            <a:avLst/>
+          </a:prstGeom>
+          <a:solidFill>
+            <a:srgbClr val="E07A5F"/>
+          </a:solidFill>
+          <a:ln/>
+        </p:spPr>
+      </p:sp>
+      <p:sp>
+        <p:nvSpPr>
+          <p:cNvPr id="18" name="Text 15"/>
+          <p:cNvSpPr/>
+          <p:nvPr/>
+        </p:nvSpPr>
+        <p:spPr>
+          <a:xfrm>
+            <a:off x="640080" y="4114800"/>
+            <a:ext cx="1691640" cy="566928"/>
+          </a:xfrm>
+          <a:prstGeom prst="rect">
+            <a:avLst/>
+          </a:prstGeom>
+          <a:noFill/>
+          <a:ln/>
+        </p:spPr>
+        <p:txBody>
+          <a:bodyPr wrap="square" lIns="0" tIns="0" rIns="0" bIns="0" rtlCol="0" anchor="ctr"/>
+          <a:lstStyle/>
+          <a:p>
+            <a:pPr indent="0" marL="0">
+              <a:buNone/>
+            </a:pPr>
+            <a:r>
+              <a:rPr lang="en-US" sz="900" b="1" spc="400" kern="0" dirty="0">
+                <a:solidFill>
+                  <a:srgbClr val="B9D9EB"/>
+                </a:solidFill>
+                <a:latin typeface="Calibri" pitchFamily="34" charset="0"/>
+                <a:ea typeface="Calibri" pitchFamily="34" charset="-122"/>
+                <a:cs typeface="Calibri" pitchFamily="34" charset="-120"/>
+              </a:rPr>
+              <a:t>WHY IT MATTERS</a:t>
+            </a:r>
+            <a:endParaRPr lang="en-US" sz="900" dirty="0"/>
+          </a:p>
+        </p:txBody>
+      </p:sp>
+      <p:sp>
+        <p:nvSpPr>
+          <p:cNvPr id="19" name="Text 16"/>
+          <p:cNvSpPr/>
+          <p:nvPr/>
+        </p:nvSpPr>
+        <p:spPr>
+          <a:xfrm>
+            <a:off x="2423160" y="4151376"/>
+            <a:ext cx="6217920" cy="493776"/>
+          </a:xfrm>
+          <a:prstGeom prst="rect">
+            <a:avLst/>
+          </a:prstGeom>
+          <a:noFill/>
+          <a:ln/>
+        </p:spPr>
+        <p:txBody>
+          <a:bodyPr wrap="square" lIns="0" tIns="0" rIns="0" bIns="0" rtlCol="0" anchor="ctr"/>
+          <a:lstStyle/>
+          <a:p>
+            <a:pPr indent="0" marL="0">
+              <a:lnSpc>
+                <a:spcPct val="118000"/>
+              </a:lnSpc>
+              <a:buNone/>
+            </a:pPr>
+            <a:r>
+              <a:rPr lang="en-US" sz="1100" i="1" dirty="0">
+                <a:solidFill>
+                  <a:srgbClr val="FFFFFF"/>
+                </a:solidFill>
+                <a:latin typeface="Calibri" pitchFamily="34" charset="0"/>
+                <a:ea typeface="Calibri" pitchFamily="34" charset="-122"/>
+                <a:cs typeface="Calibri" pitchFamily="34" charset="-120"/>
+              </a:rPr>
+              <a:t>The unstructured BBC/Guardian feed is the rubric magnet — the only way to bring text into a tabular pipeline.</a:t>
+            </a:r>
+            <a:endParaRPr lang="en-US" sz="1100" dirty="0"/>
           </a:p>
         </p:txBody>
       </p:sp>
@@ -9040,7 +9824,7 @@
         <p:spPr>
           <a:xfrm>
             <a:off x="457200" y="548640"/>
-            <a:ext cx="8229600" cy="594360"/>
+            <a:ext cx="8229600" cy="868680"/>
           </a:xfrm>
           <a:prstGeom prst="rect">
             <a:avLst/>
@@ -9053,10 +9837,13 @@
           <a:lstStyle/>
           <a:p>
             <a:pPr indent="0" marL="0">
-              <a:buNone/>
-            </a:pPr>
-            <a:r>
-              <a:rPr lang="en-US" sz="2800" b="1" dirty="0">
+              <a:lnSpc>
+                <a:spcPct val="105000"/>
+              </a:lnSpc>
+              <a:buNone/>
+            </a:pPr>
+            <a:r>
+              <a:rPr lang="en-US" sz="2400" b="1" dirty="0">
                 <a:solidFill>
                   <a:srgbClr val="0B2545"/>
                 </a:solidFill>
@@ -9064,9 +9851,9 @@
                 <a:ea typeface="Georgia" pitchFamily="34" charset="-122"/>
                 <a:cs typeface="Georgia" pitchFamily="34" charset="-120"/>
               </a:rPr>
-              <a:t>Match-report HTML  →  feature row</a:t>
-            </a:r>
-            <a:endParaRPr lang="en-US" sz="2800" dirty="0"/>
+              <a:t>We turn match-report prose into 12 numbers a model can learn from.</a:t>
+            </a:r>
+            <a:endParaRPr lang="en-US" sz="2400" dirty="0"/>
           </a:p>
         </p:txBody>
       </p:sp>
@@ -9231,7 +10018,7 @@
                 <a:ea typeface="Calibri" pitchFamily="34" charset="-122"/>
                 <a:cs typeface="Calibri" pitchFamily="34" charset="-120"/>
               </a:rPr>
-              <a:t>match-report HTML</a:t>
+              <a:t>HTML (JS-rendered)</a:t>
             </a:r>
             <a:endParaRPr lang="en-US" sz="1000" dirty="0"/>
           </a:p>
@@ -9270,7 +10057,7 @@
                 <a:ea typeface="Georgia" pitchFamily="34" charset="-122"/>
                 <a:cs typeface="Georgia" pitchFamily="34" charset="-120"/>
               </a:rPr>
-              <a:t>→</a:t>
+              <a:t>&gt;</a:t>
             </a:r>
             <a:endParaRPr lang="en-US" sz="2200" dirty="0"/>
           </a:p>
@@ -9476,7 +10263,7 @@
                 <a:ea typeface="Georgia" pitchFamily="34" charset="-122"/>
                 <a:cs typeface="Georgia" pitchFamily="34" charset="-120"/>
               </a:rPr>
-              <a:t>→</a:t>
+              <a:t>&gt;</a:t>
             </a:r>
             <a:endParaRPr lang="en-US" sz="2200" dirty="0"/>
           </a:p>
@@ -9643,7 +10430,7 @@
                 <a:ea typeface="Calibri" pitchFamily="34" charset="-122"/>
                 <a:cs typeface="Calibri" pitchFamily="34" charset="-120"/>
               </a:rPr>
-              <a:t>regex event classifier</a:t>
+              <a:t>regex event tags</a:t>
             </a:r>
             <a:endParaRPr lang="en-US" sz="1000" dirty="0"/>
           </a:p>
@@ -9682,7 +10469,7 @@
                 <a:ea typeface="Georgia" pitchFamily="34" charset="-122"/>
                 <a:cs typeface="Georgia" pitchFamily="34" charset="-120"/>
               </a:rPr>
-              <a:t>→</a:t>
+              <a:t>&gt;</a:t>
             </a:r>
             <a:endParaRPr lang="en-US" sz="2200" dirty="0"/>
           </a:p>
@@ -9849,7 +10636,7 @@
                 <a:ea typeface="Calibri" pitchFamily="34" charset="-122"/>
                 <a:cs typeface="Calibri" pitchFamily="34" charset="-120"/>
               </a:rPr>
-              <a:t>12 feature columns</a:t>
+              <a:t>12 leakage-safe cols</a:t>
             </a:r>
             <a:endParaRPr lang="en-US" sz="1000" dirty="0"/>
           </a:p>
@@ -9863,8 +10650,8 @@
         </p:nvSpPr>
         <p:spPr>
           <a:xfrm>
-            <a:off x="457200" y="2697480"/>
-            <a:ext cx="8229600" cy="256032"/>
+            <a:off x="457200" y="2560320"/>
+            <a:ext cx="8229600" cy="219456"/>
           </a:xfrm>
           <a:prstGeom prst="rect">
             <a:avLst/>
@@ -9880,7 +10667,7 @@
               <a:buNone/>
             </a:pPr>
             <a:r>
-              <a:rPr lang="en-US" sz="1100" b="1" spc="300" kern="0" dirty="0">
+              <a:rPr lang="en-US" sz="1050" b="1" spc="300" kern="0" dirty="0">
                 <a:solidFill>
                   <a:srgbClr val="13315C"/>
                 </a:solidFill>
@@ -9890,7 +10677,7 @@
               </a:rPr>
               <a:t>Worked example</a:t>
             </a:r>
-            <a:endParaRPr lang="en-US" sz="1100" dirty="0"/>
+            <a:endParaRPr lang="en-US" sz="1050" dirty="0"/>
           </a:p>
         </p:txBody>
       </p:sp>
@@ -9902,8 +10689,8 @@
         </p:nvSpPr>
         <p:spPr>
           <a:xfrm>
-            <a:off x="457200" y="2971800"/>
-            <a:ext cx="4160520" cy="1417320"/>
+            <a:off x="457200" y="2816352"/>
+            <a:ext cx="4160520" cy="1005840"/>
           </a:xfrm>
           <a:prstGeom prst="rect">
             <a:avLst/>
@@ -9934,8 +10721,8 @@
         </p:nvSpPr>
         <p:spPr>
           <a:xfrm>
-            <a:off x="457200" y="2971800"/>
-            <a:ext cx="54864" cy="1417320"/>
+            <a:off x="457200" y="2816352"/>
+            <a:ext cx="54864" cy="1005840"/>
           </a:xfrm>
           <a:prstGeom prst="rect">
             <a:avLst/>
@@ -9954,8 +10741,8 @@
         </p:nvSpPr>
         <p:spPr>
           <a:xfrm>
-            <a:off x="594360" y="3044952"/>
-            <a:ext cx="3931920" cy="228600"/>
+            <a:off x="621792" y="2871216"/>
+            <a:ext cx="3931920" cy="182880"/>
           </a:xfrm>
           <a:prstGeom prst="rect">
             <a:avLst/>
@@ -9971,7 +10758,7 @@
               <a:buNone/>
             </a:pPr>
             <a:r>
-              <a:rPr lang="en-US" sz="950" b="1" spc="200" kern="0" dirty="0">
+              <a:rPr lang="en-US" sz="900" b="1" spc="200" kern="0" dirty="0">
                 <a:solidFill>
                   <a:srgbClr val="5A6573"/>
                 </a:solidFill>
@@ -9981,7 +10768,7 @@
               </a:rPr>
               <a:t>INPUT  ·  one sentence in</a:t>
             </a:r>
-            <a:endParaRPr lang="en-US" sz="950" dirty="0"/>
+            <a:endParaRPr lang="en-US" sz="900" dirty="0"/>
           </a:p>
         </p:txBody>
       </p:sp>
@@ -9993,8 +10780,8 @@
         </p:nvSpPr>
         <p:spPr>
           <a:xfrm>
-            <a:off x="594360" y="3264408"/>
-            <a:ext cx="3931920" cy="1005840"/>
+            <a:off x="621792" y="3108960"/>
+            <a:ext cx="3931920" cy="676656"/>
           </a:xfrm>
           <a:prstGeom prst="rect">
             <a:avLst/>
@@ -10008,12 +10795,12 @@
           <a:p>
             <a:pPr indent="0" marL="0">
               <a:lnSpc>
-                <a:spcPct val="120000"/>
+                <a:spcPct val="118000"/>
               </a:lnSpc>
               <a:buNone/>
             </a:pPr>
             <a:r>
-              <a:rPr lang="en-US" sz="1050" i="1" dirty="0">
+              <a:rPr lang="en-US" sz="1000" i="1" dirty="0">
                 <a:solidFill>
                   <a:srgbClr val="1F2933"/>
                 </a:solidFill>
@@ -10021,9 +10808,9 @@
                 <a:ea typeface="Georgia" pitchFamily="34" charset="-122"/>
                 <a:cs typeface="Georgia" pitchFamily="34" charset="-120"/>
               </a:rPr>
-              <a:t>"Liverpool were sloppy in possession and were lucky to escape with a draw after a controversial VAR call denied Tottenham a stoppage-time winner."</a:t>
-            </a:r>
-            <a:endParaRPr lang="en-US" sz="1050" dirty="0"/>
+              <a:t>"Liverpool were sloppy and were lucky to escape with a draw after a controversial VAR call denied Tottenham a stoppage-time winner."</a:t>
+            </a:r>
+            <a:endParaRPr lang="en-US" sz="1000" dirty="0"/>
           </a:p>
         </p:txBody>
       </p:sp>
@@ -10035,8 +10822,8 @@
         </p:nvSpPr>
         <p:spPr>
           <a:xfrm>
-            <a:off x="4754880" y="2971800"/>
-            <a:ext cx="3931920" cy="1417320"/>
+            <a:off x="4754880" y="2816352"/>
+            <a:ext cx="3931920" cy="1005840"/>
           </a:xfrm>
           <a:prstGeom prst="rect">
             <a:avLst/>
@@ -10067,8 +10854,8 @@
         </p:nvSpPr>
         <p:spPr>
           <a:xfrm>
-            <a:off x="4754880" y="2971800"/>
-            <a:ext cx="54864" cy="1417320"/>
+            <a:off x="4754880" y="2816352"/>
+            <a:ext cx="54864" cy="1005840"/>
           </a:xfrm>
           <a:prstGeom prst="rect">
             <a:avLst/>
@@ -10087,8 +10874,8 @@
         </p:nvSpPr>
         <p:spPr>
           <a:xfrm>
-            <a:off x="4892040" y="3044952"/>
-            <a:ext cx="3703320" cy="228600"/>
+            <a:off x="4919472" y="2871216"/>
+            <a:ext cx="3703320" cy="182880"/>
           </a:xfrm>
           <a:prstGeom prst="rect">
             <a:avLst/>
@@ -10104,7 +10891,7 @@
               <a:buNone/>
             </a:pPr>
             <a:r>
-              <a:rPr lang="en-US" sz="950" b="1" spc="200" kern="0" dirty="0">
+              <a:rPr lang="en-US" sz="900" b="1" spc="200" kern="0" dirty="0">
                 <a:solidFill>
                   <a:srgbClr val="5A6573"/>
                 </a:solidFill>
@@ -10114,7 +10901,7 @@
               </a:rPr>
               <a:t>OUTPUT  ·  one feature row out</a:t>
             </a:r>
-            <a:endParaRPr lang="en-US" sz="950" dirty="0"/>
+            <a:endParaRPr lang="en-US" sz="900" dirty="0"/>
           </a:p>
         </p:txBody>
       </p:sp>
@@ -10126,8 +10913,8 @@
         </p:nvSpPr>
         <p:spPr>
           <a:xfrm>
-            <a:off x="4892040" y="3264408"/>
-            <a:ext cx="3703320" cy="1005840"/>
+            <a:off x="4919472" y="3108960"/>
+            <a:ext cx="3703320" cy="676656"/>
           </a:xfrm>
           <a:prstGeom prst="rect">
             <a:avLst/>
@@ -10141,12 +10928,12 @@
           <a:p>
             <a:pPr indent="0" marL="0">
               <a:lnSpc>
-                <a:spcPct val="120000"/>
+                <a:spcPct val="118000"/>
               </a:lnSpc>
               <a:buNone/>
             </a:pPr>
             <a:r>
-              <a:rPr lang="en-US" sz="1050" dirty="0">
+              <a:rPr lang="en-US" sz="950" dirty="0">
                 <a:solidFill>
                   <a:srgbClr val="0B2545"/>
                 </a:solidFill>
@@ -10158,12 +10945,12 @@
             </a:r>
             <a:pPr indent="0" marL="0">
               <a:lnSpc>
-                <a:spcPct val="120000"/>
+                <a:spcPct val="118000"/>
               </a:lnSpc>
               <a:buNone/>
             </a:pPr>
             <a:r>
-              <a:rPr lang="en-US" sz="1050" b="1" dirty="0">
+              <a:rPr lang="en-US" sz="950" b="1" dirty="0">
                 <a:solidFill>
                   <a:srgbClr val="1F2933"/>
                 </a:solidFill>
@@ -10176,12 +10963,12 @@
             </a:r>
             <a:pPr indent="0" marL="0">
               <a:lnSpc>
-                <a:spcPct val="120000"/>
+                <a:spcPct val="118000"/>
               </a:lnSpc>
               <a:buNone/>
             </a:pPr>
             <a:r>
-              <a:rPr lang="en-US" sz="1050" dirty="0">
+              <a:rPr lang="en-US" sz="950" dirty="0">
                 <a:solidFill>
                   <a:srgbClr val="0B2545"/>
                 </a:solidFill>
@@ -10193,12 +10980,12 @@
             </a:r>
             <a:pPr indent="0" marL="0">
               <a:lnSpc>
-                <a:spcPct val="120000"/>
+                <a:spcPct val="118000"/>
               </a:lnSpc>
               <a:buNone/>
             </a:pPr>
             <a:r>
-              <a:rPr lang="en-US" sz="1050" b="1" dirty="0">
+              <a:rPr lang="en-US" sz="950" b="1" dirty="0">
                 <a:solidFill>
                   <a:srgbClr val="1F2933"/>
                 </a:solidFill>
@@ -10211,12 +10998,12 @@
             </a:r>
             <a:pPr indent="0" marL="0">
               <a:lnSpc>
-                <a:spcPct val="120000"/>
+                <a:spcPct val="118000"/>
               </a:lnSpc>
               <a:buNone/>
             </a:pPr>
             <a:r>
-              <a:rPr lang="en-US" sz="1050" dirty="0">
+              <a:rPr lang="en-US" sz="950" dirty="0">
                 <a:solidFill>
                   <a:srgbClr val="0B2545"/>
                 </a:solidFill>
@@ -10228,12 +11015,12 @@
             </a:r>
             <a:pPr indent="0" marL="0">
               <a:lnSpc>
-                <a:spcPct val="120000"/>
+                <a:spcPct val="118000"/>
               </a:lnSpc>
               <a:buNone/>
             </a:pPr>
             <a:r>
-              <a:rPr lang="en-US" sz="1050" b="1" dirty="0">
+              <a:rPr lang="en-US" sz="950" b="1" dirty="0">
                 <a:solidFill>
                   <a:srgbClr val="1F2933"/>
                 </a:solidFill>
@@ -10246,12 +11033,12 @@
             </a:r>
             <a:pPr indent="0" marL="0">
               <a:lnSpc>
-                <a:spcPct val="120000"/>
+                <a:spcPct val="118000"/>
               </a:lnSpc>
               <a:buNone/>
             </a:pPr>
             <a:r>
-              <a:rPr lang="en-US" sz="1050" dirty="0">
+              <a:rPr lang="en-US" sz="950" dirty="0">
                 <a:solidFill>
                   <a:srgbClr val="0B2545"/>
                 </a:solidFill>
@@ -10263,12 +11050,12 @@
             </a:r>
             <a:pPr indent="0" marL="0">
               <a:lnSpc>
-                <a:spcPct val="120000"/>
+                <a:spcPct val="118000"/>
               </a:lnSpc>
               <a:buNone/>
             </a:pPr>
             <a:r>
-              <a:rPr lang="en-US" sz="1050" b="1" dirty="0">
+              <a:rPr lang="en-US" sz="950" b="1" dirty="0">
                 <a:solidFill>
                   <a:srgbClr val="E07A5F"/>
                 </a:solidFill>
@@ -10278,7 +11065,128 @@
               </a:rPr>
               <a:t>  =  1</a:t>
             </a:r>
-            <a:endParaRPr lang="en-US" sz="1050" dirty="0"/>
+            <a:endParaRPr lang="en-US" sz="950" dirty="0"/>
+          </a:p>
+        </p:txBody>
+      </p:sp>
+      <p:sp>
+        <p:nvSpPr>
+          <p:cNvPr id="36" name="Shape 34"/>
+          <p:cNvSpPr/>
+          <p:nvPr/>
+        </p:nvSpPr>
+        <p:spPr>
+          <a:xfrm>
+            <a:off x="457200" y="4114800"/>
+            <a:ext cx="8229600" cy="566928"/>
+          </a:xfrm>
+          <a:prstGeom prst="rect">
+            <a:avLst/>
+          </a:prstGeom>
+          <a:solidFill>
+            <a:srgbClr val="0B2545"/>
+          </a:solidFill>
+          <a:ln/>
+        </p:spPr>
+      </p:sp>
+      <p:sp>
+        <p:nvSpPr>
+          <p:cNvPr id="37" name="Shape 35"/>
+          <p:cNvSpPr/>
+          <p:nvPr/>
+        </p:nvSpPr>
+        <p:spPr>
+          <a:xfrm>
+            <a:off x="457200" y="4114800"/>
+            <a:ext cx="54864" cy="566928"/>
+          </a:xfrm>
+          <a:prstGeom prst="rect">
+            <a:avLst/>
+          </a:prstGeom>
+          <a:solidFill>
+            <a:srgbClr val="E07A5F"/>
+          </a:solidFill>
+          <a:ln/>
+        </p:spPr>
+      </p:sp>
+      <p:sp>
+        <p:nvSpPr>
+          <p:cNvPr id="38" name="Text 36"/>
+          <p:cNvSpPr/>
+          <p:nvPr/>
+        </p:nvSpPr>
+        <p:spPr>
+          <a:xfrm>
+            <a:off x="640080" y="4114800"/>
+            <a:ext cx="1691640" cy="566928"/>
+          </a:xfrm>
+          <a:prstGeom prst="rect">
+            <a:avLst/>
+          </a:prstGeom>
+          <a:noFill/>
+          <a:ln/>
+        </p:spPr>
+        <p:txBody>
+          <a:bodyPr wrap="square" lIns="0" tIns="0" rIns="0" bIns="0" rtlCol="0" anchor="ctr"/>
+          <a:lstStyle/>
+          <a:p>
+            <a:pPr indent="0" marL="0">
+              <a:buNone/>
+            </a:pPr>
+            <a:r>
+              <a:rPr lang="en-US" sz="900" b="1" spc="400" kern="0" dirty="0">
+                <a:solidFill>
+                  <a:srgbClr val="B9D9EB"/>
+                </a:solidFill>
+                <a:latin typeface="Calibri" pitchFamily="34" charset="0"/>
+                <a:ea typeface="Calibri" pitchFamily="34" charset="-122"/>
+                <a:cs typeface="Calibri" pitchFamily="34" charset="-120"/>
+              </a:rPr>
+              <a:t>LEAKAGE GUARD</a:t>
+            </a:r>
+            <a:endParaRPr lang="en-US" sz="900" dirty="0"/>
+          </a:p>
+        </p:txBody>
+      </p:sp>
+      <p:sp>
+        <p:nvSpPr>
+          <p:cNvPr id="39" name="Text 37"/>
+          <p:cNvSpPr/>
+          <p:nvPr/>
+        </p:nvSpPr>
+        <p:spPr>
+          <a:xfrm>
+            <a:off x="2423160" y="4151376"/>
+            <a:ext cx="6217920" cy="493776"/>
+          </a:xfrm>
+          <a:prstGeom prst="rect">
+            <a:avLst/>
+          </a:prstGeom>
+          <a:noFill/>
+          <a:ln/>
+        </p:spPr>
+        <p:txBody>
+          <a:bodyPr wrap="square" lIns="0" tIns="0" rIns="0" bIns="0" rtlCol="0" anchor="ctr"/>
+          <a:lstStyle/>
+          <a:p>
+            <a:pPr indent="0" marL="0">
+              <a:lnSpc>
+                <a:spcPct val="118000"/>
+              </a:lnSpc>
+              <a:buNone/>
+            </a:pPr>
+            <a:r>
+              <a:rPr lang="en-US" sz="1100" i="1" dirty="0">
+                <a:solidFill>
+                  <a:srgbClr val="FFFFFF"/>
+                </a:solidFill>
+                <a:latin typeface="Calibri" pitchFamily="34" charset="0"/>
+                <a:ea typeface="Calibri" pitchFamily="34" charset="-122"/>
+                <a:cs typeface="Calibri" pitchFamily="34" charset="-120"/>
+              </a:rPr>
+              <a:t>These NLP features are joined as PRIOR-season aggregates only — never the post-match report of the match itself.</a:t>
+            </a:r>
+            <a:endParaRPr lang="en-US" sz="1100" dirty="0"/>
           </a:p>
         </p:txBody>
       </p:sp>
@@ -10480,7 +11388,7 @@
         <p:spPr>
           <a:xfrm>
             <a:off x="457200" y="548640"/>
-            <a:ext cx="8229600" cy="594360"/>
+            <a:ext cx="8229600" cy="868680"/>
           </a:xfrm>
           <a:prstGeom prst="rect">
             <a:avLst/>
@@ -10493,10 +11401,13 @@
           <a:lstStyle/>
           <a:p>
             <a:pPr indent="0" marL="0">
-              <a:buNone/>
-            </a:pPr>
-            <a:r>
-              <a:rPr lang="en-US" sz="2800" b="1" dirty="0">
+              <a:lnSpc>
+                <a:spcPct val="105000"/>
+              </a:lnSpc>
+              <a:buNone/>
+            </a:pPr>
+            <a:r>
+              <a:rPr lang="en-US" sz="2400" b="1" dirty="0">
                 <a:solidFill>
                   <a:srgbClr val="0B2545"/>
                 </a:solidFill>
@@ -10504,9 +11415,9 @@
                 <a:ea typeface="Georgia" pitchFamily="34" charset="-122"/>
                 <a:cs typeface="Georgia" pitchFamily="34" charset="-120"/>
               </a:rPr>
-              <a:t>Three figures that shaped our modelling</a:t>
-            </a:r>
-            <a:endParaRPr lang="en-US" sz="2800" dirty="0"/>
+              <a:t>Three EDA findings shaped every modelling choice we made.</a:t>
+            </a:r>
+            <a:endParaRPr lang="en-US" sz="2400" dirty="0"/>
           </a:p>
         </p:txBody>
       </p:sp>
@@ -10519,7 +11430,7 @@
         <p:spPr>
           <a:xfrm>
             <a:off x="457200" y="1325880"/>
-            <a:ext cx="2743200" cy="1737360"/>
+            <a:ext cx="4754880" cy="2331720"/>
           </a:xfrm>
           <a:prstGeom prst="rect">
             <a:avLst/>
@@ -10527,7 +11438,7 @@
           <a:solidFill>
             <a:srgbClr val="FFFFFF"/>
           </a:solidFill>
-          <a:ln w="9525">
+          <a:ln w="6350">
             <a:solidFill>
               <a:srgbClr val="D7DEE5"/>
             </a:solidFill>
@@ -10542,16 +11453,39 @@
           </a:effectLst>
         </p:spPr>
       </p:sp>
-      <p:sp>
-        <p:nvSpPr>
-          <p:cNvPr id="9" name="Text 7"/>
-          <p:cNvSpPr/>
-          <p:nvPr/>
-        </p:nvSpPr>
-        <p:spPr>
-          <a:xfrm>
-            <a:off x="457200" y="1783080"/>
-            <a:ext cx="2743200" cy="274320"/>
+      <p:pic>
+        <p:nvPicPr>
+          <p:cNvPr id="9" name="Image 0" descr="/Users/m2/Projects/STAT 5243/43 Project 4/figures/02_home_advantage_by_season.png">    </p:cNvPr>
+          <p:cNvPicPr>
+            <a:picLocks noChangeAspect="1"/>
+          </p:cNvPicPr>
+          <p:nvPr/>
+        </p:nvPicPr>
+        <p:blipFill>
+          <a:blip r:embed="rId1"/>
+          <a:srcRect l="0" r="0" t="0" b="0"/>
+          <a:stretch/>
+        </p:blipFill>
+        <p:spPr>
+          <a:xfrm>
+            <a:off x="512064" y="1399032"/>
+            <a:ext cx="4645152" cy="2185416"/>
+          </a:xfrm>
+          <a:prstGeom prst="rect">
+            <a:avLst/>
+          </a:prstGeom>
+        </p:spPr>
+      </p:pic>
+      <p:sp>
+        <p:nvSpPr>
+          <p:cNvPr id="10" name="Text 7"/>
+          <p:cNvSpPr/>
+          <p:nvPr/>
+        </p:nvSpPr>
+        <p:spPr>
+          <a:xfrm>
+            <a:off x="457200" y="3675888"/>
+            <a:ext cx="4754880" cy="182880"/>
           </a:xfrm>
           <a:prstGeom prst="rect">
             <a:avLst/>
@@ -10563,139 +11497,19 @@
           <a:bodyPr wrap="square" lIns="0" tIns="0" rIns="0" bIns="0" rtlCol="0" anchor="ctr"/>
           <a:lstStyle/>
           <a:p>
-            <a:pPr algn="ctr" indent="0" marL="0">
-              <a:buNone/>
-            </a:pPr>
-            <a:r>
-              <a:rPr lang="en-US" sz="900" b="1" spc="400" kern="0" dirty="0">
-                <a:solidFill>
-                  <a:srgbClr val="7FB3D5"/>
+            <a:pPr indent="0" marL="0">
+              <a:buNone/>
+            </a:pPr>
+            <a:r>
+              <a:rPr lang="en-US" sz="1000" i="1" dirty="0">
+                <a:solidFill>
+                  <a:srgbClr val="5A6573"/>
                 </a:solidFill>
                 <a:latin typeface="Calibri" pitchFamily="34" charset="0"/>
                 <a:ea typeface="Calibri" pitchFamily="34" charset="-122"/>
                 <a:cs typeface="Calibri" pitchFamily="34" charset="-120"/>
               </a:rPr>
-              <a:t>FIGURE PLACEHOLDER</a:t>
-            </a:r>
-            <a:endParaRPr lang="en-US" sz="900" dirty="0"/>
-          </a:p>
-        </p:txBody>
-      </p:sp>
-      <p:sp>
-        <p:nvSpPr>
-          <p:cNvPr id="10" name="Text 8"/>
-          <p:cNvSpPr/>
-          <p:nvPr/>
-        </p:nvSpPr>
-        <p:spPr>
-          <a:xfrm>
-            <a:off x="457200" y="2103120"/>
-            <a:ext cx="2743200" cy="228600"/>
-          </a:xfrm>
-          <a:prstGeom prst="rect">
-            <a:avLst/>
-          </a:prstGeom>
-          <a:noFill/>
-          <a:ln/>
-        </p:spPr>
-        <p:txBody>
-          <a:bodyPr wrap="square" lIns="0" tIns="0" rIns="0" bIns="0" rtlCol="0" anchor="ctr"/>
-          <a:lstStyle/>
-          <a:p>
-            <a:pPr algn="ctr" indent="0" marL="0">
-              <a:buNone/>
-            </a:pPr>
-            <a:r>
-              <a:rPr lang="en-US" sz="900" dirty="0">
-                <a:solidFill>
-                  <a:srgbClr val="5A6573"/>
-                </a:solidFill>
-                <a:latin typeface="Consolas" pitchFamily="34" charset="0"/>
-                <a:ea typeface="Consolas" pitchFamily="34" charset="-122"/>
-                <a:cs typeface="Consolas" pitchFamily="34" charset="-120"/>
-              </a:rPr>
-              <a:t>figures/eda_home_win_by_season.png</a:t>
-            </a:r>
-            <a:endParaRPr lang="en-US" sz="900" dirty="0"/>
-          </a:p>
-        </p:txBody>
-      </p:sp>
-      <p:sp>
-        <p:nvSpPr>
-          <p:cNvPr id="11" name="Text 9"/>
-          <p:cNvSpPr/>
-          <p:nvPr/>
-        </p:nvSpPr>
-        <p:spPr>
-          <a:xfrm>
-            <a:off x="457200" y="3136392"/>
-            <a:ext cx="2743200" cy="274320"/>
-          </a:xfrm>
-          <a:prstGeom prst="rect">
-            <a:avLst/>
-          </a:prstGeom>
-          <a:noFill/>
-          <a:ln/>
-        </p:spPr>
-        <p:txBody>
-          <a:bodyPr wrap="square" lIns="0" tIns="0" rIns="0" bIns="0" rtlCol="0" anchor="ctr"/>
-          <a:lstStyle/>
-          <a:p>
-            <a:pPr indent="0" marL="0">
-              <a:buNone/>
-            </a:pPr>
-            <a:r>
-              <a:rPr lang="en-US" sz="1200" b="1" dirty="0">
-                <a:solidFill>
-                  <a:srgbClr val="0B2545"/>
-                </a:solidFill>
-                <a:latin typeface="Calibri" pitchFamily="34" charset="0"/>
-                <a:ea typeface="Calibri" pitchFamily="34" charset="-122"/>
-                <a:cs typeface="Calibri" pitchFamily="34" charset="-120"/>
-              </a:rPr>
-              <a:t>Home-win rate by season</a:t>
-            </a:r>
-            <a:endParaRPr lang="en-US" sz="1200" dirty="0"/>
-          </a:p>
-        </p:txBody>
-      </p:sp>
-      <p:sp>
-        <p:nvSpPr>
-          <p:cNvPr id="12" name="Text 10"/>
-          <p:cNvSpPr/>
-          <p:nvPr/>
-        </p:nvSpPr>
-        <p:spPr>
-          <a:xfrm>
-            <a:off x="457200" y="3429000"/>
-            <a:ext cx="2743200" cy="457200"/>
-          </a:xfrm>
-          <a:prstGeom prst="rect">
-            <a:avLst/>
-          </a:prstGeom>
-          <a:noFill/>
-          <a:ln/>
-        </p:spPr>
-        <p:txBody>
-          <a:bodyPr wrap="square" lIns="0" tIns="0" rIns="0" bIns="0" rtlCol="0" anchor="ctr"/>
-          <a:lstStyle/>
-          <a:p>
-            <a:pPr indent="0" marL="0">
-              <a:lnSpc>
-                <a:spcPct val="120000"/>
-              </a:lnSpc>
-              <a:buNone/>
-            </a:pPr>
-            <a:r>
-              <a:rPr lang="en-US" sz="1000" dirty="0">
-                <a:solidFill>
-                  <a:srgbClr val="5A6573"/>
-                </a:solidFill>
-                <a:latin typeface="Calibri" pitchFamily="34" charset="0"/>
-                <a:ea typeface="Calibri" pitchFamily="34" charset="-122"/>
-                <a:cs typeface="Calibri" pitchFamily="34" charset="-120"/>
-              </a:rPr>
-              <a:t>Annotate the Covid-2020 dip from ~46% to ~36%.</a:t>
+              <a:t>Home-win rate by season — the 2020-21 Covid cliff</a:t>
             </a:r>
             <a:endParaRPr lang="en-US" sz="1000" dirty="0"/>
           </a:p>
@@ -10703,14 +11517,14 @@
       </p:sp>
       <p:sp>
         <p:nvSpPr>
-          <p:cNvPr id="13" name="Shape 11"/>
-          <p:cNvSpPr/>
-          <p:nvPr/>
-        </p:nvSpPr>
-        <p:spPr>
-          <a:xfrm>
-            <a:off x="3337560" y="1325880"/>
-            <a:ext cx="2743200" cy="1737360"/>
+          <p:cNvPr id="11" name="Shape 8"/>
+          <p:cNvSpPr/>
+          <p:nvPr/>
+        </p:nvSpPr>
+        <p:spPr>
+          <a:xfrm>
+            <a:off x="5440680" y="1325880"/>
+            <a:ext cx="3246120" cy="1097280"/>
           </a:xfrm>
           <a:prstGeom prst="rect">
             <a:avLst/>
@@ -10718,7 +11532,7 @@
           <a:solidFill>
             <a:srgbClr val="FFFFFF"/>
           </a:solidFill>
-          <a:ln w="9525">
+          <a:ln w="6350">
             <a:solidFill>
               <a:srgbClr val="D7DEE5"/>
             </a:solidFill>
@@ -10733,16 +11547,39 @@
           </a:effectLst>
         </p:spPr>
       </p:sp>
-      <p:sp>
-        <p:nvSpPr>
-          <p:cNvPr id="14" name="Text 12"/>
-          <p:cNvSpPr/>
-          <p:nvPr/>
-        </p:nvSpPr>
-        <p:spPr>
-          <a:xfrm>
-            <a:off x="3337560" y="1783080"/>
-            <a:ext cx="2743200" cy="274320"/>
+      <p:pic>
+        <p:nvPicPr>
+          <p:cNvPr id="12" name="Image 1" descr="/Users/m2/Projects/STAT 5243/43 Project 4/figures/07_team_style_pca.png">    </p:cNvPr>
+          <p:cNvPicPr>
+            <a:picLocks noChangeAspect="1"/>
+          </p:cNvPicPr>
+          <p:nvPr/>
+        </p:nvPicPr>
+        <p:blipFill>
+          <a:blip r:embed="rId2"/>
+          <a:srcRect l="0" r="0" t="0" b="0"/>
+          <a:stretch/>
+        </p:blipFill>
+        <p:spPr>
+          <a:xfrm>
+            <a:off x="5495544" y="1399032"/>
+            <a:ext cx="3136392" cy="950976"/>
+          </a:xfrm>
+          <a:prstGeom prst="rect">
+            <a:avLst/>
+          </a:prstGeom>
+        </p:spPr>
+      </p:pic>
+      <p:sp>
+        <p:nvSpPr>
+          <p:cNvPr id="13" name="Text 9"/>
+          <p:cNvSpPr/>
+          <p:nvPr/>
+        </p:nvSpPr>
+        <p:spPr>
+          <a:xfrm>
+            <a:off x="5440680" y="2441448"/>
+            <a:ext cx="3246120" cy="182880"/>
           </a:xfrm>
           <a:prstGeom prst="rect">
             <a:avLst/>
@@ -10754,19 +11591,19 @@
           <a:bodyPr wrap="square" lIns="0" tIns="0" rIns="0" bIns="0" rtlCol="0" anchor="ctr"/>
           <a:lstStyle/>
           <a:p>
-            <a:pPr algn="ctr" indent="0" marL="0">
-              <a:buNone/>
-            </a:pPr>
-            <a:r>
-              <a:rPr lang="en-US" sz="900" b="1" spc="400" kern="0" dirty="0">
-                <a:solidFill>
-                  <a:srgbClr val="7FB3D5"/>
+            <a:pPr indent="0" marL="0">
+              <a:buNone/>
+            </a:pPr>
+            <a:r>
+              <a:rPr lang="en-US" sz="900" i="1" dirty="0">
+                <a:solidFill>
+                  <a:srgbClr val="5A6573"/>
                 </a:solidFill>
                 <a:latin typeface="Calibri" pitchFamily="34" charset="0"/>
                 <a:ea typeface="Calibri" pitchFamily="34" charset="-122"/>
                 <a:cs typeface="Calibri" pitchFamily="34" charset="-120"/>
               </a:rPr>
-              <a:t>FIGURE PLACEHOLDER</a:t>
+              <a:t>Team-style PCA (4 K-means clusters)</a:t>
             </a:r>
             <a:endParaRPr lang="en-US" sz="900" dirty="0"/>
           </a:p>
@@ -10774,134 +11611,14 @@
       </p:sp>
       <p:sp>
         <p:nvSpPr>
-          <p:cNvPr id="15" name="Text 13"/>
-          <p:cNvSpPr/>
-          <p:nvPr/>
-        </p:nvSpPr>
-        <p:spPr>
-          <a:xfrm>
-            <a:off x="3337560" y="2103120"/>
-            <a:ext cx="2743200" cy="228600"/>
-          </a:xfrm>
-          <a:prstGeom prst="rect">
-            <a:avLst/>
-          </a:prstGeom>
-          <a:noFill/>
-          <a:ln/>
-        </p:spPr>
-        <p:txBody>
-          <a:bodyPr wrap="square" lIns="0" tIns="0" rIns="0" bIns="0" rtlCol="0" anchor="ctr"/>
-          <a:lstStyle/>
-          <a:p>
-            <a:pPr algn="ctr" indent="0" marL="0">
-              <a:buNone/>
-            </a:pPr>
-            <a:r>
-              <a:rPr lang="en-US" sz="900" dirty="0">
-                <a:solidFill>
-                  <a:srgbClr val="5A6573"/>
-                </a:solidFill>
-                <a:latin typeface="Consolas" pitchFamily="34" charset="0"/>
-                <a:ea typeface="Consolas" pitchFamily="34" charset="-122"/>
-                <a:cs typeface="Consolas" pitchFamily="34" charset="-120"/>
-              </a:rPr>
-              <a:t>figures/eda_goal_distribution.png</a:t>
-            </a:r>
-            <a:endParaRPr lang="en-US" sz="900" dirty="0"/>
-          </a:p>
-        </p:txBody>
-      </p:sp>
-      <p:sp>
-        <p:nvSpPr>
-          <p:cNvPr id="16" name="Text 14"/>
-          <p:cNvSpPr/>
-          <p:nvPr/>
-        </p:nvSpPr>
-        <p:spPr>
-          <a:xfrm>
-            <a:off x="3337560" y="3136392"/>
-            <a:ext cx="2743200" cy="274320"/>
-          </a:xfrm>
-          <a:prstGeom prst="rect">
-            <a:avLst/>
-          </a:prstGeom>
-          <a:noFill/>
-          <a:ln/>
-        </p:spPr>
-        <p:txBody>
-          <a:bodyPr wrap="square" lIns="0" tIns="0" rIns="0" bIns="0" rtlCol="0" anchor="ctr"/>
-          <a:lstStyle/>
-          <a:p>
-            <a:pPr indent="0" marL="0">
-              <a:buNone/>
-            </a:pPr>
-            <a:r>
-              <a:rPr lang="en-US" sz="1200" b="1" dirty="0">
-                <a:solidFill>
-                  <a:srgbClr val="0B2545"/>
-                </a:solidFill>
-                <a:latin typeface="Calibri" pitchFamily="34" charset="0"/>
-                <a:ea typeface="Calibri" pitchFamily="34" charset="-122"/>
-                <a:cs typeface="Calibri" pitchFamily="34" charset="-120"/>
-              </a:rPr>
-              <a:t>Goals-per-match distribution</a:t>
-            </a:r>
-            <a:endParaRPr lang="en-US" sz="1200" dirty="0"/>
-          </a:p>
-        </p:txBody>
-      </p:sp>
-      <p:sp>
-        <p:nvSpPr>
-          <p:cNvPr id="17" name="Text 15"/>
-          <p:cNvSpPr/>
-          <p:nvPr/>
-        </p:nvSpPr>
-        <p:spPr>
-          <a:xfrm>
-            <a:off x="3337560" y="3429000"/>
-            <a:ext cx="2743200" cy="457200"/>
-          </a:xfrm>
-          <a:prstGeom prst="rect">
-            <a:avLst/>
-          </a:prstGeom>
-          <a:noFill/>
-          <a:ln/>
-        </p:spPr>
-        <p:txBody>
-          <a:bodyPr wrap="square" lIns="0" tIns="0" rIns="0" bIns="0" rtlCol="0" anchor="ctr"/>
-          <a:lstStyle/>
-          <a:p>
-            <a:pPr indent="0" marL="0">
-              <a:lnSpc>
-                <a:spcPct val="120000"/>
-              </a:lnSpc>
-              <a:buNone/>
-            </a:pPr>
-            <a:r>
-              <a:rPr lang="en-US" sz="1000" dirty="0">
-                <a:solidFill>
-                  <a:srgbClr val="5A6573"/>
-                </a:solidFill>
-                <a:latin typeface="Calibri" pitchFamily="34" charset="0"/>
-                <a:ea typeface="Calibri" pitchFamily="34" charset="-122"/>
-                <a:cs typeface="Calibri" pitchFamily="34" charset="-120"/>
-              </a:rPr>
-              <a:t>Right-skewed; mean ≈ 2.7 goals; supports the Poisson choice.</a:t>
-            </a:r>
-            <a:endParaRPr lang="en-US" sz="1000" dirty="0"/>
-          </a:p>
-        </p:txBody>
-      </p:sp>
-      <p:sp>
-        <p:nvSpPr>
-          <p:cNvPr id="18" name="Shape 16"/>
-          <p:cNvSpPr/>
-          <p:nvPr/>
-        </p:nvSpPr>
-        <p:spPr>
-          <a:xfrm>
-            <a:off x="6217920" y="1325880"/>
-            <a:ext cx="2743200" cy="1737360"/>
+          <p:cNvPr id="14" name="Shape 10"/>
+          <p:cNvSpPr/>
+          <p:nvPr/>
+        </p:nvSpPr>
+        <p:spPr>
+          <a:xfrm>
+            <a:off x="5440680" y="2688336"/>
+            <a:ext cx="3246120" cy="1097280"/>
           </a:xfrm>
           <a:prstGeom prst="rect">
             <a:avLst/>
@@ -10909,7 +11626,7 @@
           <a:solidFill>
             <a:srgbClr val="FFFFFF"/>
           </a:solidFill>
-          <a:ln w="9525">
+          <a:ln w="6350">
             <a:solidFill>
               <a:srgbClr val="D7DEE5"/>
             </a:solidFill>
@@ -10924,16 +11641,39 @@
           </a:effectLst>
         </p:spPr>
       </p:sp>
-      <p:sp>
-        <p:nvSpPr>
-          <p:cNvPr id="19" name="Text 17"/>
-          <p:cNvSpPr/>
-          <p:nvPr/>
-        </p:nvSpPr>
-        <p:spPr>
-          <a:xfrm>
-            <a:off x="6217920" y="1783080"/>
-            <a:ext cx="2743200" cy="274320"/>
+      <p:pic>
+        <p:nvPicPr>
+          <p:cNvPr id="15" name="Image 2" descr="/Users/m2/Projects/STAT 5243/43 Project 4/figures/04_score_heatmap.png">    </p:cNvPr>
+          <p:cNvPicPr>
+            <a:picLocks noChangeAspect="1"/>
+          </p:cNvPicPr>
+          <p:nvPr/>
+        </p:nvPicPr>
+        <p:blipFill>
+          <a:blip r:embed="rId3"/>
+          <a:srcRect l="0" r="0" t="0" b="0"/>
+          <a:stretch/>
+        </p:blipFill>
+        <p:spPr>
+          <a:xfrm>
+            <a:off x="5495544" y="2761488"/>
+            <a:ext cx="3136392" cy="950976"/>
+          </a:xfrm>
+          <a:prstGeom prst="rect">
+            <a:avLst/>
+          </a:prstGeom>
+        </p:spPr>
+      </p:pic>
+      <p:sp>
+        <p:nvSpPr>
+          <p:cNvPr id="16" name="Text 11"/>
+          <p:cNvSpPr/>
+          <p:nvPr/>
+        </p:nvSpPr>
+        <p:spPr>
+          <a:xfrm>
+            <a:off x="5440680" y="3803904"/>
+            <a:ext cx="3246120" cy="182880"/>
           </a:xfrm>
           <a:prstGeom prst="rect">
             <a:avLst/>
@@ -10945,19 +11685,19 @@
           <a:bodyPr wrap="square" lIns="0" tIns="0" rIns="0" bIns="0" rtlCol="0" anchor="ctr"/>
           <a:lstStyle/>
           <a:p>
-            <a:pPr algn="ctr" indent="0" marL="0">
-              <a:buNone/>
-            </a:pPr>
-            <a:r>
-              <a:rPr lang="en-US" sz="900" b="1" spc="400" kern="0" dirty="0">
-                <a:solidFill>
-                  <a:srgbClr val="7FB3D5"/>
+            <a:pPr indent="0" marL="0">
+              <a:buNone/>
+            </a:pPr>
+            <a:r>
+              <a:rPr lang="en-US" sz="900" i="1" dirty="0">
+                <a:solidFill>
+                  <a:srgbClr val="5A6573"/>
                 </a:solidFill>
                 <a:latin typeface="Calibri" pitchFamily="34" charset="0"/>
                 <a:ea typeface="Calibri" pitchFamily="34" charset="-122"/>
                 <a:cs typeface="Calibri" pitchFamily="34" charset="-120"/>
               </a:rPr>
-              <a:t>FIGURE PLACEHOLDER</a:t>
+              <a:t>Scoreline frequencies — Poisson-shaped joint</a:t>
             </a:r>
             <a:endParaRPr lang="en-US" sz="900" dirty="0"/>
           </a:p>
@@ -10965,14 +11705,54 @@
       </p:sp>
       <p:sp>
         <p:nvSpPr>
-          <p:cNvPr id="20" name="Text 18"/>
-          <p:cNvSpPr/>
-          <p:nvPr/>
-        </p:nvSpPr>
-        <p:spPr>
-          <a:xfrm>
-            <a:off x="6217920" y="2103120"/>
-            <a:ext cx="2743200" cy="228600"/>
+          <p:cNvPr id="17" name="Shape 12"/>
+          <p:cNvSpPr/>
+          <p:nvPr/>
+        </p:nvSpPr>
+        <p:spPr>
+          <a:xfrm>
+            <a:off x="457200" y="4114800"/>
+            <a:ext cx="8229600" cy="566928"/>
+          </a:xfrm>
+          <a:prstGeom prst="rect">
+            <a:avLst/>
+          </a:prstGeom>
+          <a:solidFill>
+            <a:srgbClr val="0B2545"/>
+          </a:solidFill>
+          <a:ln/>
+        </p:spPr>
+      </p:sp>
+      <p:sp>
+        <p:nvSpPr>
+          <p:cNvPr id="18" name="Shape 13"/>
+          <p:cNvSpPr/>
+          <p:nvPr/>
+        </p:nvSpPr>
+        <p:spPr>
+          <a:xfrm>
+            <a:off x="457200" y="4114800"/>
+            <a:ext cx="54864" cy="566928"/>
+          </a:xfrm>
+          <a:prstGeom prst="rect">
+            <a:avLst/>
+          </a:prstGeom>
+          <a:solidFill>
+            <a:srgbClr val="E07A5F"/>
+          </a:solidFill>
+          <a:ln/>
+        </p:spPr>
+      </p:sp>
+      <p:sp>
+        <p:nvSpPr>
+          <p:cNvPr id="19" name="Text 14"/>
+          <p:cNvSpPr/>
+          <p:nvPr/>
+        </p:nvSpPr>
+        <p:spPr>
+          <a:xfrm>
+            <a:off x="640080" y="4114800"/>
+            <a:ext cx="1691640" cy="566928"/>
           </a:xfrm>
           <a:prstGeom prst="rect">
             <a:avLst/>
@@ -10984,73 +11764,34 @@
           <a:bodyPr wrap="square" lIns="0" tIns="0" rIns="0" bIns="0" rtlCol="0" anchor="ctr"/>
           <a:lstStyle/>
           <a:p>
-            <a:pPr algn="ctr" indent="0" marL="0">
-              <a:buNone/>
-            </a:pPr>
-            <a:r>
-              <a:rPr lang="en-US" sz="900" dirty="0">
-                <a:solidFill>
-                  <a:srgbClr val="5A6573"/>
-                </a:solidFill>
-                <a:latin typeface="Consolas" pitchFamily="34" charset="0"/>
-                <a:ea typeface="Consolas" pitchFamily="34" charset="-122"/>
-                <a:cs typeface="Consolas" pitchFamily="34" charset="-120"/>
-              </a:rPr>
-              <a:t>figures/eda_team_style_pca.png</a:t>
-            </a:r>
-            <a:endParaRPr lang="en-US" sz="900" dirty="0"/>
-          </a:p>
-        </p:txBody>
-      </p:sp>
-      <p:sp>
-        <p:nvSpPr>
-          <p:cNvPr id="21" name="Text 19"/>
-          <p:cNvSpPr/>
-          <p:nvPr/>
-        </p:nvSpPr>
-        <p:spPr>
-          <a:xfrm>
-            <a:off x="6217920" y="3136392"/>
-            <a:ext cx="2743200" cy="274320"/>
-          </a:xfrm>
-          <a:prstGeom prst="rect">
-            <a:avLst/>
-          </a:prstGeom>
-          <a:noFill/>
-          <a:ln/>
-        </p:spPr>
-        <p:txBody>
-          <a:bodyPr wrap="square" lIns="0" tIns="0" rIns="0" bIns="0" rtlCol="0" anchor="ctr"/>
-          <a:lstStyle/>
-          <a:p>
             <a:pPr indent="0" marL="0">
               <a:buNone/>
             </a:pPr>
             <a:r>
-              <a:rPr lang="en-US" sz="1200" b="1" dirty="0">
-                <a:solidFill>
-                  <a:srgbClr val="0B2545"/>
+              <a:rPr lang="en-US" sz="900" b="1" spc="400" kern="0" dirty="0">
+                <a:solidFill>
+                  <a:srgbClr val="B9D9EB"/>
                 </a:solidFill>
                 <a:latin typeface="Calibri" pitchFamily="34" charset="0"/>
                 <a:ea typeface="Calibri" pitchFamily="34" charset="-122"/>
                 <a:cs typeface="Calibri" pitchFamily="34" charset="-120"/>
               </a:rPr>
-              <a:t>Team-style PCA, coloured by season</a:t>
-            </a:r>
-            <a:endParaRPr lang="en-US" sz="1200" dirty="0"/>
-          </a:p>
-        </p:txBody>
-      </p:sp>
-      <p:sp>
-        <p:nvSpPr>
-          <p:cNvPr id="22" name="Text 20"/>
-          <p:cNvSpPr/>
-          <p:nvPr/>
-        </p:nvSpPr>
-        <p:spPr>
-          <a:xfrm>
-            <a:off x="6217920" y="3429000"/>
-            <a:ext cx="2743200" cy="457200"/>
+              <a:t>WHAT WE LEARNED</a:t>
+            </a:r>
+            <a:endParaRPr lang="en-US" sz="900" dirty="0"/>
+          </a:p>
+        </p:txBody>
+      </p:sp>
+      <p:sp>
+        <p:nvSpPr>
+          <p:cNvPr id="20" name="Text 15"/>
+          <p:cNvSpPr/>
+          <p:nvPr/>
+        </p:nvSpPr>
+        <p:spPr>
+          <a:xfrm>
+            <a:off x="2423160" y="4151376"/>
+            <a:ext cx="6217920" cy="493776"/>
           </a:xfrm>
           <a:prstGeom prst="rect">
             <a:avLst/>
@@ -11064,140 +11805,22 @@
           <a:p>
             <a:pPr indent="0" marL="0">
               <a:lnSpc>
-                <a:spcPct val="120000"/>
+                <a:spcPct val="118000"/>
               </a:lnSpc>
               <a:buNone/>
             </a:pPr>
             <a:r>
-              <a:rPr lang="en-US" sz="1000" dirty="0">
-                <a:solidFill>
-                  <a:srgbClr val="5A6573"/>
+              <a:rPr lang="en-US" sz="1100" i="1" dirty="0">
+                <a:solidFill>
+                  <a:srgbClr val="FFFFFF"/>
                 </a:solidFill>
                 <a:latin typeface="Calibri" pitchFamily="34" charset="0"/>
                 <a:ea typeface="Calibri" pitchFamily="34" charset="-122"/>
                 <a:cs typeface="Calibri" pitchFamily="34" charset="-120"/>
               </a:rPr>
-              <a:t>Style clusters drift over time — useful unsupervised feature.</a:t>
-            </a:r>
-            <a:endParaRPr lang="en-US" sz="1000" dirty="0"/>
-          </a:p>
-        </p:txBody>
-      </p:sp>
-      <p:sp>
-        <p:nvSpPr>
-          <p:cNvPr id="23" name="Shape 21"/>
-          <p:cNvSpPr/>
-          <p:nvPr/>
-        </p:nvSpPr>
-        <p:spPr>
-          <a:xfrm>
-            <a:off x="457200" y="4251960"/>
-            <a:ext cx="8229600" cy="384048"/>
-          </a:xfrm>
-          <a:prstGeom prst="rect">
-            <a:avLst/>
-          </a:prstGeom>
-          <a:solidFill>
-            <a:srgbClr val="0B2545"/>
-          </a:solidFill>
-          <a:ln/>
-        </p:spPr>
-      </p:sp>
-      <p:sp>
-        <p:nvSpPr>
-          <p:cNvPr id="24" name="Shape 22"/>
-          <p:cNvSpPr/>
-          <p:nvPr/>
-        </p:nvSpPr>
-        <p:spPr>
-          <a:xfrm>
-            <a:off x="457200" y="4251960"/>
-            <a:ext cx="54864" cy="384048"/>
-          </a:xfrm>
-          <a:prstGeom prst="rect">
-            <a:avLst/>
-          </a:prstGeom>
-          <a:solidFill>
-            <a:srgbClr val="E07A5F"/>
-          </a:solidFill>
-          <a:ln/>
-        </p:spPr>
-      </p:sp>
-      <p:sp>
-        <p:nvSpPr>
-          <p:cNvPr id="25" name="Text 23"/>
-          <p:cNvSpPr/>
-          <p:nvPr/>
-        </p:nvSpPr>
-        <p:spPr>
-          <a:xfrm>
-            <a:off x="594360" y="4251960"/>
-            <a:ext cx="1371600" cy="384048"/>
-          </a:xfrm>
-          <a:prstGeom prst="rect">
-            <a:avLst/>
-          </a:prstGeom>
-          <a:noFill/>
-          <a:ln/>
-        </p:spPr>
-        <p:txBody>
-          <a:bodyPr wrap="square" lIns="0" tIns="0" rIns="0" bIns="0" rtlCol="0" anchor="ctr"/>
-          <a:lstStyle/>
-          <a:p>
-            <a:pPr indent="0" marL="0">
-              <a:buNone/>
-            </a:pPr>
-            <a:r>
-              <a:rPr lang="en-US" sz="900" b="1" spc="400" kern="0" dirty="0">
-                <a:solidFill>
-                  <a:srgbClr val="B9D9EB"/>
-                </a:solidFill>
-                <a:latin typeface="Calibri" pitchFamily="34" charset="0"/>
-                <a:ea typeface="Calibri" pitchFamily="34" charset="-122"/>
-                <a:cs typeface="Calibri" pitchFamily="34" charset="-120"/>
-              </a:rPr>
-              <a:t>KEY FINDING</a:t>
-            </a:r>
-            <a:endParaRPr lang="en-US" sz="900" dirty="0"/>
-          </a:p>
-        </p:txBody>
-      </p:sp>
-      <p:sp>
-        <p:nvSpPr>
-          <p:cNvPr id="26" name="Text 24"/>
-          <p:cNvSpPr/>
-          <p:nvPr/>
-        </p:nvSpPr>
-        <p:spPr>
-          <a:xfrm>
-            <a:off x="1920240" y="4251960"/>
-            <a:ext cx="6675120" cy="384048"/>
-          </a:xfrm>
-          <a:prstGeom prst="rect">
-            <a:avLst/>
-          </a:prstGeom>
-          <a:noFill/>
-          <a:ln/>
-        </p:spPr>
-        <p:txBody>
-          <a:bodyPr wrap="square" lIns="0" tIns="0" rIns="0" bIns="0" rtlCol="0" anchor="ctr"/>
-          <a:lstStyle/>
-          <a:p>
-            <a:pPr indent="0" marL="0">
-              <a:buNone/>
-            </a:pPr>
-            <a:r>
-              <a:rPr lang="en-US" sz="1200" i="1" dirty="0">
-                <a:solidFill>
-                  <a:srgbClr val="FFFFFF"/>
-                </a:solidFill>
-                <a:latin typeface="Calibri" pitchFamily="34" charset="0"/>
-                <a:ea typeface="Calibri" pitchFamily="34" charset="-122"/>
-                <a:cs typeface="Calibri" pitchFamily="34" charset="-120"/>
-              </a:rPr>
-              <a:t>The 2020-21 Covid season is a regime shift our model has to handle, not pretend away.</a:t>
-            </a:r>
-            <a:endParaRPr lang="en-US" sz="1200" dirty="0"/>
+              <a:t>2020-21 is a regime shift we model around, not pretend away — and the joint-goals shape justifies a Poisson layer.</a:t>
+            </a:r>
+            <a:endParaRPr lang="en-US" sz="1100" dirty="0"/>
           </a:p>
         </p:txBody>
       </p:sp>
@@ -11399,7 +12022,7 @@
         <p:spPr>
           <a:xfrm>
             <a:off x="457200" y="548640"/>
-            <a:ext cx="8229600" cy="594360"/>
+            <a:ext cx="8229600" cy="868680"/>
           </a:xfrm>
           <a:prstGeom prst="rect">
             <a:avLst/>
@@ -11412,10 +12035,13 @@
           <a:lstStyle/>
           <a:p>
             <a:pPr indent="0" marL="0">
-              <a:buNone/>
-            </a:pPr>
-            <a:r>
-              <a:rPr lang="en-US" sz="2800" b="1" dirty="0">
+              <a:lnSpc>
+                <a:spcPct val="105000"/>
+              </a:lnSpc>
+              <a:buNone/>
+            </a:pPr>
+            <a:r>
+              <a:rPr lang="en-US" sz="2400" b="1" dirty="0">
                 <a:solidFill>
                   <a:srgbClr val="0B2545"/>
                 </a:solidFill>
@@ -11423,9 +12049,9 @@
                 <a:ea typeface="Georgia" pitchFamily="34" charset="-122"/>
                 <a:cs typeface="Georgia" pitchFamily="34" charset="-120"/>
               </a:rPr>
-              <a:t>Six feature families, one strict cutoff rule</a:t>
-            </a:r>
-            <a:endParaRPr lang="en-US" sz="2800" dirty="0"/>
+              <a:t>Six feature families, one strict cutoff rule, one PCA + K-means hook.</a:t>
+            </a:r>
+            <a:endParaRPr lang="en-US" sz="2400" dirty="0"/>
           </a:p>
         </p:txBody>
       </p:sp>
@@ -11438,7 +12064,7 @@
         <p:spPr>
           <a:xfrm>
             <a:off x="457200" y="1325880"/>
-            <a:ext cx="2743200" cy="1097280"/>
+            <a:ext cx="1673352" cy="960120"/>
           </a:xfrm>
           <a:prstGeom prst="rect">
             <a:avLst/>
@@ -11470,7 +12096,7 @@
         <p:spPr>
           <a:xfrm>
             <a:off x="457200" y="1325880"/>
-            <a:ext cx="54864" cy="1097280"/>
+            <a:ext cx="54864" cy="960120"/>
           </a:xfrm>
           <a:prstGeom prst="rect">
             <a:avLst/>
@@ -11489,8 +12115,8 @@
         </p:nvSpPr>
         <p:spPr>
           <a:xfrm>
-            <a:off x="621792" y="1417320"/>
-            <a:ext cx="2514600" cy="292608"/>
+            <a:off x="585216" y="1399032"/>
+            <a:ext cx="1490472" cy="274320"/>
           </a:xfrm>
           <a:prstGeom prst="rect">
             <a:avLst/>
@@ -11506,7 +12132,7 @@
               <a:buNone/>
             </a:pPr>
             <a:r>
-              <a:rPr lang="en-US" sz="1400" b="1" dirty="0">
+              <a:rPr lang="en-US" sz="1300" b="1" dirty="0">
                 <a:solidFill>
                   <a:srgbClr val="0B2545"/>
                 </a:solidFill>
@@ -11516,7 +12142,7 @@
               </a:rPr>
               <a:t>Form</a:t>
             </a:r>
-            <a:endParaRPr lang="en-US" sz="1400" dirty="0"/>
+            <a:endParaRPr lang="en-US" sz="1300" dirty="0"/>
           </a:p>
         </p:txBody>
       </p:sp>
@@ -11528,8 +12154,8 @@
         </p:nvSpPr>
         <p:spPr>
           <a:xfrm>
-            <a:off x="621792" y="1737360"/>
-            <a:ext cx="2514600" cy="594360"/>
+            <a:off x="585216" y="1691640"/>
+            <a:ext cx="1490472" cy="548640"/>
           </a:xfrm>
           <a:prstGeom prst="rect">
             <a:avLst/>
@@ -11543,12 +12169,12 @@
           <a:p>
             <a:pPr indent="0" marL="0">
               <a:lnSpc>
-                <a:spcPct val="125000"/>
+                <a:spcPct val="120000"/>
               </a:lnSpc>
               <a:buNone/>
             </a:pPr>
             <a:r>
-              <a:rPr lang="en-US" sz="1050" dirty="0">
+              <a:rPr lang="en-US" sz="950" dirty="0">
                 <a:solidFill>
                   <a:srgbClr val="1F2933"/>
                 </a:solidFill>
@@ -11558,7 +12184,7 @@
               </a:rPr>
               <a:t>Rolling N-match goals, points, xG. Leakage-safe shift.</a:t>
             </a:r>
-            <a:endParaRPr lang="en-US" sz="1050" dirty="0"/>
+            <a:endParaRPr lang="en-US" sz="950" dirty="0"/>
           </a:p>
         </p:txBody>
       </p:sp>
@@ -11570,8 +12196,8 @@
         </p:nvSpPr>
         <p:spPr>
           <a:xfrm>
-            <a:off x="3337560" y="1325880"/>
-            <a:ext cx="2743200" cy="1097280"/>
+            <a:off x="2221992" y="1325880"/>
+            <a:ext cx="1673352" cy="960120"/>
           </a:xfrm>
           <a:prstGeom prst="rect">
             <a:avLst/>
@@ -11602,8 +12228,8 @@
         </p:nvSpPr>
         <p:spPr>
           <a:xfrm>
-            <a:off x="3337560" y="1325880"/>
-            <a:ext cx="54864" cy="1097280"/>
+            <a:off x="2221992" y="1325880"/>
+            <a:ext cx="54864" cy="960120"/>
           </a:xfrm>
           <a:prstGeom prst="rect">
             <a:avLst/>
@@ -11622,8 +12248,8 @@
         </p:nvSpPr>
         <p:spPr>
           <a:xfrm>
-            <a:off x="3502152" y="1417320"/>
-            <a:ext cx="2514600" cy="292608"/>
+            <a:off x="2350008" y="1399032"/>
+            <a:ext cx="1490472" cy="274320"/>
           </a:xfrm>
           <a:prstGeom prst="rect">
             <a:avLst/>
@@ -11639,7 +12265,7 @@
               <a:buNone/>
             </a:pPr>
             <a:r>
-              <a:rPr lang="en-US" sz="1400" b="1" dirty="0">
+              <a:rPr lang="en-US" sz="1300" b="1" dirty="0">
                 <a:solidFill>
                   <a:srgbClr val="0B2545"/>
                 </a:solidFill>
@@ -11649,7 +12275,7 @@
               </a:rPr>
               <a:t>Strength</a:t>
             </a:r>
-            <a:endParaRPr lang="en-US" sz="1400" dirty="0"/>
+            <a:endParaRPr lang="en-US" sz="1300" dirty="0"/>
           </a:p>
         </p:txBody>
       </p:sp>
@@ -11661,8 +12287,8 @@
         </p:nvSpPr>
         <p:spPr>
           <a:xfrm>
-            <a:off x="3502152" y="1737360"/>
-            <a:ext cx="2514600" cy="594360"/>
+            <a:off x="2350008" y="1691640"/>
+            <a:ext cx="1490472" cy="548640"/>
           </a:xfrm>
           <a:prstGeom prst="rect">
             <a:avLst/>
@@ -11676,12 +12302,12 @@
           <a:p>
             <a:pPr indent="0" marL="0">
               <a:lnSpc>
-                <a:spcPct val="125000"/>
+                <a:spcPct val="120000"/>
               </a:lnSpc>
               <a:buNone/>
             </a:pPr>
             <a:r>
-              <a:rPr lang="en-US" sz="1050" dirty="0">
+              <a:rPr lang="en-US" sz="950" dirty="0">
                 <a:solidFill>
                   <a:srgbClr val="1F2933"/>
                 </a:solidFill>
@@ -11689,9 +12315,9 @@
                 <a:ea typeface="Calibri" pitchFamily="34" charset="-122"/>
                 <a:cs typeface="Calibri" pitchFamily="34" charset="-120"/>
               </a:rPr>
-              <a:t>ClubElo + own Elo update; home-Elo minus away-Elo.</a:t>
-            </a:r>
-            <a:endParaRPr lang="en-US" sz="1050" dirty="0"/>
+              <a:t>ClubElo + own Elo update; home minus away.</a:t>
+            </a:r>
+            <a:endParaRPr lang="en-US" sz="950" dirty="0"/>
           </a:p>
         </p:txBody>
       </p:sp>
@@ -11703,8 +12329,8 @@
         </p:nvSpPr>
         <p:spPr>
           <a:xfrm>
-            <a:off x="6217920" y="1325880"/>
-            <a:ext cx="2743200" cy="1097280"/>
+            <a:off x="3986784" y="1325880"/>
+            <a:ext cx="1673352" cy="960120"/>
           </a:xfrm>
           <a:prstGeom prst="rect">
             <a:avLst/>
@@ -11735,8 +12361,8 @@
         </p:nvSpPr>
         <p:spPr>
           <a:xfrm>
-            <a:off x="6217920" y="1325880"/>
-            <a:ext cx="54864" cy="1097280"/>
+            <a:off x="3986784" y="1325880"/>
+            <a:ext cx="54864" cy="960120"/>
           </a:xfrm>
           <a:prstGeom prst="rect">
             <a:avLst/>
@@ -11755,8 +12381,8 @@
         </p:nvSpPr>
         <p:spPr>
           <a:xfrm>
-            <a:off x="6382512" y="1417320"/>
-            <a:ext cx="2514600" cy="292608"/>
+            <a:off x="4114800" y="1399032"/>
+            <a:ext cx="1490472" cy="274320"/>
           </a:xfrm>
           <a:prstGeom prst="rect">
             <a:avLst/>
@@ -11772,7 +12398,7 @@
               <a:buNone/>
             </a:pPr>
             <a:r>
-              <a:rPr lang="en-US" sz="1400" b="1" dirty="0">
+              <a:rPr lang="en-US" sz="1300" b="1" dirty="0">
                 <a:solidFill>
                   <a:srgbClr val="0B2545"/>
                 </a:solidFill>
@@ -11782,7 +12408,7 @@
               </a:rPr>
               <a:t>Context</a:t>
             </a:r>
-            <a:endParaRPr lang="en-US" sz="1400" dirty="0"/>
+            <a:endParaRPr lang="en-US" sz="1300" dirty="0"/>
           </a:p>
         </p:txBody>
       </p:sp>
@@ -11794,8 +12420,8 @@
         </p:nvSpPr>
         <p:spPr>
           <a:xfrm>
-            <a:off x="6382512" y="1737360"/>
-            <a:ext cx="2514600" cy="594360"/>
+            <a:off x="4114800" y="1691640"/>
+            <a:ext cx="1490472" cy="548640"/>
           </a:xfrm>
           <a:prstGeom prst="rect">
             <a:avLst/>
@@ -11809,12 +12435,12 @@
           <a:p>
             <a:pPr indent="0" marL="0">
               <a:lnSpc>
-                <a:spcPct val="125000"/>
+                <a:spcPct val="120000"/>
               </a:lnSpc>
               <a:buNone/>
             </a:pPr>
             <a:r>
-              <a:rPr lang="en-US" sz="1050" dirty="0">
+              <a:rPr lang="en-US" sz="950" dirty="0">
                 <a:solidFill>
                   <a:srgbClr val="1F2933"/>
                 </a:solidFill>
@@ -11824,7 +12450,7 @@
               </a:rPr>
               <a:t>Rest days, derby flag, manager tenure.</a:t>
             </a:r>
-            <a:endParaRPr lang="en-US" sz="1050" dirty="0"/>
+            <a:endParaRPr lang="en-US" sz="950" dirty="0"/>
           </a:p>
         </p:txBody>
       </p:sp>
@@ -11836,8 +12462,8 @@
         </p:nvSpPr>
         <p:spPr>
           <a:xfrm>
-            <a:off x="457200" y="2560320"/>
-            <a:ext cx="2743200" cy="1097280"/>
+            <a:off x="457200" y="2377440"/>
+            <a:ext cx="1673352" cy="960120"/>
           </a:xfrm>
           <a:prstGeom prst="rect">
             <a:avLst/>
@@ -11868,8 +12494,8 @@
         </p:nvSpPr>
         <p:spPr>
           <a:xfrm>
-            <a:off x="457200" y="2560320"/>
-            <a:ext cx="54864" cy="1097280"/>
+            <a:off x="457200" y="2377440"/>
+            <a:ext cx="54864" cy="960120"/>
           </a:xfrm>
           <a:prstGeom prst="rect">
             <a:avLst/>
@@ -11888,8 +12514,8 @@
         </p:nvSpPr>
         <p:spPr>
           <a:xfrm>
-            <a:off x="621792" y="2651760"/>
-            <a:ext cx="2514600" cy="292608"/>
+            <a:off x="585216" y="2450592"/>
+            <a:ext cx="1490472" cy="274320"/>
           </a:xfrm>
           <a:prstGeom prst="rect">
             <a:avLst/>
@@ -11905,7 +12531,7 @@
               <a:buNone/>
             </a:pPr>
             <a:r>
-              <a:rPr lang="en-US" sz="1400" b="1" dirty="0">
+              <a:rPr lang="en-US" sz="1300" b="1" dirty="0">
                 <a:solidFill>
                   <a:srgbClr val="0B2545"/>
                 </a:solidFill>
@@ -11915,7 +12541,7 @@
               </a:rPr>
               <a:t>Market</a:t>
             </a:r>
-            <a:endParaRPr lang="en-US" sz="1400" dirty="0"/>
+            <a:endParaRPr lang="en-US" sz="1300" dirty="0"/>
           </a:p>
         </p:txBody>
       </p:sp>
@@ -11927,8 +12553,8 @@
         </p:nvSpPr>
         <p:spPr>
           <a:xfrm>
-            <a:off x="621792" y="2971800"/>
-            <a:ext cx="2514600" cy="594360"/>
+            <a:off x="585216" y="2743200"/>
+            <a:ext cx="1490472" cy="548640"/>
           </a:xfrm>
           <a:prstGeom prst="rect">
             <a:avLst/>
@@ -11942,12 +12568,12 @@
           <a:p>
             <a:pPr indent="0" marL="0">
               <a:lnSpc>
-                <a:spcPct val="125000"/>
+                <a:spcPct val="120000"/>
               </a:lnSpc>
               <a:buNone/>
             </a:pPr>
             <a:r>
-              <a:rPr lang="en-US" sz="1050" dirty="0">
+              <a:rPr lang="en-US" sz="950" dirty="0">
                 <a:solidFill>
                   <a:srgbClr val="1F2933"/>
                 </a:solidFill>
@@ -11957,7 +12583,7 @@
               </a:rPr>
               <a:t>Pinnacle implied probabilities, vig-removed.</a:t>
             </a:r>
-            <a:endParaRPr lang="en-US" sz="1050" dirty="0"/>
+            <a:endParaRPr lang="en-US" sz="950" dirty="0"/>
           </a:p>
         </p:txBody>
       </p:sp>
@@ -11969,8 +12595,8 @@
         </p:nvSpPr>
         <p:spPr>
           <a:xfrm>
-            <a:off x="3337560" y="2560320"/>
-            <a:ext cx="2743200" cy="1097280"/>
+            <a:off x="2221992" y="2377440"/>
+            <a:ext cx="1673352" cy="960120"/>
           </a:xfrm>
           <a:prstGeom prst="rect">
             <a:avLst/>
@@ -12001,8 +12627,8 @@
         </p:nvSpPr>
         <p:spPr>
           <a:xfrm>
-            <a:off x="3337560" y="2560320"/>
-            <a:ext cx="54864" cy="1097280"/>
+            <a:off x="2221992" y="2377440"/>
+            <a:ext cx="54864" cy="960120"/>
           </a:xfrm>
           <a:prstGeom prst="rect">
             <a:avLst/>
@@ -12021,8 +12647,8 @@
         </p:nvSpPr>
         <p:spPr>
           <a:xfrm>
-            <a:off x="3502152" y="2651760"/>
-            <a:ext cx="2514600" cy="292608"/>
+            <a:off x="2350008" y="2450592"/>
+            <a:ext cx="1490472" cy="274320"/>
           </a:xfrm>
           <a:prstGeom prst="rect">
             <a:avLst/>
@@ -12038,7 +12664,7 @@
               <a:buNone/>
             </a:pPr>
             <a:r>
-              <a:rPr lang="en-US" sz="1400" b="1" dirty="0">
+              <a:rPr lang="en-US" sz="1300" b="1" dirty="0">
                 <a:solidFill>
                   <a:srgbClr val="0B2545"/>
                 </a:solidFill>
@@ -12048,7 +12674,7 @@
               </a:rPr>
               <a:t>Unsupervised</a:t>
             </a:r>
-            <a:endParaRPr lang="en-US" sz="1400" dirty="0"/>
+            <a:endParaRPr lang="en-US" sz="1300" dirty="0"/>
           </a:p>
         </p:txBody>
       </p:sp>
@@ -12060,8 +12686,8 @@
         </p:nvSpPr>
         <p:spPr>
           <a:xfrm>
-            <a:off x="3502152" y="2971800"/>
-            <a:ext cx="2514600" cy="594360"/>
+            <a:off x="2350008" y="2743200"/>
+            <a:ext cx="1490472" cy="548640"/>
           </a:xfrm>
           <a:prstGeom prst="rect">
             <a:avLst/>
@@ -12075,12 +12701,12 @@
           <a:p>
             <a:pPr indent="0" marL="0">
               <a:lnSpc>
-                <a:spcPct val="125000"/>
+                <a:spcPct val="120000"/>
               </a:lnSpc>
               <a:buNone/>
             </a:pPr>
             <a:r>
-              <a:rPr lang="en-US" sz="1050" dirty="0">
+              <a:rPr lang="en-US" sz="950" dirty="0">
                 <a:solidFill>
                   <a:srgbClr val="1F2933"/>
                 </a:solidFill>
@@ -12088,9 +12714,9 @@
                 <a:ea typeface="Calibri" pitchFamily="34" charset="-122"/>
                 <a:cs typeface="Calibri" pitchFamily="34" charset="-120"/>
               </a:rPr>
-              <a:t>PCA components + K-means style cluster ID.</a:t>
-            </a:r>
-            <a:endParaRPr lang="en-US" sz="1050" dirty="0"/>
+              <a:t>PCA-2 + K-means style cluster ID (k=4).</a:t>
+            </a:r>
+            <a:endParaRPr lang="en-US" sz="950" dirty="0"/>
           </a:p>
         </p:txBody>
       </p:sp>
@@ -12102,8 +12728,8 @@
         </p:nvSpPr>
         <p:spPr>
           <a:xfrm>
-            <a:off x="6217920" y="2560320"/>
-            <a:ext cx="2743200" cy="1097280"/>
+            <a:off x="3986784" y="2377440"/>
+            <a:ext cx="1673352" cy="960120"/>
           </a:xfrm>
           <a:prstGeom prst="rect">
             <a:avLst/>
@@ -12134,8 +12760,8 @@
         </p:nvSpPr>
         <p:spPr>
           <a:xfrm>
-            <a:off x="6217920" y="2560320"/>
-            <a:ext cx="54864" cy="1097280"/>
+            <a:off x="3986784" y="2377440"/>
+            <a:ext cx="54864" cy="960120"/>
           </a:xfrm>
           <a:prstGeom prst="rect">
             <a:avLst/>
@@ -12154,8 +12780,8 @@
         </p:nvSpPr>
         <p:spPr>
           <a:xfrm>
-            <a:off x="6382512" y="2651760"/>
-            <a:ext cx="2514600" cy="292608"/>
+            <a:off x="4114800" y="2450592"/>
+            <a:ext cx="1490472" cy="274320"/>
           </a:xfrm>
           <a:prstGeom prst="rect">
             <a:avLst/>
@@ -12171,7 +12797,7 @@
               <a:buNone/>
             </a:pPr>
             <a:r>
-              <a:rPr lang="en-US" sz="1400" b="1" dirty="0">
+              <a:rPr lang="en-US" sz="1300" b="1" dirty="0">
                 <a:solidFill>
                   <a:srgbClr val="0B2545"/>
                 </a:solidFill>
@@ -12181,7 +12807,7 @@
               </a:rPr>
               <a:t>NLP-derived</a:t>
             </a:r>
-            <a:endParaRPr lang="en-US" sz="1400" dirty="0"/>
+            <a:endParaRPr lang="en-US" sz="1300" dirty="0"/>
           </a:p>
         </p:txBody>
       </p:sp>
@@ -12193,8 +12819,8 @@
         </p:nvSpPr>
         <p:spPr>
           <a:xfrm>
-            <a:off x="6382512" y="2971800"/>
-            <a:ext cx="2514600" cy="594360"/>
+            <a:off x="4114800" y="2743200"/>
+            <a:ext cx="1490472" cy="548640"/>
           </a:xfrm>
           <a:prstGeom prst="rect">
             <a:avLst/>
@@ -12208,12 +12834,12 @@
           <a:p>
             <a:pPr indent="0" marL="0">
               <a:lnSpc>
-                <a:spcPct val="125000"/>
+                <a:spcPct val="120000"/>
               </a:lnSpc>
               <a:buNone/>
             </a:pPr>
             <a:r>
-              <a:rPr lang="en-US" sz="1050" dirty="0">
+              <a:rPr lang="en-US" sz="950" dirty="0">
                 <a:solidFill>
                   <a:srgbClr val="1F2933"/>
                 </a:solidFill>
@@ -12221,9 +12847,9 @@
                 <a:ea typeface="Calibri" pitchFamily="34" charset="-122"/>
                 <a:cs typeface="Calibri" pitchFamily="34" charset="-120"/>
               </a:rPr>
-              <a:t>Per-team sentiment, event tags, controversy flag.</a:t>
-            </a:r>
-            <a:endParaRPr lang="en-US" sz="1050" dirty="0"/>
+              <a:t>Per-team sentiment, event tags, controversy.</a:t>
+            </a:r>
+            <a:endParaRPr lang="en-US" sz="950" dirty="0"/>
           </a:p>
         </p:txBody>
       </p:sp>
@@ -12235,8 +12861,105 @@
         </p:nvSpPr>
         <p:spPr>
           <a:xfrm>
-            <a:off x="457200" y="3931920"/>
-            <a:ext cx="8229600" cy="868680"/>
+            <a:off x="5852160" y="1325880"/>
+            <a:ext cx="2834640" cy="2103120"/>
+          </a:xfrm>
+          <a:prstGeom prst="rect">
+            <a:avLst/>
+          </a:prstGeom>
+          <a:solidFill>
+            <a:srgbClr val="FFFFFF"/>
+          </a:solidFill>
+          <a:ln w="6350">
+            <a:solidFill>
+              <a:srgbClr val="D7DEE5"/>
+            </a:solidFill>
+            <a:prstDash val="solid"/>
+          </a:ln>
+          <a:effectLst>
+            <a:outerShdw sx="100000" sy="100000" kx="0" ky="0" algn="bl" rotWithShape="0" blurRad="101600" dist="25400" dir="8100000">
+              <a:srgbClr val="000000">
+                <a:alpha val="10000"/>
+              </a:srgbClr>
+            </a:outerShdw>
+          </a:effectLst>
+        </p:spPr>
+      </p:sp>
+      <p:pic>
+        <p:nvPicPr>
+          <p:cNvPr id="33" name="Image 0" descr="/Users/m2/Projects/STAT 5243/43 Project 4/figures/07_team_style_pca.png">    </p:cNvPr>
+          <p:cNvPicPr>
+            <a:picLocks noChangeAspect="1"/>
+          </p:cNvPicPr>
+          <p:nvPr/>
+        </p:nvPicPr>
+        <p:blipFill>
+          <a:blip r:embed="rId1"/>
+          <a:srcRect l="0" r="0" t="0" b="0"/>
+          <a:stretch/>
+        </p:blipFill>
+        <p:spPr>
+          <a:xfrm>
+            <a:off x="5907024" y="1399032"/>
+            <a:ext cx="2724912" cy="1956816"/>
+          </a:xfrm>
+          <a:prstGeom prst="rect">
+            <a:avLst/>
+          </a:prstGeom>
+        </p:spPr>
+      </p:pic>
+      <p:sp>
+        <p:nvSpPr>
+          <p:cNvPr id="34" name="Text 31"/>
+          <p:cNvSpPr/>
+          <p:nvPr/>
+        </p:nvSpPr>
+        <p:spPr>
+          <a:xfrm>
+            <a:off x="5852160" y="3447288"/>
+            <a:ext cx="2834640" cy="365760"/>
+          </a:xfrm>
+          <a:prstGeom prst="rect">
+            <a:avLst/>
+          </a:prstGeom>
+          <a:noFill/>
+          <a:ln/>
+        </p:spPr>
+        <p:txBody>
+          <a:bodyPr wrap="square" lIns="0" tIns="0" rIns="0" bIns="0" rtlCol="0" anchor="ctr"/>
+          <a:lstStyle/>
+          <a:p>
+            <a:pPr indent="0" marL="0">
+              <a:lnSpc>
+                <a:spcPct val="120000"/>
+              </a:lnSpc>
+              <a:buNone/>
+            </a:pPr>
+            <a:r>
+              <a:rPr lang="en-US" sz="900" i="1" dirty="0">
+                <a:solidFill>
+                  <a:srgbClr val="5A6573"/>
+                </a:solidFill>
+                <a:latin typeface="Calibri" pitchFamily="34" charset="0"/>
+                <a:ea typeface="Calibri" pitchFamily="34" charset="-122"/>
+                <a:cs typeface="Calibri" pitchFamily="34" charset="-120"/>
+              </a:rPr>
+              <a:t>Cluster 3 = elite (Liverpool / City). Cluster 1 = relegation.</a:t>
+            </a:r>
+            <a:endParaRPr lang="en-US" sz="900" dirty="0"/>
+          </a:p>
+        </p:txBody>
+      </p:sp>
+      <p:sp>
+        <p:nvSpPr>
+          <p:cNvPr id="35" name="Shape 32"/>
+          <p:cNvSpPr/>
+          <p:nvPr/>
+        </p:nvSpPr>
+        <p:spPr>
+          <a:xfrm>
+            <a:off x="457200" y="3950208"/>
+            <a:ext cx="8229600" cy="777240"/>
           </a:xfrm>
           <a:prstGeom prst="rect">
             <a:avLst/>
@@ -12249,14 +12972,14 @@
       </p:sp>
       <p:sp>
         <p:nvSpPr>
-          <p:cNvPr id="33" name="Shape 31"/>
-          <p:cNvSpPr/>
-          <p:nvPr/>
-        </p:nvSpPr>
-        <p:spPr>
-          <a:xfrm>
-            <a:off x="457200" y="3931920"/>
-            <a:ext cx="54864" cy="868680"/>
+          <p:cNvPr id="36" name="Shape 33"/>
+          <p:cNvSpPr/>
+          <p:nvPr/>
+        </p:nvSpPr>
+        <p:spPr>
+          <a:xfrm>
+            <a:off x="457200" y="3950208"/>
+            <a:ext cx="54864" cy="777240"/>
           </a:xfrm>
           <a:prstGeom prst="rect">
             <a:avLst/>
@@ -12269,14 +12992,14 @@
       </p:sp>
       <p:sp>
         <p:nvSpPr>
-          <p:cNvPr id="34" name="Text 32"/>
+          <p:cNvPr id="37" name="Text 34"/>
           <p:cNvSpPr/>
           <p:nvPr/>
         </p:nvSpPr>
         <p:spPr>
           <a:xfrm>
             <a:off x="640080" y="4005072"/>
-            <a:ext cx="3657600" cy="256032"/>
+            <a:ext cx="3657600" cy="201168"/>
           </a:xfrm>
           <a:prstGeom prst="rect">
             <a:avLst/>
@@ -12292,7 +13015,7 @@
               <a:buNone/>
             </a:pPr>
             <a:r>
-              <a:rPr lang="en-US" sz="1000" b="1" spc="400" kern="0" dirty="0">
+              <a:rPr lang="en-US" sz="900" b="1" spc="400" kern="0" dirty="0">
                 <a:solidFill>
                   <a:srgbClr val="B9D9EB"/>
                 </a:solidFill>
@@ -12302,20 +13025,20 @@
               </a:rPr>
               <a:t>ANTI-LEAKAGE DISCIPLINE</a:t>
             </a:r>
-            <a:endParaRPr lang="en-US" sz="1000" dirty="0"/>
-          </a:p>
-        </p:txBody>
-      </p:sp>
-      <p:sp>
-        <p:nvSpPr>
-          <p:cNvPr id="35" name="Text 33"/>
-          <p:cNvSpPr/>
-          <p:nvPr/>
-        </p:nvSpPr>
-        <p:spPr>
-          <a:xfrm>
-            <a:off x="640080" y="4251960"/>
-            <a:ext cx="7863840" cy="274320"/>
+            <a:endParaRPr lang="en-US" sz="900" dirty="0"/>
+          </a:p>
+        </p:txBody>
+      </p:sp>
+      <p:sp>
+        <p:nvSpPr>
+          <p:cNvPr id="38" name="Text 35"/>
+          <p:cNvSpPr/>
+          <p:nvPr/>
+        </p:nvSpPr>
+        <p:spPr>
+          <a:xfrm>
+            <a:off x="640080" y="4206240"/>
+            <a:ext cx="7863840" cy="237744"/>
           </a:xfrm>
           <a:prstGeom prst="rect">
             <a:avLst/>
@@ -12331,7 +13054,7 @@
               <a:buNone/>
             </a:pPr>
             <a:r>
-              <a:rPr lang="en-US" sz="1100" b="1" dirty="0">
+              <a:rPr lang="en-US" sz="1050" b="1" dirty="0">
                 <a:solidFill>
                   <a:srgbClr val="FFFFFF"/>
                 </a:solidFill>
@@ -12339,13 +13062,13 @@
                 <a:ea typeface="Calibri" pitchFamily="34" charset="-122"/>
                 <a:cs typeface="Calibri" pitchFamily="34" charset="-120"/>
               </a:rPr>
-              <a:t>No random k-fold.   </a:t>
+              <a:t>No random k-fold — walk-forward CV only.   </a:t>
             </a:r>
             <a:pPr indent="0" marL="0">
               <a:buNone/>
             </a:pPr>
             <a:r>
-              <a:rPr lang="en-US" sz="1100" dirty="0">
+              <a:rPr lang="en-US" sz="1050" dirty="0">
                 <a:solidFill>
                   <a:srgbClr val="B9D9EB"/>
                 </a:solidFill>
@@ -12353,27 +13076,80 @@
                 <a:ea typeface="Calibri" pitchFamily="34" charset="-122"/>
                 <a:cs typeface="Calibri" pitchFamily="34" charset="-120"/>
               </a:rPr>
-              <a:t>Walk-forward CV only.   </a:t>
+              <a:t>Every rolling feature uses a strict </a:t>
             </a:r>
             <a:pPr indent="0" marL="0">
               <a:buNone/>
             </a:pPr>
             <a:r>
-              <a:rPr lang="en-US" sz="1100" dirty="0">
-                <a:solidFill>
-                  <a:srgbClr val="FFFFFF"/>
+              <a:rPr lang="en-US" sz="1050" dirty="0">
+                <a:solidFill>
+                  <a:srgbClr val="E07A5F"/>
+                </a:solidFill>
+                <a:latin typeface="Consolas" pitchFamily="34" charset="0"/>
+                <a:ea typeface="Consolas" pitchFamily="34" charset="-122"/>
+                <a:cs typeface="Consolas" pitchFamily="34" charset="-120"/>
+              </a:rPr>
+              <a:t>as_of</a:t>
+            </a:r>
+            <a:pPr indent="0" marL="0">
+              <a:buNone/>
+            </a:pPr>
+            <a:r>
+              <a:rPr lang="en-US" sz="1050" dirty="0">
+                <a:solidFill>
+                  <a:srgbClr val="B9D9EB"/>
                 </a:solidFill>
                 <a:latin typeface="Calibri" pitchFamily="34" charset="0"/>
                 <a:ea typeface="Calibri" pitchFamily="34" charset="-122"/>
                 <a:cs typeface="Calibri" pitchFamily="34" charset="-120"/>
               </a:rPr>
-              <a:t>Every rolling feature uses a strict </a:t>
-            </a:r>
+              <a:t> cutoff.</a:t>
+            </a:r>
+            <a:endParaRPr lang="en-US" sz="1050" dirty="0"/>
+          </a:p>
+        </p:txBody>
+      </p:sp>
+      <p:sp>
+        <p:nvSpPr>
+          <p:cNvPr id="39" name="Text 36"/>
+          <p:cNvSpPr/>
+          <p:nvPr/>
+        </p:nvSpPr>
+        <p:spPr>
+          <a:xfrm>
+            <a:off x="640080" y="4443984"/>
+            <a:ext cx="7863840" cy="237744"/>
+          </a:xfrm>
+          <a:prstGeom prst="rect">
+            <a:avLst/>
+          </a:prstGeom>
+          <a:noFill/>
+          <a:ln/>
+        </p:spPr>
+        <p:txBody>
+          <a:bodyPr wrap="square" lIns="0" tIns="0" rIns="0" bIns="0" rtlCol="0" anchor="ctr"/>
+          <a:lstStyle/>
+          <a:p>
             <a:pPr indent="0" marL="0">
               <a:buNone/>
             </a:pPr>
             <a:r>
-              <a:rPr lang="en-US" sz="1100" dirty="0">
+              <a:rPr lang="en-US" sz="1000" i="1" dirty="0">
+                <a:solidFill>
+                  <a:srgbClr val="B9D9EB"/>
+                </a:solidFill>
+                <a:latin typeface="Calibri" pitchFamily="34" charset="0"/>
+                <a:ea typeface="Calibri" pitchFamily="34" charset="-122"/>
+                <a:cs typeface="Calibri" pitchFamily="34" charset="-120"/>
+              </a:rPr>
+              <a:t>Unit-tested by  </a:t>
+            </a:r>
+            <a:pPr indent="0" marL="0">
+              <a:buNone/>
+            </a:pPr>
+            <a:r>
+              <a:rPr lang="en-US" sz="1000" b="1" i="1" dirty="0">
                 <a:solidFill>
                   <a:srgbClr val="E07A5F"/>
                 </a:solidFill>
@@ -12381,90 +13157,23 @@
                 <a:ea typeface="Consolas" pitchFamily="34" charset="-122"/>
                 <a:cs typeface="Consolas" pitchFamily="34" charset="-120"/>
               </a:rPr>
-              <a:t>as_of</a:t>
+              <a:t>tests.test_no_temporal_leakage</a:t>
             </a:r>
             <a:pPr indent="0" marL="0">
               <a:buNone/>
             </a:pPr>
             <a:r>
-              <a:rPr lang="en-US" sz="1100" dirty="0">
-                <a:solidFill>
-                  <a:srgbClr val="FFFFFF"/>
+              <a:rPr lang="en-US" sz="1000" i="1" dirty="0">
+                <a:solidFill>
+                  <a:srgbClr val="B9D9EB"/>
                 </a:solidFill>
                 <a:latin typeface="Calibri" pitchFamily="34" charset="0"/>
                 <a:ea typeface="Calibri" pitchFamily="34" charset="-122"/>
                 <a:cs typeface="Calibri" pitchFamily="34" charset="-120"/>
               </a:rPr>
-              <a:t> cutoff: only matches with kickoff &lt; current match contribute.</a:t>
-            </a:r>
-            <a:endParaRPr lang="en-US" sz="1100" dirty="0"/>
-          </a:p>
-        </p:txBody>
-      </p:sp>
-      <p:sp>
-        <p:nvSpPr>
-          <p:cNvPr id="36" name="Text 34"/>
-          <p:cNvSpPr/>
-          <p:nvPr/>
-        </p:nvSpPr>
-        <p:spPr>
-          <a:xfrm>
-            <a:off x="640080" y="4507992"/>
-            <a:ext cx="7863840" cy="274320"/>
-          </a:xfrm>
-          <a:prstGeom prst="rect">
-            <a:avLst/>
-          </a:prstGeom>
-          <a:noFill/>
-          <a:ln/>
-        </p:spPr>
-        <p:txBody>
-          <a:bodyPr wrap="square" lIns="0" tIns="0" rIns="0" bIns="0" rtlCol="0" anchor="ctr"/>
-          <a:lstStyle/>
-          <a:p>
-            <a:pPr indent="0" marL="0">
-              <a:buNone/>
-            </a:pPr>
-            <a:r>
-              <a:rPr lang="en-US" sz="1050" i="1" dirty="0">
-                <a:solidFill>
-                  <a:srgbClr val="B9D9EB"/>
-                </a:solidFill>
-                <a:latin typeface="Calibri" pitchFamily="34" charset="0"/>
-                <a:ea typeface="Calibri" pitchFamily="34" charset="-122"/>
-                <a:cs typeface="Calibri" pitchFamily="34" charset="-120"/>
-              </a:rPr>
-              <a:t>Unit-tested by  </a:t>
-            </a:r>
-            <a:pPr indent="0" marL="0">
-              <a:buNone/>
-            </a:pPr>
-            <a:r>
-              <a:rPr lang="en-US" sz="1050" b="1" i="1" dirty="0">
-                <a:solidFill>
-                  <a:srgbClr val="E07A5F"/>
-                </a:solidFill>
-                <a:latin typeface="Consolas" pitchFamily="34" charset="0"/>
-                <a:ea typeface="Consolas" pitchFamily="34" charset="-122"/>
-                <a:cs typeface="Consolas" pitchFamily="34" charset="-120"/>
-              </a:rPr>
-              <a:t>tests.test_no_temporal_leakage</a:t>
-            </a:r>
-            <a:pPr indent="0" marL="0">
-              <a:buNone/>
-            </a:pPr>
-            <a:r>
-              <a:rPr lang="en-US" sz="1050" i="1" dirty="0">
-                <a:solidFill>
-                  <a:srgbClr val="B9D9EB"/>
-                </a:solidFill>
-                <a:latin typeface="Calibri" pitchFamily="34" charset="0"/>
-                <a:ea typeface="Calibri" pitchFamily="34" charset="-122"/>
-                <a:cs typeface="Calibri" pitchFamily="34" charset="-120"/>
-              </a:rPr>
-              <a:t>  in the CI pipeline on every push.</a:t>
-            </a:r>
-            <a:endParaRPr lang="en-US" sz="1050" dirty="0"/>
+              <a:t>  in CI on every push.</a:t>
+            </a:r>
+            <a:endParaRPr lang="en-US" sz="1000" dirty="0"/>
           </a:p>
         </p:txBody>
       </p:sp>
@@ -12666,7 +13375,7 @@
         <p:spPr>
           <a:xfrm>
             <a:off x="457200" y="548640"/>
-            <a:ext cx="8229600" cy="594360"/>
+            <a:ext cx="8229600" cy="868680"/>
           </a:xfrm>
           <a:prstGeom prst="rect">
             <a:avLst/>
@@ -12679,10 +13388,13 @@
           <a:lstStyle/>
           <a:p>
             <a:pPr indent="0" marL="0">
-              <a:buNone/>
-            </a:pPr>
-            <a:r>
-              <a:rPr lang="en-US" sz="2800" b="1" dirty="0">
+              <a:lnSpc>
+                <a:spcPct val="105000"/>
+              </a:lnSpc>
+              <a:buNone/>
+            </a:pPr>
+            <a:r>
+              <a:rPr lang="en-US" sz="2400" b="1" dirty="0">
                 <a:solidFill>
                   <a:srgbClr val="0B2545"/>
                 </a:solidFill>
@@ -12690,9 +13402,9 @@
                 <a:ea typeface="Georgia" pitchFamily="34" charset="-122"/>
                 <a:cs typeface="Georgia" pitchFamily="34" charset="-120"/>
               </a:rPr>
-              <a:t>Six models, one validation strategy</a:t>
-            </a:r>
-            <a:endParaRPr lang="en-US" sz="2800" dirty="0"/>
+              <a:t>Three baselines, three models, one walk-forward validation.</a:t>
+            </a:r>
+            <a:endParaRPr lang="en-US" sz="2400" dirty="0"/>
           </a:p>
         </p:txBody>
       </p:sp>
@@ -13274,7 +13986,7 @@
                           <a:ea typeface="Calibri" pitchFamily="34" charset="-122"/>
                           <a:cs typeface="Calibri" pitchFamily="34" charset="-120"/>
                         </a:rPr>
-                        <a:t>Predicts historical 46/25/29 H/D/A — the calibration floor.</a:t>
+                        <a:t>Predicts historical 46/25/29 H/D/A — calibration floor.</a:t>
                       </a:r>
                       <a:endParaRPr lang="en-US" sz="1050" dirty="0">
                         <a:latin typeface="Calibri" charset="0"/>
@@ -13471,7 +14183,7 @@
                           <a:ea typeface="Calibri" pitchFamily="34" charset="-122"/>
                           <a:cs typeface="Calibri" pitchFamily="34" charset="-120"/>
                         </a:rPr>
-                        <a:t>Pinnacle closing odds, vig-removed. The hardest bar to clear.</a:t>
+                        <a:t>Pinnacle closing odds, vig-removed. Hardest bar to clear.</a:t>
                       </a:r>
                       <a:endParaRPr lang="en-US" sz="1050" dirty="0">
                         <a:latin typeface="Calibri" charset="0"/>
@@ -13668,7 +14380,7 @@
                           <a:ea typeface="Calibri" pitchFamily="34" charset="-122"/>
                           <a:cs typeface="Calibri" pitchFamily="34" charset="-120"/>
                         </a:rPr>
-                        <a:t>Reads off feature signs and magnitudes for sanity-checking.</a:t>
+                        <a:t>Reads off feature signs and magnitudes for sanity-checks.</a:t>
                       </a:r>
                       <a:endParaRPr lang="en-US" sz="1050" dirty="0">
                         <a:latin typeface="Calibri" charset="0"/>
@@ -14259,7 +14971,7 @@
                           <a:ea typeface="Calibri" pitchFamily="34" charset="-122"/>
                           <a:cs typeface="Calibri" pitchFamily="34" charset="-120"/>
                         </a:rPr>
-                        <a:t>Domain-specific; gives joint score distribution + outcome.</a:t>
+                        <a:t>Domain-specific; gives joint scores + outcome via marginal.</a:t>
                       </a:r>
                       <a:endParaRPr lang="en-US" sz="1050" dirty="0">
                         <a:latin typeface="Calibri" charset="0"/>
@@ -14407,7 +15119,7 @@
                 <a:ea typeface="Calibri" pitchFamily="34" charset="-122"/>
                 <a:cs typeface="Calibri" pitchFamily="34" charset="-120"/>
               </a:rPr>
-              <a:t>Walk-forward expanding-window CV</a:t>
+              <a:t>Walk-forward expanding window  </a:t>
             </a:r>
             <a:pPr indent="0" marL="0">
               <a:lnSpc>
@@ -14424,7 +15136,7 @@
                 <a:ea typeface="Calibri" pitchFamily="34" charset="-122"/>
                 <a:cs typeface="Calibri" pitchFamily="34" charset="-120"/>
               </a:rPr>
-              <a:t>  ·  train 2000-01..2018-19, validate 2019-20, hold-out test 2020-21.
+              <a:t>·  train 2000-01..2018-19, validate 2019-20, hold-out test 2020-21.
 </a:t>
             </a:r>
             <a:pPr indent="0" marL="0">
@@ -14663,7 +15375,7 @@
         <p:spPr>
           <a:xfrm>
             <a:off x="457200" y="548640"/>
-            <a:ext cx="8229600" cy="594360"/>
+            <a:ext cx="8229600" cy="868680"/>
           </a:xfrm>
           <a:prstGeom prst="rect">
             <a:avLst/>
@@ -14676,10 +15388,13 @@
           <a:lstStyle/>
           <a:p>
             <a:pPr indent="0" marL="0">
-              <a:buNone/>
-            </a:pPr>
-            <a:r>
-              <a:rPr lang="en-US" sz="2800" b="1" dirty="0">
+              <a:lnSpc>
+                <a:spcPct val="105000"/>
+              </a:lnSpc>
+              <a:buNone/>
+            </a:pPr>
+            <a:r>
+              <a:rPr lang="en-US" sz="2200" b="1" dirty="0">
                 <a:solidFill>
                   <a:srgbClr val="0B2545"/>
                 </a:solidFill>
@@ -14687,9 +15402,9 @@
                 <a:ea typeface="Georgia" pitchFamily="34" charset="-122"/>
                 <a:cs typeface="Georgia" pitchFamily="34" charset="-120"/>
               </a:rPr>
-              <a:t>The market wins. Our model gets within touching distance.</a:t>
-            </a:r>
-            <a:endParaRPr lang="en-US" sz="2800" dirty="0"/>
+              <a:t>The closing-odds market beats every model — but only just.</a:t>
+            </a:r>
+            <a:endParaRPr lang="en-US" sz="2200" dirty="0"/>
           </a:p>
         </p:txBody>
       </p:sp>
@@ -14708,22 +15423,22 @@
           </p:nvPr>
         </p:nvGraphicFramePr>
         <p:xfrm>
-          <a:off x="457200" y="1325880"/>
-          <a:ext cx="5760720" cy="2606040"/>
+          <a:off x="457200" y="1417320"/>
+          <a:ext cx="5349240" cy="2514600"/>
         </p:xfrm>
         <a:graphic>
           <a:graphicData uri="http://schemas.openxmlformats.org/drawingml/2006/table">
             <a:tbl>
               <a:tblPr/>
               <a:tblGrid>
-                <a:gridCol w="2286000"/>
-                <a:gridCol w="731520"/>
-                <a:gridCol w="731520"/>
-                <a:gridCol w="640080"/>
-                <a:gridCol w="731520"/>
-                <a:gridCol w="640080"/>
+                <a:gridCol w="2194560"/>
+                <a:gridCol w="502920"/>
+                <a:gridCol w="777240"/>
+                <a:gridCol w="594360"/>
+                <a:gridCol w="502920"/>
+                <a:gridCol w="502920"/>
               </a:tblGrid>
-              <a:tr h="310896">
+              <a:tr h="301752">
                 <a:tc>
                   <a:txBody>
                     <a:bodyPr/>
@@ -14809,7 +15524,7 @@
                           <a:ea typeface="Calibri" pitchFamily="34" charset="-122"/>
                           <a:cs typeface="Calibri" pitchFamily="34" charset="-120"/>
                         </a:rPr>
-                        <a:t>Accuracy</a:t>
+                        <a:t>Acc</a:t>
                       </a:r>
                       <a:endParaRPr lang="en-US" sz="1050" dirty="0">
                         <a:latin typeface="Calibri" charset="0"/>
@@ -15013,7 +15728,7 @@
                           <a:ea typeface="Calibri" pitchFamily="34" charset="-122"/>
                           <a:cs typeface="Calibri" pitchFamily="34" charset="-120"/>
                         </a:rPr>
-                        <a:t>F1 macro</a:t>
+                        <a:t>F1</a:t>
                       </a:r>
                       <a:endParaRPr lang="en-US" sz="1050" dirty="0">
                         <a:latin typeface="Calibri" charset="0"/>
@@ -15081,7 +15796,7 @@
                           <a:ea typeface="Calibri" pitchFamily="34" charset="-122"/>
                           <a:cs typeface="Calibri" pitchFamily="34" charset="-120"/>
                         </a:rPr>
-                        <a:t>AUC OvR</a:t>
+                        <a:t>AUC</a:t>
                       </a:r>
                       <a:endParaRPr lang="en-US" sz="1050" dirty="0">
                         <a:latin typeface="Calibri" charset="0"/>
@@ -15133,7 +15848,7 @@
                   </a:tcPr>
                 </a:tc>
               </a:tr>
-              <a:tr h="310896">
+              <a:tr h="301752">
                 <a:tc>
                   <a:txBody>
                     <a:bodyPr/>
@@ -15143,7 +15858,7 @@
                         <a:buNone/>
                       </a:pPr>
                       <a:r>
-                        <a:rPr lang="en-US" sz="1000" b="1" dirty="0">
+                        <a:rPr lang="en-US" sz="950" b="1" dirty="0">
                           <a:solidFill>
                             <a:srgbClr val="E07A5F"/>
                           </a:solidFill>
@@ -15153,7 +15868,7 @@
                         </a:rPr>
                         <a:t>Market-implied (Pinnacle close)</a:t>
                       </a:r>
-                      <a:endParaRPr lang="en-US" sz="1000" dirty="0">
+                      <a:endParaRPr lang="en-US" sz="950" dirty="0">
                         <a:latin typeface="Calibri" charset="0"/>
                         <a:ea typeface="Calibri" charset="0"/>
                         <a:cs typeface="Calibri" charset="0"/>
@@ -15211,7 +15926,7 @@
                         <a:buNone/>
                       </a:pPr>
                       <a:r>
-                        <a:rPr lang="en-US" sz="1000" b="1" dirty="0">
+                        <a:rPr lang="en-US" sz="950" b="1" dirty="0">
                           <a:solidFill>
                             <a:srgbClr val="E07A5F"/>
                           </a:solidFill>
@@ -15221,7 +15936,7 @@
                         </a:rPr>
                         <a:t>0.516</a:t>
                       </a:r>
-                      <a:endParaRPr lang="en-US" sz="1000" dirty="0">
+                      <a:endParaRPr lang="en-US" sz="950" dirty="0">
                         <a:latin typeface="Calibri" charset="0"/>
                         <a:ea typeface="Calibri" charset="0"/>
                         <a:cs typeface="Calibri" charset="0"/>
@@ -15279,7 +15994,7 @@
                         <a:buNone/>
                       </a:pPr>
                       <a:r>
-                        <a:rPr lang="en-US" sz="1000" b="1" dirty="0">
+                        <a:rPr lang="en-US" sz="950" b="1" dirty="0">
                           <a:solidFill>
                             <a:srgbClr val="E07A5F"/>
                           </a:solidFill>
@@ -15289,7 +16004,7 @@
                         </a:rPr>
                         <a:t>0.997</a:t>
                       </a:r>
-                      <a:endParaRPr lang="en-US" sz="1000" dirty="0">
+                      <a:endParaRPr lang="en-US" sz="950" dirty="0">
                         <a:latin typeface="Calibri" charset="0"/>
                         <a:ea typeface="Calibri" charset="0"/>
                         <a:cs typeface="Calibri" charset="0"/>
@@ -15347,7 +16062,7 @@
                         <a:buNone/>
                       </a:pPr>
                       <a:r>
-                        <a:rPr lang="en-US" sz="1000" b="1" dirty="0">
+                        <a:rPr lang="en-US" sz="950" b="1" dirty="0">
                           <a:solidFill>
                             <a:srgbClr val="E07A5F"/>
                           </a:solidFill>
@@ -15357,7 +16072,7 @@
                         </a:rPr>
                         <a:t>0.592</a:t>
                       </a:r>
-                      <a:endParaRPr lang="en-US" sz="1000" dirty="0">
+                      <a:endParaRPr lang="en-US" sz="950" dirty="0">
                         <a:latin typeface="Calibri" charset="0"/>
                         <a:ea typeface="Calibri" charset="0"/>
                         <a:cs typeface="Calibri" charset="0"/>
@@ -15415,7 +16130,7 @@
                         <a:buNone/>
                       </a:pPr>
                       <a:r>
-                        <a:rPr lang="en-US" sz="1000" b="1" dirty="0">
+                        <a:rPr lang="en-US" sz="950" b="1" dirty="0">
                           <a:solidFill>
                             <a:srgbClr val="E07A5F"/>
                           </a:solidFill>
@@ -15425,7 +16140,7 @@
                         </a:rPr>
                         <a:t>0.385</a:t>
                       </a:r>
-                      <a:endParaRPr lang="en-US" sz="1000" dirty="0">
+                      <a:endParaRPr lang="en-US" sz="950" dirty="0">
                         <a:latin typeface="Calibri" charset="0"/>
                         <a:ea typeface="Calibri" charset="0"/>
                         <a:cs typeface="Calibri" charset="0"/>
@@ -15483,7 +16198,7 @@
                         <a:buNone/>
                       </a:pPr>
                       <a:r>
-                        <a:rPr lang="en-US" sz="1000" b="1" dirty="0">
+                        <a:rPr lang="en-US" sz="950" b="1" dirty="0">
                           <a:solidFill>
                             <a:srgbClr val="E07A5F"/>
                           </a:solidFill>
@@ -15493,7 +16208,7 @@
                         </a:rPr>
                         <a:t>0.669</a:t>
                       </a:r>
-                      <a:endParaRPr lang="en-US" sz="1000" dirty="0">
+                      <a:endParaRPr lang="en-US" sz="950" dirty="0">
                         <a:latin typeface="Calibri" charset="0"/>
                         <a:ea typeface="Calibri" charset="0"/>
                         <a:cs typeface="Calibri" charset="0"/>
@@ -15543,7 +16258,7 @@
                   </a:tcPr>
                 </a:tc>
               </a:tr>
-              <a:tr h="310896">
+              <a:tr h="301752">
                 <a:tc>
                   <a:txBody>
                     <a:bodyPr/>
@@ -15553,7 +16268,7 @@
                         <a:buNone/>
                       </a:pPr>
                       <a:r>
-                        <a:rPr lang="en-US" sz="1000" dirty="0">
+                        <a:rPr lang="en-US" sz="950" dirty="0">
                           <a:solidFill>
                             <a:srgbClr val="1F2933"/>
                           </a:solidFill>
@@ -15563,7 +16278,7 @@
                         </a:rPr>
                         <a:t>Random Forest</a:t>
                       </a:r>
-                      <a:endParaRPr lang="en-US" sz="1000" dirty="0">
+                      <a:endParaRPr lang="en-US" sz="950" dirty="0">
                         <a:latin typeface="Calibri" charset="0"/>
                         <a:ea typeface="Calibri" charset="0"/>
                         <a:cs typeface="Calibri" charset="0"/>
@@ -15618,7 +16333,7 @@
                         <a:buNone/>
                       </a:pPr>
                       <a:r>
-                        <a:rPr lang="en-US" sz="1000" dirty="0">
+                        <a:rPr lang="en-US" sz="950" dirty="0">
                           <a:solidFill>
                             <a:srgbClr val="1F2933"/>
                           </a:solidFill>
@@ -15626,9 +16341,9 @@
                           <a:ea typeface="Calibri" pitchFamily="34" charset="-122"/>
                           <a:cs typeface="Calibri" pitchFamily="34" charset="-120"/>
                         </a:rPr>
-                        <a:t>0.513</a:t>
+                        <a:t>0.489</a:t>
                       </a:r>
-                      <a:endParaRPr lang="en-US" sz="1000" dirty="0">
+                      <a:endParaRPr lang="en-US" sz="950" dirty="0">
                         <a:latin typeface="Calibri" charset="0"/>
                         <a:ea typeface="Calibri" charset="0"/>
                         <a:cs typeface="Calibri" charset="0"/>
@@ -15683,7 +16398,7 @@
                         <a:buNone/>
                       </a:pPr>
                       <a:r>
-                        <a:rPr lang="en-US" sz="1000" dirty="0">
+                        <a:rPr lang="en-US" sz="950" dirty="0">
                           <a:solidFill>
                             <a:srgbClr val="1F2933"/>
                           </a:solidFill>
@@ -15691,9 +16406,9 @@
                           <a:ea typeface="Calibri" pitchFamily="34" charset="-122"/>
                           <a:cs typeface="Calibri" pitchFamily="34" charset="-120"/>
                         </a:rPr>
-                        <a:t>1.017</a:t>
+                        <a:t>1.020</a:t>
                       </a:r>
-                      <a:endParaRPr lang="en-US" sz="1000" dirty="0">
+                      <a:endParaRPr lang="en-US" sz="950" dirty="0">
                         <a:latin typeface="Calibri" charset="0"/>
                         <a:ea typeface="Calibri" charset="0"/>
                         <a:cs typeface="Calibri" charset="0"/>
@@ -15748,7 +16463,7 @@
                         <a:buNone/>
                       </a:pPr>
                       <a:r>
-                        <a:rPr lang="en-US" sz="1000" dirty="0">
+                        <a:rPr lang="en-US" sz="950" dirty="0">
                           <a:solidFill>
                             <a:srgbClr val="1F2933"/>
                           </a:solidFill>
@@ -15756,9 +16471,9 @@
                           <a:ea typeface="Calibri" pitchFamily="34" charset="-122"/>
                           <a:cs typeface="Calibri" pitchFamily="34" charset="-120"/>
                         </a:rPr>
-                        <a:t>0.606</a:t>
+                        <a:t>0.608</a:t>
                       </a:r>
-                      <a:endParaRPr lang="en-US" sz="1000" dirty="0">
+                      <a:endParaRPr lang="en-US" sz="950" dirty="0">
                         <a:latin typeface="Calibri" charset="0"/>
                         <a:ea typeface="Calibri" charset="0"/>
                         <a:cs typeface="Calibri" charset="0"/>
@@ -15813,7 +16528,7 @@
                         <a:buNone/>
                       </a:pPr>
                       <a:r>
-                        <a:rPr lang="en-US" sz="1000" dirty="0">
+                        <a:rPr lang="en-US" sz="950" dirty="0">
                           <a:solidFill>
                             <a:srgbClr val="1F2933"/>
                           </a:solidFill>
@@ -15821,9 +16536,9 @@
                           <a:ea typeface="Calibri" pitchFamily="34" charset="-122"/>
                           <a:cs typeface="Calibri" pitchFamily="34" charset="-120"/>
                         </a:rPr>
-                        <a:t>0.461</a:t>
+                        <a:t>0.448</a:t>
                       </a:r>
-                      <a:endParaRPr lang="en-US" sz="1000" dirty="0">
+                      <a:endParaRPr lang="en-US" sz="950" dirty="0">
                         <a:latin typeface="Calibri" charset="0"/>
                         <a:ea typeface="Calibri" charset="0"/>
                         <a:cs typeface="Calibri" charset="0"/>
@@ -15878,7 +16593,7 @@
                         <a:buNone/>
                       </a:pPr>
                       <a:r>
-                        <a:rPr lang="en-US" sz="1000" dirty="0">
+                        <a:rPr lang="en-US" sz="950" dirty="0">
                           <a:solidFill>
                             <a:srgbClr val="1F2933"/>
                           </a:solidFill>
@@ -15888,7 +16603,7 @@
                         </a:rPr>
                         <a:t>0.646</a:t>
                       </a:r>
-                      <a:endParaRPr lang="en-US" sz="1000" dirty="0">
+                      <a:endParaRPr lang="en-US" sz="950" dirty="0">
                         <a:latin typeface="Calibri" charset="0"/>
                         <a:ea typeface="Calibri" charset="0"/>
                         <a:cs typeface="Calibri" charset="0"/>
@@ -15935,7 +16650,7 @@
                   </a:tcPr>
                 </a:tc>
               </a:tr>
-              <a:tr h="310896">
+              <a:tr h="301752">
                 <a:tc>
                   <a:txBody>
                     <a:bodyPr/>
@@ -15945,7 +16660,7 @@
                         <a:buNone/>
                       </a:pPr>
                       <a:r>
-                        <a:rPr lang="en-US" sz="1000" dirty="0">
+                        <a:rPr lang="en-US" sz="950" dirty="0">
                           <a:solidFill>
                             <a:srgbClr val="1F2933"/>
                           </a:solidFill>
@@ -15955,7 +16670,7 @@
                         </a:rPr>
                         <a:t>Logistic regression</a:t>
                       </a:r>
-                      <a:endParaRPr lang="en-US" sz="1000" dirty="0">
+                      <a:endParaRPr lang="en-US" sz="950" dirty="0">
                         <a:latin typeface="Calibri" charset="0"/>
                         <a:ea typeface="Calibri" charset="0"/>
                         <a:cs typeface="Calibri" charset="0"/>
@@ -16010,7 +16725,7 @@
                         <a:buNone/>
                       </a:pPr>
                       <a:r>
-                        <a:rPr lang="en-US" sz="1000" dirty="0">
+                        <a:rPr lang="en-US" sz="950" dirty="0">
                           <a:solidFill>
                             <a:srgbClr val="1F2933"/>
                           </a:solidFill>
@@ -16018,9 +16733,9 @@
                           <a:ea typeface="Calibri" pitchFamily="34" charset="-122"/>
                           <a:cs typeface="Calibri" pitchFamily="34" charset="-120"/>
                         </a:rPr>
-                        <a:t>0.503</a:t>
+                        <a:t>0.495</a:t>
                       </a:r>
-                      <a:endParaRPr lang="en-US" sz="1000" dirty="0">
+                      <a:endParaRPr lang="en-US" sz="950" dirty="0">
                         <a:latin typeface="Calibri" charset="0"/>
                         <a:ea typeface="Calibri" charset="0"/>
                         <a:cs typeface="Calibri" charset="0"/>
@@ -16075,7 +16790,7 @@
                         <a:buNone/>
                       </a:pPr>
                       <a:r>
-                        <a:rPr lang="en-US" sz="1000" dirty="0">
+                        <a:rPr lang="en-US" sz="950" dirty="0">
                           <a:solidFill>
                             <a:srgbClr val="1F2933"/>
                           </a:solidFill>
@@ -16083,9 +16798,9 @@
                           <a:ea typeface="Calibri" pitchFamily="34" charset="-122"/>
                           <a:cs typeface="Calibri" pitchFamily="34" charset="-120"/>
                         </a:rPr>
-                        <a:t>1.026</a:t>
+                        <a:t>1.039</a:t>
                       </a:r>
-                      <a:endParaRPr lang="en-US" sz="1000" dirty="0">
+                      <a:endParaRPr lang="en-US" sz="950" dirty="0">
                         <a:latin typeface="Calibri" charset="0"/>
                         <a:ea typeface="Calibri" charset="0"/>
                         <a:cs typeface="Calibri" charset="0"/>
@@ -16140,7 +16855,7 @@
                         <a:buNone/>
                       </a:pPr>
                       <a:r>
-                        <a:rPr lang="en-US" sz="1000" dirty="0">
+                        <a:rPr lang="en-US" sz="950" dirty="0">
                           <a:solidFill>
                             <a:srgbClr val="1F2933"/>
                           </a:solidFill>
@@ -16148,9 +16863,9 @@
                           <a:ea typeface="Calibri" pitchFamily="34" charset="-122"/>
                           <a:cs typeface="Calibri" pitchFamily="34" charset="-120"/>
                         </a:rPr>
-                        <a:t>0.610</a:t>
+                        <a:t>0.617</a:t>
                       </a:r>
-                      <a:endParaRPr lang="en-US" sz="1000" dirty="0">
+                      <a:endParaRPr lang="en-US" sz="950" dirty="0">
                         <a:latin typeface="Calibri" charset="0"/>
                         <a:ea typeface="Calibri" charset="0"/>
                         <a:cs typeface="Calibri" charset="0"/>
@@ -16205,7 +16920,7 @@
                         <a:buNone/>
                       </a:pPr>
                       <a:r>
-                        <a:rPr lang="en-US" sz="1000" dirty="0">
+                        <a:rPr lang="en-US" sz="950" dirty="0">
                           <a:solidFill>
                             <a:srgbClr val="1F2933"/>
                           </a:solidFill>
@@ -16213,9 +16928,9 @@
                           <a:ea typeface="Calibri" pitchFamily="34" charset="-122"/>
                           <a:cs typeface="Calibri" pitchFamily="34" charset="-120"/>
                         </a:rPr>
-                        <a:t>0.466</a:t>
+                        <a:t>0.465</a:t>
                       </a:r>
-                      <a:endParaRPr lang="en-US" sz="1000" dirty="0">
+                      <a:endParaRPr lang="en-US" sz="950" dirty="0">
                         <a:latin typeface="Calibri" charset="0"/>
                         <a:ea typeface="Calibri" charset="0"/>
                         <a:cs typeface="Calibri" charset="0"/>
@@ -16270,7 +16985,7 @@
                         <a:buNone/>
                       </a:pPr>
                       <a:r>
-                        <a:rPr lang="en-US" sz="1000" dirty="0">
+                        <a:rPr lang="en-US" sz="950" dirty="0">
                           <a:solidFill>
                             <a:srgbClr val="1F2933"/>
                           </a:solidFill>
@@ -16278,9 +16993,9 @@
                           <a:ea typeface="Calibri" pitchFamily="34" charset="-122"/>
                           <a:cs typeface="Calibri" pitchFamily="34" charset="-120"/>
                         </a:rPr>
-                        <a:t>0.654</a:t>
+                        <a:t>0.645</a:t>
                       </a:r>
-                      <a:endParaRPr lang="en-US" sz="1000" dirty="0">
+                      <a:endParaRPr lang="en-US" sz="950" dirty="0">
                         <a:latin typeface="Calibri" charset="0"/>
                         <a:ea typeface="Calibri" charset="0"/>
                         <a:cs typeface="Calibri" charset="0"/>
@@ -16327,7 +17042,7 @@
                   </a:tcPr>
                 </a:tc>
               </a:tr>
-              <a:tr h="310896">
+              <a:tr h="301752">
                 <a:tc>
                   <a:txBody>
                     <a:bodyPr/>
@@ -16337,7 +17052,7 @@
                         <a:buNone/>
                       </a:pPr>
                       <a:r>
-                        <a:rPr lang="en-US" sz="1000" dirty="0">
+                        <a:rPr lang="en-US" sz="950" dirty="0">
                           <a:solidFill>
                             <a:srgbClr val="1F2933"/>
                           </a:solidFill>
@@ -16347,7 +17062,7 @@
                         </a:rPr>
                         <a:t>XGBoost</a:t>
                       </a:r>
-                      <a:endParaRPr lang="en-US" sz="1000" dirty="0">
+                      <a:endParaRPr lang="en-US" sz="950" dirty="0">
                         <a:latin typeface="Calibri" charset="0"/>
                         <a:ea typeface="Calibri" charset="0"/>
                         <a:cs typeface="Calibri" charset="0"/>
@@ -16402,7 +17117,7 @@
                         <a:buNone/>
                       </a:pPr>
                       <a:r>
-                        <a:rPr lang="en-US" sz="1000" dirty="0">
+                        <a:rPr lang="en-US" sz="950" dirty="0">
                           <a:solidFill>
                             <a:srgbClr val="1F2933"/>
                           </a:solidFill>
@@ -16410,9 +17125,9 @@
                           <a:ea typeface="Calibri" pitchFamily="34" charset="-122"/>
                           <a:cs typeface="Calibri" pitchFamily="34" charset="-120"/>
                         </a:rPr>
-                        <a:t>0.511</a:t>
+                        <a:t>0.513</a:t>
                       </a:r>
-                      <a:endParaRPr lang="en-US" sz="1000" dirty="0">
+                      <a:endParaRPr lang="en-US" sz="950" dirty="0">
                         <a:latin typeface="Calibri" charset="0"/>
                         <a:ea typeface="Calibri" charset="0"/>
                         <a:cs typeface="Calibri" charset="0"/>
@@ -16467,7 +17182,7 @@
                         <a:buNone/>
                       </a:pPr>
                       <a:r>
-                        <a:rPr lang="en-US" sz="1000" dirty="0">
+                        <a:rPr lang="en-US" sz="950" dirty="0">
                           <a:solidFill>
                             <a:srgbClr val="1F2933"/>
                           </a:solidFill>
@@ -16475,9 +17190,9 @@
                           <a:ea typeface="Calibri" pitchFamily="34" charset="-122"/>
                           <a:cs typeface="Calibri" pitchFamily="34" charset="-120"/>
                         </a:rPr>
-                        <a:t>1.092</a:t>
+                        <a:t>1.106</a:t>
                       </a:r>
-                      <a:endParaRPr lang="en-US" sz="1000" dirty="0">
+                      <a:endParaRPr lang="en-US" sz="950" dirty="0">
                         <a:latin typeface="Calibri" charset="0"/>
                         <a:ea typeface="Calibri" charset="0"/>
                         <a:cs typeface="Calibri" charset="0"/>
@@ -16532,7 +17247,7 @@
                         <a:buNone/>
                       </a:pPr>
                       <a:r>
-                        <a:rPr lang="en-US" sz="1000" dirty="0">
+                        <a:rPr lang="en-US" sz="950" dirty="0">
                           <a:solidFill>
                             <a:srgbClr val="1F2933"/>
                           </a:solidFill>
@@ -16540,9 +17255,9 @@
                           <a:ea typeface="Calibri" pitchFamily="34" charset="-122"/>
                           <a:cs typeface="Calibri" pitchFamily="34" charset="-120"/>
                         </a:rPr>
-                        <a:t>0.640</a:t>
+                        <a:t>0.643</a:t>
                       </a:r>
-                      <a:endParaRPr lang="en-US" sz="1000" dirty="0">
+                      <a:endParaRPr lang="en-US" sz="950" dirty="0">
                         <a:latin typeface="Calibri" charset="0"/>
                         <a:ea typeface="Calibri" charset="0"/>
                         <a:cs typeface="Calibri" charset="0"/>
@@ -16597,7 +17312,7 @@
                         <a:buNone/>
                       </a:pPr>
                       <a:r>
-                        <a:rPr lang="en-US" sz="1000" dirty="0">
+                        <a:rPr lang="en-US" sz="950" dirty="0">
                           <a:solidFill>
                             <a:srgbClr val="1F2933"/>
                           </a:solidFill>
@@ -16605,9 +17320,9 @@
                           <a:ea typeface="Calibri" pitchFamily="34" charset="-122"/>
                           <a:cs typeface="Calibri" pitchFamily="34" charset="-120"/>
                         </a:rPr>
-                        <a:t>0.431</a:t>
+                        <a:t>0.428</a:t>
                       </a:r>
-                      <a:endParaRPr lang="en-US" sz="1000" dirty="0">
+                      <a:endParaRPr lang="en-US" sz="950" dirty="0">
                         <a:latin typeface="Calibri" charset="0"/>
                         <a:ea typeface="Calibri" charset="0"/>
                         <a:cs typeface="Calibri" charset="0"/>
@@ -16662,7 +17377,7 @@
                         <a:buNone/>
                       </a:pPr>
                       <a:r>
-                        <a:rPr lang="en-US" sz="1000" dirty="0">
+                        <a:rPr lang="en-US" sz="950" dirty="0">
                           <a:solidFill>
                             <a:srgbClr val="1F2933"/>
                           </a:solidFill>
@@ -16670,9 +17385,9 @@
                           <a:ea typeface="Calibri" pitchFamily="34" charset="-122"/>
                           <a:cs typeface="Calibri" pitchFamily="34" charset="-120"/>
                         </a:rPr>
-                        <a:t>0.628</a:t>
+                        <a:t>0.627</a:t>
                       </a:r>
-                      <a:endParaRPr lang="en-US" sz="1000" dirty="0">
+                      <a:endParaRPr lang="en-US" sz="950" dirty="0">
                         <a:latin typeface="Calibri" charset="0"/>
                         <a:ea typeface="Calibri" charset="0"/>
                         <a:cs typeface="Calibri" charset="0"/>
@@ -16719,7 +17434,7 @@
                   </a:tcPr>
                 </a:tc>
               </a:tr>
-              <a:tr h="310896">
+              <a:tr h="301752">
                 <a:tc>
                   <a:txBody>
                     <a:bodyPr/>
@@ -16729,7 +17444,7 @@
                         <a:buNone/>
                       </a:pPr>
                       <a:r>
-                        <a:rPr lang="en-US" sz="1000" dirty="0">
+                        <a:rPr lang="en-US" sz="950" dirty="0">
                           <a:solidFill>
                             <a:srgbClr val="1F2933"/>
                           </a:solidFill>
@@ -16739,7 +17454,7 @@
                         </a:rPr>
                         <a:t>Class-prior baseline</a:t>
                       </a:r>
-                      <a:endParaRPr lang="en-US" sz="1000" dirty="0">
+                      <a:endParaRPr lang="en-US" sz="950" dirty="0">
                         <a:latin typeface="Calibri" charset="0"/>
                         <a:ea typeface="Calibri" charset="0"/>
                         <a:cs typeface="Calibri" charset="0"/>
@@ -16794,7 +17509,7 @@
                         <a:buNone/>
                       </a:pPr>
                       <a:r>
-                        <a:rPr lang="en-US" sz="1000" dirty="0">
+                        <a:rPr lang="en-US" sz="950" dirty="0">
                           <a:solidFill>
                             <a:srgbClr val="1F2933"/>
                           </a:solidFill>
@@ -16804,7 +17519,7 @@
                         </a:rPr>
                         <a:t>0.379</a:t>
                       </a:r>
-                      <a:endParaRPr lang="en-US" sz="1000" dirty="0">
+                      <a:endParaRPr lang="en-US" sz="950" dirty="0">
                         <a:latin typeface="Calibri" charset="0"/>
                         <a:ea typeface="Calibri" charset="0"/>
                         <a:cs typeface="Calibri" charset="0"/>
@@ -16859,7 +17574,7 @@
                         <a:buNone/>
                       </a:pPr>
                       <a:r>
-                        <a:rPr lang="en-US" sz="1000" dirty="0">
+                        <a:rPr lang="en-US" sz="950" dirty="0">
                           <a:solidFill>
                             <a:srgbClr val="1F2933"/>
                           </a:solidFill>
@@ -16869,7 +17584,7 @@
                         </a:rPr>
                         <a:t>1.099</a:t>
                       </a:r>
-                      <a:endParaRPr lang="en-US" sz="1000" dirty="0">
+                      <a:endParaRPr lang="en-US" sz="950" dirty="0">
                         <a:latin typeface="Calibri" charset="0"/>
                         <a:ea typeface="Calibri" charset="0"/>
                         <a:cs typeface="Calibri" charset="0"/>
@@ -16924,7 +17639,7 @@
                         <a:buNone/>
                       </a:pPr>
                       <a:r>
-                        <a:rPr lang="en-US" sz="1000" dirty="0">
+                        <a:rPr lang="en-US" sz="950" dirty="0">
                           <a:solidFill>
                             <a:srgbClr val="1F2933"/>
                           </a:solidFill>
@@ -16934,7 +17649,7 @@
                         </a:rPr>
                         <a:t>0.669</a:t>
                       </a:r>
-                      <a:endParaRPr lang="en-US" sz="1000" dirty="0">
+                      <a:endParaRPr lang="en-US" sz="950" dirty="0">
                         <a:latin typeface="Calibri" charset="0"/>
                         <a:ea typeface="Calibri" charset="0"/>
                         <a:cs typeface="Calibri" charset="0"/>
@@ -16989,7 +17704,7 @@
                         <a:buNone/>
                       </a:pPr>
                       <a:r>
-                        <a:rPr lang="en-US" sz="1000" dirty="0">
+                        <a:rPr lang="en-US" sz="950" dirty="0">
                           <a:solidFill>
                             <a:srgbClr val="1F2933"/>
                           </a:solidFill>
@@ -16999,7 +17714,7 @@
                         </a:rPr>
                         <a:t>0.183</a:t>
                       </a:r>
-                      <a:endParaRPr lang="en-US" sz="1000" dirty="0">
+                      <a:endParaRPr lang="en-US" sz="950" dirty="0">
                         <a:latin typeface="Calibri" charset="0"/>
                         <a:ea typeface="Calibri" charset="0"/>
                         <a:cs typeface="Calibri" charset="0"/>
@@ -17054,7 +17769,7 @@
                         <a:buNone/>
                       </a:pPr>
                       <a:r>
-                        <a:rPr lang="en-US" sz="1000" dirty="0">
+                        <a:rPr lang="en-US" sz="950" dirty="0">
                           <a:solidFill>
                             <a:srgbClr val="1F2933"/>
                           </a:solidFill>
@@ -17064,7 +17779,7 @@
                         </a:rPr>
                         <a:t>0.500</a:t>
                       </a:r>
-                      <a:endParaRPr lang="en-US" sz="1000" dirty="0">
+                      <a:endParaRPr lang="en-US" sz="950" dirty="0">
                         <a:latin typeface="Calibri" charset="0"/>
                         <a:ea typeface="Calibri" charset="0"/>
                         <a:cs typeface="Calibri" charset="0"/>
@@ -17111,7 +17826,7 @@
                   </a:tcPr>
                 </a:tc>
               </a:tr>
-              <a:tr h="310896">
+              <a:tr h="301752">
                 <a:tc>
                   <a:txBody>
                     <a:bodyPr/>
@@ -17121,7 +17836,7 @@
                         <a:buNone/>
                       </a:pPr>
                       <a:r>
-                        <a:rPr lang="en-US" sz="1000" dirty="0">
+                        <a:rPr lang="en-US" sz="950" dirty="0">
                           <a:solidFill>
                             <a:srgbClr val="5A6573"/>
                           </a:solidFill>
@@ -17131,7 +17846,7 @@
                         </a:rPr>
                         <a:t>Always-Home baseline</a:t>
                       </a:r>
-                      <a:endParaRPr lang="en-US" sz="1000" dirty="0">
+                      <a:endParaRPr lang="en-US" sz="950" dirty="0">
                         <a:latin typeface="Calibri" charset="0"/>
                         <a:ea typeface="Calibri" charset="0"/>
                         <a:cs typeface="Calibri" charset="0"/>
@@ -17186,7 +17901,7 @@
                         <a:buNone/>
                       </a:pPr>
                       <a:r>
-                        <a:rPr lang="en-US" sz="1000" dirty="0">
+                        <a:rPr lang="en-US" sz="950" dirty="0">
                           <a:solidFill>
                             <a:srgbClr val="5A6573"/>
                           </a:solidFill>
@@ -17196,7 +17911,7 @@
                         </a:rPr>
                         <a:t>0.379</a:t>
                       </a:r>
-                      <a:endParaRPr lang="en-US" sz="1000" dirty="0">
+                      <a:endParaRPr lang="en-US" sz="950" dirty="0">
                         <a:latin typeface="Calibri" charset="0"/>
                         <a:ea typeface="Calibri" charset="0"/>
                         <a:cs typeface="Calibri" charset="0"/>
@@ -17251,7 +17966,7 @@
                         <a:buNone/>
                       </a:pPr>
                       <a:r>
-                        <a:rPr lang="en-US" sz="1000" b="1" dirty="0">
+                        <a:rPr lang="en-US" sz="950" b="1" dirty="0">
                           <a:solidFill>
                             <a:srgbClr val="E07A5F"/>
                           </a:solidFill>
@@ -17261,7 +17976,7 @@
                         </a:rPr>
                         <a:t>22.385</a:t>
                       </a:r>
-                      <a:endParaRPr lang="en-US" sz="1000" dirty="0">
+                      <a:endParaRPr lang="en-US" sz="950" dirty="0">
                         <a:latin typeface="Calibri" charset="0"/>
                         <a:ea typeface="Calibri" charset="0"/>
                         <a:cs typeface="Calibri" charset="0"/>
@@ -17316,7 +18031,7 @@
                         <a:buNone/>
                       </a:pPr>
                       <a:r>
-                        <a:rPr lang="en-US" sz="1000" dirty="0">
+                        <a:rPr lang="en-US" sz="950" dirty="0">
                           <a:solidFill>
                             <a:srgbClr val="5A6573"/>
                           </a:solidFill>
@@ -17326,7 +18041,7 @@
                         </a:rPr>
                         <a:t>1.242</a:t>
                       </a:r>
-                      <a:endParaRPr lang="en-US" sz="1000" dirty="0">
+                      <a:endParaRPr lang="en-US" sz="950" dirty="0">
                         <a:latin typeface="Calibri" charset="0"/>
                         <a:ea typeface="Calibri" charset="0"/>
                         <a:cs typeface="Calibri" charset="0"/>
@@ -17381,7 +18096,7 @@
                         <a:buNone/>
                       </a:pPr>
                       <a:r>
-                        <a:rPr lang="en-US" sz="1000" dirty="0">
+                        <a:rPr lang="en-US" sz="950" dirty="0">
                           <a:solidFill>
                             <a:srgbClr val="5A6573"/>
                           </a:solidFill>
@@ -17391,7 +18106,7 @@
                         </a:rPr>
                         <a:t>0.183</a:t>
                       </a:r>
-                      <a:endParaRPr lang="en-US" sz="1000" dirty="0">
+                      <a:endParaRPr lang="en-US" sz="950" dirty="0">
                         <a:latin typeface="Calibri" charset="0"/>
                         <a:ea typeface="Calibri" charset="0"/>
                         <a:cs typeface="Calibri" charset="0"/>
@@ -17446,7 +18161,7 @@
                         <a:buNone/>
                       </a:pPr>
                       <a:r>
-                        <a:rPr lang="en-US" sz="1000" dirty="0">
+                        <a:rPr lang="en-US" sz="950" dirty="0">
                           <a:solidFill>
                             <a:srgbClr val="5A6573"/>
                           </a:solidFill>
@@ -17456,7 +18171,7 @@
                         </a:rPr>
                         <a:t>0.500</a:t>
                       </a:r>
-                      <a:endParaRPr lang="en-US" sz="1000" dirty="0">
+                      <a:endParaRPr lang="en-US" sz="950" dirty="0">
                         <a:latin typeface="Calibri" charset="0"/>
                         <a:ea typeface="Calibri" charset="0"/>
                         <a:cs typeface="Calibri" charset="0"/>
@@ -17515,8 +18230,8 @@
         </p:nvSpPr>
         <p:spPr>
           <a:xfrm>
-            <a:off x="6446520" y="1325880"/>
-            <a:ext cx="2240280" cy="1783080"/>
+            <a:off x="5989320" y="1417320"/>
+            <a:ext cx="2697480" cy="2468880"/>
           </a:xfrm>
           <a:prstGeom prst="rect">
             <a:avLst/>
@@ -17524,7 +18239,7 @@
           <a:solidFill>
             <a:srgbClr val="FFFFFF"/>
           </a:solidFill>
-          <a:ln w="9525">
+          <a:ln w="6350">
             <a:solidFill>
               <a:srgbClr val="D7DEE5"/>
             </a:solidFill>
@@ -17539,16 +18254,39 @@
           </a:effectLst>
         </p:spPr>
       </p:sp>
-      <p:sp>
-        <p:nvSpPr>
-          <p:cNvPr id="10" name="Text 7"/>
-          <p:cNvSpPr/>
-          <p:nvPr/>
-        </p:nvSpPr>
-        <p:spPr>
-          <a:xfrm>
-            <a:off x="6446520" y="1417320"/>
-            <a:ext cx="2240280" cy="228600"/>
+      <p:pic>
+        <p:nvPicPr>
+          <p:cNvPr id="10" name="Image 0" descr="/Users/m2/Projects/STAT 5243/43 Project 4/figures/09_market_calibration.png">    </p:cNvPr>
+          <p:cNvPicPr>
+            <a:picLocks noChangeAspect="1"/>
+          </p:cNvPicPr>
+          <p:nvPr/>
+        </p:nvPicPr>
+        <p:blipFill>
+          <a:blip r:embed="rId1"/>
+          <a:srcRect l="0" r="0" t="0" b="0"/>
+          <a:stretch/>
+        </p:blipFill>
+        <p:spPr>
+          <a:xfrm>
+            <a:off x="6035040" y="1463040"/>
+            <a:ext cx="2606040" cy="2194560"/>
+          </a:xfrm>
+          <a:prstGeom prst="rect">
+            <a:avLst/>
+          </a:prstGeom>
+        </p:spPr>
+      </p:pic>
+      <p:sp>
+        <p:nvSpPr>
+          <p:cNvPr id="11" name="Text 7"/>
+          <p:cNvSpPr/>
+          <p:nvPr/>
+        </p:nvSpPr>
+        <p:spPr>
+          <a:xfrm>
+            <a:off x="5989320" y="3611880"/>
+            <a:ext cx="2697480" cy="274320"/>
           </a:xfrm>
           <a:prstGeom prst="rect">
             <a:avLst/>
@@ -17561,18 +18299,21 @@
           <a:lstStyle/>
           <a:p>
             <a:pPr algn="ctr" indent="0" marL="0">
-              <a:buNone/>
-            </a:pPr>
-            <a:r>
-              <a:rPr lang="en-US" sz="900" b="1" spc="300" kern="0" dirty="0">
-                <a:solidFill>
-                  <a:srgbClr val="7FB3D5"/>
+              <a:lnSpc>
+                <a:spcPct val="115000"/>
+              </a:lnSpc>
+              <a:buNone/>
+            </a:pPr>
+            <a:r>
+              <a:rPr lang="en-US" sz="900" i="1" dirty="0">
+                <a:solidFill>
+                  <a:srgbClr val="5A6573"/>
                 </a:solidFill>
                 <a:latin typeface="Calibri" pitchFamily="34" charset="0"/>
                 <a:ea typeface="Calibri" pitchFamily="34" charset="-122"/>
                 <a:cs typeface="Calibri" pitchFamily="34" charset="-120"/>
               </a:rPr>
-              <a:t>CONFUSION MATRIX</a:t>
+              <a:t>Market lies almost on the diagonal — essentially perfect calibration.</a:t>
             </a:r>
             <a:endParaRPr lang="en-US" sz="900" dirty="0"/>
           </a:p>
@@ -17580,108 +18321,7 @@
       </p:sp>
       <p:sp>
         <p:nvSpPr>
-          <p:cNvPr id="11" name="Text 8"/>
-          <p:cNvSpPr/>
-          <p:nvPr/>
-        </p:nvSpPr>
-        <p:spPr>
-          <a:xfrm>
-            <a:off x="6446520" y="2103120"/>
-            <a:ext cx="2240280" cy="228600"/>
-          </a:xfrm>
-          <a:prstGeom prst="rect">
-            <a:avLst/>
-          </a:prstGeom>
-          <a:noFill/>
-          <a:ln/>
-        </p:spPr>
-        <p:txBody>
-          <a:bodyPr wrap="square" lIns="0" tIns="0" rIns="0" bIns="0" rtlCol="0" anchor="ctr"/>
-          <a:lstStyle/>
-          <a:p>
-            <a:pPr algn="ctr" indent="0" marL="0">
-              <a:buNone/>
-            </a:pPr>
-            <a:r>
-              <a:rPr lang="en-US" sz="800" dirty="0">
-                <a:solidFill>
-                  <a:srgbClr val="5A6573"/>
-                </a:solidFill>
-                <a:latin typeface="Consolas" pitchFamily="34" charset="0"/>
-                <a:ea typeface="Consolas" pitchFamily="34" charset="-122"/>
-                <a:cs typeface="Consolas" pitchFamily="34" charset="-120"/>
-              </a:rPr>
-              <a:t>figures/confusion_matrix_rf.png</a:t>
-            </a:r>
-            <a:endParaRPr lang="en-US" sz="800" dirty="0"/>
-          </a:p>
-        </p:txBody>
-      </p:sp>
-      <p:sp>
-        <p:nvSpPr>
-          <p:cNvPr id="12" name="Text 9"/>
-          <p:cNvSpPr/>
-          <p:nvPr/>
-        </p:nvSpPr>
-        <p:spPr>
-          <a:xfrm>
-            <a:off x="6492240" y="2423160"/>
-            <a:ext cx="2148840" cy="594360"/>
-          </a:xfrm>
-          <a:prstGeom prst="rect">
-            <a:avLst/>
-          </a:prstGeom>
-          <a:noFill/>
-          <a:ln/>
-        </p:spPr>
-        <p:txBody>
-          <a:bodyPr wrap="square" lIns="0" tIns="0" rIns="0" bIns="0" rtlCol="0" anchor="ctr"/>
-          <a:lstStyle/>
-          <a:p>
-            <a:pPr algn="ctr" indent="0" marL="0">
-              <a:lnSpc>
-                <a:spcPct val="125000"/>
-              </a:lnSpc>
-              <a:buNone/>
-            </a:pPr>
-            <a:r>
-              <a:rPr lang="en-US" sz="1000" i="1" dirty="0">
-                <a:solidFill>
-                  <a:srgbClr val="5A6573"/>
-                </a:solidFill>
-                <a:latin typeface="Calibri" pitchFamily="34" charset="0"/>
-                <a:ea typeface="Calibri" pitchFamily="34" charset="-122"/>
-                <a:cs typeface="Calibri" pitchFamily="34" charset="-120"/>
-              </a:rPr>
-              <a:t>Most errors: Draw → Home / Away.</a:t>
-            </a:r>
-            <a:endParaRPr lang="en-US" sz="1000" dirty="0"/>
-          </a:p>
-          <a:p>
-            <a:pPr algn="ctr" indent="0" marL="0">
-              <a:lnSpc>
-                <a:spcPct val="125000"/>
-              </a:lnSpc>
-              <a:buNone/>
-            </a:pPr>
-            <a:r>
-              <a:rPr lang="en-US" sz="1000" i="1" dirty="0">
-                <a:solidFill>
-                  <a:srgbClr val="5A6573"/>
-                </a:solidFill>
-                <a:latin typeface="Calibri" pitchFamily="34" charset="0"/>
-                <a:ea typeface="Calibri" pitchFamily="34" charset="-122"/>
-                <a:cs typeface="Calibri" pitchFamily="34" charset="-120"/>
-              </a:rPr>
-              <a:t>Draws are intrinsically the hardest class.</a:t>
-            </a:r>
-            <a:endParaRPr lang="en-US" sz="1000" dirty="0"/>
-          </a:p>
-        </p:txBody>
-      </p:sp>
-      <p:sp>
-        <p:nvSpPr>
-          <p:cNvPr id="13" name="Shape 10"/>
+          <p:cNvPr id="12" name="Shape 8"/>
           <p:cNvSpPr/>
           <p:nvPr/>
         </p:nvSpPr>
@@ -17701,7 +18341,7 @@
       </p:sp>
       <p:sp>
         <p:nvSpPr>
-          <p:cNvPr id="14" name="Shape 11"/>
+          <p:cNvPr id="13" name="Shape 9"/>
           <p:cNvSpPr/>
           <p:nvPr/>
         </p:nvSpPr>
@@ -17721,7 +18361,7 @@
       </p:sp>
       <p:sp>
         <p:nvSpPr>
-          <p:cNvPr id="15" name="Text 12"/>
+          <p:cNvPr id="14" name="Text 10"/>
           <p:cNvSpPr/>
           <p:nvPr/>
         </p:nvSpPr>
@@ -17755,7 +18395,7 @@
                 <a:ea typeface="Calibri" pitchFamily="34" charset="-122"/>
                 <a:cs typeface="Calibri" pitchFamily="34" charset="-120"/>
               </a:rPr>
-              <a:t>Random Forest is within 0.3pp accuracy and 0.02 log-loss of the market</a:t>
+              <a:t>Random Forest is within 0.02 log-loss of the market</a:t>
             </a:r>
             <a:pPr indent="0" marL="0">
               <a:lnSpc>
@@ -17772,7 +18412,7 @@
                 <a:ea typeface="Calibri" pitchFamily="34" charset="-122"/>
                 <a:cs typeface="Calibri" pitchFamily="34" charset="-120"/>
               </a:rPr>
-              <a:t> — using only the same engineered features the market presumably already prices.
+              <a:t> — using only features the market presumably already prices.
 </a:t>
             </a:r>
             <a:pPr indent="0" marL="0">
@@ -17790,7 +18430,7 @@
                 <a:ea typeface="Calibri" pitchFamily="34" charset="-122"/>
                 <a:cs typeface="Calibri" pitchFamily="34" charset="-120"/>
               </a:rPr>
-              <a:t>And Always-Home's log-loss of 22.4? </a:t>
+              <a:t>Always-Home's log-loss of 22.4 </a:t>
             </a:r>
             <a:pPr indent="0" marL="0">
               <a:lnSpc>
@@ -17807,7 +18447,7 @@
                 <a:ea typeface="Calibri" pitchFamily="34" charset="-122"/>
                 <a:cs typeface="Calibri" pitchFamily="34" charset="-120"/>
               </a:rPr>
-              <a:t>That's the cost of being confidently wrong about Draws and Aways.</a:t>
+              <a:t>is the cost of being confidently wrong about Draws and Aways.</a:t>
             </a:r>
             <a:endParaRPr lang="en-US" sz="1150" dirty="0"/>
           </a:p>

--- a/slides/oral_10min.pptx
+++ b/slides/oral_10min.pptx
@@ -609,7 +609,8 @@
 Exact score from Dixon-Coles. Bivariate Poisson with daily exponential decay plus the tau correction that fixes the under-prediction of low-low scorelines. Shipped.
 Final standings via Monte Carlo. Ten thousand simulated 380-match seasons; aggregate gives title, top-four, relegation probabilities with bands. Chart on the right is the actual 2020-21 standings — the target. Shipped.
 Beat-the-bookmaker. Kelly-fractional, capped at 5%, bet only on positive edge. ROI on hold-out is conviction in dollars. Scaffolded — betting harness runs in the app, back-test in the appendix.
-[~45s. Click to demo.]</a:t>
+All three targets share one engine — that is why calibration on H/D/A pays off everywhere else, and why the slide-9 ceiling is the upper bound on every bonus target too.
+[~50s. Click to demo.]</a:t>
             </a:r>
             <a:endParaRPr lang="en-US" dirty="0"/>
           </a:p>
@@ -791,7 +792,7 @@
               <a:rPr lang="en-US" dirty="0"/>
               <a:t>Speaker notes — Slide 12 (Conclusion + team). ~45s.
 Coming back from the demo — wrapping up.
-The one line: we built an end-to-end pipeline that gets within 0.02 log-loss of the bookmaker on the 2020-21 hold-out, and we know exactly why we don't beat them. The last clause matters as much as the first — the closing market is nearly perfectly calibrated, so this ceiling is rational to respect, not to spin around.
+The one line: we built an end-to-end pipeline that gets within 0.023 log-loss of the bookmaker on the 2020-21 hold-out, and we know exactly why we don't beat them. The last clause matters as much as the first — the closing market is nearly perfectly calibrated, so this ceiling is rational to respect, not to spin around.
 Future work: in-play features (live xG, possession-by-half, lineup deltas), hierarchical Bayes for tighter cold-start on promoted clubs, and a stacked ensemble blending RF + Dixon-Coles + market.
 Team contributions on the right. Zeming: coordination, scrapers, modelling, deployment. Elina: EDA, unsupervised features, NLP, report. Collaborator's contribution to be confirmed before submission. Code, leaderboard CSV, and companion report public on GitHub.
 Thank you. Questions?
@@ -1070,7 +1071,7 @@
               <a:t>Speaker notes — Slide 4 (Data sources). ~50s.
 Onto the data. No Kaggle — we scraped every byte ourselves from five independent sources. Big numbers on the left: 7,890 matches, 21 seasons, 45 engineered features.
 Top of the table: football-data.co.uk gives results and the closing odds that become our hardest baseline. ClubElo gives daily Elo ratings since 2000. FBref via soccerdata gives advanced stats including expected goals, but only from 2017-18. Wikipedia gives manager and promotion context.
-The coral row is the showpiece — about 7,600 BBC and Guardian match-report HTML pages pushed through an NLP pipeline. That's the unstructured-to-structured story on the next slide.
+The coral row is the showpiece. BBC went JS-only mid-project, so we pivoted to Wikipedia season recaps — same NLP pipeline, seven leakage-safe columns. That's the unstructured-to-structured story on the next slide.
 [~50s. Click forward.]</a:t>
             </a:r>
             <a:endParaRPr lang="en-US" dirty="0"/>
@@ -1350,6 +1351,7 @@
 Carrying EDA into features — six families on the left.
 Form: rolling 3/5/10-match goals, points, xG. Strength: ClubElo + our own Elo, home minus away. Context: rest days, derby flag, manager tenure. Market: Pinnacle implied probabilities, vig removed. Unsupervised: PCA-2 + K-means cluster ID, our rubric hook (chart on right). NLP: per-team sentiment, event tags, controversy flag.
 The bottom rail is the discipline story. Football's classic trap is random k-fold leaking the future. We never use it — walk-forward only, every rolling feature uses a strict as_of cutoff, and that invariant is unit-tested in CI on every push.
+If you remember one thing from this slide: walk-forward CV is the hill we will die on — it is football modelling's classic mistake and the reason most public benchmarks overstate accuracy.
 [~55s. Speed up if behind.]</a:t>
             </a:r>
             <a:endParaRPr lang="en-US" dirty="0"/>
@@ -2055,8 +2057,47 @@
         </p:nvSpPr>
         <p:spPr>
           <a:xfrm>
-            <a:off x="777240" y="868680"/>
-            <a:ext cx="8229600" cy="1920240"/>
+            <a:off x="777240" y="777240"/>
+            <a:ext cx="8229600" cy="365760"/>
+          </a:xfrm>
+          <a:prstGeom prst="rect">
+            <a:avLst/>
+          </a:prstGeom>
+          <a:noFill/>
+          <a:ln/>
+        </p:spPr>
+        <p:txBody>
+          <a:bodyPr wrap="square" lIns="0" tIns="0" rIns="0" bIns="0" rtlCol="0" anchor="ctr"/>
+          <a:lstStyle/>
+          <a:p>
+            <a:pPr indent="0" marL="0">
+              <a:buNone/>
+            </a:pPr>
+            <a:r>
+              <a:rPr lang="en-US" sz="1600" i="1" dirty="0">
+                <a:solidFill>
+                  <a:srgbClr val="B9D9EB"/>
+                </a:solidFill>
+                <a:latin typeface="Georgia" pitchFamily="34" charset="0"/>
+                <a:ea typeface="Georgia" pitchFamily="34" charset="-122"/>
+                <a:cs typeface="Georgia" pitchFamily="34" charset="-120"/>
+              </a:rPr>
+              <a:t>Can a student team predict 380 Premier League matches — and beat the bookmakers?</a:t>
+            </a:r>
+            <a:endParaRPr lang="en-US" sz="1600" dirty="0"/>
+          </a:p>
+        </p:txBody>
+      </p:sp>
+      <p:sp>
+        <p:nvSpPr>
+          <p:cNvPr id="9" name="Text 7"/>
+          <p:cNvSpPr/>
+          <p:nvPr/>
+        </p:nvSpPr>
+        <p:spPr>
+          <a:xfrm>
+            <a:off x="777240" y="1188720"/>
+            <a:ext cx="8229600" cy="1600200"/>
           </a:xfrm>
           <a:prstGeom prst="rect">
             <a:avLst/>
@@ -2075,7 +2116,7 @@
               <a:buNone/>
             </a:pPr>
             <a:r>
-              <a:rPr lang="en-US" sz="4200" b="1" dirty="0">
+              <a:rPr lang="en-US" sz="3800" b="1" dirty="0">
                 <a:solidFill>
                   <a:srgbClr val="FFFFFF"/>
                 </a:solidFill>
@@ -2085,7 +2126,7 @@
               </a:rPr>
               <a:t>Predicting the 2020-21</a:t>
             </a:r>
-            <a:endParaRPr lang="en-US" sz="4200" dirty="0"/>
+            <a:endParaRPr lang="en-US" sz="3800" dirty="0"/>
           </a:p>
           <a:p>
             <a:pPr indent="0" marL="0">
@@ -2095,7 +2136,7 @@
               <a:buNone/>
             </a:pPr>
             <a:r>
-              <a:rPr lang="en-US" sz="4200" b="1" dirty="0">
+              <a:rPr lang="en-US" sz="3800" b="1" dirty="0">
                 <a:solidFill>
                   <a:srgbClr val="FFFFFF"/>
                 </a:solidFill>
@@ -2105,13 +2146,13 @@
               </a:rPr>
               <a:t>Premier League</a:t>
             </a:r>
-            <a:endParaRPr lang="en-US" sz="4200" dirty="0"/>
-          </a:p>
-        </p:txBody>
-      </p:sp>
-      <p:sp>
-        <p:nvSpPr>
-          <p:cNvPr id="9" name="Shape 7"/>
+            <a:endParaRPr lang="en-US" sz="3800" dirty="0"/>
+          </a:p>
+        </p:txBody>
+      </p:sp>
+      <p:sp>
+        <p:nvSpPr>
+          <p:cNvPr id="10" name="Shape 8"/>
           <p:cNvSpPr/>
           <p:nvPr/>
         </p:nvSpPr>
@@ -2131,7 +2172,7 @@
       </p:sp>
       <p:sp>
         <p:nvSpPr>
-          <p:cNvPr id="10" name="Text 8"/>
+          <p:cNvPr id="11" name="Text 9"/>
           <p:cNvSpPr/>
           <p:nvPr/>
         </p:nvSpPr>
@@ -2154,7 +2195,7 @@
               <a:buNone/>
             </a:pPr>
             <a:r>
-              <a:rPr lang="en-US" sz="1700" i="1" dirty="0">
+              <a:rPr lang="en-US" sz="1600" i="1" dirty="0">
                 <a:solidFill>
                   <a:srgbClr val="B9D9EB"/>
                 </a:solidFill>
@@ -2162,15 +2203,15 @@
                 <a:ea typeface="Georgia" pitchFamily="34" charset="-122"/>
                 <a:cs typeface="Georgia" pitchFamily="34" charset="-120"/>
               </a:rPr>
-              <a:t>End-to-end machine learning on 21 seasons of self-collected EPL data</a:t>
-            </a:r>
-            <a:endParaRPr lang="en-US" sz="1700" dirty="0"/>
-          </a:p>
-        </p:txBody>
-      </p:sp>
-      <p:sp>
-        <p:nvSpPr>
-          <p:cNvPr id="11" name="Text 9"/>
+              <a:t>Outcome  ·  exact score  ·  final table  ·  ROI — four targets, one probabilistic engine</a:t>
+            </a:r>
+            <a:endParaRPr lang="en-US" sz="1600" dirty="0"/>
+          </a:p>
+        </p:txBody>
+      </p:sp>
+      <p:sp>
+        <p:nvSpPr>
+          <p:cNvPr id="12" name="Text 10"/>
           <p:cNvSpPr/>
           <p:nvPr/>
         </p:nvSpPr>
@@ -2299,7 +2340,7 @@
       </p:sp>
       <p:sp>
         <p:nvSpPr>
-          <p:cNvPr id="12" name="Text 10"/>
+          <p:cNvPr id="13" name="Text 11"/>
           <p:cNvSpPr/>
           <p:nvPr/>
         </p:nvSpPr>
@@ -3300,7 +3341,7 @@
       </p:sp>
       <p:pic>
         <p:nvPicPr>
-          <p:cNvPr id="30" name="Image 0" descr="/Users/m2/Projects/STAT 5243/43 Project 4/figures/10_final_standings.png">    </p:cNvPr>
+          <p:cNvPr id="30" name="Image 0" descr="/Users/m2/Projects/STAT 5243/43 Project 4/figures/10_mc_title_probabilities.png">    </p:cNvPr>
           <p:cNvPicPr>
             <a:picLocks noChangeAspect="1"/>
           </p:cNvPicPr>
@@ -3357,7 +3398,7 @@
                 <a:ea typeface="Calibri" pitchFamily="34" charset="-122"/>
                 <a:cs typeface="Calibri" pitchFamily="34" charset="-120"/>
               </a:rPr>
-              <a:t>2020-21 final standings — actual outcome, target of the simulator.</a:t>
+              <a:t>Monte Carlo target — 10k seasons resampled per team's per-match probabilities.</a:t>
             </a:r>
             <a:endParaRPr lang="en-US" sz="900" dirty="0"/>
           </a:p>
@@ -3667,7 +3708,7 @@
                 <a:ea typeface="Calibri" pitchFamily="34" charset="-122"/>
                 <a:cs typeface="Calibri" pitchFamily="34" charset="-120"/>
               </a:rPr>
-              <a:t>DEMO</a:t>
+              <a:t>DEMO  ·  BONUS</a:t>
             </a:r>
             <a:endParaRPr lang="en-US" sz="1100" dirty="0"/>
           </a:p>
@@ -3701,7 +3742,7 @@
               <a:buNone/>
             </a:pPr>
             <a:r>
-              <a:rPr lang="en-US" sz="2200" b="1" dirty="0">
+              <a:rPr lang="en-US" sz="2100" b="1" dirty="0">
                 <a:solidFill>
                   <a:srgbClr val="0B2545"/>
                 </a:solidFill>
@@ -3709,9 +3750,9 @@
                 <a:ea typeface="Georgia" pitchFamily="34" charset="-122"/>
                 <a:cs typeface="Georgia" pitchFamily="34" charset="-120"/>
               </a:rPr>
-              <a:t>Live demo: pick a fixture, watch the model and the market disagree.</a:t>
-            </a:r>
-            <a:endParaRPr lang="en-US" sz="2200" dirty="0"/>
+              <a:t>Live demo: a six-tab Shiny app — our +10 Bonus deliverable, beyond rubric.</a:t>
+            </a:r>
+            <a:endParaRPr lang="en-US" sz="2100" dirty="0"/>
           </a:p>
         </p:txBody>
       </p:sp>
@@ -4440,7 +4481,7 @@
                 <a:ea typeface="Calibri" pitchFamily="34" charset="-122"/>
                 <a:cs typeface="Calibri" pitchFamily="34" charset="-120"/>
               </a:rPr>
-              <a:t>Live URL:  </a:t>
+              <a:t>Repo:  </a:t>
             </a:r>
             <a:pPr indent="0" marL="0">
               <a:buNone/>
@@ -4454,7 +4495,21 @@
                 <a:ea typeface="Consolas" pitchFamily="34" charset="-122"/>
                 <a:cs typeface="Consolas" pitchFamily="34" charset="-120"/>
               </a:rPr>
-              <a:t>{TODO: pipeline owner to paste new Posit Connect Cloud URL}</a:t>
+              <a:t>github.com/ZemingLiang/STAT5243-Project-4</a:t>
+            </a:r>
+            <a:pPr indent="0" marL="0">
+              <a:buNone/>
+            </a:pPr>
+            <a:r>
+              <a:rPr lang="en-US" sz="1100" i="1" dirty="0">
+                <a:solidFill>
+                  <a:srgbClr val="B9D9EB"/>
+                </a:solidFill>
+                <a:latin typeface="Calibri" pitchFamily="34" charset="0"/>
+                <a:ea typeface="Calibri" pitchFamily="34" charset="-122"/>
+                <a:cs typeface="Calibri" pitchFamily="34" charset="-120"/>
+              </a:rPr>
+              <a:t>    (live Posit Connect URL announced morning-of)</a:t>
             </a:r>
             <a:endParaRPr lang="en-US" sz="1100" dirty="0"/>
           </a:p>
@@ -4806,7 +4861,7 @@
                 <a:ea typeface="Georgia" pitchFamily="34" charset="-122"/>
                 <a:cs typeface="Georgia" pitchFamily="34" charset="-120"/>
               </a:rPr>
-              <a:t>We built an end-to-end pipeline that gets within 0.02 log-loss of the bookmaker on the 2020-21 hold-out — and we know exactly why we don't beat them.</a:t>
+              <a:t>We built an end-to-end pipeline that gets within 0.023 log-loss of the bookmaker on the 2020-21 hold-out — and we know exactly why we don't beat them.</a:t>
             </a:r>
             <a:endParaRPr lang="en-US" sz="1500" dirty="0"/>
           </a:p>
@@ -4839,13 +4894,13 @@
             <a:r>
               <a:rPr lang="en-US" sz="1000" b="1" spc="400" kern="0" dirty="0">
                 <a:solidFill>
-                  <a:srgbClr val="13315C"/>
+                  <a:srgbClr val="E07A5F"/>
                 </a:solidFill>
                 <a:latin typeface="Calibri" pitchFamily="34" charset="0"/>
                 <a:ea typeface="Calibri" pitchFamily="34" charset="-122"/>
                 <a:cs typeface="Calibri" pitchFamily="34" charset="-120"/>
               </a:rPr>
-              <a:t>FUTURE WORK</a:t>
+              <a:t>WHAT WAS ORIGINAL</a:t>
             </a:r>
             <a:endParaRPr lang="en-US" sz="1000" dirty="0"/>
           </a:p>
@@ -4860,7 +4915,7 @@
         <p:spPr>
           <a:xfrm>
             <a:off x="457200" y="3127248"/>
-            <a:ext cx="4114800" cy="1097280"/>
+            <a:ext cx="4114800" cy="960120"/>
           </a:xfrm>
           <a:prstGeom prst="rect">
             <a:avLst/>
@@ -4874,15 +4929,15 @@
           <a:p>
             <a:pPr indent="0" marL="0">
               <a:lnSpc>
-                <a:spcPct val="125000"/>
+                <a:spcPct val="118000"/>
               </a:lnSpc>
               <a:spcAft>
-                <a:spcPts val="300"/>
+                <a:spcPts val="100"/>
               </a:spcAft>
               <a:buNone/>
             </a:pPr>
             <a:r>
-              <a:rPr lang="en-US" sz="1050" b="1" dirty="0">
+              <a:rPr lang="en-US" sz="950" b="1" dirty="0">
                 <a:solidFill>
                   <a:srgbClr val="1F2933"/>
                 </a:solidFill>
@@ -4890,19 +4945,19 @@
                 <a:ea typeface="Calibri" pitchFamily="34" charset="-122"/>
                 <a:cs typeface="Calibri" pitchFamily="34" charset="-120"/>
               </a:rPr>
-              <a:t>In-play features.   </a:t>
+              <a:t>Four-target framing</a:t>
             </a:r>
             <a:pPr indent="0" marL="0">
               <a:lnSpc>
-                <a:spcPct val="125000"/>
+                <a:spcPct val="118000"/>
               </a:lnSpc>
               <a:spcAft>
-                <a:spcPts val="300"/>
+                <a:spcPts val="100"/>
               </a:spcAft>
               <a:buNone/>
             </a:pPr>
             <a:r>
-              <a:rPr lang="en-US" sz="1050" dirty="0">
+              <a:rPr lang="en-US" sz="950" dirty="0">
                 <a:solidFill>
                   <a:srgbClr val="5A6573"/>
                 </a:solidFill>
@@ -4910,20 +4965,20 @@
                 <a:ea typeface="Calibri" pitchFamily="34" charset="-122"/>
                 <a:cs typeface="Calibri" pitchFamily="34" charset="-120"/>
               </a:rPr>
-              <a:t>Live xG, possession-by-half, lineup-strength deltas.
+              <a:t> (H/D/A · exact score · table · ROI).
 </a:t>
             </a:r>
             <a:pPr indent="0" marL="0">
               <a:lnSpc>
-                <a:spcPct val="125000"/>
+                <a:spcPct val="118000"/>
               </a:lnSpc>
               <a:spcAft>
-                <a:spcPts val="300"/>
+                <a:spcPts val="100"/>
               </a:spcAft>
               <a:buNone/>
             </a:pPr>
             <a:r>
-              <a:rPr lang="en-US" sz="1050" b="1" dirty="0">
+              <a:rPr lang="en-US" sz="950" b="1" dirty="0">
                 <a:solidFill>
                   <a:srgbClr val="1F2933"/>
                 </a:solidFill>
@@ -4931,19 +4986,19 @@
                 <a:ea typeface="Calibri" pitchFamily="34" charset="-122"/>
                 <a:cs typeface="Calibri" pitchFamily="34" charset="-120"/>
               </a:rPr>
-              <a:t>Hierarchical Bayes.   </a:t>
+              <a:t>Dixon-Coles 1997</a:t>
             </a:r>
             <a:pPr indent="0" marL="0">
               <a:lnSpc>
-                <a:spcPct val="125000"/>
+                <a:spcPct val="118000"/>
               </a:lnSpc>
               <a:spcAft>
-                <a:spcPts val="300"/>
+                <a:spcPts val="100"/>
               </a:spcAft>
               <a:buNone/>
             </a:pPr>
             <a:r>
-              <a:rPr lang="en-US" sz="1050" dirty="0">
+              <a:rPr lang="en-US" sz="950" dirty="0">
                 <a:solidFill>
                   <a:srgbClr val="5A6573"/>
                 </a:solidFill>
@@ -4951,20 +5006,20 @@
                 <a:ea typeface="Calibri" pitchFamily="34" charset="-122"/>
                 <a:cs typeface="Calibri" pitchFamily="34" charset="-120"/>
               </a:rPr>
-              <a:t>Borrow strength across seasons; cold-start for promoted clubs.
+              <a:t> hand-fit with tau + 0.0065/day decay.
 </a:t>
             </a:r>
             <a:pPr indent="0" marL="0">
               <a:lnSpc>
-                <a:spcPct val="125000"/>
+                <a:spcPct val="118000"/>
               </a:lnSpc>
               <a:spcAft>
-                <a:spcPts val="300"/>
+                <a:spcPts val="100"/>
               </a:spcAft>
               <a:buNone/>
             </a:pPr>
             <a:r>
-              <a:rPr lang="en-US" sz="1050" b="1" dirty="0">
+              <a:rPr lang="en-US" sz="950" b="1" dirty="0">
                 <a:solidFill>
                   <a:srgbClr val="1F2933"/>
                 </a:solidFill>
@@ -4972,19 +5027,19 @@
                 <a:ea typeface="Calibri" pitchFamily="34" charset="-122"/>
                 <a:cs typeface="Calibri" pitchFamily="34" charset="-120"/>
               </a:rPr>
-              <a:t>Stacked ensemble.   </a:t>
+              <a:t>Multi-source self-scrape</a:t>
             </a:r>
             <a:pPr indent="0" marL="0">
               <a:lnSpc>
-                <a:spcPct val="125000"/>
+                <a:spcPct val="118000"/>
               </a:lnSpc>
               <a:spcAft>
-                <a:spcPts val="300"/>
+                <a:spcPts val="100"/>
               </a:spcAft>
               <a:buNone/>
             </a:pPr>
             <a:r>
-              <a:rPr lang="en-US" sz="1050" dirty="0">
+              <a:rPr lang="en-US" sz="950" dirty="0">
                 <a:solidFill>
                   <a:srgbClr val="5A6573"/>
                 </a:solidFill>
@@ -4992,618 +5047,324 @@
                 <a:ea typeface="Calibri" pitchFamily="34" charset="-122"/>
                 <a:cs typeface="Calibri" pitchFamily="34" charset="-120"/>
               </a:rPr>
-              <a:t>Blend RF + Dixon-Coles + market on a validation slice.</a:t>
-            </a:r>
-            <a:endParaRPr lang="en-US" sz="1050" dirty="0"/>
-          </a:p>
-        </p:txBody>
-      </p:sp>
-      <p:sp>
-        <p:nvSpPr>
-          <p:cNvPr id="14" name="Text 12"/>
-          <p:cNvSpPr/>
-          <p:nvPr/>
-        </p:nvSpPr>
-        <p:spPr>
-          <a:xfrm>
-            <a:off x="4754880" y="2880360"/>
-            <a:ext cx="3931920" cy="219456"/>
-          </a:xfrm>
-          <a:prstGeom prst="rect">
-            <a:avLst/>
-          </a:prstGeom>
-          <a:noFill/>
-          <a:ln/>
-        </p:spPr>
-        <p:txBody>
-          <a:bodyPr wrap="square" lIns="0" tIns="0" rIns="0" bIns="0" rtlCol="0" anchor="ctr"/>
-          <a:lstStyle/>
-          <a:p>
+              <a:t> — BBC pivot to Wikipedia recap NLP.
+</a:t>
+            </a:r>
             <a:pPr indent="0" marL="0">
-              <a:buNone/>
-            </a:pPr>
-            <a:r>
-              <a:rPr lang="en-US" sz="1000" b="1" spc="400" kern="0" dirty="0">
-                <a:solidFill>
-                  <a:srgbClr val="13315C"/>
+              <a:lnSpc>
+                <a:spcPct val="118000"/>
+              </a:lnSpc>
+              <a:spcAft>
+                <a:spcPts val="100"/>
+              </a:spcAft>
+              <a:buNone/>
+            </a:pPr>
+            <a:r>
+              <a:rPr lang="en-US" sz="950" b="1" dirty="0">
+                <a:solidFill>
+                  <a:srgbClr val="1F2933"/>
                 </a:solidFill>
                 <a:latin typeface="Calibri" pitchFamily="34" charset="0"/>
                 <a:ea typeface="Calibri" pitchFamily="34" charset="-122"/>
                 <a:cs typeface="Calibri" pitchFamily="34" charset="-120"/>
               </a:rPr>
-              <a:t>TEAM CONTRIBUTIONS</a:t>
+              <a:t>Cross-paradigm features</a:t>
+            </a:r>
+            <a:pPr indent="0" marL="0">
+              <a:lnSpc>
+                <a:spcPct val="118000"/>
+              </a:lnSpc>
+              <a:spcAft>
+                <a:spcPts val="100"/>
+              </a:spcAft>
+              <a:buNone/>
+            </a:pPr>
+            <a:r>
+              <a:rPr lang="en-US" sz="950" dirty="0">
+                <a:solidFill>
+                  <a:srgbClr val="5A6573"/>
+                </a:solidFill>
+                <a:latin typeface="Calibri" pitchFamily="34" charset="0"/>
+                <a:ea typeface="Calibri" pitchFamily="34" charset="-122"/>
+                <a:cs typeface="Calibri" pitchFamily="34" charset="-120"/>
+              </a:rPr>
+              <a:t> — PCA + K-means feed supervised stack.
+</a:t>
+            </a:r>
+            <a:pPr indent="0" marL="0">
+              <a:lnSpc>
+                <a:spcPct val="118000"/>
+              </a:lnSpc>
+              <a:spcAft>
+                <a:spcPts val="100"/>
+              </a:spcAft>
+              <a:buNone/>
+            </a:pPr>
+            <a:r>
+              <a:rPr lang="en-US" sz="950" b="1" dirty="0">
+                <a:solidFill>
+                  <a:srgbClr val="1F2933"/>
+                </a:solidFill>
+                <a:latin typeface="Calibri" pitchFamily="34" charset="0"/>
+                <a:ea typeface="Calibri" pitchFamily="34" charset="-122"/>
+                <a:cs typeface="Calibri" pitchFamily="34" charset="-120"/>
+              </a:rPr>
+              <a:t>Walk-forward + CI invariant</a:t>
+            </a:r>
+            <a:pPr indent="0" marL="0">
+              <a:lnSpc>
+                <a:spcPct val="118000"/>
+              </a:lnSpc>
+              <a:spcAft>
+                <a:spcPts val="100"/>
+              </a:spcAft>
+              <a:buNone/>
+            </a:pPr>
+            <a:r>
+              <a:rPr lang="en-US" sz="950" dirty="0">
+                <a:solidFill>
+                  <a:srgbClr val="5A6573"/>
+                </a:solidFill>
+                <a:latin typeface="Calibri" pitchFamily="34" charset="0"/>
+                <a:ea typeface="Calibri" pitchFamily="34" charset="-122"/>
+                <a:cs typeface="Calibri" pitchFamily="34" charset="-120"/>
+              </a:rPr>
+              <a:t> — leakage test runs on every push.
+</a:t>
+            </a:r>
+            <a:pPr indent="0" marL="0">
+              <a:lnSpc>
+                <a:spcPct val="118000"/>
+              </a:lnSpc>
+              <a:spcAft>
+                <a:spcPts val="100"/>
+              </a:spcAft>
+              <a:buNone/>
+            </a:pPr>
+            <a:r>
+              <a:rPr lang="en-US" sz="950" b="1" dirty="0">
+                <a:solidFill>
+                  <a:srgbClr val="1F2933"/>
+                </a:solidFill>
+                <a:latin typeface="Calibri" pitchFamily="34" charset="0"/>
+                <a:ea typeface="Calibri" pitchFamily="34" charset="-122"/>
+                <a:cs typeface="Calibri" pitchFamily="34" charset="-120"/>
+              </a:rPr>
+              <a:t>Honest ceiling read</a:t>
+            </a:r>
+            <a:pPr indent="0" marL="0">
+              <a:lnSpc>
+                <a:spcPct val="118000"/>
+              </a:lnSpc>
+              <a:spcAft>
+                <a:spcPts val="100"/>
+              </a:spcAft>
+              <a:buNone/>
+            </a:pPr>
+            <a:r>
+              <a:rPr lang="en-US" sz="950" dirty="0">
+                <a:solidFill>
+                  <a:srgbClr val="5A6573"/>
+                </a:solidFill>
+                <a:latin typeface="Calibri" pitchFamily="34" charset="0"/>
+                <a:ea typeface="Calibri" pitchFamily="34" charset="-122"/>
+                <a:cs typeface="Calibri" pitchFamily="34" charset="-120"/>
+              </a:rPr>
+              <a:t> — within 0.023 of the market is the result.</a:t>
+            </a:r>
+            <a:endParaRPr lang="en-US" sz="950" dirty="0"/>
+          </a:p>
+        </p:txBody>
+      </p:sp>
+      <p:sp>
+        <p:nvSpPr>
+          <p:cNvPr id="14" name="Text 12"/>
+          <p:cNvSpPr/>
+          <p:nvPr/>
+        </p:nvSpPr>
+        <p:spPr>
+          <a:xfrm>
+            <a:off x="4754880" y="2880360"/>
+            <a:ext cx="3931920" cy="219456"/>
+          </a:xfrm>
+          <a:prstGeom prst="rect">
+            <a:avLst/>
+          </a:prstGeom>
+          <a:noFill/>
+          <a:ln/>
+        </p:spPr>
+        <p:txBody>
+          <a:bodyPr wrap="square" lIns="0" tIns="0" rIns="0" bIns="0" rtlCol="0" anchor="ctr"/>
+          <a:lstStyle/>
+          <a:p>
+            <a:pPr indent="0" marL="0">
+              <a:buNone/>
+            </a:pPr>
+            <a:r>
+              <a:rPr lang="en-US" sz="1000" b="1" spc="400" kern="0" dirty="0">
+                <a:solidFill>
+                  <a:srgbClr val="13315C"/>
+                </a:solidFill>
+                <a:latin typeface="Calibri" pitchFamily="34" charset="0"/>
+                <a:ea typeface="Calibri" pitchFamily="34" charset="-122"/>
+                <a:cs typeface="Calibri" pitchFamily="34" charset="-120"/>
+              </a:rPr>
+              <a:t>FUTURE WORK</a:t>
             </a:r>
             <a:endParaRPr lang="en-US" sz="1000" dirty="0"/>
           </a:p>
         </p:txBody>
       </p:sp>
-      <p:graphicFrame>
-        <p:nvGraphicFramePr>
-          <p:cNvPr id="13" name="Table 0"/>
-          <p:cNvGraphicFramePr>
-            <a:graphicFrameLocks noGrp="1"/>
-          </p:cNvGraphicFramePr>
-          <p:nvPr>
-            <p:extLst>
-              <p:ext uri="{D42A27DB-BD31-4B8C-83A1-F6EECF244321}">
-                <p14:modId xmlns:p14="http://schemas.microsoft.com/office/powerpoint/2010/main" val="1579011935"/>
-              </p:ext>
-            </p:extLst>
-          </p:nvPr>
-        </p:nvGraphicFramePr>
-        <p:xfrm>
-          <a:off x="4754880" y="3127248"/>
-          <a:ext cx="3931920" cy="1060704"/>
-        </p:xfrm>
-        <a:graphic>
-          <a:graphicData uri="http://schemas.openxmlformats.org/drawingml/2006/table">
-            <a:tbl>
-              <a:tblPr/>
-              <a:tblGrid>
-                <a:gridCol w="1280160"/>
-                <a:gridCol w="2651760"/>
-              </a:tblGrid>
-              <a:tr h="246888">
-                <a:tc>
-                  <a:txBody>
-                    <a:bodyPr/>
-                    <a:lstStyle/>
-                    <a:p>
-                      <a:pPr indent="0" marL="0">
-                        <a:buNone/>
-                      </a:pPr>
-                      <a:r>
-                        <a:rPr lang="en-US" sz="1000" b="1" dirty="0">
-                          <a:solidFill>
-                            <a:srgbClr val="FFFFFF"/>
-                          </a:solidFill>
-                          <a:latin typeface="Calibri" pitchFamily="34" charset="0"/>
-                          <a:ea typeface="Calibri" pitchFamily="34" charset="-122"/>
-                          <a:cs typeface="Calibri" pitchFamily="34" charset="-120"/>
-                        </a:rPr>
-                        <a:t>Member</a:t>
-                      </a:r>
-                      <a:endParaRPr lang="en-US" sz="1000" dirty="0">
-                        <a:latin typeface="Calibri" charset="0"/>
-                        <a:ea typeface="Calibri" charset="0"/>
-                        <a:cs typeface="Calibri" charset="0"/>
-                      </a:endParaRPr>
-                    </a:p>
-                  </a:txBody>
-                  <a:tcPr marL="91440" marR="91440" marT="45720" marB="45720" anchor="ctr">
-                    <a:lnL w="6350" cap="flat" cmpd="sng" algn="ctr">
-                      <a:solidFill>
-                        <a:srgbClr val="D7DEE5"/>
-                      </a:solidFill>
-                      <a:prstDash val="solid"/>
-                      <a:round/>
-                      <a:headEnd type="none" w="med" len="med"/>
-                      <a:tailEnd type="none" w="med" len="med"/>
-                    </a:lnL>
-                    <a:lnR w="6350" cap="flat" cmpd="sng" algn="ctr">
-                      <a:solidFill>
-                        <a:srgbClr val="D7DEE5"/>
-                      </a:solidFill>
-                      <a:prstDash val="solid"/>
-                      <a:round/>
-                      <a:headEnd type="none" w="med" len="med"/>
-                      <a:tailEnd type="none" w="med" len="med"/>
-                    </a:lnR>
-                    <a:lnT w="6350" cap="flat" cmpd="sng" algn="ctr">
-                      <a:solidFill>
-                        <a:srgbClr val="D7DEE5"/>
-                      </a:solidFill>
-                      <a:prstDash val="solid"/>
-                      <a:round/>
-                      <a:headEnd type="none" w="med" len="med"/>
-                      <a:tailEnd type="none" w="med" len="med"/>
-                    </a:lnT>
-                    <a:lnB w="6350" cap="flat" cmpd="sng" algn="ctr">
-                      <a:solidFill>
-                        <a:srgbClr val="D7DEE5"/>
-                      </a:solidFill>
-                      <a:prstDash val="solid"/>
-                      <a:round/>
-                      <a:headEnd type="none" w="med" len="med"/>
-                      <a:tailEnd type="none" w="med" len="med"/>
-                    </a:lnB>
-                    <a:solidFill>
-                      <a:srgbClr val="0B2545"/>
-                    </a:solidFill>
-                  </a:tcPr>
-                </a:tc>
-                <a:tc>
-                  <a:txBody>
-                    <a:bodyPr/>
-                    <a:lstStyle/>
-                    <a:p>
-                      <a:pPr indent="0" marL="0">
-                        <a:buNone/>
-                      </a:pPr>
-                      <a:r>
-                        <a:rPr lang="en-US" sz="1000" b="1" dirty="0">
-                          <a:solidFill>
-                            <a:srgbClr val="FFFFFF"/>
-                          </a:solidFill>
-                          <a:latin typeface="Calibri" pitchFamily="34" charset="0"/>
-                          <a:ea typeface="Calibri" pitchFamily="34" charset="-122"/>
-                          <a:cs typeface="Calibri" pitchFamily="34" charset="-120"/>
-                        </a:rPr>
-                        <a:t>Contribution</a:t>
-                      </a:r>
-                      <a:endParaRPr lang="en-US" sz="1000" dirty="0">
-                        <a:latin typeface="Calibri" charset="0"/>
-                        <a:ea typeface="Calibri" charset="0"/>
-                        <a:cs typeface="Calibri" charset="0"/>
-                      </a:endParaRPr>
-                    </a:p>
-                  </a:txBody>
-                  <a:tcPr marL="91440" marR="91440" marT="45720" marB="45720" anchor="ctr">
-                    <a:lnL w="6350" cap="flat" cmpd="sng" algn="ctr">
-                      <a:solidFill>
-                        <a:srgbClr val="D7DEE5"/>
-                      </a:solidFill>
-                      <a:prstDash val="solid"/>
-                      <a:round/>
-                      <a:headEnd type="none" w="med" len="med"/>
-                      <a:tailEnd type="none" w="med" len="med"/>
-                    </a:lnL>
-                    <a:lnR w="6350" cap="flat" cmpd="sng" algn="ctr">
-                      <a:solidFill>
-                        <a:srgbClr val="D7DEE5"/>
-                      </a:solidFill>
-                      <a:prstDash val="solid"/>
-                      <a:round/>
-                      <a:headEnd type="none" w="med" len="med"/>
-                      <a:tailEnd type="none" w="med" len="med"/>
-                    </a:lnR>
-                    <a:lnT w="6350" cap="flat" cmpd="sng" algn="ctr">
-                      <a:solidFill>
-                        <a:srgbClr val="D7DEE5"/>
-                      </a:solidFill>
-                      <a:prstDash val="solid"/>
-                      <a:round/>
-                      <a:headEnd type="none" w="med" len="med"/>
-                      <a:tailEnd type="none" w="med" len="med"/>
-                    </a:lnT>
-                    <a:lnB w="6350" cap="flat" cmpd="sng" algn="ctr">
-                      <a:solidFill>
-                        <a:srgbClr val="D7DEE5"/>
-                      </a:solidFill>
-                      <a:prstDash val="solid"/>
-                      <a:round/>
-                      <a:headEnd type="none" w="med" len="med"/>
-                      <a:tailEnd type="none" w="med" len="med"/>
-                    </a:lnB>
-                    <a:solidFill>
-                      <a:srgbClr val="0B2545"/>
-                    </a:solidFill>
-                  </a:tcPr>
-                </a:tc>
-              </a:tr>
-              <a:tr h="246888">
-                <a:tc>
-                  <a:txBody>
-                    <a:bodyPr/>
-                    <a:lstStyle/>
-                    <a:p>
-                      <a:pPr indent="0" marL="0">
-                        <a:buNone/>
-                      </a:pPr>
-                      <a:r>
-                        <a:rPr lang="en-US" sz="950" b="1" dirty="0">
-                          <a:solidFill>
-                            <a:srgbClr val="1F2933"/>
-                          </a:solidFill>
-                          <a:latin typeface="Calibri" pitchFamily="34" charset="0"/>
-                          <a:ea typeface="Calibri" pitchFamily="34" charset="-122"/>
-                          <a:cs typeface="Calibri" pitchFamily="34" charset="-120"/>
-                        </a:rPr>
-                        <a:t>Zeming Liang</a:t>
-                      </a:r>
-                      <a:endParaRPr lang="en-US" sz="950" dirty="0">
-                        <a:latin typeface="Calibri" charset="0"/>
-                        <a:ea typeface="Calibri" charset="0"/>
-                        <a:cs typeface="Calibri" charset="0"/>
-                      </a:endParaRPr>
-                    </a:p>
-                  </a:txBody>
-                  <a:tcPr marL="91440" marR="91440" marT="45720" marB="45720" anchor="ctr">
-                    <a:lnL w="6350" cap="flat" cmpd="sng" algn="ctr">
-                      <a:solidFill>
-                        <a:srgbClr val="D7DEE5"/>
-                      </a:solidFill>
-                      <a:prstDash val="solid"/>
-                      <a:round/>
-                      <a:headEnd type="none" w="med" len="med"/>
-                      <a:tailEnd type="none" w="med" len="med"/>
-                    </a:lnL>
-                    <a:lnR w="6350" cap="flat" cmpd="sng" algn="ctr">
-                      <a:solidFill>
-                        <a:srgbClr val="D7DEE5"/>
-                      </a:solidFill>
-                      <a:prstDash val="solid"/>
-                      <a:round/>
-                      <a:headEnd type="none" w="med" len="med"/>
-                      <a:tailEnd type="none" w="med" len="med"/>
-                    </a:lnR>
-                    <a:lnT w="6350" cap="flat" cmpd="sng" algn="ctr">
-                      <a:solidFill>
-                        <a:srgbClr val="D7DEE5"/>
-                      </a:solidFill>
-                      <a:prstDash val="solid"/>
-                      <a:round/>
-                      <a:headEnd type="none" w="med" len="med"/>
-                      <a:tailEnd type="none" w="med" len="med"/>
-                    </a:lnT>
-                    <a:lnB w="6350" cap="flat" cmpd="sng" algn="ctr">
-                      <a:solidFill>
-                        <a:srgbClr val="D7DEE5"/>
-                      </a:solidFill>
-                      <a:prstDash val="solid"/>
-                      <a:round/>
-                      <a:headEnd type="none" w="med" len="med"/>
-                      <a:tailEnd type="none" w="med" len="med"/>
-                    </a:lnB>
-                  </a:tcPr>
-                </a:tc>
-                <a:tc>
-                  <a:txBody>
-                    <a:bodyPr/>
-                    <a:lstStyle/>
-                    <a:p>
-                      <a:pPr indent="0" marL="0">
-                        <a:buNone/>
-                      </a:pPr>
-                      <a:r>
-                        <a:rPr lang="en-US" sz="950" dirty="0">
-                          <a:solidFill>
-                            <a:srgbClr val="1F2933"/>
-                          </a:solidFill>
-                          <a:latin typeface="Calibri" pitchFamily="34" charset="0"/>
-                          <a:ea typeface="Calibri" pitchFamily="34" charset="-122"/>
-                          <a:cs typeface="Calibri" pitchFamily="34" charset="-120"/>
-                        </a:rPr>
-                        <a:t>Coordinator; scrapers, models, app, deploy.</a:t>
-                      </a:r>
-                      <a:endParaRPr lang="en-US" sz="950" dirty="0">
-                        <a:latin typeface="Calibri" charset="0"/>
-                        <a:ea typeface="Calibri" charset="0"/>
-                        <a:cs typeface="Calibri" charset="0"/>
-                      </a:endParaRPr>
-                    </a:p>
-                  </a:txBody>
-                  <a:tcPr marL="91440" marR="91440" marT="45720" marB="45720" anchor="ctr">
-                    <a:lnL w="6350" cap="flat" cmpd="sng" algn="ctr">
-                      <a:solidFill>
-                        <a:srgbClr val="D7DEE5"/>
-                      </a:solidFill>
-                      <a:prstDash val="solid"/>
-                      <a:round/>
-                      <a:headEnd type="none" w="med" len="med"/>
-                      <a:tailEnd type="none" w="med" len="med"/>
-                    </a:lnL>
-                    <a:lnR w="6350" cap="flat" cmpd="sng" algn="ctr">
-                      <a:solidFill>
-                        <a:srgbClr val="D7DEE5"/>
-                      </a:solidFill>
-                      <a:prstDash val="solid"/>
-                      <a:round/>
-                      <a:headEnd type="none" w="med" len="med"/>
-                      <a:tailEnd type="none" w="med" len="med"/>
-                    </a:lnR>
-                    <a:lnT w="6350" cap="flat" cmpd="sng" algn="ctr">
-                      <a:solidFill>
-                        <a:srgbClr val="D7DEE5"/>
-                      </a:solidFill>
-                      <a:prstDash val="solid"/>
-                      <a:round/>
-                      <a:headEnd type="none" w="med" len="med"/>
-                      <a:tailEnd type="none" w="med" len="med"/>
-                    </a:lnT>
-                    <a:lnB w="6350" cap="flat" cmpd="sng" algn="ctr">
-                      <a:solidFill>
-                        <a:srgbClr val="D7DEE5"/>
-                      </a:solidFill>
-                      <a:prstDash val="solid"/>
-                      <a:round/>
-                      <a:headEnd type="none" w="med" len="med"/>
-                      <a:tailEnd type="none" w="med" len="med"/>
-                    </a:lnB>
-                  </a:tcPr>
-                </a:tc>
-              </a:tr>
-              <a:tr h="246888">
-                <a:tc>
-                  <a:txBody>
-                    <a:bodyPr/>
-                    <a:lstStyle/>
-                    <a:p>
-                      <a:pPr indent="0" marL="0">
-                        <a:buNone/>
-                      </a:pPr>
-                      <a:r>
-                        <a:rPr lang="en-US" sz="950" b="1" dirty="0">
-                          <a:solidFill>
-                            <a:srgbClr val="1F2933"/>
-                          </a:solidFill>
-                          <a:latin typeface="Calibri" pitchFamily="34" charset="0"/>
-                          <a:ea typeface="Calibri" pitchFamily="34" charset="-122"/>
-                          <a:cs typeface="Calibri" pitchFamily="34" charset="-120"/>
-                        </a:rPr>
-                        <a:t>Xiying Chen</a:t>
-                      </a:r>
-                      <a:endParaRPr lang="en-US" sz="950" dirty="0">
-                        <a:latin typeface="Calibri" charset="0"/>
-                        <a:ea typeface="Calibri" charset="0"/>
-                        <a:cs typeface="Calibri" charset="0"/>
-                      </a:endParaRPr>
-                    </a:p>
-                  </a:txBody>
-                  <a:tcPr marL="91440" marR="91440" marT="45720" marB="45720" anchor="ctr">
-                    <a:lnL w="6350" cap="flat" cmpd="sng" algn="ctr">
-                      <a:solidFill>
-                        <a:srgbClr val="D7DEE5"/>
-                      </a:solidFill>
-                      <a:prstDash val="solid"/>
-                      <a:round/>
-                      <a:headEnd type="none" w="med" len="med"/>
-                      <a:tailEnd type="none" w="med" len="med"/>
-                    </a:lnL>
-                    <a:lnR w="6350" cap="flat" cmpd="sng" algn="ctr">
-                      <a:solidFill>
-                        <a:srgbClr val="D7DEE5"/>
-                      </a:solidFill>
-                      <a:prstDash val="solid"/>
-                      <a:round/>
-                      <a:headEnd type="none" w="med" len="med"/>
-                      <a:tailEnd type="none" w="med" len="med"/>
-                    </a:lnR>
-                    <a:lnT w="6350" cap="flat" cmpd="sng" algn="ctr">
-                      <a:solidFill>
-                        <a:srgbClr val="D7DEE5"/>
-                      </a:solidFill>
-                      <a:prstDash val="solid"/>
-                      <a:round/>
-                      <a:headEnd type="none" w="med" len="med"/>
-                      <a:tailEnd type="none" w="med" len="med"/>
-                    </a:lnT>
-                    <a:lnB w="6350" cap="flat" cmpd="sng" algn="ctr">
-                      <a:solidFill>
-                        <a:srgbClr val="D7DEE5"/>
-                      </a:solidFill>
-                      <a:prstDash val="solid"/>
-                      <a:round/>
-                      <a:headEnd type="none" w="med" len="med"/>
-                      <a:tailEnd type="none" w="med" len="med"/>
-                    </a:lnB>
-                  </a:tcPr>
-                </a:tc>
-                <a:tc>
-                  <a:txBody>
-                    <a:bodyPr/>
-                    <a:lstStyle/>
-                    <a:p>
-                      <a:pPr indent="0" marL="0">
-                        <a:buNone/>
-                      </a:pPr>
-                      <a:r>
-                        <a:rPr lang="en-US" sz="950" dirty="0">
-                          <a:solidFill>
-                            <a:srgbClr val="1F2933"/>
-                          </a:solidFill>
-                          <a:latin typeface="Calibri" pitchFamily="34" charset="0"/>
-                          <a:ea typeface="Calibri" pitchFamily="34" charset="-122"/>
-                          <a:cs typeface="Calibri" pitchFamily="34" charset="-120"/>
-                        </a:rPr>
-                        <a:t>EDA, unsupervised features, NLP, report.</a:t>
-                      </a:r>
-                      <a:endParaRPr lang="en-US" sz="950" dirty="0">
-                        <a:latin typeface="Calibri" charset="0"/>
-                        <a:ea typeface="Calibri" charset="0"/>
-                        <a:cs typeface="Calibri" charset="0"/>
-                      </a:endParaRPr>
-                    </a:p>
-                  </a:txBody>
-                  <a:tcPr marL="91440" marR="91440" marT="45720" marB="45720" anchor="ctr">
-                    <a:lnL w="6350" cap="flat" cmpd="sng" algn="ctr">
-                      <a:solidFill>
-                        <a:srgbClr val="D7DEE5"/>
-                      </a:solidFill>
-                      <a:prstDash val="solid"/>
-                      <a:round/>
-                      <a:headEnd type="none" w="med" len="med"/>
-                      <a:tailEnd type="none" w="med" len="med"/>
-                    </a:lnL>
-                    <a:lnR w="6350" cap="flat" cmpd="sng" algn="ctr">
-                      <a:solidFill>
-                        <a:srgbClr val="D7DEE5"/>
-                      </a:solidFill>
-                      <a:prstDash val="solid"/>
-                      <a:round/>
-                      <a:headEnd type="none" w="med" len="med"/>
-                      <a:tailEnd type="none" w="med" len="med"/>
-                    </a:lnR>
-                    <a:lnT w="6350" cap="flat" cmpd="sng" algn="ctr">
-                      <a:solidFill>
-                        <a:srgbClr val="D7DEE5"/>
-                      </a:solidFill>
-                      <a:prstDash val="solid"/>
-                      <a:round/>
-                      <a:headEnd type="none" w="med" len="med"/>
-                      <a:tailEnd type="none" w="med" len="med"/>
-                    </a:lnT>
-                    <a:lnB w="6350" cap="flat" cmpd="sng" algn="ctr">
-                      <a:solidFill>
-                        <a:srgbClr val="D7DEE5"/>
-                      </a:solidFill>
-                      <a:prstDash val="solid"/>
-                      <a:round/>
-                      <a:headEnd type="none" w="med" len="med"/>
-                      <a:tailEnd type="none" w="med" len="med"/>
-                    </a:lnB>
-                  </a:tcPr>
-                </a:tc>
-              </a:tr>
-              <a:tr h="246888">
-                <a:tc>
-                  <a:txBody>
-                    <a:bodyPr/>
-                    <a:lstStyle/>
-                    <a:p>
-                      <a:pPr indent="0" marL="0">
-                        <a:buNone/>
-                      </a:pPr>
-                      <a:r>
-                        <a:rPr lang="en-US" sz="950" b="1" dirty="0">
-                          <a:solidFill>
-                            <a:srgbClr val="1F2933"/>
-                          </a:solidFill>
-                          <a:latin typeface="Calibri" pitchFamily="34" charset="0"/>
-                          <a:ea typeface="Calibri" pitchFamily="34" charset="-122"/>
-                          <a:cs typeface="Calibri" pitchFamily="34" charset="-120"/>
-                        </a:rPr>
-                        <a:t>Collaborator</a:t>
-                      </a:r>
-                      <a:endParaRPr lang="en-US" sz="950" dirty="0">
-                        <a:latin typeface="Calibri" charset="0"/>
-                        <a:ea typeface="Calibri" charset="0"/>
-                        <a:cs typeface="Calibri" charset="0"/>
-                      </a:endParaRPr>
-                    </a:p>
-                  </a:txBody>
-                  <a:tcPr marL="91440" marR="91440" marT="45720" marB="45720" anchor="ctr">
-                    <a:lnL w="6350" cap="flat" cmpd="sng" algn="ctr">
-                      <a:solidFill>
-                        <a:srgbClr val="D7DEE5"/>
-                      </a:solidFill>
-                      <a:prstDash val="solid"/>
-                      <a:round/>
-                      <a:headEnd type="none" w="med" len="med"/>
-                      <a:tailEnd type="none" w="med" len="med"/>
-                    </a:lnL>
-                    <a:lnR w="6350" cap="flat" cmpd="sng" algn="ctr">
-                      <a:solidFill>
-                        <a:srgbClr val="D7DEE5"/>
-                      </a:solidFill>
-                      <a:prstDash val="solid"/>
-                      <a:round/>
-                      <a:headEnd type="none" w="med" len="med"/>
-                      <a:tailEnd type="none" w="med" len="med"/>
-                    </a:lnR>
-                    <a:lnT w="6350" cap="flat" cmpd="sng" algn="ctr">
-                      <a:solidFill>
-                        <a:srgbClr val="D7DEE5"/>
-                      </a:solidFill>
-                      <a:prstDash val="solid"/>
-                      <a:round/>
-                      <a:headEnd type="none" w="med" len="med"/>
-                      <a:tailEnd type="none" w="med" len="med"/>
-                    </a:lnT>
-                    <a:lnB w="6350" cap="flat" cmpd="sng" algn="ctr">
-                      <a:solidFill>
-                        <a:srgbClr val="D7DEE5"/>
-                      </a:solidFill>
-                      <a:prstDash val="solid"/>
-                      <a:round/>
-                      <a:headEnd type="none" w="med" len="med"/>
-                      <a:tailEnd type="none" w="med" len="med"/>
-                    </a:lnB>
-                  </a:tcPr>
-                </a:tc>
-                <a:tc>
-                  <a:txBody>
-                    <a:bodyPr/>
-                    <a:lstStyle/>
-                    <a:p>
-                      <a:pPr indent="0" marL="0">
-                        <a:buNone/>
-                      </a:pPr>
-                      <a:r>
-                        <a:rPr lang="en-US" sz="950" dirty="0">
-                          <a:solidFill>
-                            <a:srgbClr val="1F2933"/>
-                          </a:solidFill>
-                          <a:latin typeface="Calibri" pitchFamily="34" charset="0"/>
-                          <a:ea typeface="Calibri" pitchFamily="34" charset="-122"/>
-                          <a:cs typeface="Calibri" pitchFamily="34" charset="-120"/>
-                        </a:rPr>
-                        <a:t>{TODO: confirm contribution}</a:t>
-                      </a:r>
-                      <a:endParaRPr lang="en-US" sz="950" dirty="0">
-                        <a:latin typeface="Calibri" charset="0"/>
-                        <a:ea typeface="Calibri" charset="0"/>
-                        <a:cs typeface="Calibri" charset="0"/>
-                      </a:endParaRPr>
-                    </a:p>
-                  </a:txBody>
-                  <a:tcPr marL="91440" marR="91440" marT="45720" marB="45720" anchor="ctr">
-                    <a:lnL w="6350" cap="flat" cmpd="sng" algn="ctr">
-                      <a:solidFill>
-                        <a:srgbClr val="D7DEE5"/>
-                      </a:solidFill>
-                      <a:prstDash val="solid"/>
-                      <a:round/>
-                      <a:headEnd type="none" w="med" len="med"/>
-                      <a:tailEnd type="none" w="med" len="med"/>
-                    </a:lnL>
-                    <a:lnR w="6350" cap="flat" cmpd="sng" algn="ctr">
-                      <a:solidFill>
-                        <a:srgbClr val="D7DEE5"/>
-                      </a:solidFill>
-                      <a:prstDash val="solid"/>
-                      <a:round/>
-                      <a:headEnd type="none" w="med" len="med"/>
-                      <a:tailEnd type="none" w="med" len="med"/>
-                    </a:lnR>
-                    <a:lnT w="6350" cap="flat" cmpd="sng" algn="ctr">
-                      <a:solidFill>
-                        <a:srgbClr val="D7DEE5"/>
-                      </a:solidFill>
-                      <a:prstDash val="solid"/>
-                      <a:round/>
-                      <a:headEnd type="none" w="med" len="med"/>
-                      <a:tailEnd type="none" w="med" len="med"/>
-                    </a:lnT>
-                    <a:lnB w="6350" cap="flat" cmpd="sng" algn="ctr">
-                      <a:solidFill>
-                        <a:srgbClr val="D7DEE5"/>
-                      </a:solidFill>
-                      <a:prstDash val="solid"/>
-                      <a:round/>
-                      <a:headEnd type="none" w="med" len="med"/>
-                      <a:tailEnd type="none" w="med" len="med"/>
-                    </a:lnB>
-                  </a:tcPr>
-                </a:tc>
-              </a:tr>
-            </a:tbl>
-          </a:graphicData>
-        </a:graphic>
-      </p:graphicFrame>
-      <p:sp>
-        <p:nvSpPr>
-          <p:cNvPr id="16" name="Shape 13"/>
+      <p:sp>
+        <p:nvSpPr>
+          <p:cNvPr id="15" name="Text 13"/>
+          <p:cNvSpPr/>
+          <p:nvPr/>
+        </p:nvSpPr>
+        <p:spPr>
+          <a:xfrm>
+            <a:off x="4754880" y="3127248"/>
+            <a:ext cx="3931920" cy="960120"/>
+          </a:xfrm>
+          <a:prstGeom prst="rect">
+            <a:avLst/>
+          </a:prstGeom>
+          <a:noFill/>
+          <a:ln/>
+        </p:spPr>
+        <p:txBody>
+          <a:bodyPr wrap="square" lIns="0" tIns="0" rIns="0" bIns="0" rtlCol="0" anchor="ctr"/>
+          <a:lstStyle/>
+          <a:p>
+            <a:pPr indent="0" marL="0">
+              <a:lnSpc>
+                <a:spcPct val="122000"/>
+              </a:lnSpc>
+              <a:spcAft>
+                <a:spcPts val="200"/>
+              </a:spcAft>
+              <a:buNone/>
+            </a:pPr>
+            <a:r>
+              <a:rPr lang="en-US" sz="1000" b="1" dirty="0">
+                <a:solidFill>
+                  <a:srgbClr val="1F2933"/>
+                </a:solidFill>
+                <a:latin typeface="Calibri" pitchFamily="34" charset="0"/>
+                <a:ea typeface="Calibri" pitchFamily="34" charset="-122"/>
+                <a:cs typeface="Calibri" pitchFamily="34" charset="-120"/>
+              </a:rPr>
+              <a:t>In-play features.   </a:t>
+            </a:r>
+            <a:pPr indent="0" marL="0">
+              <a:lnSpc>
+                <a:spcPct val="122000"/>
+              </a:lnSpc>
+              <a:spcAft>
+                <a:spcPts val="200"/>
+              </a:spcAft>
+              <a:buNone/>
+            </a:pPr>
+            <a:r>
+              <a:rPr lang="en-US" sz="1000" dirty="0">
+                <a:solidFill>
+                  <a:srgbClr val="5A6573"/>
+                </a:solidFill>
+                <a:latin typeface="Calibri" pitchFamily="34" charset="0"/>
+                <a:ea typeface="Calibri" pitchFamily="34" charset="-122"/>
+                <a:cs typeface="Calibri" pitchFamily="34" charset="-120"/>
+              </a:rPr>
+              <a:t>Live xG, possession-by-half, lineup-strength deltas.
+</a:t>
+            </a:r>
+            <a:pPr indent="0" marL="0">
+              <a:lnSpc>
+                <a:spcPct val="122000"/>
+              </a:lnSpc>
+              <a:spcAft>
+                <a:spcPts val="200"/>
+              </a:spcAft>
+              <a:buNone/>
+            </a:pPr>
+            <a:r>
+              <a:rPr lang="en-US" sz="1000" b="1" dirty="0">
+                <a:solidFill>
+                  <a:srgbClr val="1F2933"/>
+                </a:solidFill>
+                <a:latin typeface="Calibri" pitchFamily="34" charset="0"/>
+                <a:ea typeface="Calibri" pitchFamily="34" charset="-122"/>
+                <a:cs typeface="Calibri" pitchFamily="34" charset="-120"/>
+              </a:rPr>
+              <a:t>Hierarchical Bayes.   </a:t>
+            </a:r>
+            <a:pPr indent="0" marL="0">
+              <a:lnSpc>
+                <a:spcPct val="122000"/>
+              </a:lnSpc>
+              <a:spcAft>
+                <a:spcPts val="200"/>
+              </a:spcAft>
+              <a:buNone/>
+            </a:pPr>
+            <a:r>
+              <a:rPr lang="en-US" sz="1000" dirty="0">
+                <a:solidFill>
+                  <a:srgbClr val="5A6573"/>
+                </a:solidFill>
+                <a:latin typeface="Calibri" pitchFamily="34" charset="0"/>
+                <a:ea typeface="Calibri" pitchFamily="34" charset="-122"/>
+                <a:cs typeface="Calibri" pitchFamily="34" charset="-120"/>
+              </a:rPr>
+              <a:t>Borrow strength across seasons; cold-start for promoted clubs.
+</a:t>
+            </a:r>
+            <a:pPr indent="0" marL="0">
+              <a:lnSpc>
+                <a:spcPct val="122000"/>
+              </a:lnSpc>
+              <a:spcAft>
+                <a:spcPts val="200"/>
+              </a:spcAft>
+              <a:buNone/>
+            </a:pPr>
+            <a:r>
+              <a:rPr lang="en-US" sz="1000" b="1" dirty="0">
+                <a:solidFill>
+                  <a:srgbClr val="1F2933"/>
+                </a:solidFill>
+                <a:latin typeface="Calibri" pitchFamily="34" charset="0"/>
+                <a:ea typeface="Calibri" pitchFamily="34" charset="-122"/>
+                <a:cs typeface="Calibri" pitchFamily="34" charset="-120"/>
+              </a:rPr>
+              <a:t>Stacked ensemble.   </a:t>
+            </a:r>
+            <a:pPr indent="0" marL="0">
+              <a:lnSpc>
+                <a:spcPct val="122000"/>
+              </a:lnSpc>
+              <a:spcAft>
+                <a:spcPts val="200"/>
+              </a:spcAft>
+              <a:buNone/>
+            </a:pPr>
+            <a:r>
+              <a:rPr lang="en-US" sz="1000" dirty="0">
+                <a:solidFill>
+                  <a:srgbClr val="5A6573"/>
+                </a:solidFill>
+                <a:latin typeface="Calibri" pitchFamily="34" charset="0"/>
+                <a:ea typeface="Calibri" pitchFamily="34" charset="-122"/>
+                <a:cs typeface="Calibri" pitchFamily="34" charset="-120"/>
+              </a:rPr>
+              <a:t>Blend RF + Dixon-Coles + market on a validation slice.</a:t>
+            </a:r>
+            <a:endParaRPr lang="en-US" sz="1000" dirty="0"/>
+          </a:p>
+        </p:txBody>
+      </p:sp>
+      <p:sp>
+        <p:nvSpPr>
+          <p:cNvPr id="16" name="Shape 14"/>
           <p:cNvSpPr/>
           <p:nvPr/>
         </p:nvSpPr>
@@ -5623,7 +5384,7 @@
       </p:sp>
       <p:sp>
         <p:nvSpPr>
-          <p:cNvPr id="17" name="Text 14"/>
+          <p:cNvPr id="17" name="Text 15"/>
           <p:cNvSpPr/>
           <p:nvPr/>
         </p:nvSpPr>
@@ -9283,7 +9044,7 @@
                           <a:ea typeface="Calibri" pitchFamily="34" charset="-122"/>
                           <a:cs typeface="Calibri" pitchFamily="34" charset="-120"/>
                         </a:rPr>
-                        <a:t>BBC + Guardian match reports</a:t>
+                        <a:t>Wikipedia season recaps (BBC pivot)</a:t>
                       </a:r>
                       <a:endParaRPr lang="en-US" sz="1050" dirty="0">
                         <a:latin typeface="Calibri" charset="0"/>
@@ -9348,7 +9109,7 @@
                           <a:ea typeface="Calibri" pitchFamily="34" charset="-122"/>
                           <a:cs typeface="Calibri" pitchFamily="34" charset="-120"/>
                         </a:rPr>
-                        <a:t>Unstructured HTML</a:t>
+                        <a:t>Unstructured prose</a:t>
                       </a:r>
                       <a:endParaRPr lang="en-US" sz="1050" dirty="0">
                         <a:latin typeface="Calibri" charset="0"/>
@@ -9413,7 +9174,7 @@
                           <a:ea typeface="Calibri" pitchFamily="34" charset="-122"/>
                           <a:cs typeface="Calibri" pitchFamily="34" charset="-120"/>
                         </a:rPr>
-                        <a:t>NLP → entities, sentiment, event tags</a:t>
+                        <a:t>spaCy + VADER → 7 leakage-safe NLP cols</a:t>
                       </a:r>
                       <a:endParaRPr lang="en-US" sz="1050" dirty="0">
                         <a:latin typeface="Calibri" charset="0"/>
@@ -9843,7 +9604,7 @@
               <a:buNone/>
             </a:pPr>
             <a:r>
-              <a:rPr lang="en-US" sz="2400" b="1" dirty="0">
+              <a:rPr lang="en-US" sz="2100" b="1" dirty="0">
                 <a:solidFill>
                   <a:srgbClr val="0B2545"/>
                 </a:solidFill>
@@ -9851,9 +9612,9 @@
                 <a:ea typeface="Georgia" pitchFamily="34" charset="-122"/>
                 <a:cs typeface="Georgia" pitchFamily="34" charset="-120"/>
               </a:rPr>
-              <a:t>We turn match-report prose into 12 numbers a model can learn from.</a:t>
-            </a:r>
-            <a:endParaRPr lang="en-US" sz="2400" dirty="0"/>
+              <a:t>BBC went JS-only mid-project — we pivoted to Wikipedia recaps and shipped the same NLP.</a:t>
+            </a:r>
+            <a:endParaRPr lang="en-US" sz="2100" dirty="0"/>
           </a:p>
         </p:txBody>
       </p:sp>
@@ -9998,7 +9759,7 @@
                 <a:ea typeface="Calibri" pitchFamily="34" charset="-122"/>
                 <a:cs typeface="Calibri" pitchFamily="34" charset="-120"/>
               </a:rPr>
-              <a:t>BBC / Guardian</a:t>
+              <a:t>BBC failed (JS-only) →</a:t>
             </a:r>
             <a:endParaRPr lang="en-US" sz="1000" dirty="0"/>
           </a:p>
@@ -10018,7 +9779,7 @@
                 <a:ea typeface="Calibri" pitchFamily="34" charset="-122"/>
                 <a:cs typeface="Calibri" pitchFamily="34" charset="-120"/>
               </a:rPr>
-              <a:t>HTML (JS-rendered)</a:t>
+              <a:t>Wikipedia recap text</a:t>
             </a:r>
             <a:endParaRPr lang="en-US" sz="1000" dirty="0"/>
           </a:p>
@@ -10636,7 +10397,7 @@
                 <a:ea typeface="Calibri" pitchFamily="34" charset="-122"/>
                 <a:cs typeface="Calibri" pitchFamily="34" charset="-120"/>
               </a:rPr>
-              <a:t>12 leakage-safe cols</a:t>
+              <a:t>7 leakage-safe cols</a:t>
             </a:r>
             <a:endParaRPr lang="en-US" sz="1000" dirty="0"/>
           </a:p>
@@ -11142,7 +10903,7 @@
                 <a:ea typeface="Calibri" pitchFamily="34" charset="-122"/>
                 <a:cs typeface="Calibri" pitchFamily="34" charset="-120"/>
               </a:rPr>
-              <a:t>LEAKAGE GUARD</a:t>
+              <a:t>PIVOT + LEAKAGE GUARD</a:t>
             </a:r>
             <a:endParaRPr lang="en-US" sz="900" dirty="0"/>
           </a:p>
@@ -11184,7 +10945,7 @@
                 <a:ea typeface="Calibri" pitchFamily="34" charset="-122"/>
                 <a:cs typeface="Calibri" pitchFamily="34" charset="-120"/>
               </a:rPr>
-              <a:t>These NLP features are joined as PRIOR-season aggregates only — never the post-match report of the match itself.</a:t>
+              <a:t>Wikipedia recap NLP is joined as PRIOR-season aggregates — same idea, different source, zero post-match leak.</a:t>
             </a:r>
             <a:endParaRPr lang="en-US" sz="1100" dirty="0"/>
           </a:p>
@@ -11524,7 +11285,7 @@
         <p:spPr>
           <a:xfrm>
             <a:off x="5440680" y="1325880"/>
-            <a:ext cx="3246120" cy="1097280"/>
+            <a:ext cx="3246120" cy="2331720"/>
           </a:xfrm>
           <a:prstGeom prst="rect">
             <a:avLst/>
@@ -11549,7 +11310,7 @@
       </p:sp>
       <p:pic>
         <p:nvPicPr>
-          <p:cNvPr id="12" name="Image 1" descr="/Users/m2/Projects/STAT 5243/43 Project 4/figures/07_team_style_pca.png">    </p:cNvPr>
+          <p:cNvPr id="12" name="Image 1" descr="/Users/m2/Projects/STAT 5243/43 Project 4/figures/05_elo_trajectories.png">    </p:cNvPr>
           <p:cNvPicPr>
             <a:picLocks noChangeAspect="1"/>
           </p:cNvPicPr>
@@ -11563,7 +11324,7 @@
         <p:spPr>
           <a:xfrm>
             <a:off x="5495544" y="1399032"/>
-            <a:ext cx="3136392" cy="950976"/>
+            <a:ext cx="3136392" cy="2057400"/>
           </a:xfrm>
           <a:prstGeom prst="rect">
             <a:avLst/>
@@ -11578,7 +11339,7 @@
         </p:nvSpPr>
         <p:spPr>
           <a:xfrm>
-            <a:off x="5440680" y="2441448"/>
+            <a:off x="5440680" y="3438144"/>
             <a:ext cx="3246120" cy="182880"/>
           </a:xfrm>
           <a:prstGeom prst="rect">
@@ -11591,7 +11352,7 @@
           <a:bodyPr wrap="square" lIns="0" tIns="0" rIns="0" bIns="0" rtlCol="0" anchor="ctr"/>
           <a:lstStyle/>
           <a:p>
-            <a:pPr indent="0" marL="0">
+            <a:pPr algn="ctr" indent="0" marL="0">
               <a:buNone/>
             </a:pPr>
             <a:r>
@@ -11603,7 +11364,7 @@
                 <a:ea typeface="Calibri" pitchFamily="34" charset="-122"/>
                 <a:cs typeface="Calibri" pitchFamily="34" charset="-120"/>
               </a:rPr>
-              <a:t>Team-style PCA (4 K-means clusters)</a:t>
+              <a:t>ClubElo trajectories — strength as a slow-moving latent.</a:t>
             </a:r>
             <a:endParaRPr lang="en-US" sz="900" dirty="0"/>
           </a:p>
@@ -11617,63 +11378,48 @@
         </p:nvSpPr>
         <p:spPr>
           <a:xfrm>
-            <a:off x="5440680" y="2688336"/>
-            <a:ext cx="3246120" cy="1097280"/>
+            <a:off x="457200" y="4114800"/>
+            <a:ext cx="8229600" cy="566928"/>
           </a:xfrm>
           <a:prstGeom prst="rect">
             <a:avLst/>
           </a:prstGeom>
           <a:solidFill>
-            <a:srgbClr val="FFFFFF"/>
+            <a:srgbClr val="0B2545"/>
           </a:solidFill>
-          <a:ln w="6350">
-            <a:solidFill>
-              <a:srgbClr val="D7DEE5"/>
-            </a:solidFill>
-            <a:prstDash val="solid"/>
-          </a:ln>
-          <a:effectLst>
-            <a:outerShdw sx="100000" sy="100000" kx="0" ky="0" algn="bl" rotWithShape="0" blurRad="101600" dist="25400" dir="8100000">
-              <a:srgbClr val="000000">
-                <a:alpha val="10000"/>
-              </a:srgbClr>
-            </a:outerShdw>
-          </a:effectLst>
-        </p:spPr>
-      </p:sp>
-      <p:pic>
-        <p:nvPicPr>
-          <p:cNvPr id="15" name="Image 2" descr="/Users/m2/Projects/STAT 5243/43 Project 4/figures/04_score_heatmap.png">    </p:cNvPr>
-          <p:cNvPicPr>
-            <a:picLocks noChangeAspect="1"/>
-          </p:cNvPicPr>
-          <p:nvPr/>
-        </p:nvPicPr>
-        <p:blipFill>
-          <a:blip r:embed="rId3"/>
-          <a:srcRect l="0" r="0" t="0" b="0"/>
-          <a:stretch/>
-        </p:blipFill>
-        <p:spPr>
-          <a:xfrm>
-            <a:off x="5495544" y="2761488"/>
-            <a:ext cx="3136392" cy="950976"/>
-          </a:xfrm>
-          <a:prstGeom prst="rect">
-            <a:avLst/>
-          </a:prstGeom>
-        </p:spPr>
-      </p:pic>
-      <p:sp>
-        <p:nvSpPr>
-          <p:cNvPr id="16" name="Text 11"/>
-          <p:cNvSpPr/>
-          <p:nvPr/>
-        </p:nvSpPr>
-        <p:spPr>
-          <a:xfrm>
-            <a:off x="5440680" y="3803904"/>
-            <a:ext cx="3246120" cy="182880"/>
+          <a:ln/>
+        </p:spPr>
+      </p:sp>
+      <p:sp>
+        <p:nvSpPr>
+          <p:cNvPr id="15" name="Shape 11"/>
+          <p:cNvSpPr/>
+          <p:nvPr/>
+        </p:nvSpPr>
+        <p:spPr>
+          <a:xfrm>
+            <a:off x="457200" y="4114800"/>
+            <a:ext cx="54864" cy="566928"/>
+          </a:xfrm>
+          <a:prstGeom prst="rect">
+            <a:avLst/>
+          </a:prstGeom>
+          <a:solidFill>
+            <a:srgbClr val="E07A5F"/>
+          </a:solidFill>
+          <a:ln/>
+        </p:spPr>
+      </p:sp>
+      <p:sp>
+        <p:nvSpPr>
+          <p:cNvPr id="16" name="Text 12"/>
+          <p:cNvSpPr/>
+          <p:nvPr/>
+        </p:nvSpPr>
+        <p:spPr>
+          <a:xfrm>
+            <a:off x="640080" y="4114800"/>
+            <a:ext cx="1691640" cy="566928"/>
           </a:xfrm>
           <a:prstGeom prst="rect">
             <a:avLst/>
@@ -11689,15 +11435,15 @@
               <a:buNone/>
             </a:pPr>
             <a:r>
-              <a:rPr lang="en-US" sz="900" i="1" dirty="0">
-                <a:solidFill>
-                  <a:srgbClr val="5A6573"/>
+              <a:rPr lang="en-US" sz="900" b="1" spc="400" kern="0" dirty="0">
+                <a:solidFill>
+                  <a:srgbClr val="B9D9EB"/>
                 </a:solidFill>
                 <a:latin typeface="Calibri" pitchFamily="34" charset="0"/>
                 <a:ea typeface="Calibri" pitchFamily="34" charset="-122"/>
                 <a:cs typeface="Calibri" pitchFamily="34" charset="-120"/>
               </a:rPr>
-              <a:t>Scoreline frequencies — Poisson-shaped joint</a:t>
+              <a:t>WHAT WE LEARNED</a:t>
             </a:r>
             <a:endParaRPr lang="en-US" sz="900" dirty="0"/>
           </a:p>
@@ -11705,86 +11451,7 @@
       </p:sp>
       <p:sp>
         <p:nvSpPr>
-          <p:cNvPr id="17" name="Shape 12"/>
-          <p:cNvSpPr/>
-          <p:nvPr/>
-        </p:nvSpPr>
-        <p:spPr>
-          <a:xfrm>
-            <a:off x="457200" y="4114800"/>
-            <a:ext cx="8229600" cy="566928"/>
-          </a:xfrm>
-          <a:prstGeom prst="rect">
-            <a:avLst/>
-          </a:prstGeom>
-          <a:solidFill>
-            <a:srgbClr val="0B2545"/>
-          </a:solidFill>
-          <a:ln/>
-        </p:spPr>
-      </p:sp>
-      <p:sp>
-        <p:nvSpPr>
-          <p:cNvPr id="18" name="Shape 13"/>
-          <p:cNvSpPr/>
-          <p:nvPr/>
-        </p:nvSpPr>
-        <p:spPr>
-          <a:xfrm>
-            <a:off x="457200" y="4114800"/>
-            <a:ext cx="54864" cy="566928"/>
-          </a:xfrm>
-          <a:prstGeom prst="rect">
-            <a:avLst/>
-          </a:prstGeom>
-          <a:solidFill>
-            <a:srgbClr val="E07A5F"/>
-          </a:solidFill>
-          <a:ln/>
-        </p:spPr>
-      </p:sp>
-      <p:sp>
-        <p:nvSpPr>
-          <p:cNvPr id="19" name="Text 14"/>
-          <p:cNvSpPr/>
-          <p:nvPr/>
-        </p:nvSpPr>
-        <p:spPr>
-          <a:xfrm>
-            <a:off x="640080" y="4114800"/>
-            <a:ext cx="1691640" cy="566928"/>
-          </a:xfrm>
-          <a:prstGeom prst="rect">
-            <a:avLst/>
-          </a:prstGeom>
-          <a:noFill/>
-          <a:ln/>
-        </p:spPr>
-        <p:txBody>
-          <a:bodyPr wrap="square" lIns="0" tIns="0" rIns="0" bIns="0" rtlCol="0" anchor="ctr"/>
-          <a:lstStyle/>
-          <a:p>
-            <a:pPr indent="0" marL="0">
-              <a:buNone/>
-            </a:pPr>
-            <a:r>
-              <a:rPr lang="en-US" sz="900" b="1" spc="400" kern="0" dirty="0">
-                <a:solidFill>
-                  <a:srgbClr val="B9D9EB"/>
-                </a:solidFill>
-                <a:latin typeface="Calibri" pitchFamily="34" charset="0"/>
-                <a:ea typeface="Calibri" pitchFamily="34" charset="-122"/>
-                <a:cs typeface="Calibri" pitchFamily="34" charset="-120"/>
-              </a:rPr>
-              <a:t>WHAT WE LEARNED</a:t>
-            </a:r>
-            <a:endParaRPr lang="en-US" sz="900" dirty="0"/>
-          </a:p>
-        </p:txBody>
-      </p:sp>
-      <p:sp>
-        <p:nvSpPr>
-          <p:cNvPr id="20" name="Text 15"/>
+          <p:cNvPr id="17" name="Text 13"/>
           <p:cNvSpPr/>
           <p:nvPr/>
         </p:nvSpPr>
@@ -12958,8 +12625,8 @@
         </p:nvSpPr>
         <p:spPr>
           <a:xfrm>
-            <a:off x="457200" y="3950208"/>
-            <a:ext cx="8229600" cy="777240"/>
+            <a:off x="457200" y="3858768"/>
+            <a:ext cx="8229600" cy="749808"/>
           </a:xfrm>
           <a:prstGeom prst="rect">
             <a:avLst/>
@@ -12978,8 +12645,8 @@
         </p:nvSpPr>
         <p:spPr>
           <a:xfrm>
-            <a:off x="457200" y="3950208"/>
-            <a:ext cx="54864" cy="777240"/>
+            <a:off x="457200" y="3858768"/>
+            <a:ext cx="54864" cy="749808"/>
           </a:xfrm>
           <a:prstGeom prst="rect">
             <a:avLst/>
@@ -12998,8 +12665,8 @@
         </p:nvSpPr>
         <p:spPr>
           <a:xfrm>
-            <a:off x="640080" y="4005072"/>
-            <a:ext cx="3657600" cy="201168"/>
+            <a:off x="640080" y="3913632"/>
+            <a:ext cx="7863840" cy="201168"/>
           </a:xfrm>
           <a:prstGeom prst="rect">
             <a:avLst/>
@@ -13023,7 +12690,7 @@
                 <a:ea typeface="Calibri" pitchFamily="34" charset="-122"/>
                 <a:cs typeface="Calibri" pitchFamily="34" charset="-120"/>
               </a:rPr>
-              <a:t>ANTI-LEAKAGE DISCIPLINE</a:t>
+              <a:t>ORIGINAL VALIDATION  ·  WALK-FORWARD + CI INVARIANT</a:t>
             </a:r>
             <a:endParaRPr lang="en-US" sz="900" dirty="0"/>
           </a:p>
@@ -13037,7 +12704,7 @@
         </p:nvSpPr>
         <p:spPr>
           <a:xfrm>
-            <a:off x="640080" y="4206240"/>
+            <a:off x="640080" y="4114800"/>
             <a:ext cx="7863840" cy="237744"/>
           </a:xfrm>
           <a:prstGeom prst="rect">
@@ -13056,13 +12723,13 @@
             <a:r>
               <a:rPr lang="en-US" sz="1050" b="1" dirty="0">
                 <a:solidFill>
-                  <a:srgbClr val="FFFFFF"/>
+                  <a:srgbClr val="E07A5F"/>
                 </a:solidFill>
                 <a:latin typeface="Calibri" pitchFamily="34" charset="0"/>
                 <a:ea typeface="Calibri" pitchFamily="34" charset="-122"/>
                 <a:cs typeface="Calibri" pitchFamily="34" charset="-120"/>
               </a:rPr>
-              <a:t>No random k-fold — walk-forward CV only.   </a:t>
+              <a:t>Most football models random-k-fold and silently leak the future.  </a:t>
             </a:r>
             <a:pPr indent="0" marL="0">
               <a:buNone/>
@@ -13076,15 +12743,15 @@
                 <a:ea typeface="Calibri" pitchFamily="34" charset="-122"/>
                 <a:cs typeface="Calibri" pitchFamily="34" charset="-120"/>
               </a:rPr>
-              <a:t>Every rolling feature uses a strict </a:t>
+              <a:t>We don't — walk-forward only, every rolling feature uses a strict </a:t>
             </a:r>
             <a:pPr indent="0" marL="0">
               <a:buNone/>
             </a:pPr>
             <a:r>
-              <a:rPr lang="en-US" sz="1050" dirty="0">
-                <a:solidFill>
-                  <a:srgbClr val="E07A5F"/>
+              <a:rPr lang="en-US" sz="1050" b="1" dirty="0">
+                <a:solidFill>
+                  <a:srgbClr val="FFFFFF"/>
                 </a:solidFill>
                 <a:latin typeface="Consolas" pitchFamily="34" charset="0"/>
                 <a:ea typeface="Consolas" pitchFamily="34" charset="-122"/>
@@ -13118,7 +12785,7 @@
         </p:nvSpPr>
         <p:spPr>
           <a:xfrm>
-            <a:off x="640080" y="4443984"/>
+            <a:off x="640080" y="4352544"/>
             <a:ext cx="7863840" cy="237744"/>
           </a:xfrm>
           <a:prstGeom prst="rect">
@@ -14841,7 +14508,7 @@
                           <a:ea typeface="Calibri" pitchFamily="34" charset="-122"/>
                           <a:cs typeface="Calibri" pitchFamily="34" charset="-120"/>
                         </a:rPr>
-                        <a:t>Dixon-Coles</a:t>
+                        <a:t>Dixon-Coles (1997)</a:t>
                       </a:r>
                       <a:endParaRPr lang="en-US" sz="1050" dirty="0">
                         <a:latin typeface="Calibri" charset="0"/>
@@ -14906,7 +14573,7 @@
                           <a:ea typeface="Calibri" pitchFamily="34" charset="-122"/>
                           <a:cs typeface="Calibri" pitchFamily="34" charset="-120"/>
                         </a:rPr>
-                        <a:t>Bivariate Poisson</a:t>
+                        <a:t>Bivariate Poisson + τ + decay</a:t>
                       </a:r>
                       <a:endParaRPr lang="en-US" sz="1050" dirty="0">
                         <a:latin typeface="Calibri" charset="0"/>
@@ -14971,7 +14638,7 @@
                           <a:ea typeface="Calibri" pitchFamily="34" charset="-122"/>
                           <a:cs typeface="Calibri" pitchFamily="34" charset="-120"/>
                         </a:rPr>
-                        <a:t>Domain-specific; gives joint scores + outcome via marginal.</a:t>
+                        <a:t>Hand-implemented from the paper — not in sklearn. Joint scores + H/D/A by marginal.</a:t>
                       </a:r>
                       <a:endParaRPr lang="en-US" sz="1050" dirty="0">
                         <a:latin typeface="Calibri" charset="0"/>
@@ -15032,8 +14699,8 @@
         </p:nvSpPr>
         <p:spPr>
           <a:xfrm>
-            <a:off x="457200" y="3931920"/>
-            <a:ext cx="8229600" cy="713232"/>
+            <a:off x="457200" y="3840480"/>
+            <a:ext cx="8229600" cy="694944"/>
           </a:xfrm>
           <a:prstGeom prst="rect">
             <a:avLst/>
@@ -15052,7 +14719,7 @@
         </p:nvSpPr>
         <p:spPr>
           <a:xfrm>
-            <a:off x="640080" y="3986784"/>
+            <a:off x="640080" y="3895344"/>
             <a:ext cx="1371600" cy="228600"/>
           </a:xfrm>
           <a:prstGeom prst="rect">
@@ -15091,7 +14758,7 @@
         </p:nvSpPr>
         <p:spPr>
           <a:xfrm>
-            <a:off x="640080" y="4224528"/>
+            <a:off x="640080" y="4133088"/>
             <a:ext cx="7863840" cy="384048"/>
           </a:xfrm>
           <a:prstGeom prst="rect">
@@ -18327,8 +17994,8 @@
         </p:nvSpPr>
         <p:spPr>
           <a:xfrm>
-            <a:off x="457200" y="4069080"/>
-            <a:ext cx="8229600" cy="731520"/>
+            <a:off x="457200" y="3977640"/>
+            <a:ext cx="8229600" cy="713232"/>
           </a:xfrm>
           <a:prstGeom prst="rect">
             <a:avLst/>
@@ -18347,8 +18014,8 @@
         </p:nvSpPr>
         <p:spPr>
           <a:xfrm>
-            <a:off x="457200" y="4069080"/>
-            <a:ext cx="54864" cy="731520"/>
+            <a:off x="457200" y="3977640"/>
+            <a:ext cx="54864" cy="713232"/>
           </a:xfrm>
           <a:prstGeom prst="rect">
             <a:avLst/>
@@ -18367,7 +18034,7 @@
         </p:nvSpPr>
         <p:spPr>
           <a:xfrm>
-            <a:off x="640080" y="4114800"/>
+            <a:off x="640080" y="4023360"/>
             <a:ext cx="7863840" cy="640080"/>
           </a:xfrm>
           <a:prstGeom prst="rect">
@@ -18387,15 +18054,32 @@
               <a:buNone/>
             </a:pPr>
             <a:r>
-              <a:rPr lang="en-US" sz="1150" b="1" dirty="0">
-                <a:solidFill>
-                  <a:srgbClr val="FFFFFF"/>
+              <a:rPr lang="en-US" sz="1150" b="1" i="1" dirty="0">
+                <a:solidFill>
+                  <a:srgbClr val="E07A5F"/>
                 </a:solidFill>
                 <a:latin typeface="Calibri" pitchFamily="34" charset="0"/>
                 <a:ea typeface="Calibri" pitchFamily="34" charset="-122"/>
                 <a:cs typeface="Calibri" pitchFamily="34" charset="-120"/>
               </a:rPr>
-              <a:t>Random Forest is within 0.02 log-loss of the market</a:t>
+              <a:t>We treat this as a finding, not a failure.   </a:t>
+            </a:r>
+            <a:pPr indent="0" marL="0">
+              <a:lnSpc>
+                <a:spcPct val="125000"/>
+              </a:lnSpc>
+              <a:buNone/>
+            </a:pPr>
+            <a:r>
+              <a:rPr lang="en-US" sz="1150" b="1" dirty="0">
+                <a:solidFill>
+                  <a:srgbClr val="FFFFFF"/>
+                </a:solidFill>
+                <a:latin typeface="Calibri" pitchFamily="34" charset="0"/>
+                <a:ea typeface="Calibri" pitchFamily="34" charset="-122"/>
+                <a:cs typeface="Calibri" pitchFamily="34" charset="-120"/>
+              </a:rPr>
+              <a:t>Random Forest is within 0.023 log-loss of the market</a:t>
             </a:r>
             <a:pPr indent="0" marL="0">
               <a:lnSpc>
